--- a/docs/kb/decks/khonsu_story_2026-09-04.pptx
+++ b/docs/kb/decks/khonsu_story_2026-09-04.pptx
@@ -5,23 +5,24 @@
     <p:sldMasterId id="2147483648" r:id="rId1"/>
   </p:sldMasterIdLst>
   <p:sldIdLst>
-    <p:sldId id="256" r:id="rId2"/>
-    <p:sldId id="257" r:id="rId3"/>
-    <p:sldId id="258" r:id="rId4"/>
-    <p:sldId id="259" r:id="rId5"/>
-    <p:sldId id="260" r:id="rId6"/>
-    <p:sldId id="261" r:id="rId7"/>
-    <p:sldId id="262" r:id="rId8"/>
-    <p:sldId id="263" r:id="rId9"/>
-    <p:sldId id="264" r:id="rId10"/>
+    <p:sldId id="256" r:id="rId7"/>
+    <p:sldId id="257" r:id="rId8"/>
+    <p:sldId id="258" r:id="rId9"/>
+    <p:sldId id="259" r:id="rId10"/>
+    <p:sldId id="260" r:id="rId11"/>
+    <p:sldId id="261" r:id="rId12"/>
+    <p:sldId id="262" r:id="rId13"/>
+    <p:sldId id="263" r:id="rId14"/>
+    <p:sldId id="264" r:id="rId15"/>
+    <p:sldId id="265" r:id="rId16"/>
+    <p:sldId id="266" r:id="rId17"/>
+    <p:sldId id="267" r:id="rId18"/>
+    <p:sldId id="268" r:id="rId19"/>
     <p:sldId id="269" r:id="rId20"/>
-    <p:sldId id="265" r:id="rId11"/>
-    <p:sldId id="266" r:id="rId12"/>
-    <p:sldId id="267" r:id="rId13"/>
     <p:sldId id="270" r:id="rId21"/>
-    <p:sldId id="268" r:id="rId14"/>
+    <p:sldId id="271" r:id="rId22"/>
   </p:sldIdLst>
-  <p:sldSz cx="12192000" cy="6858000"/>
+  <p:sldSz cx="12192000" cy="6858000" type="screen4x3"/>
   <p:notesSz cx="6858000" cy="9144000"/>
   <p:defaultTextStyle>
     <a:defPPr>
@@ -118,75 +119,7 @@
       </a:defRPr>
     </a:lvl9pPr>
   </p:defaultTextStyle>
-  <p:extLst>
-    <p:ext uri="{EFAFB233-063F-42B5-8137-9DF3F51BA10A}">
-      <p15:sldGuideLst xmlns:p15="http://schemas.microsoft.com/office/powerpoint/2012/main">
-        <p15:guide id="1" orient="horz" pos="2160">
-          <p15:clr>
-            <a:srgbClr val="A4A3A4"/>
-          </p15:clr>
-        </p15:guide>
-        <p15:guide id="2" pos="2880">
-          <p15:clr>
-            <a:srgbClr val="A4A3A4"/>
-          </p15:clr>
-        </p15:guide>
-      </p15:sldGuideLst>
-    </p:ext>
-  </p:extLst>
 </p:presentation>
-</file>
-
-<file path=ppt/changesInfos/changesInfo1.xml><?xml version="1.0" encoding="utf-8"?>
-<pc:chgInfo xmlns:a="http://schemas.openxmlformats.org/drawingml/2006/main" xmlns:r="http://schemas.openxmlformats.org/officeDocument/2006/relationships" xmlns:ac="http://schemas.microsoft.com/office/drawing/2013/main/command" xmlns:pc="http://schemas.microsoft.com/office/powerpoint/2013/main/command">
-  <pc:docChgLst>
-    <pc:chgData name="Landle, Tyler C" userId="e387bdf0-79bb-4121-b1af-e30ba9bc8ec6" providerId="ADAL" clId="{A35F9EBA-AAFD-4507-8C3F-4A09BB93CE15}"/>
-    <pc:docChg chg="custSel modSld">
-      <pc:chgData name="Landle, Tyler C" userId="e387bdf0-79bb-4121-b1af-e30ba9bc8ec6" providerId="ADAL" clId="{A35F9EBA-AAFD-4507-8C3F-4A09BB93CE15}" dt="2026-08-31T17:56:46.011" v="52" actId="1076"/>
-      <pc:docMkLst>
-        <pc:docMk/>
-      </pc:docMkLst>
-      <pc:sldChg chg="delSp modSp mod">
-        <pc:chgData name="Landle, Tyler C" userId="e387bdf0-79bb-4121-b1af-e30ba9bc8ec6" providerId="ADAL" clId="{A35F9EBA-AAFD-4507-8C3F-4A09BB93CE15}" dt="2026-08-31T17:56:11.894" v="50" actId="478"/>
-        <pc:sldMkLst>
-          <pc:docMk/>
-          <pc:sldMk cId="0" sldId="257"/>
-        </pc:sldMkLst>
-        <pc:spChg chg="mod">
-          <ac:chgData name="Landle, Tyler C" userId="e387bdf0-79bb-4121-b1af-e30ba9bc8ec6" providerId="ADAL" clId="{A35F9EBA-AAFD-4507-8C3F-4A09BB93CE15}" dt="2026-08-31T17:55:59.422" v="49" actId="20577"/>
-          <ac:spMkLst>
-            <pc:docMk/>
-            <pc:sldMk cId="0" sldId="257"/>
-            <ac:spMk id="3" creationId="{00000000-0000-0000-0000-000000000000}"/>
-          </ac:spMkLst>
-        </pc:spChg>
-        <pc:spChg chg="del">
-          <ac:chgData name="Landle, Tyler C" userId="e387bdf0-79bb-4121-b1af-e30ba9bc8ec6" providerId="ADAL" clId="{A35F9EBA-AAFD-4507-8C3F-4A09BB93CE15}" dt="2026-08-31T17:56:11.894" v="50" actId="478"/>
-          <ac:spMkLst>
-            <pc:docMk/>
-            <pc:sldMk cId="0" sldId="257"/>
-            <ac:spMk id="4" creationId="{00000000-0000-0000-0000-000000000000}"/>
-          </ac:spMkLst>
-        </pc:spChg>
-      </pc:sldChg>
-      <pc:sldChg chg="modSp mod">
-        <pc:chgData name="Landle, Tyler C" userId="e387bdf0-79bb-4121-b1af-e30ba9bc8ec6" providerId="ADAL" clId="{A35F9EBA-AAFD-4507-8C3F-4A09BB93CE15}" dt="2026-08-31T17:56:46.011" v="52" actId="1076"/>
-        <pc:sldMkLst>
-          <pc:docMk/>
-          <pc:sldMk cId="0" sldId="259"/>
-        </pc:sldMkLst>
-        <pc:picChg chg="mod">
-          <ac:chgData name="Landle, Tyler C" userId="e387bdf0-79bb-4121-b1af-e30ba9bc8ec6" providerId="ADAL" clId="{A35F9EBA-AAFD-4507-8C3F-4A09BB93CE15}" dt="2026-08-31T17:56:46.011" v="52" actId="1076"/>
-          <ac:picMkLst>
-            <pc:docMk/>
-            <pc:sldMk cId="0" sldId="259"/>
-            <ac:picMk id="5" creationId="{00000000-0000-0000-0000-000000000000}"/>
-          </ac:picMkLst>
-        </pc:picChg>
-      </pc:sldChg>
-    </pc:docChg>
-  </pc:docChgLst>
-</pc:chgInfo>
 </file>
 
 <file path=ppt/slideLayouts/slideLayout1.xml><?xml version="1.0" encoding="utf-8"?>
@@ -227,9 +160,10 @@
           <a:lstStyle/>
           <a:p>
             <a:r>
-              <a:rPr lang="en-US"/>
+              <a:rPr lang="en-US" smtClean="0"/>
               <a:t>Click to edit Master title style</a:t>
             </a:r>
+            <a:endParaRPr lang="en-US"/>
           </a:p>
         </p:txBody>
       </p:sp>
@@ -345,9 +279,10 @@
           </a:lstStyle>
           <a:p>
             <a:r>
-              <a:rPr lang="en-US"/>
+              <a:rPr lang="en-US" smtClean="0"/>
               <a:t>Click to edit Master subtitle style</a:t>
             </a:r>
+            <a:endParaRPr lang="en-US"/>
           </a:p>
         </p:txBody>
       </p:sp>
@@ -368,7 +303,7 @@
           <a:p>
             <a:fld id="{5BCAD085-E8A6-8845-BD4E-CB4CCA059FC4}" type="datetimeFigureOut">
               <a:rPr lang="en-US" smtClean="0"/>
-              <a:t>8/31/2026</a:t>
+              <a:t>1/27/13</a:t>
             </a:fld>
             <a:endParaRPr lang="en-US"/>
           </a:p>
@@ -462,9 +397,10 @@
           <a:lstStyle/>
           <a:p>
             <a:r>
-              <a:rPr lang="en-US"/>
+              <a:rPr lang="en-US" smtClean="0"/>
               <a:t>Click to edit Master title style</a:t>
             </a:r>
+            <a:endParaRPr lang="en-US"/>
           </a:p>
         </p:txBody>
       </p:sp>
@@ -485,37 +421,38 @@
           <a:p>
             <a:pPr lvl="0"/>
             <a:r>
-              <a:rPr lang="en-US"/>
+              <a:rPr lang="en-US" smtClean="0"/>
               <a:t>Click to edit Master text styles</a:t>
             </a:r>
           </a:p>
           <a:p>
             <a:pPr lvl="1"/>
             <a:r>
-              <a:rPr lang="en-US"/>
+              <a:rPr lang="en-US" smtClean="0"/>
               <a:t>Second level</a:t>
             </a:r>
           </a:p>
           <a:p>
             <a:pPr lvl="2"/>
             <a:r>
-              <a:rPr lang="en-US"/>
+              <a:rPr lang="en-US" smtClean="0"/>
               <a:t>Third level</a:t>
             </a:r>
           </a:p>
           <a:p>
             <a:pPr lvl="3"/>
             <a:r>
-              <a:rPr lang="en-US"/>
+              <a:rPr lang="en-US" smtClean="0"/>
               <a:t>Fourth level</a:t>
             </a:r>
           </a:p>
           <a:p>
             <a:pPr lvl="4"/>
             <a:r>
-              <a:rPr lang="en-US"/>
+              <a:rPr lang="en-US" smtClean="0"/>
               <a:t>Fifth level</a:t>
             </a:r>
+            <a:endParaRPr lang="en-US"/>
           </a:p>
         </p:txBody>
       </p:sp>
@@ -536,7 +473,7 @@
           <a:p>
             <a:fld id="{5BCAD085-E8A6-8845-BD4E-CB4CCA059FC4}" type="datetimeFigureOut">
               <a:rPr lang="en-US" smtClean="0"/>
-              <a:t>8/31/2026</a:t>
+              <a:t>1/27/13</a:t>
             </a:fld>
             <a:endParaRPr lang="en-US"/>
           </a:p>
@@ -635,9 +572,10 @@
           <a:lstStyle/>
           <a:p>
             <a:r>
-              <a:rPr lang="en-US"/>
+              <a:rPr lang="en-US" smtClean="0"/>
               <a:t>Click to edit Master title style</a:t>
             </a:r>
+            <a:endParaRPr lang="en-US"/>
           </a:p>
         </p:txBody>
       </p:sp>
@@ -663,37 +601,38 @@
           <a:p>
             <a:pPr lvl="0"/>
             <a:r>
-              <a:rPr lang="en-US"/>
+              <a:rPr lang="en-US" smtClean="0"/>
               <a:t>Click to edit Master text styles</a:t>
             </a:r>
           </a:p>
           <a:p>
             <a:pPr lvl="1"/>
             <a:r>
-              <a:rPr lang="en-US"/>
+              <a:rPr lang="en-US" smtClean="0"/>
               <a:t>Second level</a:t>
             </a:r>
           </a:p>
           <a:p>
             <a:pPr lvl="2"/>
             <a:r>
-              <a:rPr lang="en-US"/>
+              <a:rPr lang="en-US" smtClean="0"/>
               <a:t>Third level</a:t>
             </a:r>
           </a:p>
           <a:p>
             <a:pPr lvl="3"/>
             <a:r>
-              <a:rPr lang="en-US"/>
+              <a:rPr lang="en-US" smtClean="0"/>
               <a:t>Fourth level</a:t>
             </a:r>
           </a:p>
           <a:p>
             <a:pPr lvl="4"/>
             <a:r>
-              <a:rPr lang="en-US"/>
+              <a:rPr lang="en-US" smtClean="0"/>
               <a:t>Fifth level</a:t>
             </a:r>
+            <a:endParaRPr lang="en-US"/>
           </a:p>
         </p:txBody>
       </p:sp>
@@ -714,7 +653,7 @@
           <a:p>
             <a:fld id="{5BCAD085-E8A6-8845-BD4E-CB4CCA059FC4}" type="datetimeFigureOut">
               <a:rPr lang="en-US" smtClean="0"/>
-              <a:t>8/31/2026</a:t>
+              <a:t>1/27/13</a:t>
             </a:fld>
             <a:endParaRPr lang="en-US"/>
           </a:p>
@@ -808,9 +747,10 @@
           <a:lstStyle/>
           <a:p>
             <a:r>
-              <a:rPr lang="en-US"/>
+              <a:rPr lang="en-US" smtClean="0"/>
               <a:t>Click to edit Master title style</a:t>
             </a:r>
+            <a:endParaRPr lang="en-US"/>
           </a:p>
         </p:txBody>
       </p:sp>
@@ -831,37 +771,38 @@
           <a:p>
             <a:pPr lvl="0"/>
             <a:r>
-              <a:rPr lang="en-US"/>
+              <a:rPr lang="en-US" smtClean="0"/>
               <a:t>Click to edit Master text styles</a:t>
             </a:r>
           </a:p>
           <a:p>
             <a:pPr lvl="1"/>
             <a:r>
-              <a:rPr lang="en-US"/>
+              <a:rPr lang="en-US" smtClean="0"/>
               <a:t>Second level</a:t>
             </a:r>
           </a:p>
           <a:p>
             <a:pPr lvl="2"/>
             <a:r>
-              <a:rPr lang="en-US"/>
+              <a:rPr lang="en-US" smtClean="0"/>
               <a:t>Third level</a:t>
             </a:r>
           </a:p>
           <a:p>
             <a:pPr lvl="3"/>
             <a:r>
-              <a:rPr lang="en-US"/>
+              <a:rPr lang="en-US" smtClean="0"/>
               <a:t>Fourth level</a:t>
             </a:r>
           </a:p>
           <a:p>
             <a:pPr lvl="4"/>
             <a:r>
-              <a:rPr lang="en-US"/>
+              <a:rPr lang="en-US" smtClean="0"/>
               <a:t>Fifth level</a:t>
             </a:r>
+            <a:endParaRPr lang="en-US"/>
           </a:p>
         </p:txBody>
       </p:sp>
@@ -882,7 +823,7 @@
           <a:p>
             <a:fld id="{5BCAD085-E8A6-8845-BD4E-CB4CCA059FC4}" type="datetimeFigureOut">
               <a:rPr lang="en-US" smtClean="0"/>
-              <a:t>8/31/2026</a:t>
+              <a:t>1/27/13</a:t>
             </a:fld>
             <a:endParaRPr lang="en-US"/>
           </a:p>
@@ -985,9 +926,10 @@
           </a:lstStyle>
           <a:p>
             <a:r>
-              <a:rPr lang="en-US"/>
+              <a:rPr lang="en-US" smtClean="0"/>
               <a:t>Click to edit Master title style</a:t>
             </a:r>
+            <a:endParaRPr lang="en-US"/>
           </a:p>
         </p:txBody>
       </p:sp>
@@ -1104,7 +1046,7 @@
           <a:p>
             <a:pPr lvl="0"/>
             <a:r>
-              <a:rPr lang="en-US"/>
+              <a:rPr lang="en-US" smtClean="0"/>
               <a:t>Click to edit Master text styles</a:t>
             </a:r>
           </a:p>
@@ -1127,7 +1069,7 @@
           <a:p>
             <a:fld id="{5BCAD085-E8A6-8845-BD4E-CB4CCA059FC4}" type="datetimeFigureOut">
               <a:rPr lang="en-US" smtClean="0"/>
-              <a:t>8/31/2026</a:t>
+              <a:t>1/27/13</a:t>
             </a:fld>
             <a:endParaRPr lang="en-US"/>
           </a:p>
@@ -1221,9 +1163,10 @@
           <a:lstStyle/>
           <a:p>
             <a:r>
-              <a:rPr lang="en-US"/>
+              <a:rPr lang="en-US" smtClean="0"/>
               <a:t>Click to edit Master title style</a:t>
             </a:r>
+            <a:endParaRPr lang="en-US"/>
           </a:p>
         </p:txBody>
       </p:sp>
@@ -1277,37 +1220,38 @@
           <a:p>
             <a:pPr lvl="0"/>
             <a:r>
-              <a:rPr lang="en-US"/>
+              <a:rPr lang="en-US" smtClean="0"/>
               <a:t>Click to edit Master text styles</a:t>
             </a:r>
           </a:p>
           <a:p>
             <a:pPr lvl="1"/>
             <a:r>
-              <a:rPr lang="en-US"/>
+              <a:rPr lang="en-US" smtClean="0"/>
               <a:t>Second level</a:t>
             </a:r>
           </a:p>
           <a:p>
             <a:pPr lvl="2"/>
             <a:r>
-              <a:rPr lang="en-US"/>
+              <a:rPr lang="en-US" smtClean="0"/>
               <a:t>Third level</a:t>
             </a:r>
           </a:p>
           <a:p>
             <a:pPr lvl="3"/>
             <a:r>
-              <a:rPr lang="en-US"/>
+              <a:rPr lang="en-US" smtClean="0"/>
               <a:t>Fourth level</a:t>
             </a:r>
           </a:p>
           <a:p>
             <a:pPr lvl="4"/>
             <a:r>
-              <a:rPr lang="en-US"/>
+              <a:rPr lang="en-US" smtClean="0"/>
               <a:t>Fifth level</a:t>
             </a:r>
+            <a:endParaRPr lang="en-US"/>
           </a:p>
         </p:txBody>
       </p:sp>
@@ -1361,37 +1305,38 @@
           <a:p>
             <a:pPr lvl="0"/>
             <a:r>
-              <a:rPr lang="en-US"/>
+              <a:rPr lang="en-US" smtClean="0"/>
               <a:t>Click to edit Master text styles</a:t>
             </a:r>
           </a:p>
           <a:p>
             <a:pPr lvl="1"/>
             <a:r>
-              <a:rPr lang="en-US"/>
+              <a:rPr lang="en-US" smtClean="0"/>
               <a:t>Second level</a:t>
             </a:r>
           </a:p>
           <a:p>
             <a:pPr lvl="2"/>
             <a:r>
-              <a:rPr lang="en-US"/>
+              <a:rPr lang="en-US" smtClean="0"/>
               <a:t>Third level</a:t>
             </a:r>
           </a:p>
           <a:p>
             <a:pPr lvl="3"/>
             <a:r>
-              <a:rPr lang="en-US"/>
+              <a:rPr lang="en-US" smtClean="0"/>
               <a:t>Fourth level</a:t>
             </a:r>
           </a:p>
           <a:p>
             <a:pPr lvl="4"/>
             <a:r>
-              <a:rPr lang="en-US"/>
+              <a:rPr lang="en-US" smtClean="0"/>
               <a:t>Fifth level</a:t>
             </a:r>
+            <a:endParaRPr lang="en-US"/>
           </a:p>
         </p:txBody>
       </p:sp>
@@ -1412,7 +1357,7 @@
           <a:p>
             <a:fld id="{5BCAD085-E8A6-8845-BD4E-CB4CCA059FC4}" type="datetimeFigureOut">
               <a:rPr lang="en-US" smtClean="0"/>
-              <a:t>8/31/2026</a:t>
+              <a:t>1/27/13</a:t>
             </a:fld>
             <a:endParaRPr lang="en-US"/>
           </a:p>
@@ -1510,9 +1455,10 @@
           </a:lstStyle>
           <a:p>
             <a:r>
-              <a:rPr lang="en-US"/>
+              <a:rPr lang="en-US" smtClean="0"/>
               <a:t>Click to edit Master title style</a:t>
             </a:r>
+            <a:endParaRPr lang="en-US"/>
           </a:p>
         </p:txBody>
       </p:sp>
@@ -1575,7 +1521,7 @@
           <a:p>
             <a:pPr lvl="0"/>
             <a:r>
-              <a:rPr lang="en-US"/>
+              <a:rPr lang="en-US" smtClean="0"/>
               <a:t>Click to edit Master text styles</a:t>
             </a:r>
           </a:p>
@@ -1631,37 +1577,38 @@
           <a:p>
             <a:pPr lvl="0"/>
             <a:r>
-              <a:rPr lang="en-US"/>
+              <a:rPr lang="en-US" smtClean="0"/>
               <a:t>Click to edit Master text styles</a:t>
             </a:r>
           </a:p>
           <a:p>
             <a:pPr lvl="1"/>
             <a:r>
-              <a:rPr lang="en-US"/>
+              <a:rPr lang="en-US" smtClean="0"/>
               <a:t>Second level</a:t>
             </a:r>
           </a:p>
           <a:p>
             <a:pPr lvl="2"/>
             <a:r>
-              <a:rPr lang="en-US"/>
+              <a:rPr lang="en-US" smtClean="0"/>
               <a:t>Third level</a:t>
             </a:r>
           </a:p>
           <a:p>
             <a:pPr lvl="3"/>
             <a:r>
-              <a:rPr lang="en-US"/>
+              <a:rPr lang="en-US" smtClean="0"/>
               <a:t>Fourth level</a:t>
             </a:r>
           </a:p>
           <a:p>
             <a:pPr lvl="4"/>
             <a:r>
-              <a:rPr lang="en-US"/>
+              <a:rPr lang="en-US" smtClean="0"/>
               <a:t>Fifth level</a:t>
             </a:r>
+            <a:endParaRPr lang="en-US"/>
           </a:p>
         </p:txBody>
       </p:sp>
@@ -1724,7 +1671,7 @@
           <a:p>
             <a:pPr lvl="0"/>
             <a:r>
-              <a:rPr lang="en-US"/>
+              <a:rPr lang="en-US" smtClean="0"/>
               <a:t>Click to edit Master text styles</a:t>
             </a:r>
           </a:p>
@@ -1780,37 +1727,38 @@
           <a:p>
             <a:pPr lvl="0"/>
             <a:r>
-              <a:rPr lang="en-US"/>
+              <a:rPr lang="en-US" smtClean="0"/>
               <a:t>Click to edit Master text styles</a:t>
             </a:r>
           </a:p>
           <a:p>
             <a:pPr lvl="1"/>
             <a:r>
-              <a:rPr lang="en-US"/>
+              <a:rPr lang="en-US" smtClean="0"/>
               <a:t>Second level</a:t>
             </a:r>
           </a:p>
           <a:p>
             <a:pPr lvl="2"/>
             <a:r>
-              <a:rPr lang="en-US"/>
+              <a:rPr lang="en-US" smtClean="0"/>
               <a:t>Third level</a:t>
             </a:r>
           </a:p>
           <a:p>
             <a:pPr lvl="3"/>
             <a:r>
-              <a:rPr lang="en-US"/>
+              <a:rPr lang="en-US" smtClean="0"/>
               <a:t>Fourth level</a:t>
             </a:r>
           </a:p>
           <a:p>
             <a:pPr lvl="4"/>
             <a:r>
-              <a:rPr lang="en-US"/>
+              <a:rPr lang="en-US" smtClean="0"/>
               <a:t>Fifth level</a:t>
             </a:r>
+            <a:endParaRPr lang="en-US"/>
           </a:p>
         </p:txBody>
       </p:sp>
@@ -1831,7 +1779,7 @@
           <a:p>
             <a:fld id="{5BCAD085-E8A6-8845-BD4E-CB4CCA059FC4}" type="datetimeFigureOut">
               <a:rPr lang="en-US" smtClean="0"/>
-              <a:t>8/31/2026</a:t>
+              <a:t>1/27/13</a:t>
             </a:fld>
             <a:endParaRPr lang="en-US"/>
           </a:p>
@@ -1925,9 +1873,10 @@
           <a:lstStyle/>
           <a:p>
             <a:r>
-              <a:rPr lang="en-US"/>
+              <a:rPr lang="en-US" smtClean="0"/>
               <a:t>Click to edit Master title style</a:t>
             </a:r>
+            <a:endParaRPr lang="en-US"/>
           </a:p>
         </p:txBody>
       </p:sp>
@@ -1948,7 +1897,7 @@
           <a:p>
             <a:fld id="{5BCAD085-E8A6-8845-BD4E-CB4CCA059FC4}" type="datetimeFigureOut">
               <a:rPr lang="en-US" smtClean="0"/>
-              <a:t>8/31/2026</a:t>
+              <a:t>1/27/13</a:t>
             </a:fld>
             <a:endParaRPr lang="en-US"/>
           </a:p>
@@ -2043,7 +1992,7 @@
           <a:p>
             <a:fld id="{5BCAD085-E8A6-8845-BD4E-CB4CCA059FC4}" type="datetimeFigureOut">
               <a:rPr lang="en-US" smtClean="0"/>
-              <a:t>8/31/2026</a:t>
+              <a:t>1/27/13</a:t>
             </a:fld>
             <a:endParaRPr lang="en-US"/>
           </a:p>
@@ -2146,9 +2095,10 @@
           </a:lstStyle>
           <a:p>
             <a:r>
-              <a:rPr lang="en-US"/>
+              <a:rPr lang="en-US" smtClean="0"/>
               <a:t>Click to edit Master title style</a:t>
             </a:r>
+            <a:endParaRPr lang="en-US"/>
           </a:p>
         </p:txBody>
       </p:sp>
@@ -2202,37 +2152,38 @@
           <a:p>
             <a:pPr lvl="0"/>
             <a:r>
-              <a:rPr lang="en-US"/>
+              <a:rPr lang="en-US" smtClean="0"/>
               <a:t>Click to edit Master text styles</a:t>
             </a:r>
           </a:p>
           <a:p>
             <a:pPr lvl="1"/>
             <a:r>
-              <a:rPr lang="en-US"/>
+              <a:rPr lang="en-US" smtClean="0"/>
               <a:t>Second level</a:t>
             </a:r>
           </a:p>
           <a:p>
             <a:pPr lvl="2"/>
             <a:r>
-              <a:rPr lang="en-US"/>
+              <a:rPr lang="en-US" smtClean="0"/>
               <a:t>Third level</a:t>
             </a:r>
           </a:p>
           <a:p>
             <a:pPr lvl="3"/>
             <a:r>
-              <a:rPr lang="en-US"/>
+              <a:rPr lang="en-US" smtClean="0"/>
               <a:t>Fourth level</a:t>
             </a:r>
           </a:p>
           <a:p>
             <a:pPr lvl="4"/>
             <a:r>
-              <a:rPr lang="en-US"/>
+              <a:rPr lang="en-US" smtClean="0"/>
               <a:t>Fifth level</a:t>
             </a:r>
+            <a:endParaRPr lang="en-US"/>
           </a:p>
         </p:txBody>
       </p:sp>
@@ -2295,7 +2246,7 @@
           <a:p>
             <a:pPr lvl="0"/>
             <a:r>
-              <a:rPr lang="en-US"/>
+              <a:rPr lang="en-US" smtClean="0"/>
               <a:t>Click to edit Master text styles</a:t>
             </a:r>
           </a:p>
@@ -2318,7 +2269,7 @@
           <a:p>
             <a:fld id="{5BCAD085-E8A6-8845-BD4E-CB4CCA059FC4}" type="datetimeFigureOut">
               <a:rPr lang="en-US" smtClean="0"/>
-              <a:t>8/31/2026</a:t>
+              <a:t>1/27/13</a:t>
             </a:fld>
             <a:endParaRPr lang="en-US"/>
           </a:p>
@@ -2421,9 +2372,10 @@
           </a:lstStyle>
           <a:p>
             <a:r>
-              <a:rPr lang="en-US"/>
+              <a:rPr lang="en-US" smtClean="0"/>
               <a:t>Click to edit Master title style</a:t>
             </a:r>
+            <a:endParaRPr lang="en-US"/>
           </a:p>
         </p:txBody>
       </p:sp>
@@ -2547,7 +2499,7 @@
           <a:p>
             <a:pPr lvl="0"/>
             <a:r>
-              <a:rPr lang="en-US"/>
+              <a:rPr lang="en-US" smtClean="0"/>
               <a:t>Click to edit Master text styles</a:t>
             </a:r>
           </a:p>
@@ -2570,7 +2522,7 @@
           <a:p>
             <a:fld id="{5BCAD085-E8A6-8845-BD4E-CB4CCA059FC4}" type="datetimeFigureOut">
               <a:rPr lang="en-US" smtClean="0"/>
-              <a:t>8/31/2026</a:t>
+              <a:t>1/27/13</a:t>
             </a:fld>
             <a:endParaRPr lang="en-US"/>
           </a:p>
@@ -2679,9 +2631,10 @@
           <a:lstStyle/>
           <a:p>
             <a:r>
-              <a:rPr lang="en-US"/>
+              <a:rPr lang="en-US" smtClean="0"/>
               <a:t>Click to edit Master title style</a:t>
             </a:r>
+            <a:endParaRPr lang="en-US"/>
           </a:p>
         </p:txBody>
       </p:sp>
@@ -2712,37 +2665,38 @@
           <a:p>
             <a:pPr lvl="0"/>
             <a:r>
-              <a:rPr lang="en-US"/>
+              <a:rPr lang="en-US" smtClean="0"/>
               <a:t>Click to edit Master text styles</a:t>
             </a:r>
           </a:p>
           <a:p>
             <a:pPr lvl="1"/>
             <a:r>
-              <a:rPr lang="en-US"/>
+              <a:rPr lang="en-US" smtClean="0"/>
               <a:t>Second level</a:t>
             </a:r>
           </a:p>
           <a:p>
             <a:pPr lvl="2"/>
             <a:r>
-              <a:rPr lang="en-US"/>
+              <a:rPr lang="en-US" smtClean="0"/>
               <a:t>Third level</a:t>
             </a:r>
           </a:p>
           <a:p>
             <a:pPr lvl="3"/>
             <a:r>
-              <a:rPr lang="en-US"/>
+              <a:rPr lang="en-US" smtClean="0"/>
               <a:t>Fourth level</a:t>
             </a:r>
           </a:p>
           <a:p>
             <a:pPr lvl="4"/>
             <a:r>
-              <a:rPr lang="en-US"/>
+              <a:rPr lang="en-US" smtClean="0"/>
               <a:t>Fifth level</a:t>
             </a:r>
+            <a:endParaRPr lang="en-US"/>
           </a:p>
         </p:txBody>
       </p:sp>
@@ -2781,7 +2735,7 @@
           <a:p>
             <a:fld id="{5BCAD085-E8A6-8845-BD4E-CB4CCA059FC4}" type="datetimeFigureOut">
               <a:rPr lang="en-US" smtClean="0"/>
-              <a:t>8/31/2026</a:t>
+              <a:t>1/27/13</a:t>
             </a:fld>
             <a:endParaRPr lang="en-US"/>
           </a:p>
@@ -3140,7 +3094,7 @@
 </file>
 
 <file path=ppt/slides/slide1.xml><?xml version="1.0" encoding="utf-8"?>
-<p:sld xmlns:a="http://schemas.openxmlformats.org/drawingml/2006/main" xmlns:r="http://schemas.openxmlformats.org/officeDocument/2006/relationships" xmlns:p="http://schemas.openxmlformats.org/presentationml/2006/main">
+<p:sld xmlns:a="http://schemas.openxmlformats.org/drawingml/2006/main" xmlns:p="http://schemas.openxmlformats.org/presentationml/2006/main" xmlns:r="http://schemas.openxmlformats.org/officeDocument/2006/relationships">
   <p:cSld>
     <p:spTree>
       <p:nvGrpSpPr>
@@ -3148,14 +3102,7 @@
         <p:cNvGrpSpPr/>
         <p:nvPr/>
       </p:nvGrpSpPr>
-      <p:grpSpPr>
-        <a:xfrm>
-          <a:off x="0" y="0"/>
-          <a:ext cx="0" cy="0"/>
-          <a:chOff x="0" y="0"/>
-          <a:chExt cx="0" cy="0"/>
-        </a:xfrm>
-      </p:grpSpPr>
+      <p:grpSpPr/>
       <p:sp>
         <p:nvSpPr>
           <p:cNvPr id="2" name="TextBox 1"/>
@@ -3164,8 +3111,8 @@
         </p:nvSpPr>
         <p:spPr>
           <a:xfrm>
-            <a:off x="1097280" y="2286000"/>
-            <a:ext cx="10058400" cy="1280160"/>
+            <a:off x="900000" y="2300000"/>
+            <a:ext cx="10392000" cy="1000000"/>
           </a:xfrm>
           <a:prstGeom prst="rect">
             <a:avLst/>
@@ -3173,18 +3120,23 @@
           <a:noFill/>
         </p:spPr>
         <p:txBody>
-          <a:bodyPr wrap="none">
+          <a:bodyPr wrap="square">
             <a:spAutoFit/>
           </a:bodyPr>
           <a:lstStyle/>
           <a:p>
-            <a:r>
-              <a:rPr sz="4000" b="1">
+            <a:pPr algn="ctr">
+              <a:spcAft>
+                <a:spcPts val="600"/>
+              </a:spcAft>
+            </a:pPr>
+            <a:r>
+              <a:rPr sz="3600" b="1">
                 <a:solidFill>
                   <a:srgbClr val="1B3A6B"/>
                 </a:solidFill>
               </a:rPr>
-              <a:t>Khonsu: the story, the evidence, the study plan</a:t>
+              <a:t>Khonsu: Research Questions and Evaluation Plan</a:t>
             </a:r>
           </a:p>
         </p:txBody>
@@ -3197,8 +3149,8 @@
         </p:nvSpPr>
         <p:spPr>
           <a:xfrm>
-            <a:off x="1097280" y="3657600"/>
-            <a:ext cx="10058400" cy="548640"/>
+            <a:off x="900000" y="3400000"/>
+            <a:ext cx="10392000" cy="700000"/>
           </a:xfrm>
           <a:prstGeom prst="rect">
             <a:avLst/>
@@ -3206,18 +3158,61 @@
           <a:noFill/>
         </p:spPr>
         <p:txBody>
-          <a:bodyPr wrap="none">
+          <a:bodyPr wrap="square">
             <a:spAutoFit/>
           </a:bodyPr>
           <a:lstStyle/>
           <a:p>
-            <a:r>
-              <a:rPr sz="2000" dirty="0">
-                <a:solidFill>
-                  <a:srgbClr val="212121"/>
+            <a:pPr algn="ctr">
+              <a:spcAft>
+                <a:spcPts val="600"/>
+              </a:spcAft>
+            </a:pPr>
+            <a:r>
+              <a:rPr sz="1800" b="0">
+                <a:solidFill>
+                  <a:srgbClr val="6E6E6E"/>
                 </a:solidFill>
               </a:rPr>
               <a:t>Continuity for edge-hosted cooperative prediction across locale boundaries</a:t>
+            </a:r>
+          </a:p>
+        </p:txBody>
+      </p:sp>
+      <p:sp>
+        <p:nvSpPr>
+          <p:cNvPr id="4" name="TextBox 3"/>
+          <p:cNvSpPr txBox="1"/>
+          <p:nvPr/>
+        </p:nvSpPr>
+        <p:spPr>
+          <a:xfrm>
+            <a:off x="900000" y="4300000"/>
+            <a:ext cx="10392000" cy="500000"/>
+          </a:xfrm>
+          <a:prstGeom prst="rect">
+            <a:avLst/>
+          </a:prstGeom>
+          <a:noFill/>
+        </p:spPr>
+        <p:txBody>
+          <a:bodyPr wrap="square">
+            <a:spAutoFit/>
+          </a:bodyPr>
+          <a:lstStyle/>
+          <a:p>
+            <a:pPr algn="ctr">
+              <a:spcAft>
+                <a:spcPts val="600"/>
+              </a:spcAft>
+            </a:pPr>
+            <a:r>
+              <a:rPr sz="1300" b="0">
+                <a:solidFill>
+                  <a:srgbClr val="B3A369"/>
+                </a:solidFill>
+              </a:rPr>
+              <a:t>Status labels on evidence slides:  Done  /  Provisional  /  Running  /  Needed</a:t>
             </a:r>
           </a:p>
         </p:txBody>
@@ -3249,7 +3244,7 @@
         <p:spPr>
           <a:xfrm>
             <a:off x="548640" y="256032"/>
-            <a:ext cx="9692640" cy="777240"/>
+            <a:ext cx="9600000" cy="777240"/>
           </a:xfrm>
           <a:prstGeom prst="rect">
             <a:avLst/>
@@ -3273,7 +3268,7 @@
                   <a:srgbClr val="1B3A6B"/>
                 </a:solidFill>
               </a:rPr>
-              <a:t>Protocol correctness: epochs under message loss</a:t>
+              <a:t>Handoff must preserve the planner's freshness budget</a:t>
             </a:r>
           </a:p>
         </p:txBody>
@@ -3286,8 +3281,8 @@
         </p:nvSpPr>
         <p:spPr>
           <a:xfrm>
-            <a:off x="9692640" y="292608"/>
-            <a:ext cx="2286000" cy="457200"/>
+            <a:off x="10200000" y="292608"/>
+            <a:ext cx="1700000" cy="457200"/>
           </a:xfrm>
           <a:prstGeom prst="rect">
             <a:avLst/>
@@ -3300,7 +3295,7 @@
           </a:bodyPr>
           <a:lstStyle/>
           <a:p>
-            <a:pPr>
+            <a:pPr algn="r">
               <a:spcAft>
                 <a:spcPts val="600"/>
               </a:spcAft>
@@ -3311,21 +3306,72 @@
                   <a:srgbClr val="B3A369"/>
                 </a:solidFill>
               </a:rPr>
-              <a:t>SQ4</a:t>
-            </a:r>
-          </a:p>
-        </p:txBody>
-      </p:sp>
-      <p:sp>
-        <p:nvSpPr>
-          <p:cNvPr id="4" name="TextBox 3"/>
+              <a:t>RQ4</a:t>
+            </a:r>
+          </a:p>
+        </p:txBody>
+      </p:sp>
+      <p:sp>
+        <p:nvSpPr>
+          <p:cNvPr id="4" name="Rounded Rectangle 3"/>
+          <p:cNvSpPr/>
+          <p:nvPr/>
+        </p:nvSpPr>
+        <p:spPr>
+          <a:xfrm>
+            <a:off x="10200000" y="760000"/>
+            <a:ext cx="1450000" cy="330000"/>
+          </a:xfrm>
+          <a:prstGeom prst="roundRect">
+            <a:avLst/>
+          </a:prstGeom>
+          <a:solidFill>
+            <a:srgbClr val="1565C0"/>
+          </a:solidFill>
+          <a:ln>
+            <a:noFill/>
+          </a:ln>
+        </p:spPr>
+        <p:style>
+          <a:lnRef idx="1">
+            <a:schemeClr val="accent1"/>
+          </a:lnRef>
+          <a:fillRef idx="3">
+            <a:schemeClr val="accent1"/>
+          </a:fillRef>
+          <a:effectRef idx="2">
+            <a:schemeClr val="accent1"/>
+          </a:effectRef>
+          <a:fontRef idx="minor">
+            <a:schemeClr val="lt1"/>
+          </a:fontRef>
+        </p:style>
+        <p:txBody>
+          <a:bodyPr rtlCol="0" anchor="ctr"/>
+          <a:lstStyle/>
+          <a:p>
+            <a:pPr algn="ctr"/>
+            <a:r>
+              <a:rPr sz="1100" b="1">
+                <a:solidFill>
+                  <a:srgbClr val="FFFFFF"/>
+                </a:solidFill>
+              </a:rPr>
+              <a:t>Running</a:t>
+            </a:r>
+          </a:p>
+        </p:txBody>
+      </p:sp>
+      <p:sp>
+        <p:nvSpPr>
+          <p:cNvPr id="5" name="TextBox 4"/>
           <p:cNvSpPr txBox="1"/>
           <p:nvPr/>
         </p:nvSpPr>
         <p:spPr>
           <a:xfrm>
-            <a:off x="640080" y="1097280"/>
-            <a:ext cx="10972800" cy="4800000"/>
+            <a:off x="640080" y="1150000"/>
+            <a:ext cx="10972800" cy="2000000"/>
           </a:xfrm>
           <a:prstGeom prst="rect">
             <a:avLst/>
@@ -3340,266 +3386,68 @@
           <a:p>
             <a:pPr>
               <a:spcAft>
-                <a:spcPts val="600"/>
-              </a:spcAft>
-            </a:pPr>
-            <a:r>
-              <a:rPr sz="1400" b="0">
+                <a:spcPts val="800"/>
+              </a:spcAft>
+            </a:pPr>
+            <a:r>
+              <a:rPr sz="1600" b="0">
                 <a:solidFill>
                   <a:srgbClr val="212121"/>
                 </a:solidFill>
               </a:rPr>
-              <a:t>• Claim: exactly one server's forecasts are acted on for each track at any time. The failure model admits lost acknowledgements, so two servers can transiently both publish; the claim must hold at the consumer, not by assumption on the network.</a:t>
-            </a:r>
-          </a:p>
-          <a:p>
-            <a:pPr>
-              <a:spcAft>
-                <a:spcPts val="600"/>
-              </a:spcAft>
-            </a:pPr>
-            <a:r>
-              <a:rPr sz="1400" b="0">
+              <a:t>• Age at use is consumption time minus observation time.</a:t>
+            </a:r>
+          </a:p>
+          <a:p>
+            <a:pPr>
+              <a:spcAft>
+                <a:spcPts val="800"/>
+              </a:spcAft>
+            </a:pPr>
+            <a:r>
+              <a:rPr sz="1600" b="0">
                 <a:solidFill>
                   <a:srgbClr val="212121"/>
                 </a:solidFill>
               </a:rPr>
-              <a:t>• Mechanism: a per-track epoch increases at every prepare; every published forecast carries (actor, epoch); consumers act only on the highest epoch seen. Fault model: message loss, delay, reordering; destination failure during a handoff; source failure and partition handled by expiry plus the planner's fallback.</a:t>
-            </a:r>
-          </a:p>
-          <a:p>
-            <a:pPr>
-              <a:spcAft>
-                <a:spcPts val="600"/>
-              </a:spcAft>
-            </a:pPr>
-            <a:r>
-              <a:rPr sz="1400" b="0">
+              <a:t>• It must stay below the maneuver budget of 220 to 450 ms through the handoff.</a:t>
+            </a:r>
+          </a:p>
+          <a:p>
+            <a:pPr>
+              <a:spcAft>
+                <a:spcPts val="800"/>
+              </a:spcAft>
+            </a:pPr>
+            <a:r>
+              <a:rPr sz="1600" b="0">
                 <a:solidFill>
                   <a:srgbClr val="212121"/>
                 </a:solidFill>
               </a:rPr>
-              <a:t>• Verified in isolation: the ownership state machine (prepared / committed / aborted, idempotent retries) driven through eight scenarios: clean handoff, lost ack + duplicate prepare, lost ack + duplicate commit, stale payload, wrong destination, abort after prepare, both sides hold, commit without prepare. Exactly one publishable epoch at every step in all eight.</a:t>
-            </a:r>
-          </a:p>
-          <a:p>
-            <a:pPr>
-              <a:spcAft>
-                <a:spcPts val="600"/>
-              </a:spcAft>
-            </a:pPr>
-            <a:r>
-              <a:rPr sz="1400" b="0">
+              <a:t>• Across the handoff, age adds transfer, import, and the destination's first refresh.</a:t>
+            </a:r>
+          </a:p>
+          <a:p>
+            <a:pPr>
+              <a:spcAft>
+                <a:spcPts val="800"/>
+              </a:spcAft>
+            </a:pPr>
+            <a:r>
+              <a:rPr sz="1600" b="0">
                 <a:solidFill>
                   <a:srgbClr val="212121"/>
                 </a:solidFill>
               </a:rPr>
-              <a:t>• Next: the same injections on the live path, six fault arms with fencing on and off, reporting the double-publish window in ticks and the fallback rate.</a:t>
-            </a:r>
-          </a:p>
-        </p:txBody>
-      </p:sp>
-      <p:sp>
-        <p:nvSpPr>
-          <p:cNvPr id="5" name="TextBox 4"/>
-          <p:cNvSpPr txBox="1"/>
-          <p:nvPr/>
-        </p:nvSpPr>
-        <p:spPr>
-          <a:xfrm>
-            <a:off x="640080" y="6263640"/>
-            <a:ext cx="10972800" cy="457200"/>
-          </a:xfrm>
-          <a:prstGeom prst="rect">
-            <a:avLst/>
-          </a:prstGeom>
-          <a:noFill/>
-        </p:spPr>
-        <p:txBody>
-          <a:bodyPr wrap="square">
-            <a:spAutoFit/>
-          </a:bodyPr>
-          <a:lstStyle/>
-          <a:p>
-            <a:pPr>
-              <a:spcAft>
-                <a:spcPts val="600"/>
-              </a:spcAft>
-            </a:pPr>
-            <a:r>
-              <a:rPr sz="1300" b="0">
-                <a:solidFill>
-                  <a:srgbClr val="B3A369"/>
-                </a:solidFill>
-              </a:rPr>
-              <a:t>Ties to the study: SQ4: the invariant a reviewer will attack first, stated with its fault model and its verification.</a:t>
-            </a:r>
-          </a:p>
-        </p:txBody>
-      </p:sp>
-    </p:spTree>
-  </p:cSld>
-  <p:clrMapOvr>
-    <a:masterClrMapping/>
-  </p:clrMapOvr>
-</p:sld>
-</file>
-
-<file path=ppt/slides/slide11.xml><?xml version="1.0" encoding="utf-8"?>
-<p:sld xmlns:a="http://schemas.openxmlformats.org/drawingml/2006/main" xmlns:r="http://schemas.openxmlformats.org/officeDocument/2006/relationships" xmlns:p="http://schemas.openxmlformats.org/presentationml/2006/main">
-  <p:cSld>
-    <p:spTree>
-      <p:nvGrpSpPr>
-        <p:cNvPr id="1" name=""/>
-        <p:cNvGrpSpPr/>
-        <p:nvPr/>
-      </p:nvGrpSpPr>
-      <p:grpSpPr>
-        <a:xfrm>
-          <a:off x="0" y="0"/>
-          <a:ext cx="0" cy="0"/>
-          <a:chOff x="0" y="0"/>
-          <a:chExt cx="0" cy="0"/>
-        </a:xfrm>
-      </p:grpSpPr>
-      <p:sp>
-        <p:nvSpPr>
-          <p:cNvPr id="2" name="TextBox 1"/>
-          <p:cNvSpPr txBox="1"/>
-          <p:nvPr/>
-        </p:nvSpPr>
-        <p:spPr>
-          <a:xfrm>
-            <a:off x="548640" y="256032"/>
-            <a:ext cx="9692640" cy="777240"/>
-          </a:xfrm>
-          <a:prstGeom prst="rect">
-            <a:avLst/>
-          </a:prstGeom>
-          <a:noFill/>
-        </p:spPr>
-        <p:txBody>
-          <a:bodyPr wrap="none">
-            <a:spAutoFit/>
-          </a:bodyPr>
-          <a:lstStyle/>
-          <a:p>
-            <a:r>
-              <a:rPr sz="2800" b="1">
-                <a:solidFill>
-                  <a:srgbClr val="1B3A6B"/>
-                </a:solidFill>
-              </a:rPr>
-              <a:t>Why migrate rather than overlap: predictions need one publisher</a:t>
-            </a:r>
-          </a:p>
-        </p:txBody>
-      </p:sp>
-      <p:sp>
-        <p:nvSpPr>
-          <p:cNvPr id="3" name="TextBox 2"/>
-          <p:cNvSpPr txBox="1"/>
-          <p:nvPr/>
-        </p:nvSpPr>
-        <p:spPr>
-          <a:xfrm>
-            <a:off x="9692640" y="292608"/>
-            <a:ext cx="2286000" cy="457200"/>
-          </a:xfrm>
-          <a:prstGeom prst="rect">
-            <a:avLst/>
-          </a:prstGeom>
-          <a:noFill/>
-        </p:spPr>
-        <p:txBody>
-          <a:bodyPr wrap="none">
-            <a:spAutoFit/>
-          </a:bodyPr>
-          <a:lstStyle/>
-          <a:p>
-            <a:pPr algn="r"/>
-            <a:r>
-              <a:rPr sz="1300" b="1">
-                <a:solidFill>
-                  <a:srgbClr val="B3A369"/>
-                </a:solidFill>
-              </a:rPr>
-              <a:t>SQ4</a:t>
-            </a:r>
-          </a:p>
-        </p:txBody>
-      </p:sp>
-      <p:sp>
-        <p:nvSpPr>
-          <p:cNvPr id="4" name="TextBox 3"/>
-          <p:cNvSpPr txBox="1"/>
-          <p:nvPr/>
-        </p:nvSpPr>
-        <p:spPr>
-          <a:xfrm>
-            <a:off x="640080" y="1097280"/>
-            <a:ext cx="10972800" cy="1828800"/>
-          </a:xfrm>
-          <a:prstGeom prst="rect">
-            <a:avLst/>
-          </a:prstGeom>
-          <a:noFill/>
-        </p:spPr>
-        <p:txBody>
-          <a:bodyPr wrap="square">
-            <a:spAutoFit/>
-          </a:bodyPr>
-          <a:lstStyle/>
-          <a:p>
-            <a:pPr>
-              <a:spcAft>
-                <a:spcPts val="500"/>
-              </a:spcAft>
-            </a:pPr>
-            <a:r>
-              <a:rPr sz="1400">
-                <a:solidFill>
-                  <a:srgbClr val="212121"/>
-                </a:solidFill>
-              </a:rPr>
-              <a:t>• Coverage overlap is required and assumed. Every boundary scheme still answers two questions: when the destination gets the state (delivery) and when it becomes the single publisher (authority).</a:t>
-            </a:r>
-          </a:p>
-          <a:p>
-            <a:pPr>
-              <a:spcAft>
-                <a:spcPts val="500"/>
-              </a:spcAft>
-            </a:pPr>
-            <a:r>
-              <a:rPr sz="1400">
-                <a:solidFill>
-                  <a:srgbClr val="212121"/>
-                </a:solidFill>
-              </a:rPr>
-              <a:t>• Overlap-triggered migration is migration with a geometric trigger; its lead shrinks with speed and it fires on proximity. Replication answers only delivery at a higher rate; in the first sweep redundant sends doubled bytes and changed nothing (provisional until v3), and its cost scales with boundary traffic, not crossings.</a:t>
-            </a:r>
-          </a:p>
-          <a:p>
-            <a:pPr>
-              <a:spcAft>
-                <a:spcPts val="500"/>
-              </a:spcAft>
-            </a:pPr>
-            <a:r>
-              <a:rPr sz="1400">
-                <a:solidFill>
-                  <a:srgbClr val="212121"/>
-                </a:solidFill>
-              </a:rPr>
-              <a:t>• Keeping both services authoritative makes two predictors publish diverging forecasts for the same actor. That recreates the multi-source disagreement failure the safety-envelope work measured as dominant, at the forecast level, where no merge point exists to repair it. Prediction is why overlap cannot substitute.</a:t>
+              <a:t>• The lead is computed from that sum: transfer EMA + 0.6 s fold-in + 0.35 s, capped at 2.5 s.</a:t>
             </a:r>
           </a:p>
         </p:txBody>
       </p:sp>
       <p:pic>
         <p:nvPicPr>
-          <p:cNvPr id="5" name="Picture 4" descr="fig_phases.png"/>
+          <p:cNvPr id="6" name="Picture 5" descr="image.png"/>
           <p:cNvPicPr>
             <a:picLocks noChangeAspect="1"/>
           </p:cNvPicPr>
@@ -3613,8 +3461,8 @@
         </p:blipFill>
         <p:spPr>
           <a:xfrm>
-            <a:off x="2194560" y="3108960"/>
-            <a:ext cx="7680960" cy="2838616"/>
+            <a:off x="1463040" y="2900000"/>
+            <a:ext cx="9326880" cy="3108960"/>
           </a:xfrm>
           <a:prstGeom prst="rect">
             <a:avLst/>
@@ -3623,7 +3471,7 @@
       </p:pic>
       <p:sp>
         <p:nvSpPr>
-          <p:cNvPr id="6" name="TextBox 5"/>
+          <p:cNvPr id="7" name="TextBox 6"/>
           <p:cNvSpPr txBox="1"/>
           <p:nvPr/>
         </p:nvSpPr>
@@ -3638,18 +3486,289 @@
           <a:noFill/>
         </p:spPr>
         <p:txBody>
-          <a:bodyPr wrap="none">
+          <a:bodyPr wrap="square">
             <a:spAutoFit/>
           </a:bodyPr>
           <a:lstStyle/>
           <a:p>
-            <a:r>
-              <a:rPr sz="1300" i="1">
+            <a:pPr>
+              <a:spcAft>
+                <a:spcPts val="600"/>
+              </a:spcAft>
+            </a:pPr>
+            <a:r>
+              <a:rPr sz="1200" b="0">
                 <a:solidFill>
                   <a:srgbClr val="B3A369"/>
                 </a:solidFill>
               </a:rPr>
-              <a:t>Ties to the study: SQ4: the mirroring and refresh arms are the measured half; the dual-authority arm completes it.</a:t>
+              <a:t>Answers RQ4  ·  Evidence: age chain measured except the destination refresh term  ·  Missing: computed trigger vs fixed leads (v3)</a:t>
+            </a:r>
+          </a:p>
+        </p:txBody>
+      </p:sp>
+    </p:spTree>
+  </p:cSld>
+  <p:clrMapOvr>
+    <a:masterClrMapping/>
+  </p:clrMapOvr>
+</p:sld>
+</file>
+
+<file path=ppt/slides/slide11.xml><?xml version="1.0" encoding="utf-8"?>
+<p:sld xmlns:a="http://schemas.openxmlformats.org/drawingml/2006/main" xmlns:p="http://schemas.openxmlformats.org/presentationml/2006/main" xmlns:r="http://schemas.openxmlformats.org/officeDocument/2006/relationships">
+  <p:cSld>
+    <p:spTree>
+      <p:nvGrpSpPr>
+        <p:cNvPr id="1" name=""/>
+        <p:cNvGrpSpPr/>
+        <p:nvPr/>
+      </p:nvGrpSpPr>
+      <p:grpSpPr/>
+      <p:sp>
+        <p:nvSpPr>
+          <p:cNvPr id="2" name="TextBox 1"/>
+          <p:cNvSpPr txBox="1"/>
+          <p:nvPr/>
+        </p:nvSpPr>
+        <p:spPr>
+          <a:xfrm>
+            <a:off x="548640" y="256032"/>
+            <a:ext cx="9600000" cy="777240"/>
+          </a:xfrm>
+          <a:prstGeom prst="rect">
+            <a:avLst/>
+          </a:prstGeom>
+          <a:noFill/>
+        </p:spPr>
+        <p:txBody>
+          <a:bodyPr wrap="square">
+            <a:spAutoFit/>
+          </a:bodyPr>
+          <a:lstStyle/>
+          <a:p>
+            <a:pPr>
+              <a:spcAft>
+                <a:spcPts val="600"/>
+              </a:spcAft>
+            </a:pPr>
+            <a:r>
+              <a:rPr sz="2800" b="1">
+                <a:solidFill>
+                  <a:srgbClr val="1B3A6B"/>
+                </a:solidFill>
+              </a:rPr>
+              <a:t>Ownership epochs keep one current owner under message loss</a:t>
+            </a:r>
+          </a:p>
+        </p:txBody>
+      </p:sp>
+      <p:sp>
+        <p:nvSpPr>
+          <p:cNvPr id="3" name="TextBox 2"/>
+          <p:cNvSpPr txBox="1"/>
+          <p:nvPr/>
+        </p:nvSpPr>
+        <p:spPr>
+          <a:xfrm>
+            <a:off x="10200000" y="292608"/>
+            <a:ext cx="1700000" cy="457200"/>
+          </a:xfrm>
+          <a:prstGeom prst="rect">
+            <a:avLst/>
+          </a:prstGeom>
+          <a:noFill/>
+        </p:spPr>
+        <p:txBody>
+          <a:bodyPr wrap="square">
+            <a:spAutoFit/>
+          </a:bodyPr>
+          <a:lstStyle/>
+          <a:p>
+            <a:pPr algn="r">
+              <a:spcAft>
+                <a:spcPts val="600"/>
+              </a:spcAft>
+            </a:pPr>
+            <a:r>
+              <a:rPr sz="1300" b="1">
+                <a:solidFill>
+                  <a:srgbClr val="B3A369"/>
+                </a:solidFill>
+              </a:rPr>
+              <a:t>RQ4</a:t>
+            </a:r>
+          </a:p>
+        </p:txBody>
+      </p:sp>
+      <p:sp>
+        <p:nvSpPr>
+          <p:cNvPr id="4" name="Rounded Rectangle 3"/>
+          <p:cNvSpPr/>
+          <p:nvPr/>
+        </p:nvSpPr>
+        <p:spPr>
+          <a:xfrm>
+            <a:off x="10200000" y="760000"/>
+            <a:ext cx="1450000" cy="330000"/>
+          </a:xfrm>
+          <a:prstGeom prst="roundRect">
+            <a:avLst/>
+          </a:prstGeom>
+          <a:solidFill>
+            <a:srgbClr val="2E7D32"/>
+          </a:solidFill>
+          <a:ln>
+            <a:noFill/>
+          </a:ln>
+        </p:spPr>
+        <p:style>
+          <a:lnRef idx="1">
+            <a:schemeClr val="accent1"/>
+          </a:lnRef>
+          <a:fillRef idx="3">
+            <a:schemeClr val="accent1"/>
+          </a:fillRef>
+          <a:effectRef idx="2">
+            <a:schemeClr val="accent1"/>
+          </a:effectRef>
+          <a:fontRef idx="minor">
+            <a:schemeClr val="lt1"/>
+          </a:fontRef>
+        </p:style>
+        <p:txBody>
+          <a:bodyPr rtlCol="0" anchor="ctr"/>
+          <a:lstStyle/>
+          <a:p>
+            <a:pPr algn="ctr"/>
+            <a:r>
+              <a:rPr sz="1100" b="1">
+                <a:solidFill>
+                  <a:srgbClr val="FFFFFF"/>
+                </a:solidFill>
+              </a:rPr>
+              <a:t>Done</a:t>
+            </a:r>
+          </a:p>
+        </p:txBody>
+      </p:sp>
+      <p:sp>
+        <p:nvSpPr>
+          <p:cNvPr id="5" name="TextBox 4"/>
+          <p:cNvSpPr txBox="1"/>
+          <p:nvPr/>
+        </p:nvSpPr>
+        <p:spPr>
+          <a:xfrm>
+            <a:off x="640080" y="1150000"/>
+            <a:ext cx="10972800" cy="2600000"/>
+          </a:xfrm>
+          <a:prstGeom prst="rect">
+            <a:avLst/>
+          </a:prstGeom>
+          <a:noFill/>
+        </p:spPr>
+        <p:txBody>
+          <a:bodyPr wrap="square">
+            <a:spAutoFit/>
+          </a:bodyPr>
+          <a:lstStyle/>
+          <a:p>
+            <a:pPr>
+              <a:spcAft>
+                <a:spcPts val="800"/>
+              </a:spcAft>
+            </a:pPr>
+            <a:r>
+              <a:rPr sz="1600" b="0">
+                <a:solidFill>
+                  <a:srgbClr val="212121"/>
+                </a:solidFill>
+              </a:rPr>
+              <a:t>• Prepare moves the state early; the track is warm but unpublished.</a:t>
+            </a:r>
+          </a:p>
+          <a:p>
+            <a:pPr>
+              <a:spcAft>
+                <a:spcPts val="800"/>
+              </a:spcAft>
+            </a:pPr>
+            <a:r>
+              <a:rPr sz="1600" b="0">
+                <a:solidFill>
+                  <a:srgbClr val="212121"/>
+                </a:solidFill>
+              </a:rPr>
+              <a:t>• A final update at commit closes the gap while the source keeps observing.</a:t>
+            </a:r>
+          </a:p>
+          <a:p>
+            <a:pPr>
+              <a:spcAft>
+                <a:spcPts val="800"/>
+              </a:spcAft>
+            </a:pPr>
+            <a:r>
+              <a:rPr sz="1600" b="0">
+                <a:solidFill>
+                  <a:srgbClr val="212121"/>
+                </a:solidFill>
+              </a:rPr>
+              <a:t>• Every forecast carries an ownership epoch; planners accept only the highest.</a:t>
+            </a:r>
+          </a:p>
+          <a:p>
+            <a:pPr>
+              <a:spcAft>
+                <a:spcPts val="800"/>
+              </a:spcAft>
+            </a:pPr>
+            <a:r>
+              <a:rPr sz="1600" b="0">
+                <a:solidFill>
+                  <a:srgbClr val="212121"/>
+                </a:solidFill>
+              </a:rPr>
+              <a:t>• Eight fault scenarios verified: exactly one publishable epoch at every step.</a:t>
+            </a:r>
+          </a:p>
+        </p:txBody>
+      </p:sp>
+      <p:sp>
+        <p:nvSpPr>
+          <p:cNvPr id="6" name="TextBox 5"/>
+          <p:cNvSpPr txBox="1"/>
+          <p:nvPr/>
+        </p:nvSpPr>
+        <p:spPr>
+          <a:xfrm>
+            <a:off x="640080" y="6263640"/>
+            <a:ext cx="10972800" cy="457200"/>
+          </a:xfrm>
+          <a:prstGeom prst="rect">
+            <a:avLst/>
+          </a:prstGeom>
+          <a:noFill/>
+        </p:spPr>
+        <p:txBody>
+          <a:bodyPr wrap="square">
+            <a:spAutoFit/>
+          </a:bodyPr>
+          <a:lstStyle/>
+          <a:p>
+            <a:pPr>
+              <a:spcAft>
+                <a:spcPts val="600"/>
+              </a:spcAft>
+            </a:pPr>
+            <a:r>
+              <a:rPr sz="1200" b="0">
+                <a:solidFill>
+                  <a:srgbClr val="B3A369"/>
+                </a:solidFill>
+              </a:rPr>
+              <a:t>Answers RQ4  ·  Evidence: ownership state machine, 8-scenario fault injection (Done)  ·  Missing: live fault arms with fencing on and off</a:t>
             </a:r>
           </a:p>
         </p:txBody>
@@ -3663,7 +3782,7 @@
 </file>
 
 <file path=ppt/slides/slide12.xml><?xml version="1.0" encoding="utf-8"?>
-<p:sld xmlns:a="http://schemas.openxmlformats.org/drawingml/2006/main" xmlns:r="http://schemas.openxmlformats.org/officeDocument/2006/relationships" xmlns:p="http://schemas.openxmlformats.org/presentationml/2006/main">
+<p:sld xmlns:a="http://schemas.openxmlformats.org/drawingml/2006/main" xmlns:p="http://schemas.openxmlformats.org/presentationml/2006/main" xmlns:r="http://schemas.openxmlformats.org/officeDocument/2006/relationships">
   <p:cSld>
     <p:spTree>
       <p:nvGrpSpPr>
@@ -3671,14 +3790,7 @@
         <p:cNvGrpSpPr/>
         <p:nvPr/>
       </p:nvGrpSpPr>
-      <p:grpSpPr>
-        <a:xfrm>
-          <a:off x="0" y="0"/>
-          <a:ext cx="0" cy="0"/>
-          <a:chOff x="0" y="0"/>
-          <a:chExt cx="0" cy="0"/>
-        </a:xfrm>
-      </p:grpSpPr>
+      <p:grpSpPr/>
       <p:sp>
         <p:nvSpPr>
           <p:cNvPr id="2" name="TextBox 1"/>
@@ -3688,7 +3800,7 @@
         <p:spPr>
           <a:xfrm>
             <a:off x="548640" y="256032"/>
-            <a:ext cx="9692640" cy="777240"/>
+            <a:ext cx="9600000" cy="777240"/>
           </a:xfrm>
           <a:prstGeom prst="rect">
             <a:avLst/>
@@ -3696,18 +3808,23 @@
           <a:noFill/>
         </p:spPr>
         <p:txBody>
-          <a:bodyPr wrap="none">
+          <a:bodyPr wrap="square">
             <a:spAutoFit/>
           </a:bodyPr>
           <a:lstStyle/>
           <a:p>
+            <a:pPr>
+              <a:spcAft>
+                <a:spcPts val="600"/>
+              </a:spcAft>
+            </a:pPr>
             <a:r>
               <a:rPr sz="2800" b="1">
                 <a:solidFill>
                   <a:srgbClr val="1B3A6B"/>
                 </a:solidFill>
               </a:rPr>
-              <a:t>The knobs the study turns</a:t>
+              <a:t>Overlap does not solve ownership consistency</a:t>
             </a:r>
           </a:p>
         </p:txBody>
@@ -3720,8 +3837,8 @@
         </p:nvSpPr>
         <p:spPr>
           <a:xfrm>
-            <a:off x="9692640" y="292608"/>
-            <a:ext cx="2286000" cy="457200"/>
+            <a:off x="10200000" y="292608"/>
+            <a:ext cx="1700000" cy="457200"/>
           </a:xfrm>
           <a:prstGeom prst="rect">
             <a:avLst/>
@@ -3729,838 +3846,78 @@
           <a:noFill/>
         </p:spPr>
         <p:txBody>
-          <a:bodyPr wrap="none">
+          <a:bodyPr wrap="square">
             <a:spAutoFit/>
           </a:bodyPr>
           <a:lstStyle/>
           <a:p>
-            <a:pPr algn="r"/>
+            <a:pPr algn="r">
+              <a:spcAft>
+                <a:spcPts val="600"/>
+              </a:spcAft>
+            </a:pPr>
             <a:r>
               <a:rPr sz="1300" b="1">
                 <a:solidFill>
                   <a:srgbClr val="B3A369"/>
                 </a:solidFill>
               </a:rPr>
-              <a:t>SQ5</a:t>
-            </a:r>
-          </a:p>
-        </p:txBody>
-      </p:sp>
-      <p:graphicFrame>
-        <p:nvGraphicFramePr>
-          <p:cNvPr id="4" name="Table 3"/>
-          <p:cNvGraphicFramePr>
-            <a:graphicFrameLocks noGrp="1"/>
-          </p:cNvGraphicFramePr>
+              <a:t>RQ4</a:t>
+            </a:r>
+          </a:p>
+        </p:txBody>
+      </p:sp>
+      <p:sp>
+        <p:nvSpPr>
+          <p:cNvPr id="4" name="Rounded Rectangle 3"/>
+          <p:cNvSpPr/>
           <p:nvPr/>
-        </p:nvGraphicFramePr>
-        <p:xfrm>
-          <a:off x="731520" y="1234440"/>
-          <a:ext cx="10698480" cy="4206240"/>
-        </p:xfrm>
-        <a:graphic>
-          <a:graphicData uri="http://schemas.openxmlformats.org/drawingml/2006/table">
-            <a:tbl>
-              <a:tblPr firstRow="1" bandRow="1">
-                <a:tableStyleId>{5C22544A-7EE6-4342-B048-85BDC9FD1C3A}</a:tableStyleId>
-              </a:tblPr>
-              <a:tblGrid>
-                <a:gridCol w="4206240">
-                  <a:extLst>
-                    <a:ext uri="{9D8B030D-6E8A-4147-A177-3AD203B41FA5}">
-                      <a16:colId xmlns:a16="http://schemas.microsoft.com/office/drawing/2014/main" val="20000"/>
-                    </a:ext>
-                  </a:extLst>
-                </a:gridCol>
-                <a:gridCol w="2377440">
-                  <a:extLst>
-                    <a:ext uri="{9D8B030D-6E8A-4147-A177-3AD203B41FA5}">
-                      <a16:colId xmlns:a16="http://schemas.microsoft.com/office/drawing/2014/main" val="20001"/>
-                    </a:ext>
-                  </a:extLst>
-                </a:gridCol>
-                <a:gridCol w="4114800">
-                  <a:extLst>
-                    <a:ext uri="{9D8B030D-6E8A-4147-A177-3AD203B41FA5}">
-                      <a16:colId xmlns:a16="http://schemas.microsoft.com/office/drawing/2014/main" val="20002"/>
-                    </a:ext>
-                  </a:extLst>
-                </a:gridCol>
-              </a:tblGrid>
-              <a:tr h="525780">
-                <a:tc>
-                  <a:txBody>
-                    <a:bodyPr/>
-                    <a:lstStyle/>
-                    <a:p>
-                      <a:r>
-                        <a:rPr sz="1300" b="1">
-                          <a:solidFill>
-                            <a:srgbClr val="FFFFFF"/>
-                          </a:solidFill>
-                        </a:rPr>
-                        <a:t>Knob</a:t>
-                      </a:r>
-                    </a:p>
-                  </a:txBody>
-                  <a:tcPr>
-                    <a:solidFill>
-                      <a:srgbClr val="1B3A6B"/>
-                    </a:solidFill>
-                  </a:tcPr>
-                </a:tc>
-                <a:tc>
-                  <a:txBody>
-                    <a:bodyPr/>
-                    <a:lstStyle/>
-                    <a:p>
-                      <a:r>
-                        <a:rPr sz="1300" b="1">
-                          <a:solidFill>
-                            <a:srgbClr val="FFFFFF"/>
-                          </a:solidFill>
-                        </a:rPr>
-                        <a:t>Range</a:t>
-                      </a:r>
-                    </a:p>
-                  </a:txBody>
-                  <a:tcPr>
-                    <a:solidFill>
-                      <a:srgbClr val="1B3A6B"/>
-                    </a:solidFill>
-                  </a:tcPr>
-                </a:tc>
-                <a:tc>
-                  <a:txBody>
-                    <a:bodyPr/>
-                    <a:lstStyle/>
-                    <a:p>
-                      <a:r>
-                        <a:rPr sz="1300" b="1">
-                          <a:solidFill>
-                            <a:srgbClr val="FFFFFF"/>
-                          </a:solidFill>
-                        </a:rPr>
-                        <a:t>Question it answers</a:t>
-                      </a:r>
-                    </a:p>
-                  </a:txBody>
-                  <a:tcPr>
-                    <a:solidFill>
-                      <a:srgbClr val="1B3A6B"/>
-                    </a:solidFill>
-                  </a:tcPr>
-                </a:tc>
-                <a:extLst>
-                  <a:ext uri="{0D108BD9-81ED-4DB2-BD59-A6C34878D82A}">
-                    <a16:rowId xmlns:a16="http://schemas.microsoft.com/office/drawing/2014/main" val="10000"/>
-                  </a:ext>
-                </a:extLst>
-              </a:tr>
-              <a:tr h="525780">
-                <a:tc>
-                  <a:txBody>
-                    <a:bodyPr/>
-                    <a:lstStyle/>
-                    <a:p>
-                      <a:r>
-                        <a:rPr sz="1300" b="0">
-                          <a:solidFill>
-                            <a:srgbClr val="212121"/>
-                          </a:solidFill>
-                        </a:rPr>
-                        <a:t>Trigger lead (computed vs fixed 1-4 s)</a:t>
-                      </a:r>
-                    </a:p>
-                  </a:txBody>
-                  <a:tcPr>
-                    <a:solidFill>
-                      <a:srgbClr val="EFF2F7"/>
-                    </a:solidFill>
-                  </a:tcPr>
-                </a:tc>
-                <a:tc>
-                  <a:txBody>
-                    <a:bodyPr/>
-                    <a:lstStyle/>
-                    <a:p>
-                      <a:r>
-                        <a:rPr sz="1300" b="0">
-                          <a:solidFill>
-                            <a:srgbClr val="212121"/>
-                          </a:solidFill>
-                        </a:rPr>
-                        <a:t>LOOKAHEAD_S / band width</a:t>
-                      </a:r>
-                    </a:p>
-                  </a:txBody>
-                  <a:tcPr>
-                    <a:solidFill>
-                      <a:srgbClr val="EFF2F7"/>
-                    </a:solidFill>
-                  </a:tcPr>
-                </a:tc>
-                <a:tc>
-                  <a:txBody>
-                    <a:bodyPr/>
-                    <a:lstStyle/>
-                    <a:p>
-                      <a:r>
-                        <a:rPr sz="1300" b="0">
-                          <a:solidFill>
-                            <a:srgbClr val="212121"/>
-                          </a:solidFill>
-                        </a:rPr>
-                        <a:t>latest safe trigger under load (SQ4)</a:t>
-                      </a:r>
-                    </a:p>
-                  </a:txBody>
-                  <a:tcPr>
-                    <a:solidFill>
-                      <a:srgbClr val="EFF2F7"/>
-                    </a:solidFill>
-                  </a:tcPr>
-                </a:tc>
-                <a:extLst>
-                  <a:ext uri="{0D108BD9-81ED-4DB2-BD59-A6C34878D82A}">
-                    <a16:rowId xmlns:a16="http://schemas.microsoft.com/office/drawing/2014/main" val="10001"/>
-                  </a:ext>
-                </a:extLst>
-              </a:tr>
-              <a:tr h="525780">
-                <a:tc>
-                  <a:txBody>
-                    <a:bodyPr/>
-                    <a:lstStyle/>
-                    <a:p>
-                      <a:r>
-                        <a:rPr sz="1300" b="0">
-                          <a:solidFill>
-                            <a:srgbClr val="212121"/>
-                          </a:solidFill>
-                        </a:rPr>
-                        <a:t>Payload (context vs snapshot vs one frame)</a:t>
-                      </a:r>
-                    </a:p>
-                  </a:txBody>
-                  <a:tcPr>
-                    <a:solidFill>
-                      <a:srgbClr val="FFFFFF"/>
-                    </a:solidFill>
-                  </a:tcPr>
-                </a:tc>
-                <a:tc>
-                  <a:txBody>
-                    <a:bodyPr/>
-                    <a:lstStyle/>
-                    <a:p>
-                      <a:r>
-                        <a:rPr sz="1300" b="0">
-                          <a:solidFill>
-                            <a:srgbClr val="212121"/>
-                          </a:solidFill>
-                        </a:rPr>
-                        <a:t>history depth</a:t>
-                      </a:r>
-                    </a:p>
-                  </a:txBody>
-                  <a:tcPr>
-                    <a:solidFill>
-                      <a:srgbClr val="FFFFFF"/>
-                    </a:solidFill>
-                  </a:tcPr>
-                </a:tc>
-                <a:tc>
-                  <a:txBody>
-                    <a:bodyPr/>
-                    <a:lstStyle/>
-                    <a:p>
-                      <a:r>
-                        <a:rPr sz="1300" b="0">
-                          <a:solidFill>
-                            <a:srgbClr val="212121"/>
-                          </a:solidFill>
-                        </a:rPr>
-                        <a:t>what must move (SQ2)</a:t>
-                      </a:r>
-                    </a:p>
-                  </a:txBody>
-                  <a:tcPr>
-                    <a:solidFill>
-                      <a:srgbClr val="FFFFFF"/>
-                    </a:solidFill>
-                  </a:tcPr>
-                </a:tc>
-                <a:extLst>
-                  <a:ext uri="{0D108BD9-81ED-4DB2-BD59-A6C34878D82A}">
-                    <a16:rowId xmlns:a16="http://schemas.microsoft.com/office/drawing/2014/main" val="10002"/>
-                  </a:ext>
-                </a:extLst>
-              </a:tr>
-              <a:tr h="525780">
-                <a:tc>
-                  <a:txBody>
-                    <a:bodyPr/>
-                    <a:lstStyle/>
-                    <a:p>
-                      <a:r>
-                        <a:rPr sz="1300" b="0">
-                          <a:solidFill>
-                            <a:srgbClr val="212121"/>
-                          </a:solidFill>
-                        </a:rPr>
-                        <a:t>Commit refresh and mirroring rate</a:t>
-                      </a:r>
-                    </a:p>
-                  </a:txBody>
-                  <a:tcPr>
-                    <a:solidFill>
-                      <a:srgbClr val="EFF2F7"/>
-                    </a:solidFill>
-                  </a:tcPr>
-                </a:tc>
-                <a:tc>
-                  <a:txBody>
-                    <a:bodyPr/>
-                    <a:lstStyle/>
-                    <a:p>
-                      <a:r>
-                        <a:rPr sz="1300" b="0">
-                          <a:solidFill>
-                            <a:srgbClr val="212121"/>
-                          </a:solidFill>
-                        </a:rPr>
-                        <a:t>none / full / 0.25-2 s</a:t>
-                      </a:r>
-                    </a:p>
-                  </a:txBody>
-                  <a:tcPr>
-                    <a:solidFill>
-                      <a:srgbClr val="EFF2F7"/>
-                    </a:solidFill>
-                  </a:tcPr>
-                </a:tc>
-                <a:tc>
-                  <a:txBody>
-                    <a:bodyPr/>
-                    <a:lstStyle/>
-                    <a:p>
-                      <a:r>
-                        <a:rPr sz="1300" b="0">
-                          <a:solidFill>
-                            <a:srgbClr val="212121"/>
-                          </a:solidFill>
-                        </a:rPr>
-                        <a:t>delivery redundancy value (SQ4)</a:t>
-                      </a:r>
-                    </a:p>
-                  </a:txBody>
-                  <a:tcPr>
-                    <a:solidFill>
-                      <a:srgbClr val="EFF2F7"/>
-                    </a:solidFill>
-                  </a:tcPr>
-                </a:tc>
-                <a:extLst>
-                  <a:ext uri="{0D108BD9-81ED-4DB2-BD59-A6C34878D82A}">
-                    <a16:rowId xmlns:a16="http://schemas.microsoft.com/office/drawing/2014/main" val="10003"/>
-                  </a:ext>
-                </a:extLst>
-              </a:tr>
-              <a:tr h="525780">
-                <a:tc>
-                  <a:txBody>
-                    <a:bodyPr/>
-                    <a:lstStyle/>
-                    <a:p>
-                      <a:r>
-                        <a:rPr sz="1300" b="0">
-                          <a:solidFill>
-                            <a:srgbClr val="212121"/>
-                          </a:solidFill>
-                        </a:rPr>
-                        <a:t>Crossing burst size</a:t>
-                      </a:r>
-                    </a:p>
-                  </a:txBody>
-                  <a:tcPr>
-                    <a:solidFill>
-                      <a:srgbClr val="FFFFFF"/>
-                    </a:solidFill>
-                  </a:tcPr>
-                </a:tc>
-                <a:tc>
-                  <a:txBody>
-                    <a:bodyPr/>
-                    <a:lstStyle/>
-                    <a:p>
-                      <a:r>
-                        <a:rPr sz="1300" b="0">
-                          <a:solidFill>
-                            <a:srgbClr val="212121"/>
-                          </a:solidFill>
-                        </a:rPr>
-                        <a:t>1-8 simultaneous tracks</a:t>
-                      </a:r>
-                    </a:p>
-                  </a:txBody>
-                  <a:tcPr>
-                    <a:solidFill>
-                      <a:srgbClr val="FFFFFF"/>
-                    </a:solidFill>
-                  </a:tcPr>
-                </a:tc>
-                <a:tc>
-                  <a:txBody>
-                    <a:bodyPr/>
-                    <a:lstStyle/>
-                    <a:p>
-                      <a:r>
-                        <a:rPr sz="1300" b="0">
-                          <a:solidFill>
-                            <a:srgbClr val="212121"/>
-                          </a:solidFill>
-                        </a:rPr>
-                        <a:t>destination admission under bursts (SQ5)</a:t>
-                      </a:r>
-                    </a:p>
-                  </a:txBody>
-                  <a:tcPr>
-                    <a:solidFill>
-                      <a:srgbClr val="FFFFFF"/>
-                    </a:solidFill>
-                  </a:tcPr>
-                </a:tc>
-                <a:extLst>
-                  <a:ext uri="{0D108BD9-81ED-4DB2-BD59-A6C34878D82A}">
-                    <a16:rowId xmlns:a16="http://schemas.microsoft.com/office/drawing/2014/main" val="10004"/>
-                  </a:ext>
-                </a:extLst>
-              </a:tr>
-              <a:tr h="525780">
-                <a:tc>
-                  <a:txBody>
-                    <a:bodyPr/>
-                    <a:lstStyle/>
-                    <a:p>
-                      <a:r>
-                        <a:rPr sz="1300" b="0">
-                          <a:solidFill>
-                            <a:srgbClr val="212121"/>
-                          </a:solidFill>
-                        </a:rPr>
-                        <a:t>Boundary position along the approach</a:t>
-                      </a:r>
-                    </a:p>
-                  </a:txBody>
-                  <a:tcPr>
-                    <a:solidFill>
-                      <a:srgbClr val="EFF2F7"/>
-                    </a:solidFill>
-                  </a:tcPr>
-                </a:tc>
-                <a:tc>
-                  <a:txBody>
-                    <a:bodyPr/>
-                    <a:lstStyle/>
-                    <a:p>
-                      <a:r>
-                        <a:rPr sz="1300" b="0">
-                          <a:solidFill>
-                            <a:srgbClr val="212121"/>
-                          </a:solidFill>
-                        </a:rPr>
-                        <a:t>25 m sweep</a:t>
-                      </a:r>
-                    </a:p>
-                  </a:txBody>
-                  <a:tcPr>
-                    <a:solidFill>
-                      <a:srgbClr val="EFF2F7"/>
-                    </a:solidFill>
-                  </a:tcPr>
-                </a:tc>
-                <a:tc>
-                  <a:txBody>
-                    <a:bodyPr/>
-                    <a:lstStyle/>
-                    <a:p>
-                      <a:r>
-                        <a:rPr sz="1300" b="0">
-                          <a:solidFill>
-                            <a:srgbClr val="212121"/>
-                          </a:solidFill>
-                        </a:rPr>
-                        <a:t>how close a boundary may sit to a conflict (SQ3)</a:t>
-                      </a:r>
-                    </a:p>
-                  </a:txBody>
-                  <a:tcPr>
-                    <a:solidFill>
-                      <a:srgbClr val="EFF2F7"/>
-                    </a:solidFill>
-                  </a:tcPr>
-                </a:tc>
-                <a:extLst>
-                  <a:ext uri="{0D108BD9-81ED-4DB2-BD59-A6C34878D82A}">
-                    <a16:rowId xmlns:a16="http://schemas.microsoft.com/office/drawing/2014/main" val="10005"/>
-                  </a:ext>
-                </a:extLst>
-              </a:tr>
-              <a:tr h="525780">
-                <a:tc>
-                  <a:txBody>
-                    <a:bodyPr/>
-                    <a:lstStyle/>
-                    <a:p>
-                      <a:r>
-                        <a:rPr sz="1300" b="0">
-                          <a:solidFill>
-                            <a:srgbClr val="212121"/>
-                          </a:solidFill>
-                        </a:rPr>
-                        <a:t>Backhaul impairment</a:t>
-                      </a:r>
-                    </a:p>
-                  </a:txBody>
-                  <a:tcPr>
-                    <a:solidFill>
-                      <a:srgbClr val="FFFFFF"/>
-                    </a:solidFill>
-                  </a:tcPr>
-                </a:tc>
-                <a:tc>
-                  <a:txBody>
-                    <a:bodyPr/>
-                    <a:lstStyle/>
-                    <a:p>
-                      <a:r>
-                        <a:rPr sz="1300" b="0">
-                          <a:solidFill>
-                            <a:srgbClr val="212121"/>
-                          </a:solidFill>
-                        </a:rPr>
-                        <a:t>latency / jitter / loss</a:t>
-                      </a:r>
-                    </a:p>
-                  </a:txBody>
-                  <a:tcPr>
-                    <a:solidFill>
-                      <a:srgbClr val="FFFFFF"/>
-                    </a:solidFill>
-                  </a:tcPr>
-                </a:tc>
-                <a:tc>
-                  <a:txBody>
-                    <a:bodyPr/>
-                    <a:lstStyle/>
-                    <a:p>
-                      <a:r>
-                        <a:rPr sz="1300" b="0">
-                          <a:solidFill>
-                            <a:srgbClr val="212121"/>
-                          </a:solidFill>
-                        </a:rPr>
-                        <a:t>feasible region edges (SQ5)</a:t>
-                      </a:r>
-                    </a:p>
-                  </a:txBody>
-                  <a:tcPr>
-                    <a:solidFill>
-                      <a:srgbClr val="FFFFFF"/>
-                    </a:solidFill>
-                  </a:tcPr>
-                </a:tc>
-                <a:extLst>
-                  <a:ext uri="{0D108BD9-81ED-4DB2-BD59-A6C34878D82A}">
-                    <a16:rowId xmlns:a16="http://schemas.microsoft.com/office/drawing/2014/main" val="10006"/>
-                  </a:ext>
-                </a:extLst>
-              </a:tr>
-              <a:tr h="525780">
-                <a:tc>
-                  <a:txBody>
-                    <a:bodyPr/>
-                    <a:lstStyle/>
-                    <a:p>
-                      <a:r>
-                        <a:rPr sz="1300" b="0">
-                          <a:solidFill>
-                            <a:srgbClr val="212121"/>
-                          </a:solidFill>
-                        </a:rPr>
-                        <a:t>Density and crossing rate</a:t>
-                      </a:r>
-                    </a:p>
-                  </a:txBody>
-                  <a:tcPr>
-                    <a:solidFill>
-                      <a:srgbClr val="EFF2F7"/>
-                    </a:solidFill>
-                  </a:tcPr>
-                </a:tc>
-                <a:tc>
-                  <a:txBody>
-                    <a:bodyPr/>
-                    <a:lstStyle/>
-                    <a:p>
-                      <a:r>
-                        <a:rPr sz="1300" b="0">
-                          <a:solidFill>
-                            <a:srgbClr val="212121"/>
-                          </a:solidFill>
-                        </a:rPr>
-                        <a:t>4-32 agents</a:t>
-                      </a:r>
-                    </a:p>
-                  </a:txBody>
-                  <a:tcPr>
-                    <a:solidFill>
-                      <a:srgbClr val="EFF2F7"/>
-                    </a:solidFill>
-                  </a:tcPr>
-                </a:tc>
-                <a:tc>
-                  <a:txBody>
-                    <a:bodyPr/>
-                    <a:lstStyle/>
-                    <a:p>
-                      <a:r>
-                        <a:rPr sz="1300" b="0">
-                          <a:solidFill>
-                            <a:srgbClr val="212121"/>
-                          </a:solidFill>
-                        </a:rPr>
-                        <a:t>schedulable region and placement rule (SQ5)</a:t>
-                      </a:r>
-                    </a:p>
-                  </a:txBody>
-                  <a:tcPr>
-                    <a:solidFill>
-                      <a:srgbClr val="EFF2F7"/>
-                    </a:solidFill>
-                  </a:tcPr>
-                </a:tc>
-                <a:extLst>
-                  <a:ext uri="{0D108BD9-81ED-4DB2-BD59-A6C34878D82A}">
-                    <a16:rowId xmlns:a16="http://schemas.microsoft.com/office/drawing/2014/main" val="10007"/>
-                  </a:ext>
-                </a:extLst>
-              </a:tr>
-              <a:tr h="525780">
-                <a:tc>
-                  <a:txBody>
-                    <a:bodyPr/>
-                    <a:lstStyle/>
-                    <a:p>
-                      <a:r>
-                        <a:rPr sz="1300" b="0">
-                          <a:solidFill>
-                            <a:srgbClr val="212121"/>
-                          </a:solidFill>
-                        </a:rPr>
-                        <a:t>Ownership epochs and fault injection</a:t>
-                      </a:r>
-                    </a:p>
-                  </a:txBody>
-                  <a:tcPr>
-                    <a:solidFill>
-                      <a:srgbClr val="EFF2F7"/>
-                    </a:solidFill>
-                  </a:tcPr>
-                </a:tc>
-                <a:tc>
-                  <a:txBody>
-                    <a:bodyPr/>
-                    <a:lstStyle/>
-                    <a:p>
-                      <a:r>
-                        <a:rPr sz="1300" b="0">
-                          <a:solidFill>
-                            <a:srgbClr val="212121"/>
-                          </a:solidFill>
-                        </a:rPr>
-                        <a:t>6 fault arms, fencing on/off</a:t>
-                      </a:r>
-                    </a:p>
-                  </a:txBody>
-                  <a:tcPr>
-                    <a:solidFill>
-                      <a:srgbClr val="EFF2F7"/>
-                    </a:solidFill>
-                  </a:tcPr>
-                </a:tc>
-                <a:tc>
-                  <a:txBody>
-                    <a:bodyPr/>
-                    <a:lstStyle/>
-                    <a:p>
-                      <a:r>
-                        <a:rPr sz="1300" b="0">
-                          <a:solidFill>
-                            <a:srgbClr val="212121"/>
-                          </a:solidFill>
-                        </a:rPr>
-                        <a:t>single writer under message loss (SQ4)</a:t>
-                      </a:r>
-                    </a:p>
-                  </a:txBody>
-                  <a:tcPr>
-                    <a:solidFill>
-                      <a:srgbClr val="EFF2F7"/>
-                    </a:solidFill>
-                  </a:tcPr>
-                </a:tc>
-                <a:extLst>
-                  <a:ext uri="{0D108BD9-81ED-4DB2-BD59-A6C34878D82A}">
-                    <a16:rowId xmlns:a16="http://schemas.microsoft.com/office/drawing/2014/main" val="10007"/>
-                  </a:ext>
-                </a:extLst>
-              </a:tr>
-              <a:tr h="525780">
-                <a:tc>
-                  <a:txBody>
-                    <a:bodyPr/>
-                    <a:lstStyle/>
-                    <a:p>
-                      <a:r>
-                        <a:rPr sz="1300" b="0">
-                          <a:solidFill>
-                            <a:srgbClr val="212121"/>
-                          </a:solidFill>
-                        </a:rPr>
-                        <a:t>Transport</a:t>
-                      </a:r>
-                    </a:p>
-                  </a:txBody>
-                  <a:tcPr>
-                    <a:solidFill>
-                      <a:srgbClr val="EFF2F7"/>
-                    </a:solidFill>
-                  </a:tcPr>
-                </a:tc>
-                <a:tc>
-                  <a:txBody>
-                    <a:bodyPr/>
-                    <a:lstStyle/>
-                    <a:p>
-                      <a:r>
-                        <a:rPr sz="1300" b="0">
-                          <a:solidFill>
-                            <a:srgbClr val="212121"/>
-                          </a:solidFill>
-                        </a:rPr>
-                        <a:t>parametric vs real gRPC + netem</a:t>
-                      </a:r>
-                    </a:p>
-                  </a:txBody>
-                  <a:tcPr>
-                    <a:solidFill>
-                      <a:srgbClr val="EFF2F7"/>
-                    </a:solidFill>
-                  </a:tcPr>
-                </a:tc>
-                <a:tc>
-                  <a:txBody>
-                    <a:bodyPr/>
-                    <a:lstStyle/>
-                    <a:p>
-                      <a:r>
-                        <a:rPr sz="1300" b="0">
-                          <a:solidFill>
-                            <a:srgbClr val="212121"/>
-                          </a:solidFill>
-                        </a:rPr>
-                        <a:t>prepare/update/import/commit latency (SQ5)</a:t>
-                      </a:r>
-                    </a:p>
-                  </a:txBody>
-                  <a:tcPr>
-                    <a:solidFill>
-                      <a:srgbClr val="EFF2F7"/>
-                    </a:solidFill>
-                  </a:tcPr>
-                </a:tc>
-                <a:extLst>
-                  <a:ext uri="{0D108BD9-81ED-4DB2-BD59-A6C34878D82A}">
-                    <a16:rowId xmlns:a16="http://schemas.microsoft.com/office/drawing/2014/main" val="10007"/>
-                  </a:ext>
-                </a:extLst>
-              </a:tr>
-              <a:tr h="525780">
-                <a:tc>
-                  <a:txBody>
-                    <a:bodyPr/>
-                    <a:lstStyle/>
-                    <a:p>
-                      <a:r>
-                        <a:rPr sz="1300" b="0">
-                          <a:solidFill>
-                            <a:srgbClr val="212121"/>
-                          </a:solidFill>
-                        </a:rPr>
-                        <a:t>Cross-locale association (unconnected actors)</a:t>
-                      </a:r>
-                    </a:p>
-                  </a:txBody>
-                  <a:tcPr>
-                    <a:solidFill>
-                      <a:srgbClr val="EFF2F7"/>
-                    </a:solidFill>
-                  </a:tcPr>
-                </a:tc>
-                <a:tc>
-                  <a:txBody>
-                    <a:bodyPr/>
-                    <a:lstStyle/>
-                    <a:p>
-                      <a:r>
-                        <a:rPr sz="1300" b="0">
-                          <a:solidFill>
-                            <a:srgbClr val="212121"/>
-                          </a:solidFill>
-                        </a:rPr>
-                        <a:t>GT vs gated, pose error 0-2 m</a:t>
-                      </a:r>
-                    </a:p>
-                  </a:txBody>
-                  <a:tcPr>
-                    <a:solidFill>
-                      <a:srgbClr val="EFF2F7"/>
-                    </a:solidFill>
-                  </a:tcPr>
-                </a:tc>
-                <a:tc>
-                  <a:txBody>
-                    <a:bodyPr/>
-                    <a:lstStyle/>
-                    <a:p>
-                      <a:r>
-                        <a:rPr sz="1300" b="0">
-                          <a:solidFill>
-                            <a:srgbClr val="212121"/>
-                          </a:solidFill>
-                        </a:rPr>
-                        <a:t>identity continuity at the boundary (SQ5)</a:t>
-                      </a:r>
-                    </a:p>
-                  </a:txBody>
-                  <a:tcPr>
-                    <a:solidFill>
-                      <a:srgbClr val="EFF2F7"/>
-                    </a:solidFill>
-                  </a:tcPr>
-                </a:tc>
-                <a:extLst>
-                  <a:ext uri="{0D108BD9-81ED-4DB2-BD59-A6C34878D82A}">
-                    <a16:rowId xmlns:a16="http://schemas.microsoft.com/office/drawing/2014/main" val="10007"/>
-                  </a:ext>
-                </a:extLst>
-              </a:tr>
-            </a:tbl>
-          </a:graphicData>
-        </a:graphic>
-      </p:graphicFrame>
+        </p:nvSpPr>
+        <p:spPr>
+          <a:xfrm>
+            <a:off x="10200000" y="760000"/>
+            <a:ext cx="1450000" cy="330000"/>
+          </a:xfrm>
+          <a:prstGeom prst="roundRect">
+            <a:avLst/>
+          </a:prstGeom>
+          <a:solidFill>
+            <a:srgbClr val="D68C00"/>
+          </a:solidFill>
+          <a:ln>
+            <a:noFill/>
+          </a:ln>
+        </p:spPr>
+        <p:style>
+          <a:lnRef idx="1">
+            <a:schemeClr val="accent1"/>
+          </a:lnRef>
+          <a:fillRef idx="3">
+            <a:schemeClr val="accent1"/>
+          </a:fillRef>
+          <a:effectRef idx="2">
+            <a:schemeClr val="accent1"/>
+          </a:effectRef>
+          <a:fontRef idx="minor">
+            <a:schemeClr val="lt1"/>
+          </a:fontRef>
+        </p:style>
+        <p:txBody>
+          <a:bodyPr rtlCol="0" anchor="ctr"/>
+          <a:lstStyle/>
+          <a:p>
+            <a:pPr algn="ctr"/>
+            <a:r>
+              <a:rPr sz="1100" b="1">
+                <a:solidFill>
+                  <a:srgbClr val="FFFFFF"/>
+                </a:solidFill>
+              </a:rPr>
+              <a:t>Provisional</a:t>
+            </a:r>
+          </a:p>
+        </p:txBody>
+      </p:sp>
       <p:sp>
         <p:nvSpPr>
           <p:cNvPr id="5" name="TextBox 4"/>
@@ -4569,8 +3926,8 @@
         </p:nvSpPr>
         <p:spPr>
           <a:xfrm>
-            <a:off x="640080" y="6263640"/>
-            <a:ext cx="10972800" cy="457200"/>
+            <a:off x="640080" y="1150000"/>
+            <a:ext cx="10972800" cy="2000000"/>
           </a:xfrm>
           <a:prstGeom prst="rect">
             <a:avLst/>
@@ -4578,18 +3935,130 @@
           <a:noFill/>
         </p:spPr>
         <p:txBody>
-          <a:bodyPr wrap="none">
+          <a:bodyPr wrap="square">
             <a:spAutoFit/>
           </a:bodyPr>
           <a:lstStyle/>
           <a:p>
-            <a:r>
-              <a:rPr sz="1300" i="1">
+            <a:pPr>
+              <a:spcAft>
+                <a:spcPts val="800"/>
+              </a:spcAft>
+            </a:pPr>
+            <a:r>
+              <a:rPr sz="1600" b="0">
+                <a:solidFill>
+                  <a:srgbClr val="212121"/>
+                </a:solidFill>
+              </a:rPr>
+              <a:t>• Geometric overlap still requires an ownership handoff.</a:t>
+            </a:r>
+          </a:p>
+          <a:p>
+            <a:pPr>
+              <a:spcAft>
+                <a:spcPts val="800"/>
+              </a:spcAft>
+            </a:pPr>
+            <a:r>
+              <a:rPr sz="1600" b="0">
+                <a:solidFill>
+                  <a:srgbClr val="212121"/>
+                </a:solidFill>
+              </a:rPr>
+              <a:t>• Fixed-width overlap provides less lead time at higher speeds.</a:t>
+            </a:r>
+          </a:p>
+          <a:p>
+            <a:pPr>
+              <a:spcAft>
+                <a:spcPts val="800"/>
+              </a:spcAft>
+            </a:pPr>
+            <a:r>
+              <a:rPr sz="1600" b="0">
+                <a:solidFill>
+                  <a:srgbClr val="212121"/>
+                </a:solidFill>
+              </a:rPr>
+              <a:t>• Continuous replication raises backhaul cost and, in the first sweep, changed nothing.</a:t>
+            </a:r>
+          </a:p>
+          <a:p>
+            <a:pPr>
+              <a:spcAft>
+                <a:spcPts val="800"/>
+              </a:spcAft>
+            </a:pPr>
+            <a:r>
+              <a:rPr sz="1600" b="0">
+                <a:solidFill>
+                  <a:srgbClr val="212121"/>
+                </a:solidFill>
+              </a:rPr>
+              <a:t>• Dual authority creates conflicting predictions for the same actor.</a:t>
+            </a:r>
+          </a:p>
+        </p:txBody>
+      </p:sp>
+      <p:pic>
+        <p:nvPicPr>
+          <p:cNvPr id="6" name="Picture 5" descr="image.png"/>
+          <p:cNvPicPr>
+            <a:picLocks noChangeAspect="1"/>
+          </p:cNvPicPr>
+          <p:nvPr/>
+        </p:nvPicPr>
+        <p:blipFill>
+          <a:blip r:embed="rId2"/>
+          <a:stretch>
+            <a:fillRect/>
+          </a:stretch>
+        </p:blipFill>
+        <p:spPr>
+          <a:xfrm>
+            <a:off x="2194560" y="2900000"/>
+            <a:ext cx="7680960" cy="2838616"/>
+          </a:xfrm>
+          <a:prstGeom prst="rect">
+            <a:avLst/>
+          </a:prstGeom>
+        </p:spPr>
+      </p:pic>
+      <p:sp>
+        <p:nvSpPr>
+          <p:cNvPr id="7" name="TextBox 6"/>
+          <p:cNvSpPr txBox="1"/>
+          <p:nvPr/>
+        </p:nvSpPr>
+        <p:spPr>
+          <a:xfrm>
+            <a:off x="640080" y="6263640"/>
+            <a:ext cx="10972800" cy="457200"/>
+          </a:xfrm>
+          <a:prstGeom prst="rect">
+            <a:avLst/>
+          </a:prstGeom>
+          <a:noFill/>
+        </p:spPr>
+        <p:txBody>
+          <a:bodyPr wrap="square">
+            <a:spAutoFit/>
+          </a:bodyPr>
+          <a:lstStyle/>
+          <a:p>
+            <a:pPr>
+              <a:spcAft>
+                <a:spcPts val="600"/>
+              </a:spcAft>
+            </a:pPr>
+            <a:r>
+              <a:rPr sz="1200" b="0">
                 <a:solidFill>
                   <a:srgbClr val="B3A369"/>
                 </a:solidFill>
               </a:rPr>
-              <a:t>Ties to the study: SQ5: the ownership layer is done (8-scenario fault microeval passes); real transport, association, and the V2X-Seq trigger study are staged on the eval side.</a:t>
+              <a:t>Answers RQ4  ·  Evidence: band and mirroring arms (Provisional), safety-envelope disagreement measurement  ·  Missing: dual-authority arm</a:t>
             </a:r>
           </a:p>
         </p:txBody>
@@ -4603,7 +4072,7 @@
 </file>
 
 <file path=ppt/slides/slide13.xml><?xml version="1.0" encoding="utf-8"?>
-<p:sld xmlns:a="http://schemas.openxmlformats.org/drawingml/2006/main" xmlns:r="http://schemas.openxmlformats.org/officeDocument/2006/relationships" xmlns:p="http://schemas.openxmlformats.org/presentationml/2006/main">
+<p:sld xmlns:a="http://schemas.openxmlformats.org/drawingml/2006/main" xmlns:p="http://schemas.openxmlformats.org/presentationml/2006/main" xmlns:r="http://schemas.openxmlformats.org/officeDocument/2006/relationships">
   <p:cSld>
     <p:spTree>
       <p:nvGrpSpPr>
@@ -4611,14 +4080,7 @@
         <p:cNvGrpSpPr/>
         <p:nvPr/>
       </p:nvGrpSpPr>
-      <p:grpSpPr>
-        <a:xfrm>
-          <a:off x="0" y="0"/>
-          <a:ext cx="0" cy="0"/>
-          <a:chOff x="0" y="0"/>
-          <a:chExt cx="0" cy="0"/>
-        </a:xfrm>
-      </p:grpSpPr>
+      <p:grpSpPr/>
       <p:sp>
         <p:nvSpPr>
           <p:cNvPr id="2" name="TextBox 1"/>
@@ -4628,7 +4090,7 @@
         <p:spPr>
           <a:xfrm>
             <a:off x="548640" y="256032"/>
-            <a:ext cx="9692640" cy="777240"/>
+            <a:ext cx="9600000" cy="777240"/>
           </a:xfrm>
           <a:prstGeom prst="rect">
             <a:avLst/>
@@ -4636,18 +4098,23 @@
           <a:noFill/>
         </p:spPr>
         <p:txBody>
-          <a:bodyPr wrap="none">
+          <a:bodyPr wrap="square">
             <a:spAutoFit/>
           </a:bodyPr>
           <a:lstStyle/>
           <a:p>
+            <a:pPr>
+              <a:spcAft>
+                <a:spcPts val="600"/>
+              </a:spcAft>
+            </a:pPr>
             <a:r>
               <a:rPr sz="2800" b="1">
                 <a:solidFill>
                   <a:srgbClr val="1B3A6B"/>
                 </a:solidFill>
               </a:rPr>
-              <a:t>Scoping the paper</a:t>
+              <a:t>Scope</a:t>
             </a:r>
           </a:p>
         </p:txBody>
@@ -4660,8 +4127,8 @@
         </p:nvSpPr>
         <p:spPr>
           <a:xfrm>
-            <a:off x="640080" y="1188720"/>
-            <a:ext cx="10972800" cy="2926080"/>
+            <a:off x="640080" y="1150000"/>
+            <a:ext cx="10972800" cy="3200000"/>
           </a:xfrm>
           <a:prstGeom prst="rect">
             <a:avLst/>
@@ -4676,46 +4143,76 @@
           <a:p>
             <a:pPr>
               <a:spcAft>
-                <a:spcPts val="500"/>
-              </a:spcAft>
-            </a:pPr>
-            <a:r>
-              <a:rPr sz="1500">
+                <a:spcPts val="800"/>
+              </a:spcAft>
+            </a:pPr>
+            <a:r>
+              <a:rPr sz="1600" b="0">
                 <a:solidFill>
                   <a:srgbClr val="212121"/>
                 </a:solidFill>
               </a:rPr>
-              <a:t>• In: the freshness invariant through the ownership switch and its measurement; the forecast-driven trigger with computed lead; prepare, final update, epoch-fenced commit, and explicit fallback; per-track temporal state for two tracker backends; the alternatives as arms (cold, Kalman snapshot, generic snapshot at handover, keyed migration, replication, overlap, oracle); the locale-size bound for our architecture as a case study.</a:t>
-            </a:r>
-          </a:p>
-          <a:p>
-            <a:pPr>
-              <a:spcAft>
-                <a:spcPts val="500"/>
-              </a:spcAft>
-            </a:pPr>
-            <a:r>
-              <a:rPr sz="1500">
+              <a:t>• In: the freshness condition through ownership transfer and its measurement.</a:t>
+            </a:r>
+          </a:p>
+          <a:p>
+            <a:pPr>
+              <a:spcAft>
+                <a:spcPts val="800"/>
+              </a:spcAft>
+            </a:pPr>
+            <a:r>
+              <a:rPr sz="1600" b="0">
                 <a:solidFill>
                   <a:srgbClr val="212121"/>
                 </a:solidFill>
               </a:rPr>
-              <a:t>• Out (stated as future work or limitation): communication scheduling across PC5/Uu; cross-model state translation; cross-locale association for unconnected actors unless it lands; field deployment.</a:t>
-            </a:r>
-          </a:p>
-          <a:p>
-            <a:pPr>
-              <a:spcAft>
-                <a:spcPts val="500"/>
-              </a:spcAft>
-            </a:pPr>
-            <a:r>
-              <a:rPr sz="1500">
+              <a:t>• In: forecast-driven trigger with computed lead; prepare, final update, commit with ownership epochs.</a:t>
+            </a:r>
+          </a:p>
+          <a:p>
+            <a:pPr>
+              <a:spcAft>
+                <a:spcPts val="800"/>
+              </a:spcAft>
+            </a:pPr>
+            <a:r>
+              <a:rPr sz="1600" b="0">
                 <a:solidFill>
                   <a:srgbClr val="212121"/>
                 </a:solidFill>
               </a:rPr>
-              <a:t>• Paper form: intro, motivation and system model, design, implementation, evaluation with result-first subsections, related work, limitations. 13 pages with references before results land. NSDI'27 fall: abstracts Sep 10, papers Sep 17.</a:t>
+              <a:t>• In: one record for a state-space tracker and a Kalman tracker; the alternatives as measured arms.</a:t>
+            </a:r>
+          </a:p>
+          <a:p>
+            <a:pPr>
+              <a:spcAft>
+                <a:spcPts val="800"/>
+              </a:spcAft>
+            </a:pPr>
+            <a:r>
+              <a:rPr sz="1600" b="0">
+                <a:solidFill>
+                  <a:srgbClr val="212121"/>
+                </a:solidFill>
+              </a:rPr>
+              <a:t>• Out: communication scheduling, cross-model state translation, field deployment.</a:t>
+            </a:r>
+          </a:p>
+          <a:p>
+            <a:pPr>
+              <a:spcAft>
+                <a:spcPts val="800"/>
+              </a:spcAft>
+            </a:pPr>
+            <a:r>
+              <a:rPr sz="1600" b="0">
+                <a:solidFill>
+                  <a:srgbClr val="212121"/>
+                </a:solidFill>
+              </a:rPr>
+              <a:t>• Limitation unless it lands: cross-locale association for unconnected actors.</a:t>
             </a:r>
           </a:p>
         </p:txBody>
@@ -4737,18 +4234,23 @@
           <a:noFill/>
         </p:spPr>
         <p:txBody>
-          <a:bodyPr wrap="none">
+          <a:bodyPr wrap="square">
             <a:spAutoFit/>
           </a:bodyPr>
           <a:lstStyle/>
           <a:p>
-            <a:r>
-              <a:rPr sz="1300" i="1">
+            <a:pPr>
+              <a:spcAft>
+                <a:spcPts val="600"/>
+              </a:spcAft>
+            </a:pPr>
+            <a:r>
+              <a:rPr sz="1200" b="0">
                 <a:solidFill>
                   <a:srgbClr val="B3A369"/>
                 </a:solidFill>
               </a:rPr>
-              <a:t>Ties to the study: the paper's spine is SQ4 and SQ5; SQ1 through SQ3 are its motivation sections.</a:t>
+              <a:t>Paper: NSDI'27 fall cycle, abstracts Sep 10, papers Sep 17  ·  13 pages with references before results</a:t>
             </a:r>
           </a:p>
         </p:txBody>
@@ -4780,7 +4282,7 @@
         <p:spPr>
           <a:xfrm>
             <a:off x="548640" y="256032"/>
-            <a:ext cx="9692640" cy="777240"/>
+            <a:ext cx="9600000" cy="777240"/>
           </a:xfrm>
           <a:prstGeom prst="rect">
             <a:avLst/>
@@ -4804,7 +4306,7 @@
                   <a:srgbClr val="1B3A6B"/>
                 </a:solidFill>
               </a:rPr>
-              <a:t>Evaluation status: provenance and re-baseline</a:t>
+              <a:t>Evaluation dimensions</a:t>
             </a:r>
           </a:p>
         </p:txBody>
@@ -4817,8 +4319,8 @@
         </p:nvSpPr>
         <p:spPr>
           <a:xfrm>
-            <a:off x="9692640" y="292608"/>
-            <a:ext cx="2286000" cy="457200"/>
+            <a:off x="10200000" y="292608"/>
+            <a:ext cx="1700000" cy="457200"/>
           </a:xfrm>
           <a:prstGeom prst="rect">
             <a:avLst/>
@@ -4831,7 +4333,7 @@
           </a:bodyPr>
           <a:lstStyle/>
           <a:p>
-            <a:pPr>
+            <a:pPr algn="r">
               <a:spcAft>
                 <a:spcPts val="600"/>
               </a:spcAft>
@@ -4842,21 +4344,683 @@
                   <a:srgbClr val="B3A369"/>
                 </a:solidFill>
               </a:rPr>
-              <a:t>SQ5</a:t>
-            </a:r>
-          </a:p>
-        </p:txBody>
-      </p:sp>
-      <p:sp>
-        <p:nvSpPr>
-          <p:cNvPr id="4" name="TextBox 3"/>
+              <a:t>RQ5</a:t>
+            </a:r>
+          </a:p>
+        </p:txBody>
+      </p:sp>
+      <p:graphicFrame>
+        <p:nvGraphicFramePr>
+          <p:cNvPr id="4" name="Table 3"/>
+          <p:cNvGraphicFramePr>
+            <a:graphicFrameLocks noGrp="1"/>
+          </p:cNvGraphicFramePr>
+          <p:nvPr/>
+        </p:nvGraphicFramePr>
+        <p:xfrm>
+          <a:off x="640080" y="1150000"/>
+          <a:ext cx="10972800" cy="4400000"/>
+        </p:xfrm>
+        <a:graphic>
+          <a:graphicData uri="http://schemas.openxmlformats.org/drawingml/2006/table">
+            <a:tbl>
+              <a:tblPr firstRow="1" bandRow="1">
+                <a:tableStyleId>{5C22544A-7EE6-4342-B048-85BDC9FD1C3A}</a:tableStyleId>
+              </a:tblPr>
+              <a:tblGrid>
+                <a:gridCol w="3600000"/>
+                <a:gridCol w="3600000"/>
+                <a:gridCol w="1500000"/>
+                <a:gridCol w="2272800"/>
+              </a:tblGrid>
+              <a:tr h="400000">
+                <a:tc>
+                  <a:txBody>
+                    <a:bodyPr/>
+                    <a:lstStyle/>
+                    <a:p>
+                      <a:r>
+                        <a:rPr sz="1200" b="1"/>
+                        <a:t>Dimension</a:t>
+                      </a:r>
+                    </a:p>
+                  </a:txBody>
+                  <a:tcPr/>
+                </a:tc>
+                <a:tc>
+                  <a:txBody>
+                    <a:bodyPr/>
+                    <a:lstStyle/>
+                    <a:p>
+                      <a:r>
+                        <a:rPr sz="1200" b="1"/>
+                        <a:t>Range</a:t>
+                      </a:r>
+                    </a:p>
+                  </a:txBody>
+                  <a:tcPr/>
+                </a:tc>
+                <a:tc>
+                  <a:txBody>
+                    <a:bodyPr/>
+                    <a:lstStyle/>
+                    <a:p>
+                      <a:r>
+                        <a:rPr sz="1200" b="1"/>
+                        <a:t>Answers</a:t>
+                      </a:r>
+                    </a:p>
+                  </a:txBody>
+                  <a:tcPr/>
+                </a:tc>
+                <a:tc>
+                  <a:txBody>
+                    <a:bodyPr/>
+                    <a:lstStyle/>
+                    <a:p>
+                      <a:r>
+                        <a:rPr sz="1200" b="1"/>
+                        <a:t>Status</a:t>
+                      </a:r>
+                    </a:p>
+                  </a:txBody>
+                  <a:tcPr/>
+                </a:tc>
+              </a:tr>
+              <a:tr h="400000">
+                <a:tc>
+                  <a:txBody>
+                    <a:bodyPr/>
+                    <a:lstStyle/>
+                    <a:p>
+                      <a:r>
+                        <a:rPr sz="1200" b="0"/>
+                        <a:t>Trigger lead</a:t>
+                      </a:r>
+                    </a:p>
+                  </a:txBody>
+                  <a:tcPr/>
+                </a:tc>
+                <a:tc>
+                  <a:txBody>
+                    <a:bodyPr/>
+                    <a:lstStyle/>
+                    <a:p>
+                      <a:r>
+                        <a:rPr sz="1200" b="0"/>
+                        <a:t>computed vs fixed 1 to 4 s vs band width</a:t>
+                      </a:r>
+                    </a:p>
+                  </a:txBody>
+                  <a:tcPr/>
+                </a:tc>
+                <a:tc>
+                  <a:txBody>
+                    <a:bodyPr/>
+                    <a:lstStyle/>
+                    <a:p>
+                      <a:r>
+                        <a:rPr sz="1200" b="0"/>
+                        <a:t>RQ3, RQ4</a:t>
+                      </a:r>
+                    </a:p>
+                  </a:txBody>
+                  <a:tcPr/>
+                </a:tc>
+                <a:tc>
+                  <a:txBody>
+                    <a:bodyPr/>
+                    <a:lstStyle/>
+                    <a:p>
+                      <a:r>
+                        <a:rPr sz="1200" b="1">
+                          <a:solidFill>
+                            <a:srgbClr val="1565C0"/>
+                          </a:solidFill>
+                        </a:rPr>
+                        <a:t>Running</a:t>
+                      </a:r>
+                    </a:p>
+                  </a:txBody>
+                  <a:tcPr/>
+                </a:tc>
+              </a:tr>
+              <a:tr h="400000">
+                <a:tc>
+                  <a:txBody>
+                    <a:bodyPr/>
+                    <a:lstStyle/>
+                    <a:p>
+                      <a:r>
+                        <a:rPr sz="1200" b="0"/>
+                        <a:t>Migrated state</a:t>
+                      </a:r>
+                    </a:p>
+                  </a:txBody>
+                  <a:tcPr/>
+                </a:tc>
+                <a:tc>
+                  <a:txBody>
+                    <a:bodyPr/>
+                    <a:lstStyle/>
+                    <a:p>
+                      <a:r>
+                        <a:rPr sz="1200" b="0"/>
+                        <a:t>history vs snapshot vs one frame</a:t>
+                      </a:r>
+                    </a:p>
+                  </a:txBody>
+                  <a:tcPr/>
+                </a:tc>
+                <a:tc>
+                  <a:txBody>
+                    <a:bodyPr/>
+                    <a:lstStyle/>
+                    <a:p>
+                      <a:r>
+                        <a:rPr sz="1200" b="0"/>
+                        <a:t>RQ2</a:t>
+                      </a:r>
+                    </a:p>
+                  </a:txBody>
+                  <a:tcPr/>
+                </a:tc>
+                <a:tc>
+                  <a:txBody>
+                    <a:bodyPr/>
+                    <a:lstStyle/>
+                    <a:p>
+                      <a:r>
+                        <a:rPr sz="1200" b="1">
+                          <a:solidFill>
+                            <a:srgbClr val="2E7D32"/>
+                          </a:solidFill>
+                        </a:rPr>
+                        <a:t>Done</a:t>
+                      </a:r>
+                    </a:p>
+                  </a:txBody>
+                  <a:tcPr/>
+                </a:tc>
+              </a:tr>
+              <a:tr h="400000">
+                <a:tc>
+                  <a:txBody>
+                    <a:bodyPr/>
+                    <a:lstStyle/>
+                    <a:p>
+                      <a:r>
+                        <a:rPr sz="1200" b="0"/>
+                        <a:t>Final update and mirroring rate</a:t>
+                      </a:r>
+                    </a:p>
+                  </a:txBody>
+                  <a:tcPr/>
+                </a:tc>
+                <a:tc>
+                  <a:txBody>
+                    <a:bodyPr/>
+                    <a:lstStyle/>
+                    <a:p>
+                      <a:r>
+                        <a:rPr sz="1200" b="0"/>
+                        <a:t>none / at commit / 0.25 to 2 s</a:t>
+                      </a:r>
+                    </a:p>
+                  </a:txBody>
+                  <a:tcPr/>
+                </a:tc>
+                <a:tc>
+                  <a:txBody>
+                    <a:bodyPr/>
+                    <a:lstStyle/>
+                    <a:p>
+                      <a:r>
+                        <a:rPr sz="1200" b="0"/>
+                        <a:t>RQ4</a:t>
+                      </a:r>
+                    </a:p>
+                  </a:txBody>
+                  <a:tcPr/>
+                </a:tc>
+                <a:tc>
+                  <a:txBody>
+                    <a:bodyPr/>
+                    <a:lstStyle/>
+                    <a:p>
+                      <a:r>
+                        <a:rPr sz="1200" b="1">
+                          <a:solidFill>
+                            <a:srgbClr val="D68C00"/>
+                          </a:solidFill>
+                        </a:rPr>
+                        <a:t>Provisional</a:t>
+                      </a:r>
+                    </a:p>
+                  </a:txBody>
+                  <a:tcPr/>
+                </a:tc>
+              </a:tr>
+              <a:tr h="400000">
+                <a:tc>
+                  <a:txBody>
+                    <a:bodyPr/>
+                    <a:lstStyle/>
+                    <a:p>
+                      <a:r>
+                        <a:rPr sz="1200" b="0"/>
+                        <a:t>Ownership epochs and fault injection</a:t>
+                      </a:r>
+                    </a:p>
+                  </a:txBody>
+                  <a:tcPr/>
+                </a:tc>
+                <a:tc>
+                  <a:txBody>
+                    <a:bodyPr/>
+                    <a:lstStyle/>
+                    <a:p>
+                      <a:r>
+                        <a:rPr sz="1200" b="0"/>
+                        <a:t>6 fault arms, epoch check on and off</a:t>
+                      </a:r>
+                    </a:p>
+                  </a:txBody>
+                  <a:tcPr/>
+                </a:tc>
+                <a:tc>
+                  <a:txBody>
+                    <a:bodyPr/>
+                    <a:lstStyle/>
+                    <a:p>
+                      <a:r>
+                        <a:rPr sz="1200" b="0"/>
+                        <a:t>RQ4</a:t>
+                      </a:r>
+                    </a:p>
+                  </a:txBody>
+                  <a:tcPr/>
+                </a:tc>
+                <a:tc>
+                  <a:txBody>
+                    <a:bodyPr/>
+                    <a:lstStyle/>
+                    <a:p>
+                      <a:r>
+                        <a:rPr sz="1200" b="1">
+                          <a:solidFill>
+                            <a:srgbClr val="787878"/>
+                          </a:solidFill>
+                        </a:rPr>
+                        <a:t>Needed</a:t>
+                      </a:r>
+                    </a:p>
+                  </a:txBody>
+                  <a:tcPr/>
+                </a:tc>
+              </a:tr>
+              <a:tr h="400000">
+                <a:tc>
+                  <a:txBody>
+                    <a:bodyPr/>
+                    <a:lstStyle/>
+                    <a:p>
+                      <a:r>
+                        <a:rPr sz="1200" b="0"/>
+                        <a:t>Crossing burst size</a:t>
+                      </a:r>
+                    </a:p>
+                  </a:txBody>
+                  <a:tcPr/>
+                </a:tc>
+                <a:tc>
+                  <a:txBody>
+                    <a:bodyPr/>
+                    <a:lstStyle/>
+                    <a:p>
+                      <a:r>
+                        <a:rPr sz="1200" b="0"/>
+                        <a:t>2, 4, 8 simultaneous tracks</a:t>
+                      </a:r>
+                    </a:p>
+                  </a:txBody>
+                  <a:tcPr/>
+                </a:tc>
+                <a:tc>
+                  <a:txBody>
+                    <a:bodyPr/>
+                    <a:lstStyle/>
+                    <a:p>
+                      <a:r>
+                        <a:rPr sz="1200" b="0"/>
+                        <a:t>RQ5</a:t>
+                      </a:r>
+                    </a:p>
+                  </a:txBody>
+                  <a:tcPr/>
+                </a:tc>
+                <a:tc>
+                  <a:txBody>
+                    <a:bodyPr/>
+                    <a:lstStyle/>
+                    <a:p>
+                      <a:r>
+                        <a:rPr sz="1200" b="1">
+                          <a:solidFill>
+                            <a:srgbClr val="1565C0"/>
+                          </a:solidFill>
+                        </a:rPr>
+                        <a:t>Running</a:t>
+                      </a:r>
+                    </a:p>
+                  </a:txBody>
+                  <a:tcPr/>
+                </a:tc>
+              </a:tr>
+              <a:tr h="400000">
+                <a:tc>
+                  <a:txBody>
+                    <a:bodyPr/>
+                    <a:lstStyle/>
+                    <a:p>
+                      <a:r>
+                        <a:rPr sz="1200" b="0"/>
+                        <a:t>Crossing rate</a:t>
+                      </a:r>
+                    </a:p>
+                  </a:txBody>
+                  <a:tcPr/>
+                </a:tc>
+                <a:tc>
+                  <a:txBody>
+                    <a:bodyPr/>
+                    <a:lstStyle/>
+                    <a:p>
+                      <a:r>
+                        <a:rPr sz="1200" b="0"/>
+                        <a:t>oncoming count 2, 4, 8</a:t>
+                      </a:r>
+                    </a:p>
+                  </a:txBody>
+                  <a:tcPr/>
+                </a:tc>
+                <a:tc>
+                  <a:txBody>
+                    <a:bodyPr/>
+                    <a:lstStyle/>
+                    <a:p>
+                      <a:r>
+                        <a:rPr sz="1200" b="0"/>
+                        <a:t>RQ5</a:t>
+                      </a:r>
+                    </a:p>
+                  </a:txBody>
+                  <a:tcPr/>
+                </a:tc>
+                <a:tc>
+                  <a:txBody>
+                    <a:bodyPr/>
+                    <a:lstStyle/>
+                    <a:p>
+                      <a:r>
+                        <a:rPr sz="1200" b="1">
+                          <a:solidFill>
+                            <a:srgbClr val="1565C0"/>
+                          </a:solidFill>
+                        </a:rPr>
+                        <a:t>Running</a:t>
+                      </a:r>
+                    </a:p>
+                  </a:txBody>
+                  <a:tcPr/>
+                </a:tc>
+              </a:tr>
+              <a:tr h="400000">
+                <a:tc>
+                  <a:txBody>
+                    <a:bodyPr/>
+                    <a:lstStyle/>
+                    <a:p>
+                      <a:r>
+                        <a:rPr sz="1200" b="0"/>
+                        <a:t>Backhaul impairment</a:t>
+                      </a:r>
+                    </a:p>
+                  </a:txBody>
+                  <a:tcPr/>
+                </a:tc>
+                <a:tc>
+                  <a:txBody>
+                    <a:bodyPr/>
+                    <a:lstStyle/>
+                    <a:p>
+                      <a:r>
+                        <a:rPr sz="1200" b="0"/>
+                        <a:t>latency, jitter, loss</a:t>
+                      </a:r>
+                    </a:p>
+                  </a:txBody>
+                  <a:tcPr/>
+                </a:tc>
+                <a:tc>
+                  <a:txBody>
+                    <a:bodyPr/>
+                    <a:lstStyle/>
+                    <a:p>
+                      <a:r>
+                        <a:rPr sz="1200" b="0"/>
+                        <a:t>RQ5</a:t>
+                      </a:r>
+                    </a:p>
+                  </a:txBody>
+                  <a:tcPr/>
+                </a:tc>
+                <a:tc>
+                  <a:txBody>
+                    <a:bodyPr/>
+                    <a:lstStyle/>
+                    <a:p>
+                      <a:r>
+                        <a:rPr sz="1200" b="1">
+                          <a:solidFill>
+                            <a:srgbClr val="787878"/>
+                          </a:solidFill>
+                        </a:rPr>
+                        <a:t>Needed</a:t>
+                      </a:r>
+                    </a:p>
+                  </a:txBody>
+                  <a:tcPr/>
+                </a:tc>
+              </a:tr>
+              <a:tr h="400000">
+                <a:tc>
+                  <a:txBody>
+                    <a:bodyPr/>
+                    <a:lstStyle/>
+                    <a:p>
+                      <a:r>
+                        <a:rPr sz="1200" b="0"/>
+                        <a:t>Transport</a:t>
+                      </a:r>
+                    </a:p>
+                  </a:txBody>
+                  <a:tcPr/>
+                </a:tc>
+                <a:tc>
+                  <a:txBody>
+                    <a:bodyPr/>
+                    <a:lstStyle/>
+                    <a:p>
+                      <a:r>
+                        <a:rPr sz="1200" b="0"/>
+                        <a:t>modeled vs real gRPC with netem</a:t>
+                      </a:r>
+                    </a:p>
+                  </a:txBody>
+                  <a:tcPr/>
+                </a:tc>
+                <a:tc>
+                  <a:txBody>
+                    <a:bodyPr/>
+                    <a:lstStyle/>
+                    <a:p>
+                      <a:r>
+                        <a:rPr sz="1200" b="0"/>
+                        <a:t>RQ5</a:t>
+                      </a:r>
+                    </a:p>
+                  </a:txBody>
+                  <a:tcPr/>
+                </a:tc>
+                <a:tc>
+                  <a:txBody>
+                    <a:bodyPr/>
+                    <a:lstStyle/>
+                    <a:p>
+                      <a:r>
+                        <a:rPr sz="1200" b="1">
+                          <a:solidFill>
+                            <a:srgbClr val="787878"/>
+                          </a:solidFill>
+                        </a:rPr>
+                        <a:t>Needed</a:t>
+                      </a:r>
+                    </a:p>
+                  </a:txBody>
+                  <a:tcPr/>
+                </a:tc>
+              </a:tr>
+              <a:tr h="400000">
+                <a:tc>
+                  <a:txBody>
+                    <a:bodyPr/>
+                    <a:lstStyle/>
+                    <a:p>
+                      <a:r>
+                        <a:rPr sz="1200" b="0"/>
+                        <a:t>Association error (unconnected actors)</a:t>
+                      </a:r>
+                    </a:p>
+                  </a:txBody>
+                  <a:tcPr/>
+                </a:tc>
+                <a:tc>
+                  <a:txBody>
+                    <a:bodyPr/>
+                    <a:lstStyle/>
+                    <a:p>
+                      <a:r>
+                        <a:rPr sz="1200" b="0"/>
+                        <a:t>pose error 0 to 2 m, distractors</a:t>
+                      </a:r>
+                    </a:p>
+                  </a:txBody>
+                  <a:tcPr/>
+                </a:tc>
+                <a:tc>
+                  <a:txBody>
+                    <a:bodyPr/>
+                    <a:lstStyle/>
+                    <a:p>
+                      <a:r>
+                        <a:rPr sz="1200" b="0"/>
+                        <a:t>RQ5</a:t>
+                      </a:r>
+                    </a:p>
+                  </a:txBody>
+                  <a:tcPr/>
+                </a:tc>
+                <a:tc>
+                  <a:txBody>
+                    <a:bodyPr/>
+                    <a:lstStyle/>
+                    <a:p>
+                      <a:r>
+                        <a:rPr sz="1200" b="1">
+                          <a:solidFill>
+                            <a:srgbClr val="787878"/>
+                          </a:solidFill>
+                        </a:rPr>
+                        <a:t>Needed</a:t>
+                      </a:r>
+                    </a:p>
+                  </a:txBody>
+                  <a:tcPr/>
+                </a:tc>
+              </a:tr>
+              <a:tr h="400000">
+                <a:tc>
+                  <a:txBody>
+                    <a:bodyPr/>
+                    <a:lstStyle/>
+                    <a:p>
+                      <a:r>
+                        <a:rPr sz="1200" b="0"/>
+                        <a:t>Boundary position</a:t>
+                      </a:r>
+                    </a:p>
+                  </a:txBody>
+                  <a:tcPr/>
+                </a:tc>
+                <a:tc>
+                  <a:txBody>
+                    <a:bodyPr/>
+                    <a:lstStyle/>
+                    <a:p>
+                      <a:r>
+                        <a:rPr sz="1200" b="0"/>
+                        <a:t>25 m sweep along the approach</a:t>
+                      </a:r>
+                    </a:p>
+                  </a:txBody>
+                  <a:tcPr/>
+                </a:tc>
+                <a:tc>
+                  <a:txBody>
+                    <a:bodyPr/>
+                    <a:lstStyle/>
+                    <a:p>
+                      <a:r>
+                        <a:rPr sz="1200" b="0"/>
+                        <a:t>RQ3</a:t>
+                      </a:r>
+                    </a:p>
+                  </a:txBody>
+                  <a:tcPr/>
+                </a:tc>
+                <a:tc>
+                  <a:txBody>
+                    <a:bodyPr/>
+                    <a:lstStyle/>
+                    <a:p>
+                      <a:r>
+                        <a:rPr sz="1200" b="1">
+                          <a:solidFill>
+                            <a:srgbClr val="787878"/>
+                          </a:solidFill>
+                        </a:rPr>
+                        <a:t>Needed</a:t>
+                      </a:r>
+                    </a:p>
+                  </a:txBody>
+                  <a:tcPr/>
+                </a:tc>
+              </a:tr>
+            </a:tbl>
+          </a:graphicData>
+        </a:graphic>
+      </p:graphicFrame>
+      <p:sp>
+        <p:nvSpPr>
+          <p:cNvPr id="5" name="TextBox 4"/>
           <p:cNvSpPr txBox="1"/>
           <p:nvPr/>
         </p:nvSpPr>
         <p:spPr>
           <a:xfrm>
-            <a:off x="640080" y="1097280"/>
-            <a:ext cx="10972800" cy="4800000"/>
+            <a:off x="640080" y="6263640"/>
+            <a:ext cx="10972800" cy="457200"/>
           </a:xfrm>
           <a:prstGeom prst="rect">
             <a:avLst/>
@@ -4875,95 +5039,12 @@
               </a:spcAft>
             </a:pPr>
             <a:r>
-              <a:rPr sz="1400" b="0">
-                <a:solidFill>
-                  <a:srgbClr val="212121"/>
-                </a:solidFill>
-              </a:rPr>
-              <a:t>• Found Sep 3: the sweep harness never set the scenario env contract (oncoming 12 m/s, actor trigger 300 m) that every validated run carried. Bare invocations ran an unvalidated geometry that wedges the ego at the truck; the '30 contact ticks' figure was the sensor's 30-event buffer cap. Controlled pair, same code: bare env 1 episode / 762 raw contacts / no completion; contract env 0 / 0 / completes.</a:t>
-            </a:r>
-          </a:p>
-          <a:p>
-            <a:pPr>
-              <a:spcAft>
-                <a:spcPts val="600"/>
-              </a:spcAft>
-            </a:pPr>
-            <a:r>
-              <a:rPr sz="1400" b="0">
-                <a:solidFill>
-                  <a:srgbClr val="212121"/>
-                </a:solidFill>
-              </a:rPr>
-              <a:t>• Consequence: the v2 sweep is discarded; v1 relative findings (lead-time curve, band over-firing, mirroring null) are provisional until re-measured; the August 'canonical table irreproducible' verdict was the same artifact and is being re-checked with the contract set.</a:t>
-            </a:r>
-          </a:p>
-          <a:p>
-            <a:pPr>
-              <a:spcAft>
-                <a:spcPts val="600"/>
-              </a:spcAft>
-            </a:pPr>
-            <a:r>
-              <a:rPr sz="1400" b="0">
-                <a:solidFill>
-                  <a:srgbClr val="212121"/>
-                </a:solidFill>
-              </a:rPr>
-              <a:t>• Fix: the contract is now runner defaults, so any invocation runs the validated scenario. Frozen traffic lights stay (a real nondeterminism source, not the cause).</a:t>
-            </a:r>
-          </a:p>
-          <a:p>
-            <a:pPr>
-              <a:spcAft>
-                <a:spcPts val="600"/>
-              </a:spcAft>
-            </a:pPr>
-            <a:r>
-              <a:rPr sz="1400" b="0">
-                <a:solidFill>
-                  <a:srgbClr val="212121"/>
-                </a:solidFill>
-              </a:rPr>
-              <a:t>• Queue: v3 re-baseline (6 arms x 10 + 15 burst) running; then the crossing-rate sweep, the lookahead redo, and the canonical reproduction check. Absolute rates stay embargoed until v3 lands clean.</a:t>
-            </a:r>
-          </a:p>
-        </p:txBody>
-      </p:sp>
-      <p:sp>
-        <p:nvSpPr>
-          <p:cNvPr id="5" name="TextBox 4"/>
-          <p:cNvSpPr txBox="1"/>
-          <p:nvPr/>
-        </p:nvSpPr>
-        <p:spPr>
-          <a:xfrm>
-            <a:off x="640080" y="6263640"/>
-            <a:ext cx="10972800" cy="457200"/>
-          </a:xfrm>
-          <a:prstGeom prst="rect">
-            <a:avLst/>
-          </a:prstGeom>
-          <a:noFill/>
-        </p:spPr>
-        <p:txBody>
-          <a:bodyPr wrap="square">
-            <a:spAutoFit/>
-          </a:bodyPr>
-          <a:lstStyle/>
-          <a:p>
-            <a:pPr>
-              <a:spcAft>
-                <a:spcPts val="600"/>
-              </a:spcAft>
-            </a:pPr>
-            <a:r>
-              <a:rPr sz="1300" b="0">
+              <a:rPr sz="1200" b="0">
                 <a:solidFill>
                   <a:srgbClr val="B3A369"/>
                 </a:solidFill>
               </a:rPr>
-              <a:t>Ties to the study: SQ5: no number in the paper cites v1 or v2 absolutes; the evaluation text is written to the corrected scenario.</a:t>
+              <a:t>Answers RQ5  ·  All dimensions are knobs in the harness today; Needed items are staged on the eval side</a:t>
             </a:r>
           </a:p>
         </p:txBody>
@@ -4977,7 +5058,7 @@
 </file>
 
 <file path=ppt/slides/slide15.xml><?xml version="1.0" encoding="utf-8"?>
-<p:sld xmlns:a="http://schemas.openxmlformats.org/drawingml/2006/main" xmlns:r="http://schemas.openxmlformats.org/officeDocument/2006/relationships" xmlns:p="http://schemas.openxmlformats.org/presentationml/2006/main">
+<p:sld xmlns:a="http://schemas.openxmlformats.org/drawingml/2006/main" xmlns:p="http://schemas.openxmlformats.org/presentationml/2006/main" xmlns:r="http://schemas.openxmlformats.org/officeDocument/2006/relationships">
   <p:cSld>
     <p:spTree>
       <p:nvGrpSpPr>
@@ -4985,14 +5066,7 @@
         <p:cNvGrpSpPr/>
         <p:nvPr/>
       </p:nvGrpSpPr>
-      <p:grpSpPr>
-        <a:xfrm>
-          <a:off x="0" y="0"/>
-          <a:ext cx="0" cy="0"/>
-          <a:chOff x="0" y="0"/>
-          <a:chExt cx="0" cy="0"/>
-        </a:xfrm>
-      </p:grpSpPr>
+      <p:grpSpPr/>
       <p:sp>
         <p:nvSpPr>
           <p:cNvPr id="2" name="TextBox 1"/>
@@ -5002,7 +5076,7 @@
         <p:spPr>
           <a:xfrm>
             <a:off x="548640" y="256032"/>
-            <a:ext cx="9692640" cy="777240"/>
+            <a:ext cx="9600000" cy="777240"/>
           </a:xfrm>
           <a:prstGeom prst="rect">
             <a:avLst/>
@@ -5010,18 +5084,304 @@
           <a:noFill/>
         </p:spPr>
         <p:txBody>
-          <a:bodyPr wrap="none">
+          <a:bodyPr wrap="square">
             <a:spAutoFit/>
           </a:bodyPr>
           <a:lstStyle/>
           <a:p>
+            <a:pPr>
+              <a:spcAft>
+                <a:spcPts val="600"/>
+              </a:spcAft>
+            </a:pPr>
             <a:r>
               <a:rPr sz="2800" b="1">
                 <a:solidFill>
                   <a:srgbClr val="1B3A6B"/>
                 </a:solidFill>
               </a:rPr>
-              <a:t>Question to evidence map</a:t>
+              <a:t>Evaluation status</a:t>
+            </a:r>
+          </a:p>
+        </p:txBody>
+      </p:sp>
+      <p:sp>
+        <p:nvSpPr>
+          <p:cNvPr id="3" name="TextBox 2"/>
+          <p:cNvSpPr txBox="1"/>
+          <p:nvPr/>
+        </p:nvSpPr>
+        <p:spPr>
+          <a:xfrm>
+            <a:off x="10200000" y="292608"/>
+            <a:ext cx="1700000" cy="457200"/>
+          </a:xfrm>
+          <a:prstGeom prst="rect">
+            <a:avLst/>
+          </a:prstGeom>
+          <a:noFill/>
+        </p:spPr>
+        <p:txBody>
+          <a:bodyPr wrap="square">
+            <a:spAutoFit/>
+          </a:bodyPr>
+          <a:lstStyle/>
+          <a:p>
+            <a:pPr algn="r">
+              <a:spcAft>
+                <a:spcPts val="600"/>
+              </a:spcAft>
+            </a:pPr>
+            <a:r>
+              <a:rPr sz="1300" b="1">
+                <a:solidFill>
+                  <a:srgbClr val="B3A369"/>
+                </a:solidFill>
+              </a:rPr>
+              <a:t>RQ5</a:t>
+            </a:r>
+          </a:p>
+        </p:txBody>
+      </p:sp>
+      <p:sp>
+        <p:nvSpPr>
+          <p:cNvPr id="4" name="Rounded Rectangle 3"/>
+          <p:cNvSpPr/>
+          <p:nvPr/>
+        </p:nvSpPr>
+        <p:spPr>
+          <a:xfrm>
+            <a:off x="10200000" y="760000"/>
+            <a:ext cx="1450000" cy="330000"/>
+          </a:xfrm>
+          <a:prstGeom prst="roundRect">
+            <a:avLst/>
+          </a:prstGeom>
+          <a:solidFill>
+            <a:srgbClr val="1565C0"/>
+          </a:solidFill>
+          <a:ln>
+            <a:noFill/>
+          </a:ln>
+        </p:spPr>
+        <p:style>
+          <a:lnRef idx="1">
+            <a:schemeClr val="accent1"/>
+          </a:lnRef>
+          <a:fillRef idx="3">
+            <a:schemeClr val="accent1"/>
+          </a:fillRef>
+          <a:effectRef idx="2">
+            <a:schemeClr val="accent1"/>
+          </a:effectRef>
+          <a:fontRef idx="minor">
+            <a:schemeClr val="lt1"/>
+          </a:fontRef>
+        </p:style>
+        <p:txBody>
+          <a:bodyPr rtlCol="0" anchor="ctr"/>
+          <a:lstStyle/>
+          <a:p>
+            <a:pPr algn="ctr"/>
+            <a:r>
+              <a:rPr sz="1100" b="1">
+                <a:solidFill>
+                  <a:srgbClr val="FFFFFF"/>
+                </a:solidFill>
+              </a:rPr>
+              <a:t>Running</a:t>
+            </a:r>
+          </a:p>
+        </p:txBody>
+      </p:sp>
+      <p:sp>
+        <p:nvSpPr>
+          <p:cNvPr id="5" name="TextBox 4"/>
+          <p:cNvSpPr txBox="1"/>
+          <p:nvPr/>
+        </p:nvSpPr>
+        <p:spPr>
+          <a:xfrm>
+            <a:off x="640080" y="1150000"/>
+            <a:ext cx="10972800" cy="3200000"/>
+          </a:xfrm>
+          <a:prstGeom prst="rect">
+            <a:avLst/>
+          </a:prstGeom>
+          <a:noFill/>
+        </p:spPr>
+        <p:txBody>
+          <a:bodyPr wrap="square">
+            <a:spAutoFit/>
+          </a:bodyPr>
+          <a:lstStyle/>
+          <a:p>
+            <a:pPr>
+              <a:spcAft>
+                <a:spcPts val="800"/>
+              </a:spcAft>
+            </a:pPr>
+            <a:r>
+              <a:rPr sz="1600" b="0">
+                <a:solidFill>
+                  <a:srgbClr val="212121"/>
+                </a:solidFill>
+              </a:rPr>
+              <a:t>• Found Sep 3: the sweep harness never set the validated scenario geometry (12 m/s oncoming, 300 m trigger).</a:t>
+            </a:r>
+          </a:p>
+          <a:p>
+            <a:pPr>
+              <a:spcAft>
+                <a:spcPts val="800"/>
+              </a:spcAft>
+            </a:pPr>
+            <a:r>
+              <a:rPr sz="1600" b="0">
+                <a:solidFill>
+                  <a:srgbClr val="212121"/>
+                </a:solidFill>
+              </a:rPr>
+              <a:t>• Same code, bare geometry: 1 collision, no completion. Validated geometry: clean completion.</a:t>
+            </a:r>
+          </a:p>
+          <a:p>
+            <a:pPr>
+              <a:spcAft>
+                <a:spcPts val="800"/>
+              </a:spcAft>
+            </a:pPr>
+            <a:r>
+              <a:rPr sz="1600" b="0">
+                <a:solidFill>
+                  <a:srgbClr val="212121"/>
+                </a:solidFill>
+              </a:rPr>
+              <a:t>• Consequence: the v2 sweep is discarded and v1 relative findings are provisional.</a:t>
+            </a:r>
+          </a:p>
+          <a:p>
+            <a:pPr>
+              <a:spcAft>
+                <a:spcPts val="800"/>
+              </a:spcAft>
+            </a:pPr>
+            <a:r>
+              <a:rPr sz="1600" b="0">
+                <a:solidFill>
+                  <a:srgbClr val="212121"/>
+                </a:solidFill>
+              </a:rPr>
+              <a:t>• Fix: the geometry is now a runner default. The v3 re-baseline is running (6 arms × 10 + 15 burst).</a:t>
+            </a:r>
+          </a:p>
+          <a:p>
+            <a:pPr>
+              <a:spcAft>
+                <a:spcPts val="800"/>
+              </a:spcAft>
+            </a:pPr>
+            <a:r>
+              <a:rPr sz="1600" b="0">
+                <a:solidFill>
+                  <a:srgbClr val="212121"/>
+                </a:solidFill>
+              </a:rPr>
+              <a:t>• Queue after v3: crossing-rate sweep, lookahead redo, canonical reproduction check.</a:t>
+            </a:r>
+          </a:p>
+        </p:txBody>
+      </p:sp>
+      <p:sp>
+        <p:nvSpPr>
+          <p:cNvPr id="6" name="TextBox 5"/>
+          <p:cNvSpPr txBox="1"/>
+          <p:nvPr/>
+        </p:nvSpPr>
+        <p:spPr>
+          <a:xfrm>
+            <a:off x="640080" y="6263640"/>
+            <a:ext cx="10972800" cy="457200"/>
+          </a:xfrm>
+          <a:prstGeom prst="rect">
+            <a:avLst/>
+          </a:prstGeom>
+          <a:noFill/>
+        </p:spPr>
+        <p:txBody>
+          <a:bodyPr wrap="square">
+            <a:spAutoFit/>
+          </a:bodyPr>
+          <a:lstStyle/>
+          <a:p>
+            <a:pPr>
+              <a:spcAft>
+                <a:spcPts val="600"/>
+              </a:spcAft>
+            </a:pPr>
+            <a:r>
+              <a:rPr sz="1200" b="0">
+                <a:solidFill>
+                  <a:srgbClr val="B3A369"/>
+                </a:solidFill>
+              </a:rPr>
+              <a:t>Absolute rates stay embargoed until v3 lands clean  ·  No number in the paper cites v1 or v2 absolutes</a:t>
+            </a:r>
+          </a:p>
+        </p:txBody>
+      </p:sp>
+    </p:spTree>
+  </p:cSld>
+  <p:clrMapOvr>
+    <a:masterClrMapping/>
+  </p:clrMapOvr>
+</p:sld>
+</file>
+
+<file path=ppt/slides/slide16.xml><?xml version="1.0" encoding="utf-8"?>
+<p:sld xmlns:a="http://schemas.openxmlformats.org/drawingml/2006/main" xmlns:p="http://schemas.openxmlformats.org/presentationml/2006/main" xmlns:r="http://schemas.openxmlformats.org/officeDocument/2006/relationships">
+  <p:cSld>
+    <p:spTree>
+      <p:nvGrpSpPr>
+        <p:cNvPr id="1" name=""/>
+        <p:cNvGrpSpPr/>
+        <p:nvPr/>
+      </p:nvGrpSpPr>
+      <p:grpSpPr/>
+      <p:sp>
+        <p:nvSpPr>
+          <p:cNvPr id="2" name="TextBox 1"/>
+          <p:cNvSpPr txBox="1"/>
+          <p:nvPr/>
+        </p:nvSpPr>
+        <p:spPr>
+          <a:xfrm>
+            <a:off x="548640" y="256032"/>
+            <a:ext cx="9600000" cy="777240"/>
+          </a:xfrm>
+          <a:prstGeom prst="rect">
+            <a:avLst/>
+          </a:prstGeom>
+          <a:noFill/>
+        </p:spPr>
+        <p:txBody>
+          <a:bodyPr wrap="square">
+            <a:spAutoFit/>
+          </a:bodyPr>
+          <a:lstStyle/>
+          <a:p>
+            <a:pPr>
+              <a:spcAft>
+                <a:spcPts val="600"/>
+              </a:spcAft>
+            </a:pPr>
+            <a:r>
+              <a:rPr sz="2800" b="1">
+                <a:solidFill>
+                  <a:srgbClr val="1B3A6B"/>
+                </a:solidFill>
+              </a:rPr>
+              <a:t>Research questions and evidence</a:t>
             </a:r>
           </a:p>
         </p:txBody>
@@ -5035,8 +5395,8 @@
           <p:nvPr/>
         </p:nvGraphicFramePr>
         <p:xfrm>
-          <a:off x="731520" y="1234440"/>
-          <a:ext cx="10698480" cy="3840480"/>
+          <a:off x="548640" y="1150000"/>
+          <a:ext cx="11094720" cy="4300000"/>
         </p:xfrm>
         <a:graphic>
           <a:graphicData uri="http://schemas.openxmlformats.org/drawingml/2006/table">
@@ -5045,49 +5405,25 @@
                 <a:tableStyleId>{5C22544A-7EE6-4342-B048-85BDC9FD1C3A}</a:tableStyleId>
               </a:tblPr>
               <a:tblGrid>
-                <a:gridCol w="3108960">
-                  <a:extLst>
-                    <a:ext uri="{9D8B030D-6E8A-4147-A177-3AD203B41FA5}">
-                      <a16:colId xmlns:a16="http://schemas.microsoft.com/office/drawing/2014/main" val="20000"/>
-                    </a:ext>
-                  </a:extLst>
-                </a:gridCol>
-                <a:gridCol w="4023360">
-                  <a:extLst>
-                    <a:ext uri="{9D8B030D-6E8A-4147-A177-3AD203B41FA5}">
-                      <a16:colId xmlns:a16="http://schemas.microsoft.com/office/drawing/2014/main" val="20001"/>
-                    </a:ext>
-                  </a:extLst>
-                </a:gridCol>
-                <a:gridCol w="3566160">
-                  <a:extLst>
-                    <a:ext uri="{9D8B030D-6E8A-4147-A177-3AD203B41FA5}">
-                      <a16:colId xmlns:a16="http://schemas.microsoft.com/office/drawing/2014/main" val="20002"/>
-                    </a:ext>
-                  </a:extLst>
-                </a:gridCol>
+                <a:gridCol w="1900000"/>
+                <a:gridCol w="2500000"/>
+                <a:gridCol w="2700000"/>
+                <a:gridCol w="2700000"/>
+                <a:gridCol w="1294720"/>
               </a:tblGrid>
-              <a:tr h="640080">
+              <a:tr h="716666">
                 <a:tc>
                   <a:txBody>
                     <a:bodyPr/>
                     <a:lstStyle/>
                     <a:p>
                       <a:r>
-                        <a:rPr sz="1300" b="1">
-                          <a:solidFill>
-                            <a:srgbClr val="FFFFFF"/>
-                          </a:solidFill>
-                        </a:rPr>
+                        <a:rPr sz="1100" b="1"/>
                         <a:t>Question</a:t>
                       </a:r>
                     </a:p>
                   </a:txBody>
-                  <a:tcPr>
-                    <a:solidFill>
-                      <a:srgbClr val="1B3A6B"/>
-                    </a:solidFill>
-                  </a:tcPr>
+                  <a:tcPr/>
                 </a:tc>
                 <a:tc>
                   <a:txBody>
@@ -5095,20 +5431,12 @@
                     <a:lstStyle/>
                     <a:p>
                       <a:r>
-                        <a:rPr sz="1300" b="1">
-                          <a:solidFill>
-                            <a:srgbClr val="FFFFFF"/>
-                          </a:solidFill>
-                        </a:rPr>
-                        <a:t>Evidence, today</a:t>
+                        <a:rPr sz="1100" b="1"/>
+                        <a:t>Current answer</a:t>
                       </a:r>
                     </a:p>
                   </a:txBody>
-                  <a:tcPr>
-                    <a:solidFill>
-                      <a:srgbClr val="1B3A6B"/>
-                    </a:solidFill>
-                  </a:tcPr>
+                  <a:tcPr/>
                 </a:tc>
                 <a:tc>
                   <a:txBody>
@@ -5116,48 +5444,12 @@
                     <a:lstStyle/>
                     <a:p>
                       <a:r>
-                        <a:rPr sz="1300" b="1">
-                          <a:solidFill>
-                            <a:srgbClr val="FFFFFF"/>
-                          </a:solidFill>
-                        </a:rPr>
-                        <a:t>Evidence, to run</a:t>
+                        <a:rPr sz="1100" b="1"/>
+                        <a:t>Evidence</a:t>
                       </a:r>
                     </a:p>
                   </a:txBody>
-                  <a:tcPr>
-                    <a:solidFill>
-                      <a:srgbClr val="1B3A6B"/>
-                    </a:solidFill>
-                  </a:tcPr>
-                </a:tc>
-                <a:extLst>
-                  <a:ext uri="{0D108BD9-81ED-4DB2-BD59-A6C34878D82A}">
-                    <a16:rowId xmlns:a16="http://schemas.microsoft.com/office/drawing/2014/main" val="10000"/>
-                  </a:ext>
-                </a:extLst>
-              </a:tr>
-              <a:tr h="640080">
-                <a:tc>
-                  <a:txBody>
-                    <a:bodyPr/>
-                    <a:lstStyle/>
-                    <a:p>
-                      <a:r>
-                        <a:rPr sz="1300" b="0">
-                          <a:solidFill>
-                            <a:srgbClr val="212121"/>
-                          </a:solidFill>
-                        </a:rPr>
-                        <a:t>SQ1 locale size cap</a:t>
-                      </a:r>
-                    </a:p>
-                  </a:txBody>
-                  <a:tcPr>
-                    <a:solidFill>
-                      <a:srgbClr val="EFF2F7"/>
-                    </a:solidFill>
-                  </a:tcPr>
+                  <a:tcPr/>
                 </a:tc>
                 <a:tc>
                   <a:txBody>
@@ -5165,20 +5457,12 @@
                     <a:lstStyle/>
                     <a:p>
                       <a:r>
-                        <a:rPr sz="1300" b="0">
-                          <a:solidFill>
-                            <a:srgbClr val="212121"/>
-                          </a:solidFill>
-                        </a:rPr>
-                        <a:t>canvas sweep: fusion crosses 130 ms between 282 and 400 m at 8 contributors; scoped to our architecture</a:t>
+                        <a:rPr sz="1100" b="1"/>
+                        <a:t>Missing experiment</a:t>
                       </a:r>
                     </a:p>
                   </a:txBody>
-                  <a:tcPr>
-                    <a:solidFill>
-                      <a:srgbClr val="EFF2F7"/>
-                    </a:solidFill>
-                  </a:tcPr>
+                  <a:tcPr/>
                 </a:tc>
                 <a:tc>
                   <a:txBody>
@@ -5186,48 +5470,27 @@
                     <a:lstStyle/>
                     <a:p>
                       <a:r>
-                        <a:rPr sz="1300" b="0">
-                          <a:solidFill>
-                            <a:srgbClr val="212121"/>
-                          </a:solidFill>
-                        </a:rPr>
-                        <a:t>sizing study on measured density traces</a:t>
+                        <a:rPr sz="1100" b="1"/>
+                        <a:t>Status</a:t>
                       </a:r>
                     </a:p>
                   </a:txBody>
-                  <a:tcPr>
-                    <a:solidFill>
-                      <a:srgbClr val="EFF2F7"/>
-                    </a:solidFill>
-                  </a:tcPr>
+                  <a:tcPr/>
                 </a:tc>
-                <a:extLst>
-                  <a:ext uri="{0D108BD9-81ED-4DB2-BD59-A6C34878D82A}">
-                    <a16:rowId xmlns:a16="http://schemas.microsoft.com/office/drawing/2014/main" val="10001"/>
-                  </a:ext>
-                </a:extLst>
               </a:tr>
-              <a:tr h="640080">
+              <a:tr h="716666">
                 <a:tc>
                   <a:txBody>
                     <a:bodyPr/>
                     <a:lstStyle/>
                     <a:p>
                       <a:r>
-                        <a:rPr sz="1300" b="0">
-                          <a:solidFill>
-                            <a:srgbClr val="212121"/>
-                          </a:solidFill>
-                        </a:rPr>
-                        <a:t>SQ2 tracker requirement</a:t>
+                        <a:rPr sz="1100" b="0"/>
+                        <a:t>RQ1 locale size</a:t>
                       </a:r>
                     </a:p>
                   </a:txBody>
-                  <a:tcPr>
-                    <a:solidFill>
-                      <a:srgbClr val="FFFFFF"/>
-                    </a:solidFill>
-                  </a:tcPr>
+                  <a:tcPr/>
                 </a:tc>
                 <a:tc>
                   <a:txBody>
@@ -5235,20 +5498,12 @@
                     <a:lstStyle/>
                     <a:p>
                       <a:r>
-                        <a:rPr sz="1300" b="0">
-                          <a:solidFill>
-                            <a:srgbClr val="212121"/>
-                          </a:solidFill>
-                        </a:rPr>
-                        <a:t>microbench 2.8-9.3x; Kalman snapshot 4/4 collided under acceleration, history 3/4 clean</a:t>
+                        <a:rPr sz="1100" b="0"/>
+                        <a:t>About 300 m for our stack</a:t>
                       </a:r>
                     </a:p>
                   </a:txBody>
-                  <a:tcPr>
-                    <a:solidFill>
-                      <a:srgbClr val="FFFFFF"/>
-                    </a:solidFill>
-                  </a:tcPr>
+                  <a:tcPr/>
                 </a:tc>
                 <a:tc>
                   <a:txBody>
@@ -5256,48 +5511,12 @@
                     <a:lstStyle/>
                     <a:p>
                       <a:r>
-                        <a:rPr sz="1300" b="0">
-                          <a:solidFill>
-                            <a:srgbClr val="212121"/>
-                          </a:solidFill>
-                        </a:rPr>
-                        <a:t>post-handoff minADE/minFDE (T9)</a:t>
+                        <a:rPr sz="1100" b="0"/>
+                        <a:t>canvas sweep, 282 to 400 m at 8 contributors</a:t>
                       </a:r>
                     </a:p>
                   </a:txBody>
-                  <a:tcPr>
-                    <a:solidFill>
-                      <a:srgbClr val="FFFFFF"/>
-                    </a:solidFill>
-                  </a:tcPr>
-                </a:tc>
-                <a:extLst>
-                  <a:ext uri="{0D108BD9-81ED-4DB2-BD59-A6C34878D82A}">
-                    <a16:rowId xmlns:a16="http://schemas.microsoft.com/office/drawing/2014/main" val="10002"/>
-                  </a:ext>
-                </a:extLst>
-              </a:tr>
-              <a:tr h="640080">
-                <a:tc>
-                  <a:txBody>
-                    <a:bodyPr/>
-                    <a:lstStyle/>
-                    <a:p>
-                      <a:r>
-                        <a:rPr sz="1300" b="0">
-                          <a:solidFill>
-                            <a:srgbClr val="212121"/>
-                          </a:solidFill>
-                        </a:rPr>
-                        <a:t>SQ3 boundary losses</a:t>
-                      </a:r>
-                    </a:p>
-                  </a:txBody>
-                  <a:tcPr>
-                    <a:solidFill>
-                      <a:srgbClr val="EFF2F7"/>
-                    </a:solidFill>
-                  </a:tcPr>
+                  <a:tcPr/>
                 </a:tc>
                 <a:tc>
                   <a:txBody>
@@ -5305,20 +5524,12 @@
                     <a:lstStyle/>
                     <a:p>
                       <a:r>
-                        <a:rPr sz="1300" b="0">
-                          <a:solidFill>
-                            <a:srgbClr val="212121"/>
-                          </a:solidFill>
-                        </a:rPr>
-                        <a:t>v1 lead-time curve and over-firing: PROVISIONAL (unvalidated geometry)</a:t>
+                        <a:rPr sz="1100" b="0"/>
+                        <a:t>sizing study on density traces</a:t>
                       </a:r>
                     </a:p>
                   </a:txBody>
-                  <a:tcPr>
-                    <a:solidFill>
-                      <a:srgbClr val="EFF2F7"/>
-                    </a:solidFill>
-                  </a:tcPr>
+                  <a:tcPr/>
                 </a:tc>
                 <a:tc>
                   <a:txBody>
@@ -5326,48 +5537,31 @@
                     <a:lstStyle/>
                     <a:p>
                       <a:r>
-                        <a:rPr sz="1300" b="0">
+                        <a:rPr sz="1100" b="1">
                           <a:solidFill>
-                            <a:srgbClr val="212121"/>
+                            <a:srgbClr val="2E7D32"/>
                           </a:solidFill>
                         </a:rPr>
-                        <a:t>v3 re-baseline (running); boundary-position sweep; V2X-Seq trigger study (T11)</a:t>
+                        <a:t>Done</a:t>
                       </a:r>
                     </a:p>
                   </a:txBody>
-                  <a:tcPr>
-                    <a:solidFill>
-                      <a:srgbClr val="EFF2F7"/>
-                    </a:solidFill>
-                  </a:tcPr>
+                  <a:tcPr/>
                 </a:tc>
-                <a:extLst>
-                  <a:ext uri="{0D108BD9-81ED-4DB2-BD59-A6C34878D82A}">
-                    <a16:rowId xmlns:a16="http://schemas.microsoft.com/office/drawing/2014/main" val="10003"/>
-                  </a:ext>
-                </a:extLst>
               </a:tr>
-              <a:tr h="640080">
+              <a:tr h="716666">
                 <a:tc>
                   <a:txBody>
                     <a:bodyPr/>
                     <a:lstStyle/>
                     <a:p>
                       <a:r>
-                        <a:rPr sz="1300" b="0">
-                          <a:solidFill>
-                            <a:srgbClr val="212121"/>
-                          </a:solidFill>
-                        </a:rPr>
-                        <a:t>SQ4 envelope across handoff</a:t>
+                        <a:rPr sz="1100" b="0"/>
+                        <a:t>RQ2 tracking state</a:t>
                       </a:r>
                     </a:p>
                   </a:txBody>
-                  <a:tcPr>
-                    <a:solidFill>
-                      <a:srgbClr val="FFFFFF"/>
-                    </a:solidFill>
-                  </a:tcPr>
+                  <a:tcPr/>
                 </a:tc>
                 <a:tc>
                   <a:txBody>
@@ -5375,20 +5569,12 @@
                     <a:lstStyle/>
                     <a:p>
                       <a:r>
-                        <a:rPr sz="1300" b="0">
-                          <a:solidFill>
-                            <a:srgbClr val="212121"/>
-                          </a:solidFill>
-                        </a:rPr>
-                        <a:t>8-scenario ownership fault microeval passes; refresh and mirror null results provisional</a:t>
+                        <a:rPr sz="1100" b="0"/>
+                        <a:t>Observation history, not a snapshot</a:t>
                       </a:r>
                     </a:p>
                   </a:txBody>
-                  <a:tcPr>
-                    <a:solidFill>
-                      <a:srgbClr val="FFFFFF"/>
-                    </a:solidFill>
-                  </a:tcPr>
+                  <a:tcPr/>
                 </a:tc>
                 <a:tc>
                   <a:txBody>
@@ -5396,48 +5582,12 @@
                     <a:lstStyle/>
                     <a:p>
                       <a:r>
-                        <a:rPr sz="1300" b="0">
-                          <a:solidFill>
-                            <a:srgbClr val="212121"/>
-                          </a:solidFill>
-                        </a:rPr>
-                        <a:t>live fault arms with fencing on/off (T7); computed trigger vs fixed leads (v3)</a:t>
+                        <a:rPr sz="1100" b="0"/>
+                        <a:t>microbench 2.8 to 9.3×; acceleration 4/4 vs 3/4</a:t>
                       </a:r>
                     </a:p>
                   </a:txBody>
-                  <a:tcPr>
-                    <a:solidFill>
-                      <a:srgbClr val="FFFFFF"/>
-                    </a:solidFill>
-                  </a:tcPr>
-                </a:tc>
-                <a:extLst>
-                  <a:ext uri="{0D108BD9-81ED-4DB2-BD59-A6C34878D82A}">
-                    <a16:rowId xmlns:a16="http://schemas.microsoft.com/office/drawing/2014/main" val="10004"/>
-                  </a:ext>
-                </a:extLst>
-              </a:tr>
-              <a:tr h="640080">
-                <a:tc>
-                  <a:txBody>
-                    <a:bodyPr/>
-                    <a:lstStyle/>
-                    <a:p>
-                      <a:r>
-                        <a:rPr sz="1300" b="0">
-                          <a:solidFill>
-                            <a:srgbClr val="212121"/>
-                          </a:solidFill>
-                        </a:rPr>
-                        <a:t>SQ5 feasible region</a:t>
-                      </a:r>
-                    </a:p>
-                  </a:txBody>
-                  <a:tcPr>
-                    <a:solidFill>
-                      <a:srgbClr val="EFF2F7"/>
-                    </a:solidFill>
-                  </a:tcPr>
+                  <a:tcPr/>
                 </a:tc>
                 <a:tc>
                   <a:txBody>
@@ -5445,20 +5595,12 @@
                     <a:lstStyle/>
                     <a:p>
                       <a:r>
-                        <a:rPr sz="1300" b="0">
-                          <a:solidFill>
-                            <a:srgbClr val="212121"/>
-                          </a:solidFill>
-                        </a:rPr>
-                        <a:t>harness and knobs; v2 sweep discarded (missing env contract)</a:t>
+                        <a:rPr sz="1100" b="0"/>
+                        <a:t>post-handoff minADE and minFDE</a:t>
                       </a:r>
                     </a:p>
                   </a:txBody>
-                  <a:tcPr>
-                    <a:solidFill>
-                      <a:srgbClr val="EFF2F7"/>
-                    </a:solidFill>
-                  </a:tcPr>
+                  <a:tcPr/>
                 </a:tc>
                 <a:tc>
                   <a:txBody>
@@ -5466,31 +5608,273 @@
                     <a:lstStyle/>
                     <a:p>
                       <a:r>
-                        <a:rPr sz="1300" b="0">
+                        <a:rPr sz="1100" b="1">
                           <a:solidFill>
-                            <a:srgbClr val="212121"/>
+                            <a:srgbClr val="2E7D32"/>
                           </a:solidFill>
                         </a:rPr>
-                        <a:t>burst and crossing-rate sweep (q5); real transport (T8); association (T10)</a:t>
+                        <a:t>Done</a:t>
                       </a:r>
                     </a:p>
                   </a:txBody>
-                  <a:tcPr>
-                    <a:solidFill>
-                      <a:srgbClr val="EFF2F7"/>
-                    </a:solidFill>
-                  </a:tcPr>
+                  <a:tcPr/>
                 </a:tc>
-                <a:extLst>
-                  <a:ext uri="{0D108BD9-81ED-4DB2-BD59-A6C34878D82A}">
-                    <a16:rowId xmlns:a16="http://schemas.microsoft.com/office/drawing/2014/main" val="10005"/>
-                  </a:ext>
-                </a:extLst>
+              </a:tr>
+              <a:tr h="716666">
+                <a:tc>
+                  <a:txBody>
+                    <a:bodyPr/>
+                    <a:lstStyle/>
+                    <a:p>
+                      <a:r>
+                        <a:rPr sz="1100" b="0"/>
+                        <a:t>RQ3 where mechanisms fail</a:t>
+                      </a:r>
+                    </a:p>
+                  </a:txBody>
+                  <a:tcPr/>
+                </a:tc>
+                <a:tc>
+                  <a:txBody>
+                    <a:bodyPr/>
+                    <a:lstStyle/>
+                    <a:p>
+                      <a:r>
+                        <a:rPr sz="1100" b="0"/>
+                        <a:t>Late transfer and snapshots fail on approach segments</a:t>
+                      </a:r>
+                    </a:p>
+                  </a:txBody>
+                  <a:tcPr/>
+                </a:tc>
+                <a:tc>
+                  <a:txBody>
+                    <a:bodyPr/>
+                    <a:lstStyle/>
+                    <a:p>
+                      <a:r>
+                        <a:rPr sz="1100" b="0"/>
+                        <a:t>lead-time sweep (unvalidated geometry)</a:t>
+                      </a:r>
+                    </a:p>
+                  </a:txBody>
+                  <a:tcPr/>
+                </a:tc>
+                <a:tc>
+                  <a:txBody>
+                    <a:bodyPr/>
+                    <a:lstStyle/>
+                    <a:p>
+                      <a:r>
+                        <a:rPr sz="1100" b="0"/>
+                        <a:t>v3 re-baseline; boundary-position sweep; V2X-Seq trigger study</a:t>
+                      </a:r>
+                    </a:p>
+                  </a:txBody>
+                  <a:tcPr/>
+                </a:tc>
+                <a:tc>
+                  <a:txBody>
+                    <a:bodyPr/>
+                    <a:lstStyle/>
+                    <a:p>
+                      <a:r>
+                        <a:rPr sz="1100" b="1">
+                          <a:solidFill>
+                            <a:srgbClr val="D68C00"/>
+                          </a:solidFill>
+                        </a:rPr>
+                        <a:t>Provisional</a:t>
+                      </a:r>
+                    </a:p>
+                  </a:txBody>
+                  <a:tcPr/>
+                </a:tc>
+              </a:tr>
+              <a:tr h="716666">
+                <a:tc>
+                  <a:txBody>
+                    <a:bodyPr/>
+                    <a:lstStyle/>
+                    <a:p>
+                      <a:r>
+                        <a:rPr sz="1100" b="0"/>
+                        <a:t>RQ4 freshness through transfer</a:t>
+                      </a:r>
+                    </a:p>
+                  </a:txBody>
+                  <a:tcPr/>
+                </a:tc>
+                <a:tc>
+                  <a:txBody>
+                    <a:bodyPr/>
+                    <a:lstStyle/>
+                    <a:p>
+                      <a:r>
+                        <a:rPr sz="1100" b="0"/>
+                        <a:t>Design meets it; live measurement pending</a:t>
+                      </a:r>
+                    </a:p>
+                  </a:txBody>
+                  <a:tcPr/>
+                </a:tc>
+                <a:tc>
+                  <a:txBody>
+                    <a:bodyPr/>
+                    <a:lstStyle/>
+                    <a:p>
+                      <a:r>
+                        <a:rPr sz="1100" b="0"/>
+                        <a:t>age chain; 8-scenario fault microeval</a:t>
+                      </a:r>
+                    </a:p>
+                  </a:txBody>
+                  <a:tcPr/>
+                </a:tc>
+                <a:tc>
+                  <a:txBody>
+                    <a:bodyPr/>
+                    <a:lstStyle/>
+                    <a:p>
+                      <a:r>
+                        <a:rPr sz="1100" b="0"/>
+                        <a:t>computed trigger vs fixed leads; live fault arms</a:t>
+                      </a:r>
+                    </a:p>
+                  </a:txBody>
+                  <a:tcPr/>
+                </a:tc>
+                <a:tc>
+                  <a:txBody>
+                    <a:bodyPr/>
+                    <a:lstStyle/>
+                    <a:p>
+                      <a:r>
+                        <a:rPr sz="1100" b="1">
+                          <a:solidFill>
+                            <a:srgbClr val="1565C0"/>
+                          </a:solidFill>
+                        </a:rPr>
+                        <a:t>Running</a:t>
+                      </a:r>
+                    </a:p>
+                  </a:txBody>
+                  <a:tcPr/>
+                </a:tc>
+              </a:tr>
+              <a:tr h="716670">
+                <a:tc>
+                  <a:txBody>
+                    <a:bodyPr/>
+                    <a:lstStyle/>
+                    <a:p>
+                      <a:r>
+                        <a:rPr sz="1100" b="0"/>
+                        <a:t>RQ5 feasible region</a:t>
+                      </a:r>
+                    </a:p>
+                  </a:txBody>
+                  <a:tcPr/>
+                </a:tc>
+                <a:tc>
+                  <a:txBody>
+                    <a:bodyPr/>
+                    <a:lstStyle/>
+                    <a:p>
+                      <a:r>
+                        <a:rPr sz="1100" b="0"/>
+                        <a:t>Unknown until the corrected sweeps land</a:t>
+                      </a:r>
+                    </a:p>
+                  </a:txBody>
+                  <a:tcPr/>
+                </a:tc>
+                <a:tc>
+                  <a:txBody>
+                    <a:bodyPr/>
+                    <a:lstStyle/>
+                    <a:p>
+                      <a:r>
+                        <a:rPr sz="1100" b="0"/>
+                        <a:t>harness and knobs</a:t>
+                      </a:r>
+                    </a:p>
+                  </a:txBody>
+                  <a:tcPr/>
+                </a:tc>
+                <a:tc>
+                  <a:txBody>
+                    <a:bodyPr/>
+                    <a:lstStyle/>
+                    <a:p>
+                      <a:r>
+                        <a:rPr sz="1100" b="0"/>
+                        <a:t>burst and crossing-rate sweep; real transport; association</a:t>
+                      </a:r>
+                    </a:p>
+                  </a:txBody>
+                  <a:tcPr/>
+                </a:tc>
+                <a:tc>
+                  <a:txBody>
+                    <a:bodyPr/>
+                    <a:lstStyle/>
+                    <a:p>
+                      <a:r>
+                        <a:rPr sz="1100" b="1">
+                          <a:solidFill>
+                            <a:srgbClr val="1565C0"/>
+                          </a:solidFill>
+                        </a:rPr>
+                        <a:t>Running</a:t>
+                      </a:r>
+                    </a:p>
+                  </a:txBody>
+                  <a:tcPr/>
+                </a:tc>
               </a:tr>
             </a:tbl>
           </a:graphicData>
         </a:graphic>
       </p:graphicFrame>
+      <p:sp>
+        <p:nvSpPr>
+          <p:cNvPr id="4" name="TextBox 3"/>
+          <p:cNvSpPr txBox="1"/>
+          <p:nvPr/>
+        </p:nvSpPr>
+        <p:spPr>
+          <a:xfrm>
+            <a:off x="640080" y="6263640"/>
+            <a:ext cx="10972800" cy="457200"/>
+          </a:xfrm>
+          <a:prstGeom prst="rect">
+            <a:avLst/>
+          </a:prstGeom>
+          <a:noFill/>
+        </p:spPr>
+        <p:txBody>
+          <a:bodyPr wrap="square">
+            <a:spAutoFit/>
+          </a:bodyPr>
+          <a:lstStyle/>
+          <a:p>
+            <a:pPr>
+              <a:spcAft>
+                <a:spcPts val="600"/>
+              </a:spcAft>
+            </a:pPr>
+            <a:r>
+              <a:rPr sz="1200" b="0">
+                <a:solidFill>
+                  <a:srgbClr val="B3A369"/>
+                </a:solidFill>
+              </a:rPr>
+              <a:t>Done = validated evidence in hand  ·  Provisional = measured on an unvalidated geometry  ·  Running = in the queue  ·  Needed = staged</a:t>
+            </a:r>
+          </a:p>
+        </p:txBody>
+      </p:sp>
     </p:spTree>
   </p:cSld>
   <p:clrMapOvr>
@@ -5500,7 +5884,7 @@
 </file>
 
 <file path=ppt/slides/slide2.xml><?xml version="1.0" encoding="utf-8"?>
-<p:sld xmlns:a="http://schemas.openxmlformats.org/drawingml/2006/main" xmlns:r="http://schemas.openxmlformats.org/officeDocument/2006/relationships" xmlns:p="http://schemas.openxmlformats.org/presentationml/2006/main">
+<p:sld xmlns:a="http://schemas.openxmlformats.org/drawingml/2006/main" xmlns:p="http://schemas.openxmlformats.org/presentationml/2006/main" xmlns:r="http://schemas.openxmlformats.org/officeDocument/2006/relationships">
   <p:cSld>
     <p:spTree>
       <p:nvGrpSpPr>
@@ -5508,14 +5892,7 @@
         <p:cNvGrpSpPr/>
         <p:nvPr/>
       </p:nvGrpSpPr>
-      <p:grpSpPr>
-        <a:xfrm>
-          <a:off x="0" y="0"/>
-          <a:ext cx="0" cy="0"/>
-          <a:chOff x="0" y="0"/>
-          <a:chExt cx="0" cy="0"/>
-        </a:xfrm>
-      </p:grpSpPr>
+      <p:grpSpPr/>
       <p:sp>
         <p:nvSpPr>
           <p:cNvPr id="2" name="TextBox 1"/>
@@ -5525,7 +5902,7 @@
         <p:spPr>
           <a:xfrm>
             <a:off x="548640" y="256032"/>
-            <a:ext cx="9692640" cy="777240"/>
+            <a:ext cx="9600000" cy="777240"/>
           </a:xfrm>
           <a:prstGeom prst="rect">
             <a:avLst/>
@@ -5533,18 +5910,23 @@
           <a:noFill/>
         </p:spPr>
         <p:txBody>
-          <a:bodyPr wrap="none">
+          <a:bodyPr wrap="square">
             <a:spAutoFit/>
           </a:bodyPr>
           <a:lstStyle/>
           <a:p>
+            <a:pPr>
+              <a:spcAft>
+                <a:spcPts val="600"/>
+              </a:spcAft>
+            </a:pPr>
             <a:r>
               <a:rPr sz="2800" b="1">
                 <a:solidFill>
                   <a:srgbClr val="1B3A6B"/>
                 </a:solidFill>
               </a:rPr>
-              <a:t>What we want to study</a:t>
+              <a:t>Claim being tested</a:t>
             </a:r>
           </a:p>
         </p:txBody>
@@ -5557,8 +5939,8 @@
         </p:nvSpPr>
         <p:spPr>
           <a:xfrm>
-            <a:off x="731520" y="1234440"/>
-            <a:ext cx="10789920" cy="3026470"/>
+            <a:off x="640080" y="1150000"/>
+            <a:ext cx="10972800" cy="2000000"/>
           </a:xfrm>
           <a:prstGeom prst="rect">
             <a:avLst/>
@@ -5573,196 +5955,99 @@
           <a:p>
             <a:pPr>
               <a:spcAft>
-                <a:spcPts val="1400"/>
-              </a:spcAft>
-            </a:pPr>
-            <a:r>
-              <a:rPr sz="1800" b="1" dirty="0">
+                <a:spcPts val="800"/>
+              </a:spcAft>
+            </a:pPr>
+            <a:r>
+              <a:rPr sz="1600" b="0">
+                <a:solidFill>
+                  <a:srgbClr val="212121"/>
+                </a:solidFill>
+              </a:rPr>
+              <a:t>• Locale-scaled cooperative prediction must migrate per-track temporal state before actor ownership changes.</a:t>
+            </a:r>
+          </a:p>
+          <a:p>
+            <a:pPr>
+              <a:spcAft>
+                <a:spcPts val="800"/>
+              </a:spcAft>
+            </a:pPr>
+            <a:r>
+              <a:rPr sz="1600" b="0">
+                <a:solidFill>
+                  <a:srgbClr val="212121"/>
+                </a:solidFill>
+              </a:rPr>
+              <a:t>• Otherwise the destination suffers a planner-visible cold start.</a:t>
+            </a:r>
+          </a:p>
+          <a:p>
+            <a:pPr>
+              <a:spcAft>
+                <a:spcPts val="800"/>
+              </a:spcAft>
+            </a:pPr>
+            <a:r>
+              <a:rPr sz="1600" b="0">
+                <a:solidFill>
+                  <a:srgbClr val="212121"/>
+                </a:solidFill>
+              </a:rPr>
+              <a:t>• Chain: bounded locale size → frequent crossings → history-dependent tracking → lost history → cold start.</a:t>
+            </a:r>
+          </a:p>
+          <a:p>
+            <a:pPr>
+              <a:spcAft>
+                <a:spcPts val="800"/>
+              </a:spcAft>
+            </a:pPr>
+            <a:r>
+              <a:rPr sz="1600" b="0">
+                <a:solidFill>
+                  <a:srgbClr val="212121"/>
+                </a:solidFill>
+              </a:rPr>
+              <a:t>• Khonsu moves the state on the service's own forecast, before the crossing, with one current owner per track.</a:t>
+            </a:r>
+          </a:p>
+        </p:txBody>
+      </p:sp>
+      <p:sp>
+        <p:nvSpPr>
+          <p:cNvPr id="4" name="TextBox 3"/>
+          <p:cNvSpPr txBox="1"/>
+          <p:nvPr/>
+        </p:nvSpPr>
+        <p:spPr>
+          <a:xfrm>
+            <a:off x="640080" y="6263640"/>
+            <a:ext cx="10972800" cy="457200"/>
+          </a:xfrm>
+          <a:prstGeom prst="rect">
+            <a:avLst/>
+          </a:prstGeom>
+          <a:noFill/>
+        </p:spPr>
+        <p:txBody>
+          <a:bodyPr wrap="square">
+            <a:spAutoFit/>
+          </a:bodyPr>
+          <a:lstStyle/>
+          <a:p>
+            <a:pPr>
+              <a:spcAft>
+                <a:spcPts val="600"/>
+              </a:spcAft>
+            </a:pPr>
+            <a:r>
+              <a:rPr sz="1200" b="0">
                 <a:solidFill>
                   <a:srgbClr val="B3A369"/>
                 </a:solidFill>
               </a:rPr>
-              <a:t>SQ1  </a:t>
-            </a:r>
-            <a:r>
-              <a:rPr sz="1800" dirty="0">
-                <a:solidFill>
-                  <a:srgbClr val="212121"/>
-                </a:solidFill>
-              </a:rPr>
-              <a:t>How large can one locale be before the edge GPU misses </a:t>
-            </a:r>
-            <a:r>
-              <a:rPr lang="en-US" sz="1800" dirty="0">
-                <a:solidFill>
-                  <a:srgbClr val="212121"/>
-                </a:solidFill>
-              </a:rPr>
-              <a:t>a</a:t>
-            </a:r>
-            <a:r>
-              <a:rPr sz="1800" dirty="0">
-                <a:solidFill>
-                  <a:srgbClr val="212121"/>
-                </a:solidFill>
-              </a:rPr>
-              <a:t> deadline, </a:t>
-            </a:r>
-            <a:r>
-              <a:rPr lang="en-US" sz="1800" dirty="0">
-                <a:solidFill>
-                  <a:srgbClr val="212121"/>
-                </a:solidFill>
-              </a:rPr>
-              <a:t>and how do we solve </a:t>
-            </a:r>
-            <a:r>
-              <a:rPr sz="1800" dirty="0">
-                <a:solidFill>
-                  <a:srgbClr val="212121"/>
-                </a:solidFill>
-              </a:rPr>
-              <a:t>metropolitan deployment?</a:t>
-            </a:r>
-          </a:p>
-          <a:p>
-            <a:pPr>
-              <a:spcAft>
-                <a:spcPts val="1400"/>
-              </a:spcAft>
-            </a:pPr>
-            <a:r>
-              <a:rPr sz="1800" b="1" dirty="0">
-                <a:solidFill>
-                  <a:srgbClr val="B3A369"/>
-                </a:solidFill>
-              </a:rPr>
-              <a:t>SQ2  </a:t>
-            </a:r>
-            <a:r>
-              <a:rPr sz="1800" dirty="0">
-                <a:solidFill>
-                  <a:srgbClr val="212121"/>
-                </a:solidFill>
-              </a:rPr>
-              <a:t>What tracker does the service need under realistic vehicle motion, and what does a Kalman filter miss?</a:t>
-            </a:r>
-          </a:p>
-          <a:p>
-            <a:pPr>
-              <a:spcAft>
-                <a:spcPts val="1400"/>
-              </a:spcAft>
-            </a:pPr>
-            <a:r>
-              <a:rPr sz="1800" b="1" dirty="0">
-                <a:solidFill>
-                  <a:srgbClr val="B3A369"/>
-                </a:solidFill>
-              </a:rPr>
-              <a:t>SQ3  </a:t>
-            </a:r>
-            <a:r>
-              <a:rPr sz="1800" dirty="0">
-                <a:solidFill>
-                  <a:srgbClr val="212121"/>
-                </a:solidFill>
-              </a:rPr>
-              <a:t>Where do conflicts happen relative to locale boundaries, and </a:t>
-            </a:r>
-            <a:r>
-              <a:rPr lang="en-US" sz="1800" dirty="0">
-                <a:solidFill>
-                  <a:srgbClr val="212121"/>
-                </a:solidFill>
-              </a:rPr>
-              <a:t>where</a:t>
-            </a:r>
-            <a:r>
-              <a:rPr sz="1800" dirty="0">
-                <a:solidFill>
-                  <a:srgbClr val="212121"/>
-                </a:solidFill>
-              </a:rPr>
-              <a:t> do existing transfer baselines </a:t>
-            </a:r>
-            <a:r>
-              <a:rPr lang="en-US" sz="1800" dirty="0">
-                <a:solidFill>
-                  <a:srgbClr val="212121"/>
-                </a:solidFill>
-              </a:rPr>
-              <a:t>succeed and fail</a:t>
-            </a:r>
-            <a:r>
-              <a:rPr sz="1800" dirty="0">
-                <a:solidFill>
-                  <a:srgbClr val="212121"/>
-                </a:solidFill>
-              </a:rPr>
-              <a:t>?</a:t>
-            </a:r>
-          </a:p>
-          <a:p>
-            <a:pPr>
-              <a:spcAft>
-                <a:spcPts val="1400"/>
-              </a:spcAft>
-            </a:pPr>
-            <a:r>
-              <a:rPr sz="1800" b="1" dirty="0">
-                <a:solidFill>
-                  <a:srgbClr val="B3A369"/>
-                </a:solidFill>
-              </a:rPr>
-              <a:t>SQ4  </a:t>
-            </a:r>
-            <a:r>
-              <a:rPr sz="1800" dirty="0">
-                <a:solidFill>
-                  <a:srgbClr val="212121"/>
-                </a:solidFill>
-              </a:rPr>
-              <a:t>Can the measured safety envelope (220-450 </a:t>
-            </a:r>
-            <a:r>
-              <a:rPr sz="1800" dirty="0" err="1">
-                <a:solidFill>
-                  <a:srgbClr val="212121"/>
-                </a:solidFill>
-              </a:rPr>
-              <a:t>ms</a:t>
-            </a:r>
-            <a:r>
-              <a:rPr sz="1800" dirty="0">
-                <a:solidFill>
-                  <a:srgbClr val="212121"/>
-                </a:solidFill>
-              </a:rPr>
-              <a:t> per maneuver) hold through an ownership handoff, and with which mechanism?</a:t>
-            </a:r>
-          </a:p>
-          <a:p>
-            <a:pPr>
-              <a:spcAft>
-                <a:spcPts val="1400"/>
-              </a:spcAft>
-            </a:pPr>
-            <a:r>
-              <a:rPr sz="1800" b="1" dirty="0">
-                <a:solidFill>
-                  <a:srgbClr val="B3A369"/>
-                </a:solidFill>
-              </a:rPr>
-              <a:t>SQ5  </a:t>
-            </a:r>
-            <a:r>
-              <a:rPr sz="1800" dirty="0">
-                <a:solidFill>
-                  <a:srgbClr val="212121"/>
-                </a:solidFill>
-              </a:rPr>
-              <a:t>Which design knobs govern the handoff, and over what crossing load does the guarantee remain feasible?</a:t>
+              <a:t>Thesis sentence for the NSDI paper; every following slide tests one link of the chain.</a:t>
             </a:r>
           </a:p>
         </p:txBody>
@@ -5776,7 +6061,7 @@
 </file>
 
 <file path=ppt/slides/slide3.xml><?xml version="1.0" encoding="utf-8"?>
-<p:sld xmlns:a="http://schemas.openxmlformats.org/drawingml/2006/main" xmlns:r="http://schemas.openxmlformats.org/officeDocument/2006/relationships" xmlns:p="http://schemas.openxmlformats.org/presentationml/2006/main">
+<p:sld xmlns:a="http://schemas.openxmlformats.org/drawingml/2006/main" xmlns:p="http://schemas.openxmlformats.org/presentationml/2006/main" xmlns:r="http://schemas.openxmlformats.org/officeDocument/2006/relationships">
   <p:cSld>
     <p:spTree>
       <p:nvGrpSpPr>
@@ -5784,14 +6069,7 @@
         <p:cNvGrpSpPr/>
         <p:nvPr/>
       </p:nvGrpSpPr>
-      <p:grpSpPr>
-        <a:xfrm>
-          <a:off x="0" y="0"/>
-          <a:ext cx="0" cy="0"/>
-          <a:chOff x="0" y="0"/>
-          <a:chExt cx="0" cy="0"/>
-        </a:xfrm>
-      </p:grpSpPr>
+      <p:grpSpPr/>
       <p:sp>
         <p:nvSpPr>
           <p:cNvPr id="2" name="TextBox 1"/>
@@ -5801,7 +6079,7 @@
         <p:spPr>
           <a:xfrm>
             <a:off x="548640" y="256032"/>
-            <a:ext cx="9692640" cy="777240"/>
+            <a:ext cx="9600000" cy="777240"/>
           </a:xfrm>
           <a:prstGeom prst="rect">
             <a:avLst/>
@@ -5809,18 +6087,23 @@
           <a:noFill/>
         </p:spPr>
         <p:txBody>
-          <a:bodyPr wrap="none">
+          <a:bodyPr wrap="square">
             <a:spAutoFit/>
           </a:bodyPr>
           <a:lstStyle/>
           <a:p>
+            <a:pPr>
+              <a:spcAft>
+                <a:spcPts val="600"/>
+              </a:spcAft>
+            </a:pPr>
             <a:r>
               <a:rPr sz="2800" b="1">
                 <a:solidFill>
                   <a:srgbClr val="1B3A6B"/>
                 </a:solidFill>
               </a:rPr>
-              <a:t>One locale cannot cover a city: the deadline caps the canvas</a:t>
+              <a:t>Research Questions</a:t>
             </a:r>
           </a:p>
         </p:txBody>
@@ -5833,8 +6116,8 @@
         </p:nvSpPr>
         <p:spPr>
           <a:xfrm>
-            <a:off x="9692640" y="292608"/>
-            <a:ext cx="2286000" cy="457200"/>
+            <a:off x="640080" y="1150000"/>
+            <a:ext cx="10972800" cy="3200000"/>
           </a:xfrm>
           <a:prstGeom prst="rect">
             <a:avLst/>
@@ -5842,19 +6125,83 @@
           <a:noFill/>
         </p:spPr>
         <p:txBody>
-          <a:bodyPr wrap="none">
+          <a:bodyPr wrap="square">
             <a:spAutoFit/>
           </a:bodyPr>
           <a:lstStyle/>
           <a:p>
-            <a:pPr algn="r"/>
-            <a:r>
-              <a:rPr sz="1300" b="1">
-                <a:solidFill>
-                  <a:srgbClr val="B3A369"/>
-                </a:solidFill>
-              </a:rPr>
-              <a:t>SQ1</a:t>
+            <a:pPr>
+              <a:spcAft>
+                <a:spcPts val="800"/>
+              </a:spcAft>
+            </a:pPr>
+            <a:r>
+              <a:rPr sz="1600" b="0">
+                <a:solidFill>
+                  <a:srgbClr val="212121"/>
+                </a:solidFill>
+              </a:rPr>
+              <a:t>• RQ1  How large can a locale be while meeting the edge deadline?</a:t>
+            </a:r>
+          </a:p>
+          <a:p>
+            <a:pPr>
+              <a:spcAft>
+                <a:spcPts val="800"/>
+              </a:spcAft>
+            </a:pPr>
+            <a:r>
+              <a:rPr sz="1600" b="0">
+                <a:solidFill>
+                  <a:srgbClr val="212121"/>
+                </a:solidFill>
+              </a:rPr>
+              <a:t>• RQ2  What tracking state is required for maneuvering vehicles?</a:t>
+            </a:r>
+          </a:p>
+          <a:p>
+            <a:pPr>
+              <a:spcAft>
+                <a:spcPts val="800"/>
+              </a:spcAft>
+            </a:pPr>
+            <a:r>
+              <a:rPr sz="1600" b="0">
+                <a:solidFill>
+                  <a:srgbClr val="212121"/>
+                </a:solidFill>
+              </a:rPr>
+              <a:t>• RQ3  When do locale crossings make existing migration mechanisms fail?</a:t>
+            </a:r>
+          </a:p>
+          <a:p>
+            <a:pPr>
+              <a:spcAft>
+                <a:spcPts val="800"/>
+              </a:spcAft>
+            </a:pPr>
+            <a:r>
+              <a:rPr sz="1600" b="0">
+                <a:solidFill>
+                  <a:srgbClr val="212121"/>
+                </a:solidFill>
+              </a:rPr>
+              <a:t>• RQ4  Can migration preserve planner freshness through ownership transfer?</a:t>
+            </a:r>
+          </a:p>
+          <a:p>
+            <a:pPr>
+              <a:spcAft>
+                <a:spcPts val="800"/>
+              </a:spcAft>
+            </a:pPr>
+            <a:r>
+              <a:rPr sz="1600" b="0">
+                <a:solidFill>
+                  <a:srgbClr val="212121"/>
+                </a:solidFill>
+              </a:rPr>
+              <a:t>• RQ5  Under what load and network conditions does Khonsu remain feasible?</a:t>
             </a:r>
           </a:p>
         </p:txBody>
@@ -5867,8 +6214,8 @@
         </p:nvSpPr>
         <p:spPr>
           <a:xfrm>
-            <a:off x="640080" y="1097280"/>
-            <a:ext cx="10972800" cy="1463040"/>
+            <a:off x="640080" y="6263640"/>
+            <a:ext cx="10972800" cy="457200"/>
           </a:xfrm>
           <a:prstGeom prst="rect">
             <a:avLst/>
@@ -5883,84 +6230,251 @@
           <a:p>
             <a:pPr>
               <a:spcAft>
-                <a:spcPts val="500"/>
-              </a:spcAft>
-            </a:pPr>
-            <a:r>
-              <a:rPr sz="1400" dirty="0">
+                <a:spcPts val="600"/>
+              </a:spcAft>
+            </a:pPr>
+            <a:r>
+              <a:rPr sz="1200" b="0">
+                <a:solidFill>
+                  <a:srgbClr val="B3A369"/>
+                </a:solidFill>
+              </a:rPr>
+              <a:t>Each RQ slide gives the current answer, the evidence, and the missing experiment.</a:t>
+            </a:r>
+          </a:p>
+        </p:txBody>
+      </p:sp>
+    </p:spTree>
+  </p:cSld>
+  <p:clrMapOvr>
+    <a:masterClrMapping/>
+  </p:clrMapOvr>
+</p:sld>
+</file>
+
+<file path=ppt/slides/slide4.xml><?xml version="1.0" encoding="utf-8"?>
+<p:sld xmlns:a="http://schemas.openxmlformats.org/drawingml/2006/main" xmlns:p="http://schemas.openxmlformats.org/presentationml/2006/main" xmlns:r="http://schemas.openxmlformats.org/officeDocument/2006/relationships">
+  <p:cSld>
+    <p:spTree>
+      <p:nvGrpSpPr>
+        <p:cNvPr id="1" name=""/>
+        <p:cNvGrpSpPr/>
+        <p:nvPr/>
+      </p:nvGrpSpPr>
+      <p:grpSpPr/>
+      <p:sp>
+        <p:nvSpPr>
+          <p:cNvPr id="2" name="TextBox 1"/>
+          <p:cNvSpPr txBox="1"/>
+          <p:nvPr/>
+        </p:nvSpPr>
+        <p:spPr>
+          <a:xfrm>
+            <a:off x="548640" y="256032"/>
+            <a:ext cx="9600000" cy="777240"/>
+          </a:xfrm>
+          <a:prstGeom prst="rect">
+            <a:avLst/>
+          </a:prstGeom>
+          <a:noFill/>
+        </p:spPr>
+        <p:txBody>
+          <a:bodyPr wrap="square">
+            <a:spAutoFit/>
+          </a:bodyPr>
+          <a:lstStyle/>
+          <a:p>
+            <a:pPr>
+              <a:spcAft>
+                <a:spcPts val="600"/>
+              </a:spcAft>
+            </a:pPr>
+            <a:r>
+              <a:rPr sz="2800" b="1">
+                <a:solidFill>
+                  <a:srgbClr val="1B3A6B"/>
+                </a:solidFill>
+              </a:rPr>
+              <a:t>GPU latency limits locale size</a:t>
+            </a:r>
+          </a:p>
+        </p:txBody>
+      </p:sp>
+      <p:sp>
+        <p:nvSpPr>
+          <p:cNvPr id="3" name="TextBox 2"/>
+          <p:cNvSpPr txBox="1"/>
+          <p:nvPr/>
+        </p:nvSpPr>
+        <p:spPr>
+          <a:xfrm>
+            <a:off x="10200000" y="292608"/>
+            <a:ext cx="1700000" cy="457200"/>
+          </a:xfrm>
+          <a:prstGeom prst="rect">
+            <a:avLst/>
+          </a:prstGeom>
+          <a:noFill/>
+        </p:spPr>
+        <p:txBody>
+          <a:bodyPr wrap="square">
+            <a:spAutoFit/>
+          </a:bodyPr>
+          <a:lstStyle/>
+          <a:p>
+            <a:pPr algn="r">
+              <a:spcAft>
+                <a:spcPts val="600"/>
+              </a:spcAft>
+            </a:pPr>
+            <a:r>
+              <a:rPr sz="1300" b="1">
+                <a:solidFill>
+                  <a:srgbClr val="B3A369"/>
+                </a:solidFill>
+              </a:rPr>
+              <a:t>RQ1</a:t>
+            </a:r>
+          </a:p>
+        </p:txBody>
+      </p:sp>
+      <p:sp>
+        <p:nvSpPr>
+          <p:cNvPr id="4" name="Rounded Rectangle 3"/>
+          <p:cNvSpPr/>
+          <p:nvPr/>
+        </p:nvSpPr>
+        <p:spPr>
+          <a:xfrm>
+            <a:off x="10200000" y="760000"/>
+            <a:ext cx="1450000" cy="330000"/>
+          </a:xfrm>
+          <a:prstGeom prst="roundRect">
+            <a:avLst/>
+          </a:prstGeom>
+          <a:solidFill>
+            <a:srgbClr val="2E7D32"/>
+          </a:solidFill>
+          <a:ln>
+            <a:noFill/>
+          </a:ln>
+        </p:spPr>
+        <p:style>
+          <a:lnRef idx="1">
+            <a:schemeClr val="accent1"/>
+          </a:lnRef>
+          <a:fillRef idx="3">
+            <a:schemeClr val="accent1"/>
+          </a:fillRef>
+          <a:effectRef idx="2">
+            <a:schemeClr val="accent1"/>
+          </a:effectRef>
+          <a:fontRef idx="minor">
+            <a:schemeClr val="lt1"/>
+          </a:fontRef>
+        </p:style>
+        <p:txBody>
+          <a:bodyPr rtlCol="0" anchor="ctr"/>
+          <a:lstStyle/>
+          <a:p>
+            <a:pPr algn="ctr"/>
+            <a:r>
+              <a:rPr sz="1100" b="1">
+                <a:solidFill>
+                  <a:srgbClr val="FFFFFF"/>
+                </a:solidFill>
+              </a:rPr>
+              <a:t>Done</a:t>
+            </a:r>
+          </a:p>
+        </p:txBody>
+      </p:sp>
+      <p:sp>
+        <p:nvSpPr>
+          <p:cNvPr id="5" name="TextBox 4"/>
+          <p:cNvSpPr txBox="1"/>
+          <p:nvPr/>
+        </p:nvSpPr>
+        <p:spPr>
+          <a:xfrm>
+            <a:off x="640080" y="1150000"/>
+            <a:ext cx="10972800" cy="2000000"/>
+          </a:xfrm>
+          <a:prstGeom prst="rect">
+            <a:avLst/>
+          </a:prstGeom>
+          <a:noFill/>
+        </p:spPr>
+        <p:txBody>
+          <a:bodyPr wrap="square">
+            <a:spAutoFit/>
+          </a:bodyPr>
+          <a:lstStyle/>
+          <a:p>
+            <a:pPr>
+              <a:spcAft>
+                <a:spcPts val="800"/>
+              </a:spcAft>
+            </a:pPr>
+            <a:r>
+              <a:rPr sz="1600" b="0">
                 <a:solidFill>
                   <a:srgbClr val="212121"/>
                 </a:solidFill>
               </a:rPr>
-              <a:t>• Fusion runs attention over the BEV grid, so its cost grows with canvas area: doubling the side roughly quadruples latency (measured).</a:t>
-            </a:r>
-          </a:p>
-          <a:p>
-            <a:pPr>
-              <a:spcAft>
-                <a:spcPts val="500"/>
-              </a:spcAft>
-            </a:pPr>
-            <a:r>
-              <a:rPr sz="1400" dirty="0">
+              <a:t>• BEV fusion cost grows with canvas area.</a:t>
+            </a:r>
+          </a:p>
+          <a:p>
+            <a:pPr>
+              <a:spcAft>
+                <a:spcPts val="800"/>
+              </a:spcAft>
+            </a:pPr>
+            <a:r>
+              <a:rPr sz="1600" b="0">
                 <a:solidFill>
                   <a:srgbClr val="212121"/>
                 </a:solidFill>
               </a:rPr>
-              <a:t>• At 8 contributors the fusion stage alone crosses the 130 </a:t>
-            </a:r>
-            <a:r>
-              <a:rPr sz="1400" dirty="0" err="1">
+              <a:t>• At 8 contributors, fusion exceeds its 130 ms budget between 282 and 400 m.</a:t>
+            </a:r>
+          </a:p>
+          <a:p>
+            <a:pPr>
+              <a:spcAft>
+                <a:spcPts val="800"/>
+              </a:spcAft>
+            </a:pPr>
+            <a:r>
+              <a:rPr sz="1600" b="0">
                 <a:solidFill>
                   <a:srgbClr val="212121"/>
                 </a:solidFill>
               </a:rPr>
-              <a:t>ms</a:t>
-            </a:r>
-            <a:r>
-              <a:rPr sz="1400" dirty="0">
+              <a:t>• Memory is not the limit: 6.8 GB of 16 GB at 563 m.</a:t>
+            </a:r>
+          </a:p>
+          <a:p>
+            <a:pPr>
+              <a:spcAft>
+                <a:spcPts val="800"/>
+              </a:spcAft>
+            </a:pPr>
+            <a:r>
+              <a:rPr sz="1600" b="0">
                 <a:solidFill>
                   <a:srgbClr val="212121"/>
                 </a:solidFill>
               </a:rPr>
-              <a:t> edge compute SLO between 282 m and 400 m of canvas. Tracking and prediction share the same SLO, so the practical cap is near 300 m.</a:t>
-            </a:r>
-          </a:p>
-          <a:p>
-            <a:pPr>
-              <a:spcAft>
-                <a:spcPts val="500"/>
-              </a:spcAft>
-            </a:pPr>
-            <a:r>
-              <a:rPr sz="1400" dirty="0">
-                <a:solidFill>
-                  <a:srgbClr val="212121"/>
-                </a:solidFill>
-              </a:rPr>
-              <a:t>• Memory is not the binding constraint (6.8 GB peak at 563 m on a 16 GB GPU). The deadline binds first.</a:t>
-            </a:r>
-          </a:p>
-          <a:p>
-            <a:pPr>
-              <a:spcAft>
-                <a:spcPts val="500"/>
-              </a:spcAft>
-            </a:pPr>
-            <a:r>
-              <a:rPr sz="1400" dirty="0">
-                <a:solidFill>
-                  <a:srgbClr val="212121"/>
-                </a:solidFill>
-              </a:rPr>
-              <a:t>• The cap is specific to our fusion architecture and edge tier. What the argument needs is that every implementation has one; the particular number is ours.</a:t>
+              <a:t>• For our hardware and fusion stack, the practical locale size is about 300 m.</a:t>
             </a:r>
           </a:p>
         </p:txBody>
       </p:sp>
       <p:pic>
         <p:nvPicPr>
-          <p:cNvPr id="5" name="Picture 4" descr="fig_canvas.png"/>
+          <p:cNvPr id="6" name="Picture 5" descr="image.png"/>
           <p:cNvPicPr>
             <a:picLocks noChangeAspect="1"/>
           </p:cNvPicPr>
@@ -5974,8 +6488,8 @@
         </p:blipFill>
         <p:spPr>
           <a:xfrm>
-            <a:off x="1920240" y="2697480"/>
-            <a:ext cx="8412480" cy="3738880"/>
+            <a:off x="1920240" y="2900000"/>
+            <a:ext cx="7312500" cy="3250000"/>
           </a:xfrm>
           <a:prstGeom prst="rect">
             <a:avLst/>
@@ -5984,7 +6498,7 @@
       </p:pic>
       <p:sp>
         <p:nvSpPr>
-          <p:cNvPr id="6" name="TextBox 5"/>
+          <p:cNvPr id="7" name="TextBox 6"/>
           <p:cNvSpPr txBox="1"/>
           <p:nvPr/>
         </p:nvSpPr>
@@ -5999,18 +6513,23 @@
           <a:noFill/>
         </p:spPr>
         <p:txBody>
-          <a:bodyPr wrap="none">
+          <a:bodyPr wrap="square">
             <a:spAutoFit/>
           </a:bodyPr>
           <a:lstStyle/>
           <a:p>
-            <a:r>
-              <a:rPr sz="1300" i="1">
+            <a:pPr>
+              <a:spcAft>
+                <a:spcPts val="600"/>
+              </a:spcAft>
+            </a:pPr>
+            <a:r>
+              <a:rPr sz="1200" b="0">
                 <a:solidFill>
                   <a:srgbClr val="B3A369"/>
                 </a:solidFill>
               </a:rPr>
-              <a:t>Ties to the study: SQ1 measured: fusion latency vs canvas side at fixed contributors, on the edge GPU (canvas_latency.csv, 2026-08-31).</a:t>
+              <a:t>Answers RQ1  ·  Evidence: canvas latency sweep on the edge GPU (Aug 31)  ·  Caveat: the number is architecture-specific</a:t>
             </a:r>
           </a:p>
         </p:txBody>
@@ -6023,8 +6542,8 @@
 </p:sld>
 </file>
 
-<file path=ppt/slides/slide4.xml><?xml version="1.0" encoding="utf-8"?>
-<p:sld xmlns:a="http://schemas.openxmlformats.org/drawingml/2006/main" xmlns:r="http://schemas.openxmlformats.org/officeDocument/2006/relationships" xmlns:p="http://schemas.openxmlformats.org/presentationml/2006/main">
+<file path=ppt/slides/slide5.xml><?xml version="1.0" encoding="utf-8"?>
+<p:sld xmlns:a="http://schemas.openxmlformats.org/drawingml/2006/main" xmlns:p="http://schemas.openxmlformats.org/presentationml/2006/main" xmlns:r="http://schemas.openxmlformats.org/officeDocument/2006/relationships">
   <p:cSld>
     <p:spTree>
       <p:nvGrpSpPr>
@@ -6032,14 +6551,7 @@
         <p:cNvGrpSpPr/>
         <p:nvPr/>
       </p:nvGrpSpPr>
-      <p:grpSpPr>
-        <a:xfrm>
-          <a:off x="0" y="0"/>
-          <a:ext cx="0" cy="0"/>
-          <a:chOff x="0" y="0"/>
-          <a:chExt cx="0" cy="0"/>
-        </a:xfrm>
-      </p:grpSpPr>
+      <p:grpSpPr/>
       <p:sp>
         <p:nvSpPr>
           <p:cNvPr id="2" name="TextBox 1"/>
@@ -6049,7 +6561,7 @@
         <p:spPr>
           <a:xfrm>
             <a:off x="548640" y="256032"/>
-            <a:ext cx="9692640" cy="777240"/>
+            <a:ext cx="9600000" cy="777240"/>
           </a:xfrm>
           <a:prstGeom prst="rect">
             <a:avLst/>
@@ -6057,18 +6569,23 @@
           <a:noFill/>
         </p:spPr>
         <p:txBody>
-          <a:bodyPr wrap="none">
+          <a:bodyPr wrap="square">
             <a:spAutoFit/>
           </a:bodyPr>
           <a:lstStyle/>
           <a:p>
+            <a:pPr>
+              <a:spcAft>
+                <a:spcPts val="600"/>
+              </a:spcAft>
+            </a:pPr>
             <a:r>
               <a:rPr sz="2800" b="1">
                 <a:solidFill>
                   <a:srgbClr val="1B3A6B"/>
                 </a:solidFill>
               </a:rPr>
-              <a:t>Consequence: many locales, boundaries every few hundred meters</a:t>
+              <a:t>Metropolitan coverage requires many locales</a:t>
             </a:r>
           </a:p>
         </p:txBody>
@@ -6081,8 +6598,8 @@
         </p:nvSpPr>
         <p:spPr>
           <a:xfrm>
-            <a:off x="9692640" y="292608"/>
-            <a:ext cx="2286000" cy="457200"/>
+            <a:off x="10200000" y="292608"/>
+            <a:ext cx="1700000" cy="457200"/>
           </a:xfrm>
           <a:prstGeom prst="rect">
             <a:avLst/>
@@ -6090,33 +6607,88 @@
           <a:noFill/>
         </p:spPr>
         <p:txBody>
-          <a:bodyPr wrap="none">
+          <a:bodyPr wrap="square">
             <a:spAutoFit/>
           </a:bodyPr>
           <a:lstStyle/>
           <a:p>
-            <a:pPr algn="r"/>
+            <a:pPr algn="r">
+              <a:spcAft>
+                <a:spcPts val="600"/>
+              </a:spcAft>
+            </a:pPr>
             <a:r>
               <a:rPr sz="1300" b="1">
                 <a:solidFill>
                   <a:srgbClr val="B3A369"/>
                 </a:solidFill>
               </a:rPr>
-              <a:t>SQ1</a:t>
-            </a:r>
-          </a:p>
-        </p:txBody>
-      </p:sp>
-      <p:sp>
-        <p:nvSpPr>
-          <p:cNvPr id="4" name="TextBox 3"/>
+              <a:t>RQ1</a:t>
+            </a:r>
+          </a:p>
+        </p:txBody>
+      </p:sp>
+      <p:sp>
+        <p:nvSpPr>
+          <p:cNvPr id="4" name="Rounded Rectangle 3"/>
+          <p:cNvSpPr/>
+          <p:nvPr/>
+        </p:nvSpPr>
+        <p:spPr>
+          <a:xfrm>
+            <a:off x="10200000" y="760000"/>
+            <a:ext cx="1450000" cy="330000"/>
+          </a:xfrm>
+          <a:prstGeom prst="roundRect">
+            <a:avLst/>
+          </a:prstGeom>
+          <a:solidFill>
+            <a:srgbClr val="2E7D32"/>
+          </a:solidFill>
+          <a:ln>
+            <a:noFill/>
+          </a:ln>
+        </p:spPr>
+        <p:style>
+          <a:lnRef idx="1">
+            <a:schemeClr val="accent1"/>
+          </a:lnRef>
+          <a:fillRef idx="3">
+            <a:schemeClr val="accent1"/>
+          </a:fillRef>
+          <a:effectRef idx="2">
+            <a:schemeClr val="accent1"/>
+          </a:effectRef>
+          <a:fontRef idx="minor">
+            <a:schemeClr val="lt1"/>
+          </a:fontRef>
+        </p:style>
+        <p:txBody>
+          <a:bodyPr rtlCol="0" anchor="ctr"/>
+          <a:lstStyle/>
+          <a:p>
+            <a:pPr algn="ctr"/>
+            <a:r>
+              <a:rPr sz="1100" b="1">
+                <a:solidFill>
+                  <a:srgbClr val="FFFFFF"/>
+                </a:solidFill>
+              </a:rPr>
+              <a:t>Done</a:t>
+            </a:r>
+          </a:p>
+        </p:txBody>
+      </p:sp>
+      <p:sp>
+        <p:nvSpPr>
+          <p:cNvPr id="5" name="TextBox 4"/>
           <p:cNvSpPr txBox="1"/>
           <p:nvPr/>
         </p:nvSpPr>
         <p:spPr>
           <a:xfrm>
-            <a:off x="640080" y="1097280"/>
-            <a:ext cx="10972800" cy="1371600"/>
+            <a:off x="640080" y="1150000"/>
+            <a:ext cx="10972800" cy="2000000"/>
           </a:xfrm>
           <a:prstGeom prst="rect">
             <a:avLst/>
@@ -6131,53 +6703,68 @@
           <a:p>
             <a:pPr>
               <a:spcAft>
-                <a:spcPts val="500"/>
-              </a:spcAft>
-            </a:pPr>
-            <a:r>
-              <a:rPr sz="1400">
+                <a:spcPts val="800"/>
+              </a:spcAft>
+            </a:pPr>
+            <a:r>
+              <a:rPr sz="1600" b="0">
                 <a:solidFill>
                   <a:srgbClr val="212121"/>
                 </a:solidFill>
               </a:rPr>
-              <a:t>• A metropolitan deployment therefore partitions into locales of roughly 300 m, each with its own edge service.</a:t>
-            </a:r>
-          </a:p>
-          <a:p>
-            <a:pPr>
-              <a:spcAft>
-                <a:spcPts val="500"/>
-              </a:spcAft>
-            </a:pPr>
-            <a:r>
-              <a:rPr sz="1400">
+              <a:t>• Locales of about 300 m, each with its own service instance.</a:t>
+            </a:r>
+          </a:p>
+          <a:p>
+            <a:pPr>
+              <a:spcAft>
+                <a:spcPts val="800"/>
+              </a:spcAft>
+            </a:pPr>
+            <a:r>
+              <a:rPr sz="1600" b="0">
                 <a:solidFill>
                   <a:srgbClr val="212121"/>
                 </a:solidFill>
               </a:rPr>
-              <a:t>• Partitioning a CARLA town by conflict anchors shows the boundary geometry this forces: boundary-to-conflict separations cluster well below what cold recovery needs at arterial speeds.</a:t>
-            </a:r>
-          </a:p>
-          <a:p>
-            <a:pPr>
-              <a:spcAft>
-                <a:spcPts val="500"/>
-              </a:spcAft>
-            </a:pPr>
-            <a:r>
-              <a:rPr sz="1400">
+              <a:t>• Boundaries fall on the road segments between conflict zones.</a:t>
+            </a:r>
+          </a:p>
+          <a:p>
+            <a:pPr>
+              <a:spcAft>
+                <a:spcPts val="800"/>
+              </a:spcAft>
+            </a:pPr>
+            <a:r>
+              <a:rPr sz="1600" b="0">
                 <a:solidFill>
                   <a:srgbClr val="212121"/>
                 </a:solidFill>
               </a:rPr>
-              <a:t>• At 14 m/s a vehicle crosses a boundary roughly every 20 to 30 s of driving. Continuity is a steady-state event, not a corner case.</a:t>
+              <a:t>• A vehicle crosses a boundary every 20 to 30 seconds of urban driving.</a:t>
+            </a:r>
+          </a:p>
+          <a:p>
+            <a:pPr>
+              <a:spcAft>
+                <a:spcPts val="800"/>
+              </a:spcAft>
+            </a:pPr>
+            <a:r>
+              <a:rPr sz="1600" b="0">
+                <a:solidFill>
+                  <a:srgbClr val="212121"/>
+                </a:solidFill>
+              </a:rPr>
+              <a:t>• Handoffs are the steady-state workload, not a corner case.</a:t>
             </a:r>
           </a:p>
         </p:txBody>
       </p:sp>
       <p:pic>
         <p:nvPicPr>
-          <p:cNvPr id="5" name="Picture 4" descr="paper_partition_map.png"/>
+          <p:cNvPr id="6" name="Picture 5" descr="image.png"/>
           <p:cNvPicPr>
             <a:picLocks noChangeAspect="1"/>
           </p:cNvPicPr>
@@ -6191,8 +6778,8 @@
         </p:blipFill>
         <p:spPr>
           <a:xfrm>
-            <a:off x="762000" y="2135192"/>
-            <a:ext cx="5120640" cy="4585648"/>
+            <a:off x="762000" y="2900000"/>
+            <a:ext cx="3629166" cy="3250000"/>
           </a:xfrm>
           <a:prstGeom prst="rect">
             <a:avLst/>
@@ -6201,7 +6788,7 @@
       </p:pic>
       <p:pic>
         <p:nvPicPr>
-          <p:cNvPr id="6" name="Picture 5" descr="paper_separation.png"/>
+          <p:cNvPr id="7" name="Picture 6" descr="image.png"/>
           <p:cNvPicPr>
             <a:picLocks noChangeAspect="1"/>
           </p:cNvPicPr>
@@ -6215,8 +6802,8 @@
         </p:blipFill>
         <p:spPr>
           <a:xfrm>
-            <a:off x="6309360" y="2560320"/>
-            <a:ext cx="5120640" cy="3515663"/>
+            <a:off x="6309360" y="2900000"/>
+            <a:ext cx="4733696" cy="3250000"/>
           </a:xfrm>
           <a:prstGeom prst="rect">
             <a:avLst/>
@@ -6225,7 +6812,7 @@
       </p:pic>
       <p:sp>
         <p:nvSpPr>
-          <p:cNvPr id="7" name="TextBox 6"/>
+          <p:cNvPr id="8" name="TextBox 7"/>
           <p:cNvSpPr txBox="1"/>
           <p:nvPr/>
         </p:nvSpPr>
@@ -6240,18 +6827,23 @@
           <a:noFill/>
         </p:spPr>
         <p:txBody>
-          <a:bodyPr wrap="none">
+          <a:bodyPr wrap="square">
             <a:spAutoFit/>
           </a:bodyPr>
           <a:lstStyle/>
           <a:p>
-            <a:r>
-              <a:rPr sz="1300" i="1">
+            <a:pPr>
+              <a:spcAft>
+                <a:spcPts val="600"/>
+              </a:spcAft>
+            </a:pPr>
+            <a:r>
+              <a:rPr sz="1200" b="0">
                 <a:solidFill>
                   <a:srgbClr val="B3A369"/>
                 </a:solidFill>
               </a:rPr>
-              <a:t>Ties to the study: SQ1: the partition study (Q7 data) turns the canvas cap into measured boundary geometry.</a:t>
+              <a:t>Answers RQ1  ·  Evidence: partition of a CARLA town under the measured cap  ·  Missing: sizing study on measured density traces</a:t>
             </a:r>
           </a:p>
         </p:txBody>
@@ -6264,8 +6856,8 @@
 </p:sld>
 </file>
 
-<file path=ppt/slides/slide5.xml><?xml version="1.0" encoding="utf-8"?>
-<p:sld xmlns:a="http://schemas.openxmlformats.org/drawingml/2006/main" xmlns:r="http://schemas.openxmlformats.org/officeDocument/2006/relationships" xmlns:p="http://schemas.openxmlformats.org/presentationml/2006/main">
+<file path=ppt/slides/slide6.xml><?xml version="1.0" encoding="utf-8"?>
+<p:sld xmlns:a="http://schemas.openxmlformats.org/drawingml/2006/main" xmlns:p="http://schemas.openxmlformats.org/presentationml/2006/main" xmlns:r="http://schemas.openxmlformats.org/officeDocument/2006/relationships">
   <p:cSld>
     <p:spTree>
       <p:nvGrpSpPr>
@@ -6273,14 +6865,7 @@
         <p:cNvGrpSpPr/>
         <p:nvPr/>
       </p:nvGrpSpPr>
-      <p:grpSpPr>
-        <a:xfrm>
-          <a:off x="0" y="0"/>
-          <a:ext cx="0" cy="0"/>
-          <a:chOff x="0" y="0"/>
-          <a:chExt cx="0" cy="0"/>
-        </a:xfrm>
-      </p:grpSpPr>
+      <p:grpSpPr/>
       <p:sp>
         <p:nvSpPr>
           <p:cNvPr id="2" name="TextBox 1"/>
@@ -6290,7 +6875,7 @@
         <p:spPr>
           <a:xfrm>
             <a:off x="548640" y="256032"/>
-            <a:ext cx="9692640" cy="777240"/>
+            <a:ext cx="9600000" cy="777240"/>
           </a:xfrm>
           <a:prstGeom prst="rect">
             <a:avLst/>
@@ -6298,18 +6883,23 @@
           <a:noFill/>
         </p:spPr>
         <p:txBody>
-          <a:bodyPr wrap="none">
+          <a:bodyPr wrap="square">
             <a:spAutoFit/>
           </a:bodyPr>
           <a:lstStyle/>
           <a:p>
+            <a:pPr>
+              <a:spcAft>
+                <a:spcPts val="600"/>
+              </a:spcAft>
+            </a:pPr>
             <a:r>
               <a:rPr sz="2800" b="1">
                 <a:solidFill>
                   <a:srgbClr val="1B3A6B"/>
                 </a:solidFill>
               </a:rPr>
-              <a:t>Vehicle tracking under real motion needs temporal state</a:t>
+              <a:t>Maneuvering vehicles require temporal history</a:t>
             </a:r>
           </a:p>
         </p:txBody>
@@ -6322,8 +6912,8 @@
         </p:nvSpPr>
         <p:spPr>
           <a:xfrm>
-            <a:off x="9692640" y="292608"/>
-            <a:ext cx="2286000" cy="457200"/>
+            <a:off x="10200000" y="292608"/>
+            <a:ext cx="1700000" cy="457200"/>
           </a:xfrm>
           <a:prstGeom prst="rect">
             <a:avLst/>
@@ -6331,33 +6921,88 @@
           <a:noFill/>
         </p:spPr>
         <p:txBody>
-          <a:bodyPr wrap="none">
+          <a:bodyPr wrap="square">
             <a:spAutoFit/>
           </a:bodyPr>
           <a:lstStyle/>
           <a:p>
-            <a:pPr algn="r"/>
+            <a:pPr algn="r">
+              <a:spcAft>
+                <a:spcPts val="600"/>
+              </a:spcAft>
+            </a:pPr>
             <a:r>
               <a:rPr sz="1300" b="1">
                 <a:solidFill>
                   <a:srgbClr val="B3A369"/>
                 </a:solidFill>
               </a:rPr>
-              <a:t>SQ2</a:t>
-            </a:r>
-          </a:p>
-        </p:txBody>
-      </p:sp>
-      <p:sp>
-        <p:nvSpPr>
-          <p:cNvPr id="4" name="TextBox 3"/>
+              <a:t>RQ2</a:t>
+            </a:r>
+          </a:p>
+        </p:txBody>
+      </p:sp>
+      <p:sp>
+        <p:nvSpPr>
+          <p:cNvPr id="4" name="Rounded Rectangle 3"/>
+          <p:cNvSpPr/>
+          <p:nvPr/>
+        </p:nvSpPr>
+        <p:spPr>
+          <a:xfrm>
+            <a:off x="10200000" y="760000"/>
+            <a:ext cx="1450000" cy="330000"/>
+          </a:xfrm>
+          <a:prstGeom prst="roundRect">
+            <a:avLst/>
+          </a:prstGeom>
+          <a:solidFill>
+            <a:srgbClr val="2E7D32"/>
+          </a:solidFill>
+          <a:ln>
+            <a:noFill/>
+          </a:ln>
+        </p:spPr>
+        <p:style>
+          <a:lnRef idx="1">
+            <a:schemeClr val="accent1"/>
+          </a:lnRef>
+          <a:fillRef idx="3">
+            <a:schemeClr val="accent1"/>
+          </a:fillRef>
+          <a:effectRef idx="2">
+            <a:schemeClr val="accent1"/>
+          </a:effectRef>
+          <a:fontRef idx="minor">
+            <a:schemeClr val="lt1"/>
+          </a:fontRef>
+        </p:style>
+        <p:txBody>
+          <a:bodyPr rtlCol="0" anchor="ctr"/>
+          <a:lstStyle/>
+          <a:p>
+            <a:pPr algn="ctr"/>
+            <a:r>
+              <a:rPr sz="1100" b="1">
+                <a:solidFill>
+                  <a:srgbClr val="FFFFFF"/>
+                </a:solidFill>
+              </a:rPr>
+              <a:t>Done</a:t>
+            </a:r>
+          </a:p>
+        </p:txBody>
+      </p:sp>
+      <p:sp>
+        <p:nvSpPr>
+          <p:cNvPr id="5" name="TextBox 4"/>
           <p:cNvSpPr txBox="1"/>
           <p:nvPr/>
         </p:nvSpPr>
         <p:spPr>
           <a:xfrm>
-            <a:off x="640080" y="1097280"/>
-            <a:ext cx="10972800" cy="1828800"/>
+            <a:off x="640080" y="1150000"/>
+            <a:ext cx="10972800" cy="2000000"/>
           </a:xfrm>
           <a:prstGeom prst="rect">
             <a:avLst/>
@@ -6372,68 +7017,68 @@
           <a:p>
             <a:pPr>
               <a:spcAft>
-                <a:spcPts val="500"/>
-              </a:spcAft>
-            </a:pPr>
-            <a:r>
-              <a:rPr sz="1400">
+                <a:spcPts val="800"/>
+              </a:spcAft>
+            </a:pPr>
+            <a:r>
+              <a:rPr sz="1600" b="0">
                 <a:solidFill>
                   <a:srgbClr val="212121"/>
                 </a:solidFill>
               </a:rPr>
-              <a:t>• Approach motion is non-constant (braking, acceleration, turning, lane changes); a constant-velocity Kalman tracker loses accuracy exactly there. Literature: Singer (1970), IMM (Blom and Bar-Shalom, 1988).</a:t>
-            </a:r>
-          </a:p>
-          <a:p>
-            <a:pPr>
-              <a:spcAft>
-                <a:spcPts val="500"/>
-              </a:spcAft>
-            </a:pPr>
-            <a:r>
-              <a:rPr sz="1400">
+              <a:t>• Braking, acceleration, turning, and lane changes break constant-velocity tracking.</a:t>
+            </a:r>
+          </a:p>
+          <a:p>
+            <a:pPr>
+              <a:spcAft>
+                <a:spcPts val="800"/>
+              </a:spcAft>
+            </a:pPr>
+            <a:r>
+              <a:rPr sz="1600" b="0">
                 <a:solidFill>
                   <a:srgbClr val="212121"/>
                 </a:solidFill>
               </a:rPr>
-              <a:t>• Every remedy carries temporal context. Our pipeline uses a 3D adaptation of MambaTrack; for the maneuvering workloads we study it beats the constant-velocity baseline. No claim that SSMs are necessary in general.</a:t>
-            </a:r>
-          </a:p>
-          <a:p>
-            <a:pPr>
-              <a:spcAft>
-                <a:spcPts val="500"/>
-              </a:spcAft>
-            </a:pPr>
-            <a:r>
-              <a:rPr sz="1400">
+              <a:t>• Our 3D adaptation of MambaTrack conditions on the last K observations.</a:t>
+            </a:r>
+          </a:p>
+          <a:p>
+            <a:pPr>
+              <a:spcAft>
+                <a:spcPts val="800"/>
+              </a:spcAft>
+            </a:pPr>
+            <a:r>
+              <a:rPr sz="1600" b="0">
                 <a:solidFill>
                   <a:srgbClr val="212121"/>
                 </a:solidFill>
               </a:rPr>
-              <a:t>• Scoped claim: first integration of a state-space 3D multi-object tracker into a distributed cooperative-prediction pipeline; prior SSM trackers (MambaTrack, TrackSSM, S3MOT, D3SSTrack, MambaTrack3D) are standalone benchmark models.</a:t>
-            </a:r>
-          </a:p>
-          <a:p>
-            <a:pPr>
-              <a:spcAft>
-                <a:spcPts val="500"/>
-              </a:spcAft>
-            </a:pPr>
-            <a:r>
-              <a:rPr sz="1400">
+              <a:t>• After a forced handoff, one frame is indistinguishable from a cold start.</a:t>
+            </a:r>
+          </a:p>
+          <a:p>
+            <a:pPr>
+              <a:spcAft>
+                <a:spcPts val="800"/>
+              </a:spcAft>
+            </a:pPr>
+            <a:r>
+              <a:rPr sz="1600" b="0">
                 <a:solidFill>
                   <a:srgbClr val="212121"/>
                 </a:solidFill>
               </a:rPr>
-              <a:t>• Measured (chart): after a forced handoff, one frame is indistinguishable from cold start; the observation history cuts error 2.8 to 9.3x. The migrated state is explicit history plus bookkeeping (about 1.3 KB), not a hidden state.</a:t>
+              <a:t>• The observation history reduces post-handoff error by a factor of 2.8 to 9.3.</a:t>
             </a:r>
           </a:p>
         </p:txBody>
       </p:sp>
       <p:pic>
         <p:nvPicPr>
-          <p:cNvPr id="5" name="Picture 4" descr="fig_bk_rebuild.png"/>
+          <p:cNvPr id="6" name="Picture 5" descr="image.png"/>
           <p:cNvPicPr>
             <a:picLocks noChangeAspect="1"/>
           </p:cNvPicPr>
@@ -6447,8 +7092,8 @@
         </p:blipFill>
         <p:spPr>
           <a:xfrm>
-            <a:off x="2834640" y="3154680"/>
-            <a:ext cx="6583680" cy="4122214"/>
+            <a:off x="2834640" y="2900000"/>
+            <a:ext cx="5190647" cy="3250000"/>
           </a:xfrm>
           <a:prstGeom prst="rect">
             <a:avLst/>
@@ -6457,7 +7102,7 @@
       </p:pic>
       <p:sp>
         <p:nvSpPr>
-          <p:cNvPr id="6" name="TextBox 5"/>
+          <p:cNvPr id="7" name="TextBox 6"/>
           <p:cNvSpPr txBox="1"/>
           <p:nvPr/>
         </p:nvSpPr>
@@ -6472,18 +7117,23 @@
           <a:noFill/>
         </p:spPr>
         <p:txBody>
-          <a:bodyPr wrap="none">
+          <a:bodyPr wrap="square">
             <a:spAutoFit/>
           </a:bodyPr>
           <a:lstStyle/>
           <a:p>
-            <a:r>
-              <a:rPr sz="1300" i="1">
+            <a:pPr>
+              <a:spcAft>
+                <a:spcPts val="600"/>
+              </a:spcAft>
+            </a:pPr>
+            <a:r>
+              <a:rPr sz="1200" b="0">
                 <a:solidFill>
                   <a:srgbClr val="B3A369"/>
                 </a:solidFill>
               </a:rPr>
-              <a:t>Ties to the study: SQ2: the tracker earns its accuracy from history; preserving that history across the boundary is what retains it.</a:t>
+              <a:t>Answers RQ2  ·  Evidence: forced-handoff microbenchmark, four maneuvers  ·  Claim scope: first SSM 3D tracker inside a distributed cooperative-prediction pipeline</a:t>
             </a:r>
           </a:p>
         </p:txBody>
@@ -6496,8 +7146,8 @@
 </p:sld>
 </file>
 
-<file path=ppt/slides/slide6.xml><?xml version="1.0" encoding="utf-8"?>
-<p:sld xmlns:a="http://schemas.openxmlformats.org/drawingml/2006/main" xmlns:r="http://schemas.openxmlformats.org/officeDocument/2006/relationships" xmlns:p="http://schemas.openxmlformats.org/presentationml/2006/main">
+<file path=ppt/slides/slide7.xml><?xml version="1.0" encoding="utf-8"?>
+<p:sld xmlns:a="http://schemas.openxmlformats.org/drawingml/2006/main" xmlns:p="http://schemas.openxmlformats.org/presentationml/2006/main" xmlns:r="http://schemas.openxmlformats.org/officeDocument/2006/relationships">
   <p:cSld>
     <p:spTree>
       <p:nvGrpSpPr>
@@ -6505,14 +7155,7 @@
         <p:cNvGrpSpPr/>
         <p:nvPr/>
       </p:nvGrpSpPr>
-      <p:grpSpPr>
-        <a:xfrm>
-          <a:off x="0" y="0"/>
-          <a:ext cx="0" cy="0"/>
-          <a:chOff x="0" y="0"/>
-          <a:chExt cx="0" cy="0"/>
-        </a:xfrm>
-      </p:grpSpPr>
+      <p:grpSpPr/>
       <p:sp>
         <p:nvSpPr>
           <p:cNvPr id="2" name="TextBox 1"/>
@@ -6522,7 +7165,7 @@
         <p:spPr>
           <a:xfrm>
             <a:off x="548640" y="256032"/>
-            <a:ext cx="9692640" cy="777240"/>
+            <a:ext cx="9600000" cy="777240"/>
           </a:xfrm>
           <a:prstGeom prst="rect">
             <a:avLst/>
@@ -6530,18 +7173,23 @@
           <a:noFill/>
         </p:spPr>
         <p:txBody>
-          <a:bodyPr wrap="none">
+          <a:bodyPr wrap="square">
             <a:spAutoFit/>
           </a:bodyPr>
           <a:lstStyle/>
           <a:p>
+            <a:pPr>
+              <a:spcAft>
+                <a:spcPts val="600"/>
+              </a:spcAft>
+            </a:pPr>
             <a:r>
               <a:rPr sz="2800" b="1">
                 <a:solidFill>
                   <a:srgbClr val="1B3A6B"/>
                 </a:solidFill>
               </a:rPr>
-              <a:t>The snapshot completes by colliding through</a:t>
+              <a:t>A Kalman snapshot is insufficient under acceleration</a:t>
             </a:r>
           </a:p>
         </p:txBody>
@@ -6554,8 +7202,8 @@
         </p:nvSpPr>
         <p:spPr>
           <a:xfrm>
-            <a:off x="9692640" y="292608"/>
-            <a:ext cx="2286000" cy="457200"/>
+            <a:off x="10200000" y="292608"/>
+            <a:ext cx="1700000" cy="457200"/>
           </a:xfrm>
           <a:prstGeom prst="rect">
             <a:avLst/>
@@ -6563,33 +7211,88 @@
           <a:noFill/>
         </p:spPr>
         <p:txBody>
-          <a:bodyPr wrap="none">
+          <a:bodyPr wrap="square">
             <a:spAutoFit/>
           </a:bodyPr>
           <a:lstStyle/>
           <a:p>
-            <a:pPr algn="r"/>
+            <a:pPr algn="r">
+              <a:spcAft>
+                <a:spcPts val="600"/>
+              </a:spcAft>
+            </a:pPr>
             <a:r>
               <a:rPr sz="1300" b="1">
                 <a:solidFill>
                   <a:srgbClr val="B3A369"/>
                 </a:solidFill>
               </a:rPr>
-              <a:t>SQ2</a:t>
-            </a:r>
-          </a:p>
-        </p:txBody>
-      </p:sp>
-      <p:sp>
-        <p:nvSpPr>
-          <p:cNvPr id="4" name="TextBox 3"/>
+              <a:t>RQ2</a:t>
+            </a:r>
+          </a:p>
+        </p:txBody>
+      </p:sp>
+      <p:sp>
+        <p:nvSpPr>
+          <p:cNvPr id="4" name="Rounded Rectangle 3"/>
+          <p:cNvSpPr/>
+          <p:nvPr/>
+        </p:nvSpPr>
+        <p:spPr>
+          <a:xfrm>
+            <a:off x="10200000" y="760000"/>
+            <a:ext cx="1450000" cy="330000"/>
+          </a:xfrm>
+          <a:prstGeom prst="roundRect">
+            <a:avLst/>
+          </a:prstGeom>
+          <a:solidFill>
+            <a:srgbClr val="2E7D32"/>
+          </a:solidFill>
+          <a:ln>
+            <a:noFill/>
+          </a:ln>
+        </p:spPr>
+        <p:style>
+          <a:lnRef idx="1">
+            <a:schemeClr val="accent1"/>
+          </a:lnRef>
+          <a:fillRef idx="3">
+            <a:schemeClr val="accent1"/>
+          </a:fillRef>
+          <a:effectRef idx="2">
+            <a:schemeClr val="accent1"/>
+          </a:effectRef>
+          <a:fontRef idx="minor">
+            <a:schemeClr val="lt1"/>
+          </a:fontRef>
+        </p:style>
+        <p:txBody>
+          <a:bodyPr rtlCol="0" anchor="ctr"/>
+          <a:lstStyle/>
+          <a:p>
+            <a:pPr algn="ctr"/>
+            <a:r>
+              <a:rPr sz="1100" b="1">
+                <a:solidFill>
+                  <a:srgbClr val="FFFFFF"/>
+                </a:solidFill>
+              </a:rPr>
+              <a:t>Done</a:t>
+            </a:r>
+          </a:p>
+        </p:txBody>
+      </p:sp>
+      <p:sp>
+        <p:nvSpPr>
+          <p:cNvPr id="5" name="TextBox 4"/>
           <p:cNvSpPr txBox="1"/>
           <p:nvPr/>
         </p:nvSpPr>
         <p:spPr>
           <a:xfrm>
-            <a:off x="640080" y="1097280"/>
-            <a:ext cx="10972800" cy="1188720"/>
+            <a:off x="640080" y="1150000"/>
+            <a:ext cx="10972800" cy="2000000"/>
           </a:xfrm>
           <a:prstGeom prst="rect">
             <a:avLst/>
@@ -6604,38 +7307,68 @@
           <a:p>
             <a:pPr>
               <a:spcAft>
-                <a:spcPts val="500"/>
-              </a:spcAft>
-            </a:pPr>
-            <a:r>
-              <a:rPr sz="1400">
+                <a:spcPts val="800"/>
+              </a:spcAft>
+            </a:pPr>
+            <a:r>
+              <a:rPr sz="1600" b="0">
                 <a:solidFill>
                   <a:srgbClr val="212121"/>
                 </a:solidFill>
               </a:rPr>
-              <a:t>• Accelerating oncoming actor, closed loop: the Kalman snapshot arm finishes its runs but collides in every one (1 to 2 episodes per run). The context arm runs clean.</a:t>
-            </a:r>
-          </a:p>
-          <a:p>
-            <a:pPr>
-              <a:spcAft>
-                <a:spcPts val="500"/>
-              </a:spcAft>
-            </a:pPr>
-            <a:r>
-              <a:rPr sz="1400">
+              <a:t>• Oncoming actor accelerates through the conflict.</a:t>
+            </a:r>
+          </a:p>
+          <a:p>
+            <a:pPr>
+              <a:spcAft>
+                <a:spcPts val="800"/>
+              </a:spcAft>
+            </a:pPr>
+            <a:r>
+              <a:rPr sz="1600" b="0">
                 <a:solidFill>
                   <a:srgbClr val="212121"/>
                 </a:solidFill>
               </a:rPr>
-              <a:t>• The predictor behind a snapshot sees one frame, assumes constant velocity, and misplaces the conflict point by meters at the 5 s horizon. The 25 cm instantaneous error is the trace, not the harm.</a:t>
+              <a:t>• Kalman snapshot: 4 of 4 runs collide.</a:t>
+            </a:r>
+          </a:p>
+          <a:p>
+            <a:pPr>
+              <a:spcAft>
+                <a:spcPts val="800"/>
+              </a:spcAft>
+            </a:pPr>
+            <a:r>
+              <a:rPr sz="1600" b="0">
+                <a:solidFill>
+                  <a:srgbClr val="212121"/>
+                </a:solidFill>
+              </a:rPr>
+              <a:t>• Temporal history: 3 of 4 runs complete without collision.</a:t>
+            </a:r>
+          </a:p>
+          <a:p>
+            <a:pPr>
+              <a:spcAft>
+                <a:spcPts val="800"/>
+              </a:spcAft>
+            </a:pPr>
+            <a:r>
+              <a:rPr sz="1600" b="0">
+                <a:solidFill>
+                  <a:srgbClr val="212121"/>
+                </a:solidFill>
+              </a:rPr>
+              <a:t>• The difference comes from motion history, not transfer size.</a:t>
             </a:r>
           </a:p>
         </p:txBody>
       </p:sp>
       <p:pic>
         <p:nvPicPr>
-          <p:cNvPr id="5" name="Picture 4" descr="fig_payload_timing.png"/>
+          <p:cNvPr id="6" name="Picture 5" descr="image.png"/>
           <p:cNvPicPr>
             <a:picLocks noChangeAspect="1"/>
           </p:cNvPicPr>
@@ -6649,8 +7382,8 @@
         </p:blipFill>
         <p:spPr>
           <a:xfrm>
-            <a:off x="1645920" y="2468880"/>
-            <a:ext cx="8778240" cy="3339548"/>
+            <a:off x="1645920" y="2900000"/>
+            <a:ext cx="8778240" cy="3038988"/>
           </a:xfrm>
           <a:prstGeom prst="rect">
             <a:avLst/>
@@ -6659,7 +7392,7 @@
       </p:pic>
       <p:sp>
         <p:nvSpPr>
-          <p:cNvPr id="6" name="TextBox 5"/>
+          <p:cNvPr id="7" name="TextBox 6"/>
           <p:cNvSpPr txBox="1"/>
           <p:nvPr/>
         </p:nvSpPr>
@@ -6674,131 +7407,6 @@
           <a:noFill/>
         </p:spPr>
         <p:txBody>
-          <a:bodyPr wrap="none">
-            <a:spAutoFit/>
-          </a:bodyPr>
-          <a:lstStyle/>
-          <a:p>
-            <a:r>
-              <a:rPr sz="1300" i="1">
-                <a:solidFill>
-                  <a:srgbClr val="B3A369"/>
-                </a:solidFill>
-              </a:rPr>
-              <a:t>Ties to the study: SQ2 closed loop: clean completion and collision episodes per arm, accelerating-actor scenario, 4 seeds.</a:t>
-            </a:r>
-          </a:p>
-        </p:txBody>
-      </p:sp>
-    </p:spTree>
-  </p:cSld>
-  <p:clrMapOvr>
-    <a:masterClrMapping/>
-  </p:clrMapOvr>
-</p:sld>
-</file>
-
-<file path=ppt/slides/slide7.xml><?xml version="1.0" encoding="utf-8"?>
-<p:sld xmlns:a="http://schemas.openxmlformats.org/drawingml/2006/main" xmlns:r="http://schemas.openxmlformats.org/officeDocument/2006/relationships" xmlns:p="http://schemas.openxmlformats.org/presentationml/2006/main">
-  <p:cSld>
-    <p:spTree>
-      <p:nvGrpSpPr>
-        <p:cNvPr id="1" name=""/>
-        <p:cNvGrpSpPr/>
-        <p:nvPr/>
-      </p:nvGrpSpPr>
-      <p:grpSpPr>
-        <a:xfrm>
-          <a:off x="0" y="0"/>
-          <a:ext cx="0" cy="0"/>
-          <a:chOff x="0" y="0"/>
-          <a:chExt cx="0" cy="0"/>
-        </a:xfrm>
-      </p:grpSpPr>
-      <p:sp>
-        <p:nvSpPr>
-          <p:cNvPr id="2" name="TextBox 1"/>
-          <p:cNvSpPr txBox="1"/>
-          <p:nvPr/>
-        </p:nvSpPr>
-        <p:spPr>
-          <a:xfrm>
-            <a:off x="548640" y="256032"/>
-            <a:ext cx="9692640" cy="777240"/>
-          </a:xfrm>
-          <a:prstGeom prst="rect">
-            <a:avLst/>
-          </a:prstGeom>
-          <a:noFill/>
-        </p:spPr>
-        <p:txBody>
-          <a:bodyPr wrap="none">
-            <a:spAutoFit/>
-          </a:bodyPr>
-          <a:lstStyle/>
-          <a:p>
-            <a:r>
-              <a:rPr sz="2800" b="1">
-                <a:solidFill>
-                  <a:srgbClr val="1B3A6B"/>
-                </a:solidFill>
-              </a:rPr>
-              <a:t>Conflicts concentrate at junctions and happen anywhere</a:t>
-            </a:r>
-          </a:p>
-        </p:txBody>
-      </p:sp>
-      <p:sp>
-        <p:nvSpPr>
-          <p:cNvPr id="3" name="TextBox 2"/>
-          <p:cNvSpPr txBox="1"/>
-          <p:nvPr/>
-        </p:nvSpPr>
-        <p:spPr>
-          <a:xfrm>
-            <a:off x="9692640" y="292608"/>
-            <a:ext cx="2286000" cy="457200"/>
-          </a:xfrm>
-          <a:prstGeom prst="rect">
-            <a:avLst/>
-          </a:prstGeom>
-          <a:noFill/>
-        </p:spPr>
-        <p:txBody>
-          <a:bodyPr wrap="none">
-            <a:spAutoFit/>
-          </a:bodyPr>
-          <a:lstStyle/>
-          <a:p>
-            <a:pPr algn="r"/>
-            <a:r>
-              <a:rPr sz="1300" b="1">
-                <a:solidFill>
-                  <a:srgbClr val="B3A369"/>
-                </a:solidFill>
-              </a:rPr>
-              <a:t>SQ3</a:t>
-            </a:r>
-          </a:p>
-        </p:txBody>
-      </p:sp>
-      <p:sp>
-        <p:nvSpPr>
-          <p:cNvPr id="4" name="TextBox 3"/>
-          <p:cNvSpPr txBox="1"/>
-          <p:nvPr/>
-        </p:nvSpPr>
-        <p:spPr>
-          <a:xfrm>
-            <a:off x="640080" y="1097280"/>
-            <a:ext cx="10972800" cy="2011680"/>
-          </a:xfrm>
-          <a:prstGeom prst="rect">
-            <a:avLst/>
-          </a:prstGeom>
-          <a:noFill/>
-        </p:spPr>
-        <p:txBody>
           <a:bodyPr wrap="square">
             <a:spAutoFit/>
           </a:bodyPr>
@@ -6806,94 +7414,16 @@
           <a:p>
             <a:pPr>
               <a:spcAft>
-                <a:spcPts val="500"/>
-              </a:spcAft>
-            </a:pPr>
-            <a:r>
-              <a:rPr sz="1400">
-                <a:solidFill>
-                  <a:srgbClr val="212121"/>
-                </a:solidFill>
-              </a:rPr>
-              <a:t>• NHTSA's pre-crash typology puts crossing-path and turning conflicts among the most frequent crash classes, which is why locales anchor to junctions.</a:t>
-            </a:r>
-          </a:p>
-          <a:p>
-            <a:pPr>
-              <a:spcAft>
-                <a:spcPts val="500"/>
-              </a:spcAft>
-            </a:pPr>
-            <a:r>
-              <a:rPr sz="1400">
-                <a:solidFill>
-                  <a:srgbClr val="212121"/>
-                </a:solidFill>
-              </a:rPr>
-              <a:t>• The same typology carries rear-end, lane-change, and stopped-vehicle classes that occur on ordinary segments: traffic makes conflict geometry, placement does not.</a:t>
-            </a:r>
-          </a:p>
-          <a:p>
-            <a:pPr>
-              <a:spcAft>
-                <a:spcPts val="500"/>
-              </a:spcAft>
-            </a:pPr>
-            <a:r>
-              <a:rPr sz="1400">
-                <a:solidFill>
-                  <a:srgbClr val="212121"/>
-                </a:solidFill>
-              </a:rPr>
-              <a:t>• With locales capped near 300 m, whatever boundary placement chooses, queue tails, stopped vehicles, and work zones can straddle it. The 08-22 commit-gate incident is our own measured example: absence of a forecast read as clear road at a boundary.</a:t>
-            </a:r>
-          </a:p>
-          <a:p>
-            <a:pPr>
-              <a:spcAft>
-                <a:spcPts val="500"/>
-              </a:spcAft>
-            </a:pPr>
-            <a:r>
-              <a:rPr sz="1400">
-                <a:solidFill>
-                  <a:srgbClr val="212121"/>
-                </a:solidFill>
-              </a:rPr>
-              <a:t>• Placement is granted its best case in our scenarios: fixed conflict zones sit inside locales, and the failures below still occur on the segments between them.</a:t>
-            </a:r>
-          </a:p>
-        </p:txBody>
-      </p:sp>
-      <p:sp>
-        <p:nvSpPr>
-          <p:cNvPr id="5" name="TextBox 4"/>
-          <p:cNvSpPr txBox="1"/>
-          <p:nvPr/>
-        </p:nvSpPr>
-        <p:spPr>
-          <a:xfrm>
-            <a:off x="640080" y="6263640"/>
-            <a:ext cx="10972800" cy="457200"/>
-          </a:xfrm>
-          <a:prstGeom prst="rect">
-            <a:avLst/>
-          </a:prstGeom>
-          <a:noFill/>
-        </p:spPr>
-        <p:txBody>
-          <a:bodyPr wrap="none">
-            <a:spAutoFit/>
-          </a:bodyPr>
-          <a:lstStyle/>
-          <a:p>
-            <a:r>
-              <a:rPr sz="1300" i="1">
+                <a:spcPts val="600"/>
+              </a:spcAft>
+            </a:pPr>
+            <a:r>
+              <a:rPr sz="1200" b="0">
                 <a:solidFill>
                   <a:srgbClr val="B3A369"/>
                 </a:solidFill>
               </a:rPr>
-              <a:t>Ties to the study: SQ3: motivates evaluating crossings on approach segments rather than engineered corner cases.</a:t>
+              <a:t>Answers RQ2  ·  Evidence: closed-loop acceleration experiment, 4 seeds, validated scenario  ·  Missing: post-handoff minADE and minFDE</a:t>
             </a:r>
           </a:p>
         </p:txBody>
@@ -6907,7 +7437,7 @@
 </file>
 
 <file path=ppt/slides/slide8.xml><?xml version="1.0" encoding="utf-8"?>
-<p:sld xmlns:a="http://schemas.openxmlformats.org/drawingml/2006/main" xmlns:r="http://schemas.openxmlformats.org/officeDocument/2006/relationships" xmlns:p="http://schemas.openxmlformats.org/presentationml/2006/main">
+<p:sld xmlns:a="http://schemas.openxmlformats.org/drawingml/2006/main" xmlns:p="http://schemas.openxmlformats.org/presentationml/2006/main" xmlns:r="http://schemas.openxmlformats.org/officeDocument/2006/relationships">
   <p:cSld>
     <p:spTree>
       <p:nvGrpSpPr>
@@ -6915,14 +7445,7 @@
         <p:cNvGrpSpPr/>
         <p:nvPr/>
       </p:nvGrpSpPr>
-      <p:grpSpPr>
-        <a:xfrm>
-          <a:off x="0" y="0"/>
-          <a:ext cx="0" cy="0"/>
-          <a:chOff x="0" y="0"/>
-          <a:chExt cx="0" cy="0"/>
-        </a:xfrm>
-      </p:grpSpPr>
+      <p:grpSpPr/>
       <p:sp>
         <p:nvSpPr>
           <p:cNvPr id="2" name="TextBox 1"/>
@@ -6932,7 +7455,7 @@
         <p:spPr>
           <a:xfrm>
             <a:off x="548640" y="256032"/>
-            <a:ext cx="9692640" cy="777240"/>
+            <a:ext cx="9600000" cy="777240"/>
           </a:xfrm>
           <a:prstGeom prst="rect">
             <a:avLst/>
@@ -6940,18 +7463,23 @@
           <a:noFill/>
         </p:spPr>
         <p:txBody>
-          <a:bodyPr wrap="none">
+          <a:bodyPr wrap="square">
             <a:spAutoFit/>
           </a:bodyPr>
           <a:lstStyle/>
           <a:p>
+            <a:pPr>
+              <a:spcAft>
+                <a:spcPts val="600"/>
+              </a:spcAft>
+            </a:pPr>
             <a:r>
               <a:rPr sz="2800" b="1">
                 <a:solidFill>
                   <a:srgbClr val="1B3A6B"/>
                 </a:solidFill>
               </a:rPr>
-              <a:t>What existing transfer baselines lose at the boundary</a:t>
+              <a:t>Dynamic conflicts occur anywhere, not only at junctions</a:t>
             </a:r>
           </a:p>
         </p:txBody>
@@ -6964,8 +7492,8 @@
         </p:nvSpPr>
         <p:spPr>
           <a:xfrm>
-            <a:off x="9692640" y="292608"/>
-            <a:ext cx="2286000" cy="457200"/>
+            <a:off x="10200000" y="292608"/>
+            <a:ext cx="1700000" cy="457200"/>
           </a:xfrm>
           <a:prstGeom prst="rect">
             <a:avLst/>
@@ -6973,33 +7501,88 @@
           <a:noFill/>
         </p:spPr>
         <p:txBody>
-          <a:bodyPr wrap="none">
+          <a:bodyPr wrap="square">
             <a:spAutoFit/>
           </a:bodyPr>
           <a:lstStyle/>
           <a:p>
-            <a:pPr algn="r"/>
+            <a:pPr algn="r">
+              <a:spcAft>
+                <a:spcPts val="600"/>
+              </a:spcAft>
+            </a:pPr>
             <a:r>
               <a:rPr sz="1300" b="1">
                 <a:solidFill>
                   <a:srgbClr val="B3A369"/>
                 </a:solidFill>
               </a:rPr>
-              <a:t>SQ3</a:t>
-            </a:r>
-          </a:p>
-        </p:txBody>
-      </p:sp>
-      <p:sp>
-        <p:nvSpPr>
-          <p:cNvPr id="4" name="TextBox 3"/>
+              <a:t>RQ3</a:t>
+            </a:r>
+          </a:p>
+        </p:txBody>
+      </p:sp>
+      <p:sp>
+        <p:nvSpPr>
+          <p:cNvPr id="4" name="Rounded Rectangle 3"/>
+          <p:cNvSpPr/>
+          <p:nvPr/>
+        </p:nvSpPr>
+        <p:spPr>
+          <a:xfrm>
+            <a:off x="10200000" y="760000"/>
+            <a:ext cx="1450000" cy="330000"/>
+          </a:xfrm>
+          <a:prstGeom prst="roundRect">
+            <a:avLst/>
+          </a:prstGeom>
+          <a:solidFill>
+            <a:srgbClr val="2E7D32"/>
+          </a:solidFill>
+          <a:ln>
+            <a:noFill/>
+          </a:ln>
+        </p:spPr>
+        <p:style>
+          <a:lnRef idx="1">
+            <a:schemeClr val="accent1"/>
+          </a:lnRef>
+          <a:fillRef idx="3">
+            <a:schemeClr val="accent1"/>
+          </a:fillRef>
+          <a:effectRef idx="2">
+            <a:schemeClr val="accent1"/>
+          </a:effectRef>
+          <a:fontRef idx="minor">
+            <a:schemeClr val="lt1"/>
+          </a:fontRef>
+        </p:style>
+        <p:txBody>
+          <a:bodyPr rtlCol="0" anchor="ctr"/>
+          <a:lstStyle/>
+          <a:p>
+            <a:pPr algn="ctr"/>
+            <a:r>
+              <a:rPr sz="1100" b="1">
+                <a:solidFill>
+                  <a:srgbClr val="FFFFFF"/>
+                </a:solidFill>
+              </a:rPr>
+              <a:t>Done</a:t>
+            </a:r>
+          </a:p>
+        </p:txBody>
+      </p:sp>
+      <p:sp>
+        <p:nvSpPr>
+          <p:cNvPr id="5" name="TextBox 4"/>
           <p:cNvSpPr txBox="1"/>
           <p:nvPr/>
         </p:nvSpPr>
         <p:spPr>
           <a:xfrm>
-            <a:off x="640080" y="1097280"/>
-            <a:ext cx="10972800" cy="1005840"/>
+            <a:off x="640080" y="1150000"/>
+            <a:ext cx="10972800" cy="3000000"/>
           </a:xfrm>
           <a:prstGeom prst="rect">
             <a:avLst/>
@@ -7014,53 +7597,334 @@
           <a:p>
             <a:pPr>
               <a:spcAft>
-                <a:spcPts val="500"/>
-              </a:spcAft>
-            </a:pPr>
-            <a:r>
-              <a:rPr sz="1400">
+                <a:spcPts val="800"/>
+              </a:spcAft>
+            </a:pPr>
+            <a:r>
+              <a:rPr sz="1600" b="0">
                 <a:solidFill>
                   <a:srgbClr val="212121"/>
                 </a:solidFill>
               </a:rPr>
-              <a:t>• Transfer at the crossing (EdgeWarp timing) strands the maneuver: the destination has no time to fold the track into its cycle before the decision.</a:t>
-            </a:r>
-          </a:p>
-          <a:p>
-            <a:pPr>
-              <a:spcAft>
-                <a:spcPts val="500"/>
-              </a:spcAft>
-            </a:pPr>
-            <a:r>
-              <a:rPr sz="1400">
+              <a:t>• Crossing-path and turning conflicts concentrate at intersections, so locales anchor there.</a:t>
+            </a:r>
+          </a:p>
+          <a:p>
+            <a:pPr>
+              <a:spcAft>
+                <a:spcPts val="800"/>
+              </a:spcAft>
+            </a:pPr>
+            <a:r>
+              <a:rPr sz="1600" b="0">
                 <a:solidFill>
                   <a:srgbClr val="212121"/>
                 </a:solidFill>
               </a:rPr>
-              <a:t>• In the first uniform sweep, completions rose with transfer lead up to about 4 s, and the lead was spent on destination-side warm-up, not the wire (payload about 1 KB, tens of milliseconds).</a:t>
-            </a:r>
-          </a:p>
-          <a:p>
-            <a:pPr>
-              <a:spcAft>
-                <a:spcPts val="500"/>
-              </a:spcAft>
-            </a:pPr>
-            <a:r>
-              <a:rPr sz="1400">
+              <a:t>• Queue tails, stopped vehicles, lane changes, and occlusions form on ordinary segments.</a:t>
+            </a:r>
+          </a:p>
+          <a:p>
+            <a:pPr>
+              <a:spcAft>
+                <a:spcPts val="800"/>
+              </a:spcAft>
+            </a:pPr>
+            <a:r>
+              <a:rPr sz="1600" b="0">
                 <a:solidFill>
                   <a:srgbClr val="212121"/>
                 </a:solidFill>
               </a:rPr>
-              <a:t>• PROVISIONAL: that sweep ran an unvalidated scenario geometry (the harness never set the scenario env contract; found Sep 3). The corrected re-baseline (v3) is running; relative orderings are re-measured before they are cited.</a:t>
+              <a:t>• Those segments are exactly where boundaries fall once locale size is capped.</a:t>
+            </a:r>
+          </a:p>
+          <a:p>
+            <a:pPr>
+              <a:spcAft>
+                <a:spcPts val="800"/>
+              </a:spcAft>
+            </a:pPr>
+            <a:r>
+              <a:rPr sz="1600" b="0">
+                <a:solidFill>
+                  <a:srgbClr val="212121"/>
+                </a:solidFill>
+              </a:rPr>
+              <a:t>• A boundary can separate the observations that build a track from the decision that uses it.</a:t>
+            </a:r>
+          </a:p>
+        </p:txBody>
+      </p:sp>
+      <p:sp>
+        <p:nvSpPr>
+          <p:cNvPr id="6" name="TextBox 5"/>
+          <p:cNvSpPr txBox="1"/>
+          <p:nvPr/>
+        </p:nvSpPr>
+        <p:spPr>
+          <a:xfrm>
+            <a:off x="640080" y="6263640"/>
+            <a:ext cx="10972800" cy="457200"/>
+          </a:xfrm>
+          <a:prstGeom prst="rect">
+            <a:avLst/>
+          </a:prstGeom>
+          <a:noFill/>
+        </p:spPr>
+        <p:txBody>
+          <a:bodyPr wrap="square">
+            <a:spAutoFit/>
+          </a:bodyPr>
+          <a:lstStyle/>
+          <a:p>
+            <a:pPr>
+              <a:spcAft>
+                <a:spcPts val="600"/>
+              </a:spcAft>
+            </a:pPr>
+            <a:r>
+              <a:rPr sz="1200" b="0">
+                <a:solidFill>
+                  <a:srgbClr val="B3A369"/>
+                </a:solidFill>
+              </a:rPr>
+              <a:t>Answers RQ3  ·  Evidence: NHTSA pre-crash typology for the maneuver families  ·  Missing: occurrence rate on the dense route</a:t>
+            </a:r>
+          </a:p>
+        </p:txBody>
+      </p:sp>
+    </p:spTree>
+  </p:cSld>
+  <p:clrMapOvr>
+    <a:masterClrMapping/>
+  </p:clrMapOvr>
+</p:sld>
+</file>
+
+<file path=ppt/slides/slide9.xml><?xml version="1.0" encoding="utf-8"?>
+<p:sld xmlns:a="http://schemas.openxmlformats.org/drawingml/2006/main" xmlns:p="http://schemas.openxmlformats.org/presentationml/2006/main" xmlns:r="http://schemas.openxmlformats.org/officeDocument/2006/relationships">
+  <p:cSld>
+    <p:spTree>
+      <p:nvGrpSpPr>
+        <p:cNvPr id="1" name=""/>
+        <p:cNvGrpSpPr/>
+        <p:nvPr/>
+      </p:nvGrpSpPr>
+      <p:grpSpPr/>
+      <p:sp>
+        <p:nvSpPr>
+          <p:cNvPr id="2" name="TextBox 1"/>
+          <p:cNvSpPr txBox="1"/>
+          <p:nvPr/>
+        </p:nvSpPr>
+        <p:spPr>
+          <a:xfrm>
+            <a:off x="548640" y="256032"/>
+            <a:ext cx="9600000" cy="777240"/>
+          </a:xfrm>
+          <a:prstGeom prst="rect">
+            <a:avLst/>
+          </a:prstGeom>
+          <a:noFill/>
+        </p:spPr>
+        <p:txBody>
+          <a:bodyPr wrap="square">
+            <a:spAutoFit/>
+          </a:bodyPr>
+          <a:lstStyle/>
+          <a:p>
+            <a:pPr>
+              <a:spcAft>
+                <a:spcPts val="600"/>
+              </a:spcAft>
+            </a:pPr>
+            <a:r>
+              <a:rPr sz="2800" b="1">
+                <a:solidFill>
+                  <a:srgbClr val="1B3A6B"/>
+                </a:solidFill>
+              </a:rPr>
+              <a:t>Reactive transfer is too late</a:t>
+            </a:r>
+          </a:p>
+        </p:txBody>
+      </p:sp>
+      <p:sp>
+        <p:nvSpPr>
+          <p:cNvPr id="3" name="TextBox 2"/>
+          <p:cNvSpPr txBox="1"/>
+          <p:nvPr/>
+        </p:nvSpPr>
+        <p:spPr>
+          <a:xfrm>
+            <a:off x="10200000" y="292608"/>
+            <a:ext cx="1700000" cy="457200"/>
+          </a:xfrm>
+          <a:prstGeom prst="rect">
+            <a:avLst/>
+          </a:prstGeom>
+          <a:noFill/>
+        </p:spPr>
+        <p:txBody>
+          <a:bodyPr wrap="square">
+            <a:spAutoFit/>
+          </a:bodyPr>
+          <a:lstStyle/>
+          <a:p>
+            <a:pPr algn="r">
+              <a:spcAft>
+                <a:spcPts val="600"/>
+              </a:spcAft>
+            </a:pPr>
+            <a:r>
+              <a:rPr sz="1300" b="1">
+                <a:solidFill>
+                  <a:srgbClr val="B3A369"/>
+                </a:solidFill>
+              </a:rPr>
+              <a:t>RQ3</a:t>
+            </a:r>
+          </a:p>
+        </p:txBody>
+      </p:sp>
+      <p:sp>
+        <p:nvSpPr>
+          <p:cNvPr id="4" name="Rounded Rectangle 3"/>
+          <p:cNvSpPr/>
+          <p:nvPr/>
+        </p:nvSpPr>
+        <p:spPr>
+          <a:xfrm>
+            <a:off x="10200000" y="760000"/>
+            <a:ext cx="1450000" cy="330000"/>
+          </a:xfrm>
+          <a:prstGeom prst="roundRect">
+            <a:avLst/>
+          </a:prstGeom>
+          <a:solidFill>
+            <a:srgbClr val="D68C00"/>
+          </a:solidFill>
+          <a:ln>
+            <a:noFill/>
+          </a:ln>
+        </p:spPr>
+        <p:style>
+          <a:lnRef idx="1">
+            <a:schemeClr val="accent1"/>
+          </a:lnRef>
+          <a:fillRef idx="3">
+            <a:schemeClr val="accent1"/>
+          </a:fillRef>
+          <a:effectRef idx="2">
+            <a:schemeClr val="accent1"/>
+          </a:effectRef>
+          <a:fontRef idx="minor">
+            <a:schemeClr val="lt1"/>
+          </a:fontRef>
+        </p:style>
+        <p:txBody>
+          <a:bodyPr rtlCol="0" anchor="ctr"/>
+          <a:lstStyle/>
+          <a:p>
+            <a:pPr algn="ctr"/>
+            <a:r>
+              <a:rPr sz="1100" b="1">
+                <a:solidFill>
+                  <a:srgbClr val="FFFFFF"/>
+                </a:solidFill>
+              </a:rPr>
+              <a:t>Provisional</a:t>
+            </a:r>
+          </a:p>
+        </p:txBody>
+      </p:sp>
+      <p:sp>
+        <p:nvSpPr>
+          <p:cNvPr id="5" name="TextBox 4"/>
+          <p:cNvSpPr txBox="1"/>
+          <p:nvPr/>
+        </p:nvSpPr>
+        <p:spPr>
+          <a:xfrm>
+            <a:off x="640080" y="1150000"/>
+            <a:ext cx="10972800" cy="2000000"/>
+          </a:xfrm>
+          <a:prstGeom prst="rect">
+            <a:avLst/>
+          </a:prstGeom>
+          <a:noFill/>
+        </p:spPr>
+        <p:txBody>
+          <a:bodyPr wrap="square">
+            <a:spAutoFit/>
+          </a:bodyPr>
+          <a:lstStyle/>
+          <a:p>
+            <a:pPr>
+              <a:spcAft>
+                <a:spcPts val="800"/>
+              </a:spcAft>
+            </a:pPr>
+            <a:r>
+              <a:rPr sz="1600" b="0">
+                <a:solidFill>
+                  <a:srgbClr val="212121"/>
+                </a:solidFill>
+              </a:rPr>
+              <a:t>• Transfer at the crossing leaves the destination no time to fold the track in.</a:t>
+            </a:r>
+          </a:p>
+          <a:p>
+            <a:pPr>
+              <a:spcAft>
+                <a:spcPts val="800"/>
+              </a:spcAft>
+            </a:pPr>
+            <a:r>
+              <a:rPr sz="1600" b="0">
+                <a:solidFill>
+                  <a:srgbClr val="212121"/>
+                </a:solidFill>
+              </a:rPr>
+              <a:t>• Completion rose with transfer lead up to about 4 s in the first sweep.</a:t>
+            </a:r>
+          </a:p>
+          <a:p>
+            <a:pPr>
+              <a:spcAft>
+                <a:spcPts val="800"/>
+              </a:spcAft>
+            </a:pPr>
+            <a:r>
+              <a:rPr sz="1600" b="0">
+                <a:solidFill>
+                  <a:srgbClr val="212121"/>
+                </a:solidFill>
+              </a:rPr>
+              <a:t>• The lead is spent on destination warm-up, not on the wire.</a:t>
+            </a:r>
+          </a:p>
+          <a:p>
+            <a:pPr>
+              <a:spcAft>
+                <a:spcPts val="800"/>
+              </a:spcAft>
+            </a:pPr>
+            <a:r>
+              <a:rPr sz="1600" b="0">
+                <a:solidFill>
+                  <a:srgbClr val="212121"/>
+                </a:solidFill>
+              </a:rPr>
+              <a:t>• That sweep ran an unvalidated scenario geometry and is being re-measured.</a:t>
             </a:r>
           </a:p>
         </p:txBody>
       </p:sp>
       <p:pic>
         <p:nvPicPr>
-          <p:cNvPr id="5" name="Picture 4" descr="fig_leadtime.png"/>
+          <p:cNvPr id="6" name="Picture 5" descr="image.png"/>
           <p:cNvPicPr>
             <a:picLocks noChangeAspect="1"/>
           </p:cNvPicPr>
@@ -7074,8 +7938,8 @@
         </p:blipFill>
         <p:spPr>
           <a:xfrm>
-            <a:off x="1645920" y="2240280"/>
-            <a:ext cx="8778240" cy="3434963"/>
+            <a:off x="1645920" y="2900000"/>
+            <a:ext cx="8305556" cy="3250000"/>
           </a:xfrm>
           <a:prstGeom prst="rect">
             <a:avLst/>
@@ -7084,7 +7948,7 @@
       </p:pic>
       <p:sp>
         <p:nvSpPr>
-          <p:cNvPr id="6" name="TextBox 5"/>
+          <p:cNvPr id="7" name="TextBox 6"/>
           <p:cNvSpPr txBox="1"/>
           <p:nvPr/>
         </p:nvSpPr>
@@ -7099,131 +7963,6 @@
           <a:noFill/>
         </p:spPr>
         <p:txBody>
-          <a:bodyPr wrap="none">
-            <a:spAutoFit/>
-          </a:bodyPr>
-          <a:lstStyle/>
-          <a:p>
-            <a:r>
-              <a:rPr sz="1300" i="1">
-                <a:solidFill>
-                  <a:srgbClr val="B3A369"/>
-                </a:solidFill>
-              </a:rPr>
-              <a:t>Ties to the study: SQ3/SQ4: the lead-time curve is re-baselined on the corrected scenario before any number is cited.</a:t>
-            </a:r>
-          </a:p>
-        </p:txBody>
-      </p:sp>
-    </p:spTree>
-  </p:cSld>
-  <p:clrMapOvr>
-    <a:masterClrMapping/>
-  </p:clrMapOvr>
-</p:sld>
-</file>
-
-<file path=ppt/slides/slide9.xml><?xml version="1.0" encoding="utf-8"?>
-<p:sld xmlns:a="http://schemas.openxmlformats.org/drawingml/2006/main" xmlns:r="http://schemas.openxmlformats.org/officeDocument/2006/relationships" xmlns:p="http://schemas.openxmlformats.org/presentationml/2006/main">
-  <p:cSld>
-    <p:spTree>
-      <p:nvGrpSpPr>
-        <p:cNvPr id="1" name=""/>
-        <p:cNvGrpSpPr/>
-        <p:nvPr/>
-      </p:nvGrpSpPr>
-      <p:grpSpPr>
-        <a:xfrm>
-          <a:off x="0" y="0"/>
-          <a:ext cx="0" cy="0"/>
-          <a:chOff x="0" y="0"/>
-          <a:chExt cx="0" cy="0"/>
-        </a:xfrm>
-      </p:grpSpPr>
-      <p:sp>
-        <p:nvSpPr>
-          <p:cNvPr id="2" name="TextBox 1"/>
-          <p:cNvSpPr txBox="1"/>
-          <p:nvPr/>
-        </p:nvSpPr>
-        <p:spPr>
-          <a:xfrm>
-            <a:off x="548640" y="256032"/>
-            <a:ext cx="9692640" cy="777240"/>
-          </a:xfrm>
-          <a:prstGeom prst="rect">
-            <a:avLst/>
-          </a:prstGeom>
-          <a:noFill/>
-        </p:spPr>
-        <p:txBody>
-          <a:bodyPr wrap="none">
-            <a:spAutoFit/>
-          </a:bodyPr>
-          <a:lstStyle/>
-          <a:p>
-            <a:r>
-              <a:rPr sz="2800" b="1">
-                <a:solidFill>
-                  <a:srgbClr val="1B3A6B"/>
-                </a:solidFill>
-              </a:rPr>
-              <a:t>The safety envelope must hold through the handoff</a:t>
-            </a:r>
-          </a:p>
-        </p:txBody>
-      </p:sp>
-      <p:sp>
-        <p:nvSpPr>
-          <p:cNvPr id="3" name="TextBox 2"/>
-          <p:cNvSpPr txBox="1"/>
-          <p:nvPr/>
-        </p:nvSpPr>
-        <p:spPr>
-          <a:xfrm>
-            <a:off x="9692640" y="292608"/>
-            <a:ext cx="2286000" cy="457200"/>
-          </a:xfrm>
-          <a:prstGeom prst="rect">
-            <a:avLst/>
-          </a:prstGeom>
-          <a:noFill/>
-        </p:spPr>
-        <p:txBody>
-          <a:bodyPr wrap="none">
-            <a:spAutoFit/>
-          </a:bodyPr>
-          <a:lstStyle/>
-          <a:p>
-            <a:pPr algn="r"/>
-            <a:r>
-              <a:rPr sz="1300" b="1">
-                <a:solidFill>
-                  <a:srgbClr val="B3A369"/>
-                </a:solidFill>
-              </a:rPr>
-              <a:t>SQ4</a:t>
-            </a:r>
-          </a:p>
-        </p:txBody>
-      </p:sp>
-      <p:sp>
-        <p:nvSpPr>
-          <p:cNvPr id="4" name="TextBox 3"/>
-          <p:cNvSpPr txBox="1"/>
-          <p:nvPr/>
-        </p:nvSpPr>
-        <p:spPr>
-          <a:xfrm>
-            <a:off x="640080" y="1097280"/>
-            <a:ext cx="10972800" cy="1737360"/>
-          </a:xfrm>
-          <a:prstGeom prst="rect">
-            <a:avLst/>
-          </a:prstGeom>
-          <a:noFill/>
-        </p:spPr>
-        <p:txBody>
           <a:bodyPr wrap="square">
             <a:spAutoFit/>
           </a:bodyPr>
@@ -7231,103 +7970,16 @@
           <a:p>
             <a:pPr>
               <a:spcAft>
-                <a:spcPts val="500"/>
-              </a:spcAft>
-            </a:pPr>
-            <a:r>
-              <a:rPr sz="1400">
-                <a:solidFill>
-                  <a:srgbClr val="212121"/>
-                </a:solidFill>
-              </a:rPr>
-              <a:t>• Freshness in four timestamps: observation t_o, snapshot t_s, forecast t_f, consumption t_c. Age at use is t_c - t_o. Invariant: t_c - t_o &lt;= tau(u), the maneuver budget (220 to 450 ms), through the ownership switch.</a:t>
-            </a:r>
-          </a:p>
-          <a:p>
-            <a:pPr>
-              <a:spcAft>
-                <a:spcPts val="500"/>
-              </a:spcAft>
-            </a:pPr>
-            <a:r>
-              <a:rPr sz="1400">
-                <a:solidFill>
-                  <a:srgbClr val="212121"/>
-                </a:solidFill>
-              </a:rPr>
-              <a:t>• Across the switch the age is: time since the last source observation + transfer + import and association + the destination's first refresh. The refresh term depends on load, so the lead is computed: transfer EMA + 3 edge cycles (0.6 s) + 0.35 s, capped at 2.5 s.</a:t>
-            </a:r>
-          </a:p>
-          <a:p>
-            <a:pPr>
-              <a:spcAft>
-                <a:spcPts val="500"/>
-              </a:spcAft>
-            </a:pPr>
-            <a:r>
-              <a:rPr sz="1400">
-                <a:solidFill>
-                  <a:srgbClr val="212121"/>
-                </a:solidFill>
-              </a:rPr>
-              <a:t>• Delivery is prepare + a final update at commit (the copy ages while the source keeps observing; the update closes the gap for about 1 KB). Authority moves with an epoch-fenced commit: consumers act only on the highest epoch, so single-writer holds under message loss.</a:t>
-            </a:r>
-          </a:p>
-        </p:txBody>
-      </p:sp>
-      <p:pic>
-        <p:nvPicPr>
-          <p:cNvPr id="5" name="Picture 4" descr="fig_budget_chain.png"/>
-          <p:cNvPicPr>
-            <a:picLocks noChangeAspect="1"/>
-          </p:cNvPicPr>
-          <p:nvPr/>
-        </p:nvPicPr>
-        <p:blipFill>
-          <a:blip r:embed="rId2"/>
-          <a:stretch>
-            <a:fillRect/>
-          </a:stretch>
-        </p:blipFill>
-        <p:spPr>
-          <a:xfrm>
-            <a:off x="1463040" y="3063240"/>
-            <a:ext cx="9326880" cy="3108960"/>
-          </a:xfrm>
-          <a:prstGeom prst="rect">
-            <a:avLst/>
-          </a:prstGeom>
-        </p:spPr>
-      </p:pic>
-      <p:sp>
-        <p:nvSpPr>
-          <p:cNvPr id="6" name="TextBox 5"/>
-          <p:cNvSpPr txBox="1"/>
-          <p:nvPr/>
-        </p:nvSpPr>
-        <p:spPr>
-          <a:xfrm>
-            <a:off x="640080" y="6263640"/>
-            <a:ext cx="10972800" cy="457200"/>
-          </a:xfrm>
-          <a:prstGeom prst="rect">
-            <a:avLst/>
-          </a:prstGeom>
-          <a:noFill/>
-        </p:spPr>
-        <p:txBody>
-          <a:bodyPr wrap="none">
-            <a:spAutoFit/>
-          </a:bodyPr>
-          <a:lstStyle/>
-          <a:p>
-            <a:r>
-              <a:rPr sz="1300" i="1">
+                <a:spcPts val="600"/>
+              </a:spcAft>
+            </a:pPr>
+            <a:r>
+              <a:rPr sz="1200" b="0">
                 <a:solidFill>
                   <a:srgbClr val="B3A369"/>
                 </a:solidFill>
               </a:rPr>
-              <a:t>Ties to the study: SQ4: the freshness invariant is the object under study; prepare, final update, and epoch-fenced commit are the mechanism that keeps it.</a:t>
+              <a:t>Answers RQ3  ·  Evidence: lead-time sweep, 10 seeds per point  ·  Missing: v3 re-baseline on the corrected scenario</a:t>
             </a:r>
           </a:p>
         </p:txBody>

--- a/docs/kb/decks/khonsu_story_2026-09-04.pptx
+++ b/docs/kb/decks/khonsu_story_2026-09-04.pptx
@@ -3111,8 +3111,8 @@
         </p:nvSpPr>
         <p:spPr>
           <a:xfrm>
-            <a:off x="900000" y="2300000"/>
-            <a:ext cx="10392000" cy="1000000"/>
+            <a:off x="900000" y="2200000"/>
+            <a:ext cx="10392000" cy="1100000"/>
           </a:xfrm>
           <a:prstGeom prst="rect">
             <a:avLst/>
@@ -3131,12 +3131,12 @@
               </a:spcAft>
             </a:pPr>
             <a:r>
-              <a:rPr sz="3600" b="1">
+              <a:rPr sz="3400" b="1">
                 <a:solidFill>
                   <a:srgbClr val="1B3A6B"/>
                 </a:solidFill>
               </a:rPr>
-              <a:t>Khonsu: Research Questions and Evaluation Plan</a:t>
+              <a:t>Khonsu: Scaling Cooperative Prediction Across Edge Locales</a:t>
             </a:r>
           </a:p>
         </p:txBody>
@@ -3174,7 +3174,7 @@
                   <a:srgbClr val="6E6E6E"/>
                 </a:solidFill>
               </a:rPr>
-              <a:t>Continuity for edge-hosted cooperative prediction across locale boundaries</a:t>
+              <a:t>Research questions and evaluation plan</a:t>
             </a:r>
           </a:p>
         </p:txBody>
@@ -3268,7 +3268,7 @@
                   <a:srgbClr val="1B3A6B"/>
                 </a:solidFill>
               </a:rPr>
-              <a:t>Handoff must preserve the planner's freshness budget</a:t>
+              <a:t>RQ3: how should a handoff work?</a:t>
             </a:r>
           </a:p>
         </p:txBody>
@@ -3306,72 +3306,21 @@
                   <a:srgbClr val="B3A369"/>
                 </a:solidFill>
               </a:rPr>
-              <a:t>RQ4</a:t>
-            </a:r>
-          </a:p>
-        </p:txBody>
-      </p:sp>
-      <p:sp>
-        <p:nvSpPr>
-          <p:cNvPr id="4" name="Rounded Rectangle 3"/>
-          <p:cNvSpPr/>
-          <p:nvPr/>
-        </p:nvSpPr>
-        <p:spPr>
-          <a:xfrm>
-            <a:off x="10200000" y="760000"/>
-            <a:ext cx="1450000" cy="330000"/>
-          </a:xfrm>
-          <a:prstGeom prst="roundRect">
-            <a:avLst/>
-          </a:prstGeom>
-          <a:solidFill>
-            <a:srgbClr val="1565C0"/>
-          </a:solidFill>
-          <a:ln>
-            <a:noFill/>
-          </a:ln>
-        </p:spPr>
-        <p:style>
-          <a:lnRef idx="1">
-            <a:schemeClr val="accent1"/>
-          </a:lnRef>
-          <a:fillRef idx="3">
-            <a:schemeClr val="accent1"/>
-          </a:fillRef>
-          <a:effectRef idx="2">
-            <a:schemeClr val="accent1"/>
-          </a:effectRef>
-          <a:fontRef idx="minor">
-            <a:schemeClr val="lt1"/>
-          </a:fontRef>
-        </p:style>
-        <p:txBody>
-          <a:bodyPr rtlCol="0" anchor="ctr"/>
-          <a:lstStyle/>
-          <a:p>
-            <a:pPr algn="ctr"/>
-            <a:r>
-              <a:rPr sz="1100" b="1">
-                <a:solidFill>
-                  <a:srgbClr val="FFFFFF"/>
-                </a:solidFill>
-              </a:rPr>
-              <a:t>Running</a:t>
-            </a:r>
-          </a:p>
-        </p:txBody>
-      </p:sp>
-      <p:sp>
-        <p:nvSpPr>
-          <p:cNvPr id="5" name="TextBox 4"/>
+              <a:t>RQ3</a:t>
+            </a:r>
+          </a:p>
+        </p:txBody>
+      </p:sp>
+      <p:sp>
+        <p:nvSpPr>
+          <p:cNvPr id="4" name="TextBox 3"/>
           <p:cNvSpPr txBox="1"/>
           <p:nvPr/>
         </p:nvSpPr>
         <p:spPr>
           <a:xfrm>
             <a:off x="640080" y="1150000"/>
-            <a:ext cx="10972800" cy="2000000"/>
+            <a:ext cx="10972800" cy="3600000"/>
           </a:xfrm>
           <a:prstGeom prst="rect">
             <a:avLst/>
@@ -3395,7 +3344,7 @@
                   <a:srgbClr val="212121"/>
                 </a:solidFill>
               </a:rPr>
-              <a:t>• Age at use is consumption time minus observation time.</a:t>
+              <a:t>• Cold start: does no state transfer violate the envelope?</a:t>
             </a:r>
           </a:p>
           <a:p>
@@ -3410,7 +3359,7 @@
                   <a:srgbClr val="212121"/>
                 </a:solidFill>
               </a:rPr>
-              <a:t>• It must stay below the maneuver budget of 220 to 450 ms through the handoff.</a:t>
+              <a:t>• Transfer at the boundary: is reactive migration early enough?</a:t>
             </a:r>
           </a:p>
           <a:p>
@@ -3425,7 +3374,7 @@
                   <a:srgbClr val="212121"/>
                 </a:solidFill>
               </a:rPr>
-              <a:t>• Across the handoff, age adds transfer, import, and the destination's first refresh.</a:t>
+              <a:t>• EdgeWarp timing: does radio-predicted migration give the predictor time to warm?</a:t>
             </a:r>
           </a:p>
           <a:p>
@@ -3440,38 +3389,59 @@
                   <a:srgbClr val="212121"/>
                 </a:solidFill>
               </a:rPr>
-              <a:t>• The lead is computed from that sum: transfer EMA + 0.6 s fold-in + 0.35 s, capped at 2.5 s.</a:t>
-            </a:r>
-          </a:p>
-        </p:txBody>
-      </p:sp>
-      <p:pic>
-        <p:nvPicPr>
-          <p:cNvPr id="6" name="Picture 5" descr="image.png"/>
-          <p:cNvPicPr>
-            <a:picLocks noChangeAspect="1"/>
-          </p:cNvPicPr>
-          <p:nvPr/>
-        </p:nvPicPr>
-        <p:blipFill>
-          <a:blip r:embed="rId2"/>
-          <a:stretch>
-            <a:fillRect/>
-          </a:stretch>
-        </p:blipFill>
-        <p:spPr>
-          <a:xfrm>
-            <a:off x="1463040" y="2900000"/>
-            <a:ext cx="9326880" cy="3108960"/>
-          </a:xfrm>
-          <a:prstGeom prst="rect">
-            <a:avLst/>
-          </a:prstGeom>
-        </p:spPr>
-      </p:pic>
-      <p:sp>
-        <p:nvSpPr>
-          <p:cNvPr id="7" name="TextBox 6"/>
+              <a:t>• Overlap: can both locale services simply run in an overlap region?</a:t>
+            </a:r>
+          </a:p>
+          <a:p>
+            <a:pPr>
+              <a:spcAft>
+                <a:spcPts val="800"/>
+              </a:spcAft>
+            </a:pPr>
+            <a:r>
+              <a:rPr sz="1600" b="0">
+                <a:solidFill>
+                  <a:srgbClr val="212121"/>
+                </a:solidFill>
+              </a:rPr>
+              <a:t>• Continuous replication: can we mirror everything and avoid predictive handoff?</a:t>
+            </a:r>
+          </a:p>
+          <a:p>
+            <a:pPr>
+              <a:spcAft>
+                <a:spcPts val="800"/>
+              </a:spcAft>
+            </a:pPr>
+            <a:r>
+              <a:rPr sz="1600" b="0">
+                <a:solidFill>
+                  <a:srgbClr val="212121"/>
+                </a:solidFill>
+              </a:rPr>
+              <a:t>• Khonsu: does forecast-driven prepare, final update, and ownership transfer preserve the envelope efficiently?</a:t>
+            </a:r>
+          </a:p>
+          <a:p>
+            <a:pPr>
+              <a:spcAft>
+                <a:spcPts val="800"/>
+              </a:spcAft>
+            </a:pPr>
+            <a:r>
+              <a:rPr sz="1600" b="0">
+                <a:solidFill>
+                  <a:srgbClr val="212121"/>
+                </a:solidFill>
+              </a:rPr>
+              <a:t>• Oracle: what is the upper bound?</a:t>
+            </a:r>
+          </a:p>
+        </p:txBody>
+      </p:sp>
+      <p:sp>
+        <p:nvSpPr>
+          <p:cNvPr id="5" name="TextBox 4"/>
           <p:cNvSpPr txBox="1"/>
           <p:nvPr/>
         </p:nvSpPr>
@@ -3502,7 +3472,7 @@
                   <a:srgbClr val="B3A369"/>
                 </a:solidFill>
               </a:rPr>
-              <a:t>Answers RQ4  ·  Evidence: age chain measured except the destination refresh term  ·  Missing: computed trigger vs fixed leads (v3)</a:t>
+              <a:t>All seven are alternative designs for cross-locale continuity, measured as arms of one experiment</a:t>
             </a:r>
           </a:p>
         </p:txBody>
@@ -3558,7 +3528,7 @@
                   <a:srgbClr val="1B3A6B"/>
                 </a:solidFill>
               </a:rPr>
-              <a:t>Ownership epochs keep one current owner under message loss</a:t>
+              <a:t>Khonsu mechanism</a:t>
             </a:r>
           </a:p>
         </p:txBody>
@@ -3596,7 +3566,7 @@
                   <a:srgbClr val="B3A369"/>
                 </a:solidFill>
               </a:rPr>
-              <a:t>RQ4</a:t>
+              <a:t>RQ3</a:t>
             </a:r>
           </a:p>
         </p:txBody>
@@ -3637,7 +3607,7 @@
           </a:fontRef>
         </p:style>
         <p:txBody>
-          <a:bodyPr rtlCol="0" anchor="ctr"/>
+          <a:bodyPr rtlCol="0" anchor="ctr" wrap="square"/>
           <a:lstStyle/>
           <a:p>
             <a:pPr algn="ctr"/>
@@ -3661,7 +3631,7 @@
         <p:spPr>
           <a:xfrm>
             <a:off x="640080" y="1150000"/>
-            <a:ext cx="10972800" cy="2600000"/>
+            <a:ext cx="10972800" cy="3600000"/>
           </a:xfrm>
           <a:prstGeom prst="rect">
             <a:avLst/>
@@ -3685,7 +3655,7 @@
                   <a:srgbClr val="212121"/>
                 </a:solidFill>
               </a:rPr>
-              <a:t>• Prepare moves the state early; the track is warm but unpublished.</a:t>
+              <a:t>• The predictor already forecasts each actor; a forecast that crosses the boundary names the actor, destination, and arrival time.</a:t>
             </a:r>
           </a:p>
           <a:p>
@@ -3700,6 +3670,21 @@
                   <a:srgbClr val="212121"/>
                 </a:solidFill>
               </a:rPr>
+              <a:t>• Prepare moves the temporal track state early; the track is warm but unpublished.</a:t>
+            </a:r>
+          </a:p>
+          <a:p>
+            <a:pPr>
+              <a:spcAft>
+                <a:spcPts val="800"/>
+              </a:spcAft>
+            </a:pPr>
+            <a:r>
+              <a:rPr sz="1600" b="0">
+                <a:solidFill>
+                  <a:srgbClr val="212121"/>
+                </a:solidFill>
+              </a:rPr>
               <a:t>• A final update at commit closes the gap while the source keeps observing.</a:t>
             </a:r>
           </a:p>
@@ -3715,7 +3700,7 @@
                   <a:srgbClr val="212121"/>
                 </a:solidFill>
               </a:rPr>
-              <a:t>• Every forecast carries an ownership epoch; planners accept only the highest.</a:t>
+              <a:t>• Every forecast carries an ownership epoch; planners accept only the highest, so one owner is consumed.</a:t>
             </a:r>
           </a:p>
           <a:p>
@@ -3730,7 +3715,7 @@
                   <a:srgbClr val="212121"/>
                 </a:solidFill>
               </a:rPr>
-              <a:t>• Eight fault scenarios verified: exactly one publishable epoch at every step.</a:t>
+              <a:t>• If the state cannot be imported safely, the track is marked cold and the planner falls back.</a:t>
             </a:r>
           </a:p>
         </p:txBody>
@@ -3768,7 +3753,7 @@
                   <a:srgbClr val="B3A369"/>
                 </a:solidFill>
               </a:rPr>
-              <a:t>Answers RQ4  ·  Evidence: ownership state machine, 8-scenario fault injection (Done)  ·  Missing: live fault arms with fencing on and off</a:t>
+              <a:t>Lead time is computed from the age chain: transfer EMA + destination fold-in + margin</a:t>
             </a:r>
           </a:p>
         </p:txBody>
@@ -3824,7 +3809,7 @@
                   <a:srgbClr val="1B3A6B"/>
                 </a:solidFill>
               </a:rPr>
-              <a:t>Overlap does not solve ownership consistency</a:t>
+              <a:t>RQ3: evidence so far</a:t>
             </a:r>
           </a:p>
         </p:txBody>
@@ -3862,7 +3847,7 @@
                   <a:srgbClr val="B3A369"/>
                 </a:solidFill>
               </a:rPr>
-              <a:t>RQ4</a:t>
+              <a:t>RQ3</a:t>
             </a:r>
           </a:p>
         </p:txBody>
@@ -3903,7 +3888,7 @@
           </a:fontRef>
         </p:style>
         <p:txBody>
-          <a:bodyPr rtlCol="0" anchor="ctr"/>
+          <a:bodyPr rtlCol="0" anchor="ctr" wrap="square"/>
           <a:lstStyle/>
           <a:p>
             <a:pPr algn="ctr"/>
@@ -3927,7 +3912,7 @@
         <p:spPr>
           <a:xfrm>
             <a:off x="640080" y="1150000"/>
-            <a:ext cx="10972800" cy="2000000"/>
+            <a:ext cx="10972800" cy="3600000"/>
           </a:xfrm>
           <a:prstGeom prst="rect">
             <a:avLst/>
@@ -3951,7 +3936,7 @@
                   <a:srgbClr val="212121"/>
                 </a:solidFill>
               </a:rPr>
-              <a:t>• Geometric overlap still requires an ownership handoff.</a:t>
+              <a:t>• Handoff microbenchmark: history beats one frame by a factor of 2.8 to 9.3 (Done).</a:t>
             </a:r>
           </a:p>
           <a:p>
@@ -3966,7 +3951,7 @@
                   <a:srgbClr val="212121"/>
                 </a:solidFill>
               </a:rPr>
-              <a:t>• Fixed-width overlap provides less lead time at higher speeds.</a:t>
+              <a:t>• Acceleration closed loop: snapshot 4/4 collide, history 3/4 clean (Done).</a:t>
             </a:r>
           </a:p>
           <a:p>
@@ -3981,7 +3966,7 @@
                   <a:srgbClr val="212121"/>
                 </a:solidFill>
               </a:rPr>
-              <a:t>• Continuous replication raises backhaul cost and, in the first sweep, changed nothing.</a:t>
+              <a:t>• Ownership protocol: 8 fault scenarios, one publishable epoch at every step (Done).</a:t>
             </a:r>
           </a:p>
           <a:p>
@@ -3996,7 +3981,7 @@
                   <a:srgbClr val="212121"/>
                 </a:solidFill>
               </a:rPr>
-              <a:t>• Dual authority creates conflicting predictions for the same actor.</a:t>
+              <a:t>• Lead-time sweep: more lead, more completions up to 4 s, on an unvalidated geometry (Provisional, v3 running).</a:t>
             </a:r>
           </a:p>
         </p:txBody>
@@ -4017,8 +4002,8 @@
         </p:blipFill>
         <p:spPr>
           <a:xfrm>
-            <a:off x="2194560" y="2900000"/>
-            <a:ext cx="7680960" cy="2838616"/>
+            <a:off x="1645920" y="2900000"/>
+            <a:ext cx="8305556" cy="3250000"/>
           </a:xfrm>
           <a:prstGeom prst="rect">
             <a:avLst/>
@@ -4058,7 +4043,7 @@
                   <a:srgbClr val="B3A369"/>
                 </a:solidFill>
               </a:rPr>
-              <a:t>Answers RQ4  ·  Evidence: band and mirroring arms (Provisional), safety-envelope disagreement measurement  ·  Missing: dual-authority arm</a:t>
+              <a:t>Missing: computed trigger vs fixed leads on the corrected scenario; live fault arms with the epoch check on and off</a:t>
             </a:r>
           </a:p>
         </p:txBody>
@@ -4114,7 +4099,7 @@
                   <a:srgbClr val="1B3A6B"/>
                 </a:solidFill>
               </a:rPr>
-              <a:t>Scope</a:t>
+              <a:t>Overlap: how much is enough, what does it cost?</a:t>
             </a:r>
           </a:p>
         </p:txBody>
@@ -4127,8 +4112,8 @@
         </p:nvSpPr>
         <p:spPr>
           <a:xfrm>
-            <a:off x="640080" y="1150000"/>
-            <a:ext cx="10972800" cy="3200000"/>
+            <a:off x="10200000" y="292608"/>
+            <a:ext cx="1700000" cy="457200"/>
           </a:xfrm>
           <a:prstGeom prst="rect">
             <a:avLst/>
@@ -4141,92 +4126,83 @@
           </a:bodyPr>
           <a:lstStyle/>
           <a:p>
-            <a:pPr>
-              <a:spcAft>
-                <a:spcPts val="800"/>
-              </a:spcAft>
-            </a:pPr>
-            <a:r>
-              <a:rPr sz="1600" b="0">
-                <a:solidFill>
-                  <a:srgbClr val="212121"/>
-                </a:solidFill>
-              </a:rPr>
-              <a:t>• In: the freshness condition through ownership transfer and its measurement.</a:t>
-            </a:r>
-          </a:p>
-          <a:p>
-            <a:pPr>
-              <a:spcAft>
-                <a:spcPts val="800"/>
-              </a:spcAft>
-            </a:pPr>
-            <a:r>
-              <a:rPr sz="1600" b="0">
-                <a:solidFill>
-                  <a:srgbClr val="212121"/>
-                </a:solidFill>
-              </a:rPr>
-              <a:t>• In: forecast-driven trigger with computed lead; prepare, final update, commit with ownership epochs.</a:t>
-            </a:r>
-          </a:p>
-          <a:p>
-            <a:pPr>
-              <a:spcAft>
-                <a:spcPts val="800"/>
-              </a:spcAft>
-            </a:pPr>
-            <a:r>
-              <a:rPr sz="1600" b="0">
-                <a:solidFill>
-                  <a:srgbClr val="212121"/>
-                </a:solidFill>
-              </a:rPr>
-              <a:t>• In: one record for a state-space tracker and a Kalman tracker; the alternatives as measured arms.</a:t>
-            </a:r>
-          </a:p>
-          <a:p>
-            <a:pPr>
-              <a:spcAft>
-                <a:spcPts val="800"/>
-              </a:spcAft>
-            </a:pPr>
-            <a:r>
-              <a:rPr sz="1600" b="0">
-                <a:solidFill>
-                  <a:srgbClr val="212121"/>
-                </a:solidFill>
-              </a:rPr>
-              <a:t>• Out: communication scheduling, cross-model state translation, field deployment.</a:t>
-            </a:r>
-          </a:p>
-          <a:p>
-            <a:pPr>
-              <a:spcAft>
-                <a:spcPts val="800"/>
-              </a:spcAft>
-            </a:pPr>
-            <a:r>
-              <a:rPr sz="1600" b="0">
-                <a:solidFill>
-                  <a:srgbClr val="212121"/>
-                </a:solidFill>
-              </a:rPr>
-              <a:t>• Limitation unless it lands: cross-locale association for unconnected actors.</a:t>
-            </a:r>
-          </a:p>
-        </p:txBody>
-      </p:sp>
-      <p:sp>
-        <p:nvSpPr>
-          <p:cNvPr id="4" name="TextBox 3"/>
+            <a:pPr algn="r">
+              <a:spcAft>
+                <a:spcPts val="600"/>
+              </a:spcAft>
+            </a:pPr>
+            <a:r>
+              <a:rPr sz="1300" b="1">
+                <a:solidFill>
+                  <a:srgbClr val="B3A369"/>
+                </a:solidFill>
+              </a:rPr>
+              <a:t>RQ3</a:t>
+            </a:r>
+          </a:p>
+        </p:txBody>
+      </p:sp>
+      <p:sp>
+        <p:nvSpPr>
+          <p:cNvPr id="4" name="Rounded Rectangle 3"/>
+          <p:cNvSpPr/>
+          <p:nvPr/>
+        </p:nvSpPr>
+        <p:spPr>
+          <a:xfrm>
+            <a:off x="10200000" y="760000"/>
+            <a:ext cx="1450000" cy="330000"/>
+          </a:xfrm>
+          <a:prstGeom prst="roundRect">
+            <a:avLst/>
+          </a:prstGeom>
+          <a:solidFill>
+            <a:srgbClr val="D68C00"/>
+          </a:solidFill>
+          <a:ln>
+            <a:noFill/>
+          </a:ln>
+        </p:spPr>
+        <p:style>
+          <a:lnRef idx="1">
+            <a:schemeClr val="accent1"/>
+          </a:lnRef>
+          <a:fillRef idx="3">
+            <a:schemeClr val="accent1"/>
+          </a:fillRef>
+          <a:effectRef idx="2">
+            <a:schemeClr val="accent1"/>
+          </a:effectRef>
+          <a:fontRef idx="minor">
+            <a:schemeClr val="lt1"/>
+          </a:fontRef>
+        </p:style>
+        <p:txBody>
+          <a:bodyPr rtlCol="0" anchor="ctr" wrap="square"/>
+          <a:lstStyle/>
+          <a:p>
+            <a:pPr algn="ctr"/>
+            <a:r>
+              <a:rPr sz="1100" b="1">
+                <a:solidFill>
+                  <a:srgbClr val="FFFFFF"/>
+                </a:solidFill>
+              </a:rPr>
+              <a:t>Provisional</a:t>
+            </a:r>
+          </a:p>
+        </p:txBody>
+      </p:sp>
+      <p:sp>
+        <p:nvSpPr>
+          <p:cNvPr id="5" name="TextBox 4"/>
           <p:cNvSpPr txBox="1"/>
           <p:nvPr/>
         </p:nvSpPr>
         <p:spPr>
           <a:xfrm>
-            <a:off x="640080" y="6263640"/>
-            <a:ext cx="10972800" cy="457200"/>
+            <a:off x="640080" y="1150000"/>
+            <a:ext cx="10972800" cy="3600000"/>
           </a:xfrm>
           <a:prstGeom prst="rect">
             <a:avLst/>
@@ -4241,6 +4217,113 @@
           <a:p>
             <a:pPr>
               <a:spcAft>
+                <a:spcPts val="800"/>
+              </a:spcAft>
+            </a:pPr>
+            <a:r>
+              <a:rPr sz="1600" b="0">
+                <a:solidFill>
+                  <a:srgbClr val="212121"/>
+                </a:solidFill>
+              </a:rPr>
+              <a:t>• Sensing overlap only: both locales see the boundary, but the state must still move.</a:t>
+            </a:r>
+          </a:p>
+          <a:p>
+            <a:pPr>
+              <a:spcAft>
+                <a:spcPts val="800"/>
+              </a:spcAft>
+            </a:pPr>
+            <a:r>
+              <a:rPr sz="1600" b="0">
+                <a:solidFill>
+                  <a:srgbClr val="212121"/>
+                </a:solidFill>
+              </a:rPr>
+              <a:t>• Compute overlap (make-before-break): geometric prefetching, compared directly against forecast triggering.</a:t>
+            </a:r>
+          </a:p>
+          <a:p>
+            <a:pPr>
+              <a:spcAft>
+                <a:spcPts val="800"/>
+              </a:spcAft>
+            </a:pPr>
+            <a:r>
+              <a:rPr sz="1600" b="0">
+                <a:solidFill>
+                  <a:srgbClr val="212121"/>
+                </a:solidFill>
+              </a:rPr>
+              <a:t>• Dual authority: two forecasts for the same actor need a conflict-resolution rule.</a:t>
+            </a:r>
+          </a:p>
+          <a:p>
+            <a:pPr>
+              <a:spcAft>
+                <a:spcPts val="800"/>
+              </a:spcAft>
+            </a:pPr>
+            <a:r>
+              <a:rPr sz="1600" b="0">
+                <a:solidFill>
+                  <a:srgbClr val="212121"/>
+                </a:solidFill>
+              </a:rPr>
+              <a:t>• First sweep: replication doubled bytes and changed nothing (Provisional).</a:t>
+            </a:r>
+          </a:p>
+        </p:txBody>
+      </p:sp>
+      <p:pic>
+        <p:nvPicPr>
+          <p:cNvPr id="6" name="Picture 5" descr="image.png"/>
+          <p:cNvPicPr>
+            <a:picLocks noChangeAspect="1"/>
+          </p:cNvPicPr>
+          <p:nvPr/>
+        </p:nvPicPr>
+        <p:blipFill>
+          <a:blip r:embed="rId2"/>
+          <a:stretch>
+            <a:fillRect/>
+          </a:stretch>
+        </p:blipFill>
+        <p:spPr>
+          <a:xfrm>
+            <a:off x="2194560" y="2900000"/>
+            <a:ext cx="7680960" cy="2838616"/>
+          </a:xfrm>
+          <a:prstGeom prst="rect">
+            <a:avLst/>
+          </a:prstGeom>
+        </p:spPr>
+      </p:pic>
+      <p:sp>
+        <p:nvSpPr>
+          <p:cNvPr id="7" name="TextBox 6"/>
+          <p:cNvSpPr txBox="1"/>
+          <p:nvPr/>
+        </p:nvSpPr>
+        <p:spPr>
+          <a:xfrm>
+            <a:off x="640080" y="6263640"/>
+            <a:ext cx="10972800" cy="457200"/>
+          </a:xfrm>
+          <a:prstGeom prst="rect">
+            <a:avLst/>
+          </a:prstGeom>
+          <a:noFill/>
+        </p:spPr>
+        <p:txBody>
+          <a:bodyPr wrap="square">
+            <a:spAutoFit/>
+          </a:bodyPr>
+          <a:lstStyle/>
+          <a:p>
+            <a:pPr>
+              <a:spcAft>
                 <a:spcPts val="600"/>
               </a:spcAft>
             </a:pPr>
@@ -4250,7 +4333,7 @@
                   <a:srgbClr val="B3A369"/>
                 </a:solidFill>
               </a:rPr>
-              <a:t>Paper: NSDI'27 fall cycle, abstracts Sep 10, papers Sep 17  ·  13 pages with references before results</a:t>
+              <a:t>Evidence: band and mirroring arms (Provisional)  ·  Missing: dual-authority arm; overlap width sweep</a:t>
             </a:r>
           </a:p>
         </p:txBody>
@@ -4306,7 +4389,7 @@
                   <a:srgbClr val="1B3A6B"/>
                 </a:solidFill>
               </a:rPr>
-              <a:t>Evaluation dimensions</a:t>
+              <a:t>RQ4: what happens across an actual corridor?</a:t>
             </a:r>
           </a:p>
         </p:txBody>
@@ -4344,22 +4427,1881 @@
                   <a:srgbClr val="B3A369"/>
                 </a:solidFill>
               </a:rPr>
-              <a:t>RQ5</a:t>
+              <a:t>RQ4</a:t>
+            </a:r>
+          </a:p>
+        </p:txBody>
+      </p:sp>
+      <p:sp>
+        <p:nvSpPr>
+          <p:cNvPr id="4" name="Rounded Rectangle 3"/>
+          <p:cNvSpPr/>
+          <p:nvPr/>
+        </p:nvSpPr>
+        <p:spPr>
+          <a:xfrm>
+            <a:off x="10200000" y="760000"/>
+            <a:ext cx="1450000" cy="330000"/>
+          </a:xfrm>
+          <a:prstGeom prst="roundRect">
+            <a:avLst/>
+          </a:prstGeom>
+          <a:solidFill>
+            <a:srgbClr val="787878"/>
+          </a:solidFill>
+          <a:ln>
+            <a:noFill/>
+          </a:ln>
+        </p:spPr>
+        <p:style>
+          <a:lnRef idx="1">
+            <a:schemeClr val="accent1"/>
+          </a:lnRef>
+          <a:fillRef idx="3">
+            <a:schemeClr val="accent1"/>
+          </a:fillRef>
+          <a:effectRef idx="2">
+            <a:schemeClr val="accent1"/>
+          </a:effectRef>
+          <a:fontRef idx="minor">
+            <a:schemeClr val="lt1"/>
+          </a:fontRef>
+        </p:style>
+        <p:txBody>
+          <a:bodyPr rtlCol="0" anchor="ctr" wrap="square"/>
+          <a:lstStyle/>
+          <a:p>
+            <a:pPr algn="ctr"/>
+            <a:r>
+              <a:rPr sz="1100" b="1">
+                <a:solidFill>
+                  <a:srgbClr val="FFFFFF"/>
+                </a:solidFill>
+              </a:rPr>
+              <a:t>Needed</a:t>
+            </a:r>
+          </a:p>
+        </p:txBody>
+      </p:sp>
+      <p:sp>
+        <p:nvSpPr>
+          <p:cNvPr id="5" name="TextBox 4"/>
+          <p:cNvSpPr txBox="1"/>
+          <p:nvPr/>
+        </p:nvSpPr>
+        <p:spPr>
+          <a:xfrm>
+            <a:off x="640080" y="1100000"/>
+            <a:ext cx="10972800" cy="800000"/>
+          </a:xfrm>
+          <a:prstGeom prst="rect">
+            <a:avLst/>
+          </a:prstGeom>
+          <a:noFill/>
+        </p:spPr>
+        <p:txBody>
+          <a:bodyPr wrap="square">
+            <a:spAutoFit/>
+          </a:bodyPr>
+          <a:lstStyle/>
+          <a:p>
+            <a:pPr>
+              <a:spcAft>
+                <a:spcPts val="800"/>
+              </a:spcAft>
+            </a:pPr>
+            <a:r>
+              <a:rPr sz="1600" b="0">
+                <a:solidFill>
+                  <a:srgbClr val="212121"/>
+                </a:solidFill>
+              </a:rPr>
+              <a:t>• Four locales, three boundaries, one ego driving the whole corridor.</a:t>
+            </a:r>
+          </a:p>
+          <a:p>
+            <a:pPr>
+              <a:spcAft>
+                <a:spcPts val="800"/>
+              </a:spcAft>
+            </a:pPr>
+            <a:r>
+              <a:rPr sz="1600" b="0">
+                <a:solidFill>
+                  <a:srgbClr val="212121"/>
+                </a:solidFill>
+              </a:rPr>
+              <a:t>• Conflicts at intersection centers and, deliberately, between them.</a:t>
+            </a:r>
+          </a:p>
+        </p:txBody>
+      </p:sp>
+      <p:sp>
+        <p:nvSpPr>
+          <p:cNvPr id="6" name="Rectangle 5"/>
+          <p:cNvSpPr/>
+          <p:nvPr/>
+        </p:nvSpPr>
+        <p:spPr>
+          <a:xfrm>
+            <a:off x="600000" y="2300000"/>
+            <a:ext cx="2600000" cy="2600000"/>
+          </a:xfrm>
+          <a:prstGeom prst="rect">
+            <a:avLst/>
+          </a:prstGeom>
+          <a:solidFill>
+            <a:srgbClr val="E1E8F5"/>
+          </a:solidFill>
+          <a:ln w="15875">
+            <a:solidFill>
+              <a:srgbClr val="1B3A6B"/>
+            </a:solidFill>
+            <a:prstDash val="dash"/>
+          </a:ln>
+        </p:spPr>
+        <p:style>
+          <a:lnRef idx="1">
+            <a:schemeClr val="accent1"/>
+          </a:lnRef>
+          <a:fillRef idx="3">
+            <a:schemeClr val="accent1"/>
+          </a:fillRef>
+          <a:effectRef idx="2">
+            <a:schemeClr val="accent1"/>
+          </a:effectRef>
+          <a:fontRef idx="minor">
+            <a:schemeClr val="lt1"/>
+          </a:fontRef>
+        </p:style>
+        <p:txBody>
+          <a:bodyPr rtlCol="0" anchor="ctr"/>
+          <a:lstStyle/>
+          <a:p>
+            <a:pPr algn="ctr"/>
+          </a:p>
+        </p:txBody>
+      </p:sp>
+      <p:sp>
+        <p:nvSpPr>
+          <p:cNvPr id="7" name="TextBox 6"/>
+          <p:cNvSpPr txBox="1"/>
+          <p:nvPr/>
+        </p:nvSpPr>
+        <p:spPr>
+          <a:xfrm>
+            <a:off x="660000" y="2330000"/>
+            <a:ext cx="1500000" cy="380000"/>
+          </a:xfrm>
+          <a:prstGeom prst="rect">
+            <a:avLst/>
+          </a:prstGeom>
+          <a:noFill/>
+        </p:spPr>
+        <p:txBody>
+          <a:bodyPr wrap="square">
+            <a:spAutoFit/>
+          </a:bodyPr>
+          <a:lstStyle/>
+          <a:p>
+            <a:pPr>
+              <a:spcAft>
+                <a:spcPts val="600"/>
+              </a:spcAft>
+            </a:pPr>
+            <a:r>
+              <a:rPr sz="1300" b="1">
+                <a:solidFill>
+                  <a:srgbClr val="1B3A6B"/>
+                </a:solidFill>
+              </a:rPr>
+              <a:t>Locale A</a:t>
+            </a:r>
+          </a:p>
+        </p:txBody>
+      </p:sp>
+      <p:sp>
+        <p:nvSpPr>
+          <p:cNvPr id="8" name="Rectangle 7"/>
+          <p:cNvSpPr/>
+          <p:nvPr/>
+        </p:nvSpPr>
+        <p:spPr>
+          <a:xfrm>
+            <a:off x="1700000" y="2650000"/>
+            <a:ext cx="400000" cy="380000"/>
+          </a:xfrm>
+          <a:prstGeom prst="rect">
+            <a:avLst/>
+          </a:prstGeom>
+          <a:solidFill>
+            <a:srgbClr val="6E6E6E"/>
+          </a:solidFill>
+          <a:ln>
+            <a:noFill/>
+          </a:ln>
+        </p:spPr>
+        <p:style>
+          <a:lnRef idx="1">
+            <a:schemeClr val="accent1"/>
+          </a:lnRef>
+          <a:fillRef idx="3">
+            <a:schemeClr val="accent1"/>
+          </a:fillRef>
+          <a:effectRef idx="2">
+            <a:schemeClr val="accent1"/>
+          </a:effectRef>
+          <a:fontRef idx="minor">
+            <a:schemeClr val="lt1"/>
+          </a:fontRef>
+        </p:style>
+        <p:txBody>
+          <a:bodyPr rtlCol="0" anchor="ctr" wrap="square"/>
+          <a:lstStyle/>
+          <a:p>
+            <a:pPr algn="ctr"/>
+            <a:r>
+              <a:rPr sz="900" b="0">
+                <a:solidFill>
+                  <a:srgbClr val="FFFFFF"/>
+                </a:solidFill>
+              </a:rPr>
+              <a:t>RSU</a:t>
+            </a:r>
+          </a:p>
+        </p:txBody>
+      </p:sp>
+      <p:sp>
+        <p:nvSpPr>
+          <p:cNvPr id="9" name="Rectangle 8"/>
+          <p:cNvSpPr/>
+          <p:nvPr/>
+        </p:nvSpPr>
+        <p:spPr>
+          <a:xfrm>
+            <a:off x="1750000" y="3200000"/>
+            <a:ext cx="300000" cy="1500000"/>
+          </a:xfrm>
+          <a:prstGeom prst="rect">
+            <a:avLst/>
+          </a:prstGeom>
+          <a:solidFill>
+            <a:srgbClr val="D7D7D7"/>
+          </a:solidFill>
+          <a:ln>
+            <a:noFill/>
+          </a:ln>
+        </p:spPr>
+        <p:style>
+          <a:lnRef idx="1">
+            <a:schemeClr val="accent1"/>
+          </a:lnRef>
+          <a:fillRef idx="3">
+            <a:schemeClr val="accent1"/>
+          </a:fillRef>
+          <a:effectRef idx="2">
+            <a:schemeClr val="accent1"/>
+          </a:effectRef>
+          <a:fontRef idx="minor">
+            <a:schemeClr val="lt1"/>
+          </a:fontRef>
+        </p:style>
+        <p:txBody>
+          <a:bodyPr rtlCol="0" anchor="ctr"/>
+          <a:lstStyle/>
+          <a:p>
+            <a:pPr algn="ctr"/>
+          </a:p>
+        </p:txBody>
+      </p:sp>
+      <p:sp>
+        <p:nvSpPr>
+          <p:cNvPr id="10" name="Rectangle 9"/>
+          <p:cNvSpPr/>
+          <p:nvPr/>
+        </p:nvSpPr>
+        <p:spPr>
+          <a:xfrm>
+            <a:off x="3350000" y="2300000"/>
+            <a:ext cx="2600000" cy="2600000"/>
+          </a:xfrm>
+          <a:prstGeom prst="rect">
+            <a:avLst/>
+          </a:prstGeom>
+          <a:solidFill>
+            <a:srgbClr val="FCECD6"/>
+          </a:solidFill>
+          <a:ln w="15875">
+            <a:solidFill>
+              <a:srgbClr val="CC7814"/>
+            </a:solidFill>
+            <a:prstDash val="dash"/>
+          </a:ln>
+        </p:spPr>
+        <p:style>
+          <a:lnRef idx="1">
+            <a:schemeClr val="accent1"/>
+          </a:lnRef>
+          <a:fillRef idx="3">
+            <a:schemeClr val="accent1"/>
+          </a:fillRef>
+          <a:effectRef idx="2">
+            <a:schemeClr val="accent1"/>
+          </a:effectRef>
+          <a:fontRef idx="minor">
+            <a:schemeClr val="lt1"/>
+          </a:fontRef>
+        </p:style>
+        <p:txBody>
+          <a:bodyPr rtlCol="0" anchor="ctr"/>
+          <a:lstStyle/>
+          <a:p>
+            <a:pPr algn="ctr"/>
+          </a:p>
+        </p:txBody>
+      </p:sp>
+      <p:sp>
+        <p:nvSpPr>
+          <p:cNvPr id="11" name="TextBox 10"/>
+          <p:cNvSpPr txBox="1"/>
+          <p:nvPr/>
+        </p:nvSpPr>
+        <p:spPr>
+          <a:xfrm>
+            <a:off x="3410000" y="2330000"/>
+            <a:ext cx="1500000" cy="380000"/>
+          </a:xfrm>
+          <a:prstGeom prst="rect">
+            <a:avLst/>
+          </a:prstGeom>
+          <a:noFill/>
+        </p:spPr>
+        <p:txBody>
+          <a:bodyPr wrap="square">
+            <a:spAutoFit/>
+          </a:bodyPr>
+          <a:lstStyle/>
+          <a:p>
+            <a:pPr>
+              <a:spcAft>
+                <a:spcPts val="600"/>
+              </a:spcAft>
+            </a:pPr>
+            <a:r>
+              <a:rPr sz="1300" b="1">
+                <a:solidFill>
+                  <a:srgbClr val="CC7814"/>
+                </a:solidFill>
+              </a:rPr>
+              <a:t>Locale B</a:t>
+            </a:r>
+          </a:p>
+        </p:txBody>
+      </p:sp>
+      <p:sp>
+        <p:nvSpPr>
+          <p:cNvPr id="12" name="Rectangle 11"/>
+          <p:cNvSpPr/>
+          <p:nvPr/>
+        </p:nvSpPr>
+        <p:spPr>
+          <a:xfrm>
+            <a:off x="4450000" y="2650000"/>
+            <a:ext cx="400000" cy="380000"/>
+          </a:xfrm>
+          <a:prstGeom prst="rect">
+            <a:avLst/>
+          </a:prstGeom>
+          <a:solidFill>
+            <a:srgbClr val="6E6E6E"/>
+          </a:solidFill>
+          <a:ln>
+            <a:noFill/>
+          </a:ln>
+        </p:spPr>
+        <p:style>
+          <a:lnRef idx="1">
+            <a:schemeClr val="accent1"/>
+          </a:lnRef>
+          <a:fillRef idx="3">
+            <a:schemeClr val="accent1"/>
+          </a:fillRef>
+          <a:effectRef idx="2">
+            <a:schemeClr val="accent1"/>
+          </a:effectRef>
+          <a:fontRef idx="minor">
+            <a:schemeClr val="lt1"/>
+          </a:fontRef>
+        </p:style>
+        <p:txBody>
+          <a:bodyPr rtlCol="0" anchor="ctr" wrap="square"/>
+          <a:lstStyle/>
+          <a:p>
+            <a:pPr algn="ctr"/>
+            <a:r>
+              <a:rPr sz="900" b="0">
+                <a:solidFill>
+                  <a:srgbClr val="FFFFFF"/>
+                </a:solidFill>
+              </a:rPr>
+              <a:t>RSU</a:t>
+            </a:r>
+          </a:p>
+        </p:txBody>
+      </p:sp>
+      <p:sp>
+        <p:nvSpPr>
+          <p:cNvPr id="13" name="Rectangle 12"/>
+          <p:cNvSpPr/>
+          <p:nvPr/>
+        </p:nvSpPr>
+        <p:spPr>
+          <a:xfrm>
+            <a:off x="4500000" y="3200000"/>
+            <a:ext cx="300000" cy="1500000"/>
+          </a:xfrm>
+          <a:prstGeom prst="rect">
+            <a:avLst/>
+          </a:prstGeom>
+          <a:solidFill>
+            <a:srgbClr val="D7D7D7"/>
+          </a:solidFill>
+          <a:ln>
+            <a:noFill/>
+          </a:ln>
+        </p:spPr>
+        <p:style>
+          <a:lnRef idx="1">
+            <a:schemeClr val="accent1"/>
+          </a:lnRef>
+          <a:fillRef idx="3">
+            <a:schemeClr val="accent1"/>
+          </a:fillRef>
+          <a:effectRef idx="2">
+            <a:schemeClr val="accent1"/>
+          </a:effectRef>
+          <a:fontRef idx="minor">
+            <a:schemeClr val="lt1"/>
+          </a:fontRef>
+        </p:style>
+        <p:txBody>
+          <a:bodyPr rtlCol="0" anchor="ctr"/>
+          <a:lstStyle/>
+          <a:p>
+            <a:pPr algn="ctr"/>
+          </a:p>
+        </p:txBody>
+      </p:sp>
+      <p:sp>
+        <p:nvSpPr>
+          <p:cNvPr id="14" name="Rectangle 13"/>
+          <p:cNvSpPr/>
+          <p:nvPr/>
+        </p:nvSpPr>
+        <p:spPr>
+          <a:xfrm>
+            <a:off x="6100000" y="2300000"/>
+            <a:ext cx="2600000" cy="2600000"/>
+          </a:xfrm>
+          <a:prstGeom prst="rect">
+            <a:avLst/>
+          </a:prstGeom>
+          <a:solidFill>
+            <a:srgbClr val="E1E8F5"/>
+          </a:solidFill>
+          <a:ln w="15875">
+            <a:solidFill>
+              <a:srgbClr val="1B3A6B"/>
+            </a:solidFill>
+            <a:prstDash val="dash"/>
+          </a:ln>
+        </p:spPr>
+        <p:style>
+          <a:lnRef idx="1">
+            <a:schemeClr val="accent1"/>
+          </a:lnRef>
+          <a:fillRef idx="3">
+            <a:schemeClr val="accent1"/>
+          </a:fillRef>
+          <a:effectRef idx="2">
+            <a:schemeClr val="accent1"/>
+          </a:effectRef>
+          <a:fontRef idx="minor">
+            <a:schemeClr val="lt1"/>
+          </a:fontRef>
+        </p:style>
+        <p:txBody>
+          <a:bodyPr rtlCol="0" anchor="ctr"/>
+          <a:lstStyle/>
+          <a:p>
+            <a:pPr algn="ctr"/>
+          </a:p>
+        </p:txBody>
+      </p:sp>
+      <p:sp>
+        <p:nvSpPr>
+          <p:cNvPr id="15" name="TextBox 14"/>
+          <p:cNvSpPr txBox="1"/>
+          <p:nvPr/>
+        </p:nvSpPr>
+        <p:spPr>
+          <a:xfrm>
+            <a:off x="6160000" y="2330000"/>
+            <a:ext cx="1500000" cy="380000"/>
+          </a:xfrm>
+          <a:prstGeom prst="rect">
+            <a:avLst/>
+          </a:prstGeom>
+          <a:noFill/>
+        </p:spPr>
+        <p:txBody>
+          <a:bodyPr wrap="square">
+            <a:spAutoFit/>
+          </a:bodyPr>
+          <a:lstStyle/>
+          <a:p>
+            <a:pPr>
+              <a:spcAft>
+                <a:spcPts val="600"/>
+              </a:spcAft>
+            </a:pPr>
+            <a:r>
+              <a:rPr sz="1300" b="1">
+                <a:solidFill>
+                  <a:srgbClr val="1B3A6B"/>
+                </a:solidFill>
+              </a:rPr>
+              <a:t>Locale C</a:t>
+            </a:r>
+          </a:p>
+        </p:txBody>
+      </p:sp>
+      <p:sp>
+        <p:nvSpPr>
+          <p:cNvPr id="16" name="Rectangle 15"/>
+          <p:cNvSpPr/>
+          <p:nvPr/>
+        </p:nvSpPr>
+        <p:spPr>
+          <a:xfrm>
+            <a:off x="7200000" y="2650000"/>
+            <a:ext cx="400000" cy="380000"/>
+          </a:xfrm>
+          <a:prstGeom prst="rect">
+            <a:avLst/>
+          </a:prstGeom>
+          <a:solidFill>
+            <a:srgbClr val="6E6E6E"/>
+          </a:solidFill>
+          <a:ln>
+            <a:noFill/>
+          </a:ln>
+        </p:spPr>
+        <p:style>
+          <a:lnRef idx="1">
+            <a:schemeClr val="accent1"/>
+          </a:lnRef>
+          <a:fillRef idx="3">
+            <a:schemeClr val="accent1"/>
+          </a:fillRef>
+          <a:effectRef idx="2">
+            <a:schemeClr val="accent1"/>
+          </a:effectRef>
+          <a:fontRef idx="minor">
+            <a:schemeClr val="lt1"/>
+          </a:fontRef>
+        </p:style>
+        <p:txBody>
+          <a:bodyPr rtlCol="0" anchor="ctr" wrap="square"/>
+          <a:lstStyle/>
+          <a:p>
+            <a:pPr algn="ctr"/>
+            <a:r>
+              <a:rPr sz="900" b="0">
+                <a:solidFill>
+                  <a:srgbClr val="FFFFFF"/>
+                </a:solidFill>
+              </a:rPr>
+              <a:t>RSU</a:t>
+            </a:r>
+          </a:p>
+        </p:txBody>
+      </p:sp>
+      <p:sp>
+        <p:nvSpPr>
+          <p:cNvPr id="17" name="Rectangle 16"/>
+          <p:cNvSpPr/>
+          <p:nvPr/>
+        </p:nvSpPr>
+        <p:spPr>
+          <a:xfrm>
+            <a:off x="7250000" y="3200000"/>
+            <a:ext cx="300000" cy="1500000"/>
+          </a:xfrm>
+          <a:prstGeom prst="rect">
+            <a:avLst/>
+          </a:prstGeom>
+          <a:solidFill>
+            <a:srgbClr val="D7D7D7"/>
+          </a:solidFill>
+          <a:ln>
+            <a:noFill/>
+          </a:ln>
+        </p:spPr>
+        <p:style>
+          <a:lnRef idx="1">
+            <a:schemeClr val="accent1"/>
+          </a:lnRef>
+          <a:fillRef idx="3">
+            <a:schemeClr val="accent1"/>
+          </a:fillRef>
+          <a:effectRef idx="2">
+            <a:schemeClr val="accent1"/>
+          </a:effectRef>
+          <a:fontRef idx="minor">
+            <a:schemeClr val="lt1"/>
+          </a:fontRef>
+        </p:style>
+        <p:txBody>
+          <a:bodyPr rtlCol="0" anchor="ctr"/>
+          <a:lstStyle/>
+          <a:p>
+            <a:pPr algn="ctr"/>
+          </a:p>
+        </p:txBody>
+      </p:sp>
+      <p:sp>
+        <p:nvSpPr>
+          <p:cNvPr id="18" name="Rectangle 17"/>
+          <p:cNvSpPr/>
+          <p:nvPr/>
+        </p:nvSpPr>
+        <p:spPr>
+          <a:xfrm>
+            <a:off x="8850000" y="2300000"/>
+            <a:ext cx="2600000" cy="2600000"/>
+          </a:xfrm>
+          <a:prstGeom prst="rect">
+            <a:avLst/>
+          </a:prstGeom>
+          <a:solidFill>
+            <a:srgbClr val="FCECD6"/>
+          </a:solidFill>
+          <a:ln w="15875">
+            <a:solidFill>
+              <a:srgbClr val="CC7814"/>
+            </a:solidFill>
+            <a:prstDash val="dash"/>
+          </a:ln>
+        </p:spPr>
+        <p:style>
+          <a:lnRef idx="1">
+            <a:schemeClr val="accent1"/>
+          </a:lnRef>
+          <a:fillRef idx="3">
+            <a:schemeClr val="accent1"/>
+          </a:fillRef>
+          <a:effectRef idx="2">
+            <a:schemeClr val="accent1"/>
+          </a:effectRef>
+          <a:fontRef idx="minor">
+            <a:schemeClr val="lt1"/>
+          </a:fontRef>
+        </p:style>
+        <p:txBody>
+          <a:bodyPr rtlCol="0" anchor="ctr"/>
+          <a:lstStyle/>
+          <a:p>
+            <a:pPr algn="ctr"/>
+          </a:p>
+        </p:txBody>
+      </p:sp>
+      <p:sp>
+        <p:nvSpPr>
+          <p:cNvPr id="19" name="TextBox 18"/>
+          <p:cNvSpPr txBox="1"/>
+          <p:nvPr/>
+        </p:nvSpPr>
+        <p:spPr>
+          <a:xfrm>
+            <a:off x="8910000" y="2330000"/>
+            <a:ext cx="1500000" cy="380000"/>
+          </a:xfrm>
+          <a:prstGeom prst="rect">
+            <a:avLst/>
+          </a:prstGeom>
+          <a:noFill/>
+        </p:spPr>
+        <p:txBody>
+          <a:bodyPr wrap="square">
+            <a:spAutoFit/>
+          </a:bodyPr>
+          <a:lstStyle/>
+          <a:p>
+            <a:pPr>
+              <a:spcAft>
+                <a:spcPts val="600"/>
+              </a:spcAft>
+            </a:pPr>
+            <a:r>
+              <a:rPr sz="1300" b="1">
+                <a:solidFill>
+                  <a:srgbClr val="CC7814"/>
+                </a:solidFill>
+              </a:rPr>
+              <a:t>Locale D</a:t>
+            </a:r>
+          </a:p>
+        </p:txBody>
+      </p:sp>
+      <p:sp>
+        <p:nvSpPr>
+          <p:cNvPr id="20" name="Rectangle 19"/>
+          <p:cNvSpPr/>
+          <p:nvPr/>
+        </p:nvSpPr>
+        <p:spPr>
+          <a:xfrm>
+            <a:off x="9950000" y="2650000"/>
+            <a:ext cx="400000" cy="380000"/>
+          </a:xfrm>
+          <a:prstGeom prst="rect">
+            <a:avLst/>
+          </a:prstGeom>
+          <a:solidFill>
+            <a:srgbClr val="6E6E6E"/>
+          </a:solidFill>
+          <a:ln>
+            <a:noFill/>
+          </a:ln>
+        </p:spPr>
+        <p:style>
+          <a:lnRef idx="1">
+            <a:schemeClr val="accent1"/>
+          </a:lnRef>
+          <a:fillRef idx="3">
+            <a:schemeClr val="accent1"/>
+          </a:fillRef>
+          <a:effectRef idx="2">
+            <a:schemeClr val="accent1"/>
+          </a:effectRef>
+          <a:fontRef idx="minor">
+            <a:schemeClr val="lt1"/>
+          </a:fontRef>
+        </p:style>
+        <p:txBody>
+          <a:bodyPr rtlCol="0" anchor="ctr" wrap="square"/>
+          <a:lstStyle/>
+          <a:p>
+            <a:pPr algn="ctr"/>
+            <a:r>
+              <a:rPr sz="900" b="0">
+                <a:solidFill>
+                  <a:srgbClr val="FFFFFF"/>
+                </a:solidFill>
+              </a:rPr>
+              <a:t>RSU</a:t>
+            </a:r>
+          </a:p>
+        </p:txBody>
+      </p:sp>
+      <p:sp>
+        <p:nvSpPr>
+          <p:cNvPr id="21" name="Rectangle 20"/>
+          <p:cNvSpPr/>
+          <p:nvPr/>
+        </p:nvSpPr>
+        <p:spPr>
+          <a:xfrm>
+            <a:off x="10000000" y="3200000"/>
+            <a:ext cx="300000" cy="1500000"/>
+          </a:xfrm>
+          <a:prstGeom prst="rect">
+            <a:avLst/>
+          </a:prstGeom>
+          <a:solidFill>
+            <a:srgbClr val="D7D7D7"/>
+          </a:solidFill>
+          <a:ln>
+            <a:noFill/>
+          </a:ln>
+        </p:spPr>
+        <p:style>
+          <a:lnRef idx="1">
+            <a:schemeClr val="accent1"/>
+          </a:lnRef>
+          <a:fillRef idx="3">
+            <a:schemeClr val="accent1"/>
+          </a:fillRef>
+          <a:effectRef idx="2">
+            <a:schemeClr val="accent1"/>
+          </a:effectRef>
+          <a:fontRef idx="minor">
+            <a:schemeClr val="lt1"/>
+          </a:fontRef>
+        </p:style>
+        <p:txBody>
+          <a:bodyPr rtlCol="0" anchor="ctr"/>
+          <a:lstStyle/>
+          <a:p>
+            <a:pPr algn="ctr"/>
+          </a:p>
+        </p:txBody>
+      </p:sp>
+      <p:sp>
+        <p:nvSpPr>
+          <p:cNvPr id="22" name="Rectangle 21"/>
+          <p:cNvSpPr/>
+          <p:nvPr/>
+        </p:nvSpPr>
+        <p:spPr>
+          <a:xfrm>
+            <a:off x="700000" y="3750000"/>
+            <a:ext cx="10800000" cy="380000"/>
+          </a:xfrm>
+          <a:prstGeom prst="rect">
+            <a:avLst/>
+          </a:prstGeom>
+          <a:solidFill>
+            <a:srgbClr val="C8C8C8"/>
+          </a:solidFill>
+          <a:ln>
+            <a:noFill/>
+          </a:ln>
+        </p:spPr>
+        <p:style>
+          <a:lnRef idx="1">
+            <a:schemeClr val="accent1"/>
+          </a:lnRef>
+          <a:fillRef idx="3">
+            <a:schemeClr val="accent1"/>
+          </a:fillRef>
+          <a:effectRef idx="2">
+            <a:schemeClr val="accent1"/>
+          </a:effectRef>
+          <a:fontRef idx="minor">
+            <a:schemeClr val="lt1"/>
+          </a:fontRef>
+        </p:style>
+        <p:txBody>
+          <a:bodyPr rtlCol="0" anchor="ctr"/>
+          <a:lstStyle/>
+          <a:p>
+            <a:pPr algn="ctr"/>
+          </a:p>
+        </p:txBody>
+      </p:sp>
+      <p:sp>
+        <p:nvSpPr>
+          <p:cNvPr id="23" name="Rectangle 22"/>
+          <p:cNvSpPr/>
+          <p:nvPr/>
+        </p:nvSpPr>
+        <p:spPr>
+          <a:xfrm>
+            <a:off x="3275000" y="2200000"/>
+            <a:ext cx="20000" cy="2800000"/>
+          </a:xfrm>
+          <a:prstGeom prst="rect">
+            <a:avLst/>
+          </a:prstGeom>
+          <a:solidFill>
+            <a:srgbClr val="C0392B"/>
+          </a:solidFill>
+          <a:ln>
+            <a:noFill/>
+          </a:ln>
+        </p:spPr>
+        <p:style>
+          <a:lnRef idx="1">
+            <a:schemeClr val="accent1"/>
+          </a:lnRef>
+          <a:fillRef idx="3">
+            <a:schemeClr val="accent1"/>
+          </a:fillRef>
+          <a:effectRef idx="2">
+            <a:schemeClr val="accent1"/>
+          </a:effectRef>
+          <a:fontRef idx="minor">
+            <a:schemeClr val="lt1"/>
+          </a:fontRef>
+        </p:style>
+        <p:txBody>
+          <a:bodyPr rtlCol="0" anchor="ctr"/>
+          <a:lstStyle/>
+          <a:p>
+            <a:pPr algn="ctr"/>
+          </a:p>
+        </p:txBody>
+      </p:sp>
+      <p:sp>
+        <p:nvSpPr>
+          <p:cNvPr id="24" name="Rectangle 23"/>
+          <p:cNvSpPr/>
+          <p:nvPr/>
+        </p:nvSpPr>
+        <p:spPr>
+          <a:xfrm>
+            <a:off x="6025000" y="2200000"/>
+            <a:ext cx="20000" cy="2800000"/>
+          </a:xfrm>
+          <a:prstGeom prst="rect">
+            <a:avLst/>
+          </a:prstGeom>
+          <a:solidFill>
+            <a:srgbClr val="C0392B"/>
+          </a:solidFill>
+          <a:ln>
+            <a:noFill/>
+          </a:ln>
+        </p:spPr>
+        <p:style>
+          <a:lnRef idx="1">
+            <a:schemeClr val="accent1"/>
+          </a:lnRef>
+          <a:fillRef idx="3">
+            <a:schemeClr val="accent1"/>
+          </a:fillRef>
+          <a:effectRef idx="2">
+            <a:schemeClr val="accent1"/>
+          </a:effectRef>
+          <a:fontRef idx="minor">
+            <a:schemeClr val="lt1"/>
+          </a:fontRef>
+        </p:style>
+        <p:txBody>
+          <a:bodyPr rtlCol="0" anchor="ctr"/>
+          <a:lstStyle/>
+          <a:p>
+            <a:pPr algn="ctr"/>
+          </a:p>
+        </p:txBody>
+      </p:sp>
+      <p:sp>
+        <p:nvSpPr>
+          <p:cNvPr id="25" name="Rectangle 24"/>
+          <p:cNvSpPr/>
+          <p:nvPr/>
+        </p:nvSpPr>
+        <p:spPr>
+          <a:xfrm>
+            <a:off x="8775000" y="2200000"/>
+            <a:ext cx="20000" cy="2800000"/>
+          </a:xfrm>
+          <a:prstGeom prst="rect">
+            <a:avLst/>
+          </a:prstGeom>
+          <a:solidFill>
+            <a:srgbClr val="C0392B"/>
+          </a:solidFill>
+          <a:ln>
+            <a:noFill/>
+          </a:ln>
+        </p:spPr>
+        <p:style>
+          <a:lnRef idx="1">
+            <a:schemeClr val="accent1"/>
+          </a:lnRef>
+          <a:fillRef idx="3">
+            <a:schemeClr val="accent1"/>
+          </a:fillRef>
+          <a:effectRef idx="2">
+            <a:schemeClr val="accent1"/>
+          </a:effectRef>
+          <a:fontRef idx="minor">
+            <a:schemeClr val="lt1"/>
+          </a:fontRef>
+        </p:style>
+        <p:txBody>
+          <a:bodyPr rtlCol="0" anchor="ctr"/>
+          <a:lstStyle/>
+          <a:p>
+            <a:pPr algn="ctr"/>
+          </a:p>
+        </p:txBody>
+      </p:sp>
+      <p:sp>
+        <p:nvSpPr>
+          <p:cNvPr id="26" name="Oval 25"/>
+          <p:cNvSpPr/>
+          <p:nvPr/>
+        </p:nvSpPr>
+        <p:spPr>
+          <a:xfrm>
+            <a:off x="1600000" y="3800000"/>
+            <a:ext cx="280000" cy="280000"/>
+          </a:xfrm>
+          <a:prstGeom prst="ellipse">
+            <a:avLst/>
+          </a:prstGeom>
+          <a:solidFill>
+            <a:srgbClr val="C0392B"/>
+          </a:solidFill>
+          <a:ln>
+            <a:noFill/>
+          </a:ln>
+        </p:spPr>
+        <p:style>
+          <a:lnRef idx="1">
+            <a:schemeClr val="accent1"/>
+          </a:lnRef>
+          <a:fillRef idx="3">
+            <a:schemeClr val="accent1"/>
+          </a:fillRef>
+          <a:effectRef idx="2">
+            <a:schemeClr val="accent1"/>
+          </a:effectRef>
+          <a:fontRef idx="minor">
+            <a:schemeClr val="lt1"/>
+          </a:fontRef>
+        </p:style>
+        <p:txBody>
+          <a:bodyPr rtlCol="0" anchor="ctr" wrap="square"/>
+          <a:lstStyle/>
+          <a:p>
+            <a:pPr algn="ctr"/>
+            <a:r>
+              <a:rPr sz="900" b="1">
+                <a:solidFill>
+                  <a:srgbClr val="FFFFFF"/>
+                </a:solidFill>
+              </a:rPr>
+              <a:t>x</a:t>
+            </a:r>
+          </a:p>
+        </p:txBody>
+      </p:sp>
+      <p:sp>
+        <p:nvSpPr>
+          <p:cNvPr id="27" name="TextBox 26"/>
+          <p:cNvSpPr txBox="1"/>
+          <p:nvPr/>
+        </p:nvSpPr>
+        <p:spPr>
+          <a:xfrm>
+            <a:off x="1250000" y="4150000"/>
+            <a:ext cx="1100000" cy="350000"/>
+          </a:xfrm>
+          <a:prstGeom prst="rect">
+            <a:avLst/>
+          </a:prstGeom>
+          <a:noFill/>
+        </p:spPr>
+        <p:txBody>
+          <a:bodyPr wrap="square">
+            <a:spAutoFit/>
+          </a:bodyPr>
+          <a:lstStyle/>
+          <a:p>
+            <a:pPr algn="ctr">
+              <a:spcAft>
+                <a:spcPts val="600"/>
+              </a:spcAft>
+            </a:pPr>
+            <a:r>
+              <a:rPr sz="900" b="0">
+                <a:solidFill>
+                  <a:srgbClr val="C0392B"/>
+                </a:solidFill>
+              </a:rPr>
+              <a:t>crossing path</a:t>
+            </a:r>
+          </a:p>
+        </p:txBody>
+      </p:sp>
+      <p:sp>
+        <p:nvSpPr>
+          <p:cNvPr id="28" name="Oval 27"/>
+          <p:cNvSpPr/>
+          <p:nvPr/>
+        </p:nvSpPr>
+        <p:spPr>
+          <a:xfrm>
+            <a:off x="3450000" y="3800000"/>
+            <a:ext cx="280000" cy="280000"/>
+          </a:xfrm>
+          <a:prstGeom prst="ellipse">
+            <a:avLst/>
+          </a:prstGeom>
+          <a:solidFill>
+            <a:srgbClr val="C0392B"/>
+          </a:solidFill>
+          <a:ln>
+            <a:noFill/>
+          </a:ln>
+        </p:spPr>
+        <p:style>
+          <a:lnRef idx="1">
+            <a:schemeClr val="accent1"/>
+          </a:lnRef>
+          <a:fillRef idx="3">
+            <a:schemeClr val="accent1"/>
+          </a:fillRef>
+          <a:effectRef idx="2">
+            <a:schemeClr val="accent1"/>
+          </a:effectRef>
+          <a:fontRef idx="minor">
+            <a:schemeClr val="lt1"/>
+          </a:fontRef>
+        </p:style>
+        <p:txBody>
+          <a:bodyPr rtlCol="0" anchor="ctr" wrap="square"/>
+          <a:lstStyle/>
+          <a:p>
+            <a:pPr algn="ctr"/>
+            <a:r>
+              <a:rPr sz="900" b="1">
+                <a:solidFill>
+                  <a:srgbClr val="FFFFFF"/>
+                </a:solidFill>
+              </a:rPr>
+              <a:t>x</a:t>
+            </a:r>
+          </a:p>
+        </p:txBody>
+      </p:sp>
+      <p:sp>
+        <p:nvSpPr>
+          <p:cNvPr id="29" name="TextBox 28"/>
+          <p:cNvSpPr txBox="1"/>
+          <p:nvPr/>
+        </p:nvSpPr>
+        <p:spPr>
+          <a:xfrm>
+            <a:off x="3100000" y="4150000"/>
+            <a:ext cx="1100000" cy="350000"/>
+          </a:xfrm>
+          <a:prstGeom prst="rect">
+            <a:avLst/>
+          </a:prstGeom>
+          <a:noFill/>
+        </p:spPr>
+        <p:txBody>
+          <a:bodyPr wrap="square">
+            <a:spAutoFit/>
+          </a:bodyPr>
+          <a:lstStyle/>
+          <a:p>
+            <a:pPr algn="ctr">
+              <a:spcAft>
+                <a:spcPts val="600"/>
+              </a:spcAft>
+            </a:pPr>
+            <a:r>
+              <a:rPr sz="900" b="0">
+                <a:solidFill>
+                  <a:srgbClr val="C0392B"/>
+                </a:solidFill>
+              </a:rPr>
+              <a:t>queue tail</a:t>
+            </a:r>
+          </a:p>
+        </p:txBody>
+      </p:sp>
+      <p:sp>
+        <p:nvSpPr>
+          <p:cNvPr id="30" name="Oval 29"/>
+          <p:cNvSpPr/>
+          <p:nvPr/>
+        </p:nvSpPr>
+        <p:spPr>
+          <a:xfrm>
+            <a:off x="6200000" y="3800000"/>
+            <a:ext cx="280000" cy="280000"/>
+          </a:xfrm>
+          <a:prstGeom prst="ellipse">
+            <a:avLst/>
+          </a:prstGeom>
+          <a:solidFill>
+            <a:srgbClr val="C0392B"/>
+          </a:solidFill>
+          <a:ln>
+            <a:noFill/>
+          </a:ln>
+        </p:spPr>
+        <p:style>
+          <a:lnRef idx="1">
+            <a:schemeClr val="accent1"/>
+          </a:lnRef>
+          <a:fillRef idx="3">
+            <a:schemeClr val="accent1"/>
+          </a:fillRef>
+          <a:effectRef idx="2">
+            <a:schemeClr val="accent1"/>
+          </a:effectRef>
+          <a:fontRef idx="minor">
+            <a:schemeClr val="lt1"/>
+          </a:fontRef>
+        </p:style>
+        <p:txBody>
+          <a:bodyPr rtlCol="0" anchor="ctr" wrap="square"/>
+          <a:lstStyle/>
+          <a:p>
+            <a:pPr algn="ctr"/>
+            <a:r>
+              <a:rPr sz="900" b="1">
+                <a:solidFill>
+                  <a:srgbClr val="FFFFFF"/>
+                </a:solidFill>
+              </a:rPr>
+              <a:t>x</a:t>
+            </a:r>
+          </a:p>
+        </p:txBody>
+      </p:sp>
+      <p:sp>
+        <p:nvSpPr>
+          <p:cNvPr id="31" name="TextBox 30"/>
+          <p:cNvSpPr txBox="1"/>
+          <p:nvPr/>
+        </p:nvSpPr>
+        <p:spPr>
+          <a:xfrm>
+            <a:off x="5850000" y="4150000"/>
+            <a:ext cx="1100000" cy="350000"/>
+          </a:xfrm>
+          <a:prstGeom prst="rect">
+            <a:avLst/>
+          </a:prstGeom>
+          <a:noFill/>
+        </p:spPr>
+        <p:txBody>
+          <a:bodyPr wrap="square">
+            <a:spAutoFit/>
+          </a:bodyPr>
+          <a:lstStyle/>
+          <a:p>
+            <a:pPr algn="ctr">
+              <a:spcAft>
+                <a:spcPts val="600"/>
+              </a:spcAft>
+            </a:pPr>
+            <a:r>
+              <a:rPr sz="900" b="0">
+                <a:solidFill>
+                  <a:srgbClr val="C0392B"/>
+                </a:solidFill>
+              </a:rPr>
+              <a:t>overtake</a:t>
+            </a:r>
+          </a:p>
+        </p:txBody>
+      </p:sp>
+      <p:sp>
+        <p:nvSpPr>
+          <p:cNvPr id="32" name="Oval 31"/>
+          <p:cNvSpPr/>
+          <p:nvPr/>
+        </p:nvSpPr>
+        <p:spPr>
+          <a:xfrm>
+            <a:off x="9000000" y="3800000"/>
+            <a:ext cx="280000" cy="280000"/>
+          </a:xfrm>
+          <a:prstGeom prst="ellipse">
+            <a:avLst/>
+          </a:prstGeom>
+          <a:solidFill>
+            <a:srgbClr val="C0392B"/>
+          </a:solidFill>
+          <a:ln>
+            <a:noFill/>
+          </a:ln>
+        </p:spPr>
+        <p:style>
+          <a:lnRef idx="1">
+            <a:schemeClr val="accent1"/>
+          </a:lnRef>
+          <a:fillRef idx="3">
+            <a:schemeClr val="accent1"/>
+          </a:fillRef>
+          <a:effectRef idx="2">
+            <a:schemeClr val="accent1"/>
+          </a:effectRef>
+          <a:fontRef idx="minor">
+            <a:schemeClr val="lt1"/>
+          </a:fontRef>
+        </p:style>
+        <p:txBody>
+          <a:bodyPr rtlCol="0" anchor="ctr" wrap="square"/>
+          <a:lstStyle/>
+          <a:p>
+            <a:pPr algn="ctr"/>
+            <a:r>
+              <a:rPr sz="900" b="1">
+                <a:solidFill>
+                  <a:srgbClr val="FFFFFF"/>
+                </a:solidFill>
+              </a:rPr>
+              <a:t>x</a:t>
+            </a:r>
+          </a:p>
+        </p:txBody>
+      </p:sp>
+      <p:sp>
+        <p:nvSpPr>
+          <p:cNvPr id="33" name="TextBox 32"/>
+          <p:cNvSpPr txBox="1"/>
+          <p:nvPr/>
+        </p:nvSpPr>
+        <p:spPr>
+          <a:xfrm>
+            <a:off x="8650000" y="4150000"/>
+            <a:ext cx="1100000" cy="350000"/>
+          </a:xfrm>
+          <a:prstGeom prst="rect">
+            <a:avLst/>
+          </a:prstGeom>
+          <a:noFill/>
+        </p:spPr>
+        <p:txBody>
+          <a:bodyPr wrap="square">
+            <a:spAutoFit/>
+          </a:bodyPr>
+          <a:lstStyle/>
+          <a:p>
+            <a:pPr algn="ctr">
+              <a:spcAft>
+                <a:spcPts val="600"/>
+              </a:spcAft>
+            </a:pPr>
+            <a:r>
+              <a:rPr sz="900" b="0">
+                <a:solidFill>
+                  <a:srgbClr val="C0392B"/>
+                </a:solidFill>
+              </a:rPr>
+              <a:t>stopped vehicle</a:t>
+            </a:r>
+          </a:p>
+        </p:txBody>
+      </p:sp>
+      <p:sp>
+        <p:nvSpPr>
+          <p:cNvPr id="34" name="Oval 33"/>
+          <p:cNvSpPr/>
+          <p:nvPr/>
+        </p:nvSpPr>
+        <p:spPr>
+          <a:xfrm>
+            <a:off x="7000000" y="3800000"/>
+            <a:ext cx="280000" cy="280000"/>
+          </a:xfrm>
+          <a:prstGeom prst="ellipse">
+            <a:avLst/>
+          </a:prstGeom>
+          <a:solidFill>
+            <a:srgbClr val="C0392B"/>
+          </a:solidFill>
+          <a:ln>
+            <a:noFill/>
+          </a:ln>
+        </p:spPr>
+        <p:style>
+          <a:lnRef idx="1">
+            <a:schemeClr val="accent1"/>
+          </a:lnRef>
+          <a:fillRef idx="3">
+            <a:schemeClr val="accent1"/>
+          </a:fillRef>
+          <a:effectRef idx="2">
+            <a:schemeClr val="accent1"/>
+          </a:effectRef>
+          <a:fontRef idx="minor">
+            <a:schemeClr val="lt1"/>
+          </a:fontRef>
+        </p:style>
+        <p:txBody>
+          <a:bodyPr rtlCol="0" anchor="ctr" wrap="square"/>
+          <a:lstStyle/>
+          <a:p>
+            <a:pPr algn="ctr"/>
+            <a:r>
+              <a:rPr sz="900" b="1">
+                <a:solidFill>
+                  <a:srgbClr val="FFFFFF"/>
+                </a:solidFill>
+              </a:rPr>
+              <a:t>x</a:t>
+            </a:r>
+          </a:p>
+        </p:txBody>
+      </p:sp>
+      <p:sp>
+        <p:nvSpPr>
+          <p:cNvPr id="35" name="TextBox 34"/>
+          <p:cNvSpPr txBox="1"/>
+          <p:nvPr/>
+        </p:nvSpPr>
+        <p:spPr>
+          <a:xfrm>
+            <a:off x="6650000" y="4150000"/>
+            <a:ext cx="1100000" cy="350000"/>
+          </a:xfrm>
+          <a:prstGeom prst="rect">
+            <a:avLst/>
+          </a:prstGeom>
+          <a:noFill/>
+        </p:spPr>
+        <p:txBody>
+          <a:bodyPr wrap="square">
+            <a:spAutoFit/>
+          </a:bodyPr>
+          <a:lstStyle/>
+          <a:p>
+            <a:pPr algn="ctr">
+              <a:spcAft>
+                <a:spcPts val="600"/>
+              </a:spcAft>
+            </a:pPr>
+            <a:r>
+              <a:rPr sz="900" b="0">
+                <a:solidFill>
+                  <a:srgbClr val="C0392B"/>
+                </a:solidFill>
+              </a:rPr>
+              <a:t>crossing path</a:t>
+            </a:r>
+          </a:p>
+        </p:txBody>
+      </p:sp>
+      <p:sp>
+        <p:nvSpPr>
+          <p:cNvPr id="36" name="Right Arrow 35"/>
+          <p:cNvSpPr/>
+          <p:nvPr/>
+        </p:nvSpPr>
+        <p:spPr>
+          <a:xfrm>
+            <a:off x="800000" y="4520000"/>
+            <a:ext cx="10500000" cy="250000"/>
+          </a:xfrm>
+          <a:prstGeom prst="rightArrow">
+            <a:avLst/>
+          </a:prstGeom>
+          <a:solidFill>
+            <a:srgbClr val="1B3A6B"/>
+          </a:solidFill>
+          <a:ln>
+            <a:noFill/>
+          </a:ln>
+        </p:spPr>
+        <p:style>
+          <a:lnRef idx="1">
+            <a:schemeClr val="accent1"/>
+          </a:lnRef>
+          <a:fillRef idx="3">
+            <a:schemeClr val="accent1"/>
+          </a:fillRef>
+          <a:effectRef idx="2">
+            <a:schemeClr val="accent1"/>
+          </a:effectRef>
+          <a:fontRef idx="minor">
+            <a:schemeClr val="lt1"/>
+          </a:fontRef>
+        </p:style>
+        <p:txBody>
+          <a:bodyPr rtlCol="0" anchor="ctr"/>
+          <a:lstStyle/>
+          <a:p>
+            <a:pPr algn="ctr"/>
+            <a:r>
+              <a:rPr sz="1000" b="1">
+                <a:solidFill>
+                  <a:srgbClr val="FFFFFF"/>
+                </a:solidFill>
+              </a:rPr>
+              <a:t>ego route: three handoffs, actors crossing independently, several at once</a:t>
+            </a:r>
+          </a:p>
+        </p:txBody>
+      </p:sp>
+      <p:sp>
+        <p:nvSpPr>
+          <p:cNvPr id="37" name="TextBox 36"/>
+          <p:cNvSpPr txBox="1"/>
+          <p:nvPr/>
+        </p:nvSpPr>
+        <p:spPr>
+          <a:xfrm>
+            <a:off x="640080" y="6263640"/>
+            <a:ext cx="10972800" cy="457200"/>
+          </a:xfrm>
+          <a:prstGeom prst="rect">
+            <a:avLst/>
+          </a:prstGeom>
+          <a:noFill/>
+        </p:spPr>
+        <p:txBody>
+          <a:bodyPr wrap="square">
+            <a:spAutoFit/>
+          </a:bodyPr>
+          <a:lstStyle/>
+          <a:p>
+            <a:pPr>
+              <a:spcAft>
+                <a:spcPts val="600"/>
+              </a:spcAft>
+            </a:pPr>
+            <a:r>
+              <a:rPr sz="1200" b="0">
+                <a:solidFill>
+                  <a:srgbClr val="B3A369"/>
+                </a:solidFill>
+              </a:rPr>
+              <a:t>This is a cooperative-prediction service operating across a sequence of locales, not a two-server microbenchmark  ·  Missing: build (T13)</a:t>
+            </a:r>
+          </a:p>
+        </p:txBody>
+      </p:sp>
+    </p:spTree>
+  </p:cSld>
+  <p:clrMapOvr>
+    <a:masterClrMapping/>
+  </p:clrMapOvr>
+</p:sld>
+</file>
+
+<file path=ppt/slides/slide15.xml><?xml version="1.0" encoding="utf-8"?>
+<p:sld xmlns:a="http://schemas.openxmlformats.org/drawingml/2006/main" xmlns:p="http://schemas.openxmlformats.org/presentationml/2006/main" xmlns:r="http://schemas.openxmlformats.org/officeDocument/2006/relationships">
+  <p:cSld>
+    <p:spTree>
+      <p:nvGrpSpPr>
+        <p:cNvPr id="1" name=""/>
+        <p:cNvGrpSpPr/>
+        <p:nvPr/>
+      </p:nvGrpSpPr>
+      <p:grpSpPr/>
+      <p:sp>
+        <p:nvSpPr>
+          <p:cNvPr id="2" name="TextBox 1"/>
+          <p:cNvSpPr txBox="1"/>
+          <p:nvPr/>
+        </p:nvSpPr>
+        <p:spPr>
+          <a:xfrm>
+            <a:off x="548640" y="256032"/>
+            <a:ext cx="9600000" cy="777240"/>
+          </a:xfrm>
+          <a:prstGeom prst="rect">
+            <a:avLst/>
+          </a:prstGeom>
+          <a:noFill/>
+        </p:spPr>
+        <p:txBody>
+          <a:bodyPr wrap="square">
+            <a:spAutoFit/>
+          </a:bodyPr>
+          <a:lstStyle/>
+          <a:p>
+            <a:pPr>
+              <a:spcAft>
+                <a:spcPts val="600"/>
+              </a:spcAft>
+            </a:pPr>
+            <a:r>
+              <a:rPr sz="2800" b="1">
+                <a:solidFill>
+                  <a:srgbClr val="1B3A6B"/>
+                </a:solidFill>
+              </a:rPr>
+              <a:t>RQ4: multi-locale evaluation</a:t>
+            </a:r>
+          </a:p>
+        </p:txBody>
+      </p:sp>
+      <p:sp>
+        <p:nvSpPr>
+          <p:cNvPr id="3" name="TextBox 2"/>
+          <p:cNvSpPr txBox="1"/>
+          <p:nvPr/>
+        </p:nvSpPr>
+        <p:spPr>
+          <a:xfrm>
+            <a:off x="10200000" y="292608"/>
+            <a:ext cx="1700000" cy="457200"/>
+          </a:xfrm>
+          <a:prstGeom prst="rect">
+            <a:avLst/>
+          </a:prstGeom>
+          <a:noFill/>
+        </p:spPr>
+        <p:txBody>
+          <a:bodyPr wrap="square">
+            <a:spAutoFit/>
+          </a:bodyPr>
+          <a:lstStyle/>
+          <a:p>
+            <a:pPr algn="r">
+              <a:spcAft>
+                <a:spcPts val="600"/>
+              </a:spcAft>
+            </a:pPr>
+            <a:r>
+              <a:rPr sz="1300" b="1">
+                <a:solidFill>
+                  <a:srgbClr val="B3A369"/>
+                </a:solidFill>
+              </a:rPr>
+              <a:t>RQ4</a:t>
+            </a:r>
+          </a:p>
+        </p:txBody>
+      </p:sp>
+      <p:sp>
+        <p:nvSpPr>
+          <p:cNvPr id="4" name="Rounded Rectangle 3"/>
+          <p:cNvSpPr/>
+          <p:nvPr/>
+        </p:nvSpPr>
+        <p:spPr>
+          <a:xfrm>
+            <a:off x="10200000" y="760000"/>
+            <a:ext cx="1450000" cy="330000"/>
+          </a:xfrm>
+          <a:prstGeom prst="roundRect">
+            <a:avLst/>
+          </a:prstGeom>
+          <a:solidFill>
+            <a:srgbClr val="787878"/>
+          </a:solidFill>
+          <a:ln>
+            <a:noFill/>
+          </a:ln>
+        </p:spPr>
+        <p:style>
+          <a:lnRef idx="1">
+            <a:schemeClr val="accent1"/>
+          </a:lnRef>
+          <a:fillRef idx="3">
+            <a:schemeClr val="accent1"/>
+          </a:fillRef>
+          <a:effectRef idx="2">
+            <a:schemeClr val="accent1"/>
+          </a:effectRef>
+          <a:fontRef idx="minor">
+            <a:schemeClr val="lt1"/>
+          </a:fontRef>
+        </p:style>
+        <p:txBody>
+          <a:bodyPr rtlCol="0" anchor="ctr" wrap="square"/>
+          <a:lstStyle/>
+          <a:p>
+            <a:pPr algn="ctr"/>
+            <a:r>
+              <a:rPr sz="1100" b="1">
+                <a:solidFill>
+                  <a:srgbClr val="FFFFFF"/>
+                </a:solidFill>
+              </a:rPr>
+              <a:t>Needed</a:t>
+            </a:r>
+          </a:p>
+        </p:txBody>
+      </p:sp>
+      <p:sp>
+        <p:nvSpPr>
+          <p:cNvPr id="5" name="TextBox 4"/>
+          <p:cNvSpPr txBox="1"/>
+          <p:nvPr/>
+        </p:nvSpPr>
+        <p:spPr>
+          <a:xfrm>
+            <a:off x="640080" y="1150000"/>
+            <a:ext cx="10972800" cy="3600000"/>
+          </a:xfrm>
+          <a:prstGeom prst="rect">
+            <a:avLst/>
+          </a:prstGeom>
+          <a:noFill/>
+        </p:spPr>
+        <p:txBody>
+          <a:bodyPr wrap="square">
+            <a:spAutoFit/>
+          </a:bodyPr>
+          <a:lstStyle/>
+          <a:p>
+            <a:pPr>
+              <a:spcAft>
+                <a:spcPts val="800"/>
+              </a:spcAft>
+            </a:pPr>
+            <a:r>
+              <a:rPr sz="1600" b="0">
+                <a:solidFill>
+                  <a:srgbClr val="212121"/>
+                </a:solidFill>
+              </a:rPr>
+              <a:t>• Continuity: handoffs warm before use, post-handoff ADE and FDE, track resets, fallbacks per km.</a:t>
+            </a:r>
+          </a:p>
+          <a:p>
+            <a:pPr>
+              <a:spcAft>
+                <a:spcPts val="800"/>
+              </a:spcAft>
+            </a:pPr>
+            <a:r>
+              <a:rPr sz="1600" b="0">
+                <a:solidFill>
+                  <a:srgbClr val="212121"/>
+                </a:solidFill>
+              </a:rPr>
+              <a:t>• Planner safety: age at use vs the scenario's safe-age limit, minimum TTC, collisions, hard and false braking, route completion.</a:t>
+            </a:r>
+          </a:p>
+          <a:p>
+            <a:pPr>
+              <a:spcAft>
+                <a:spcPts val="800"/>
+              </a:spcAft>
+            </a:pPr>
+            <a:r>
+              <a:rPr sz="1600" b="0">
+                <a:solidFill>
+                  <a:srgbClr val="212121"/>
+                </a:solidFill>
+              </a:rPr>
+              <a:t>• System: migrations per second, concurrent migrations, bytes per second, import and first-refresh latency, per-locale utilization.</a:t>
+            </a:r>
+          </a:p>
+          <a:p>
+            <a:pPr>
+              <a:spcAft>
+                <a:spcPts val="800"/>
+              </a:spcAft>
+            </a:pPr>
+            <a:r>
+              <a:rPr sz="1600" b="0">
+                <a:solidFill>
+                  <a:srgbClr val="212121"/>
+                </a:solidFill>
+              </a:rPr>
+              <a:t>• Repeated handoffs: every metric by crossing index, stale epochs, back-and-forth transitions.</a:t>
+            </a:r>
+          </a:p>
+          <a:p>
+            <a:pPr>
+              <a:spcAft>
+                <a:spcPts val="800"/>
+              </a:spcAft>
+            </a:pPr>
+            <a:r>
+              <a:rPr sz="1600" b="0">
+                <a:solidFill>
+                  <a:srgbClr val="212121"/>
+                </a:solidFill>
+              </a:rPr>
+              <a:t>• The whole route under cold start, boundary transfer, EdgeWarp timing, overlap, replication, Khonsu, oracle.</a:t>
+            </a:r>
+          </a:p>
+        </p:txBody>
+      </p:sp>
+      <p:sp>
+        <p:nvSpPr>
+          <p:cNvPr id="6" name="TextBox 5"/>
+          <p:cNvSpPr txBox="1"/>
+          <p:nvPr/>
+        </p:nvSpPr>
+        <p:spPr>
+          <a:xfrm>
+            <a:off x="640080" y="6263640"/>
+            <a:ext cx="10972800" cy="457200"/>
+          </a:xfrm>
+          <a:prstGeom prst="rect">
+            <a:avLst/>
+          </a:prstGeom>
+          <a:noFill/>
+        </p:spPr>
+        <p:txBody>
+          <a:bodyPr wrap="square">
+            <a:spAutoFit/>
+          </a:bodyPr>
+          <a:lstStyle/>
+          <a:p>
+            <a:pPr>
+              <a:spcAft>
+                <a:spcPts val="600"/>
+              </a:spcAft>
+            </a:pPr>
+            <a:r>
+              <a:rPr sz="1200" b="0">
+                <a:solidFill>
+                  <a:srgbClr val="B3A369"/>
+                </a:solidFill>
+              </a:rPr>
+              <a:t>The burst test (5-vehicle platoon) stays as the microbenchmark behind the concurrent-crossing part</a:t>
+            </a:r>
+          </a:p>
+        </p:txBody>
+      </p:sp>
+    </p:spTree>
+  </p:cSld>
+  <p:clrMapOvr>
+    <a:masterClrMapping/>
+  </p:clrMapOvr>
+</p:sld>
+</file>
+
+<file path=ppt/slides/slide16.xml><?xml version="1.0" encoding="utf-8"?>
+<p:sld xmlns:a="http://schemas.openxmlformats.org/drawingml/2006/main" xmlns:p="http://schemas.openxmlformats.org/presentationml/2006/main" xmlns:r="http://schemas.openxmlformats.org/officeDocument/2006/relationships">
+  <p:cSld>
+    <p:spTree>
+      <p:nvGrpSpPr>
+        <p:cNvPr id="1" name=""/>
+        <p:cNvGrpSpPr/>
+        <p:nvPr/>
+      </p:nvGrpSpPr>
+      <p:grpSpPr/>
+      <p:sp>
+        <p:nvSpPr>
+          <p:cNvPr id="2" name="TextBox 1"/>
+          <p:cNvSpPr txBox="1"/>
+          <p:nvPr/>
+        </p:nvSpPr>
+        <p:spPr>
+          <a:xfrm>
+            <a:off x="548640" y="256032"/>
+            <a:ext cx="9600000" cy="777240"/>
+          </a:xfrm>
+          <a:prstGeom prst="rect">
+            <a:avLst/>
+          </a:prstGeom>
+          <a:noFill/>
+        </p:spPr>
+        <p:txBody>
+          <a:bodyPr wrap="square">
+            <a:spAutoFit/>
+          </a:bodyPr>
+          <a:lstStyle/>
+          <a:p>
+            <a:pPr>
+              <a:spcAft>
+                <a:spcPts val="600"/>
+              </a:spcAft>
+            </a:pPr>
+            <a:r>
+              <a:rPr sz="2800" b="1">
+                <a:solidFill>
+                  <a:srgbClr val="1B3A6B"/>
+                </a:solidFill>
+              </a:rPr>
+              <a:t>Done, running, missing</a:t>
             </a:r>
           </a:p>
         </p:txBody>
       </p:sp>
       <p:graphicFrame>
         <p:nvGraphicFramePr>
-          <p:cNvPr id="4" name="Table 3"/>
+          <p:cNvPr id="3" name="Table 2"/>
           <p:cNvGraphicFramePr>
             <a:graphicFrameLocks noGrp="1"/>
           </p:cNvGraphicFramePr>
           <p:nvPr/>
         </p:nvGraphicFramePr>
         <p:xfrm>
-          <a:off x="640080" y="1150000"/>
-          <a:ext cx="10972800" cy="4400000"/>
+          <a:off x="548640" y="1150000"/>
+          <a:ext cx="11094720" cy="3600000"/>
         </p:xfrm>
         <a:graphic>
           <a:graphicData uri="http://schemas.openxmlformats.org/drawingml/2006/table">
@@ -4368,12 +6310,13 @@
                 <a:tableStyleId>{5C22544A-7EE6-4342-B048-85BDC9FD1C3A}</a:tableStyleId>
               </a:tblPr>
               <a:tblGrid>
-                <a:gridCol w="3600000"/>
-                <a:gridCol w="3600000"/>
-                <a:gridCol w="1500000"/>
-                <a:gridCol w="2272800"/>
+                <a:gridCol w="1800000"/>
+                <a:gridCol w="2900000"/>
+                <a:gridCol w="2300000"/>
+                <a:gridCol w="2900000"/>
+                <a:gridCol w="1194720"/>
               </a:tblGrid>
-              <a:tr h="400000">
+              <a:tr h="720000">
                 <a:tc>
                   <a:txBody>
                     <a:bodyPr/>
@@ -4381,7 +6324,7 @@
                     <a:p>
                       <a:r>
                         <a:rPr sz="1200" b="1"/>
-                        <a:t>Dimension</a:t>
+                        <a:t>Question</a:t>
                       </a:r>
                     </a:p>
                   </a:txBody>
@@ -4394,7 +6337,7 @@
                     <a:p>
                       <a:r>
                         <a:rPr sz="1200" b="1"/>
-                        <a:t>Range</a:t>
+                        <a:t>Evidence in hand</a:t>
                       </a:r>
                     </a:p>
                   </a:txBody>
@@ -4407,7 +6350,20 @@
                     <a:p>
                       <a:r>
                         <a:rPr sz="1200" b="1"/>
-                        <a:t>Answers</a:t>
+                        <a:t>Running</a:t>
+                      </a:r>
+                    </a:p>
+                  </a:txBody>
+                  <a:tcPr/>
+                </a:tc>
+                <a:tc>
+                  <a:txBody>
+                    <a:bodyPr/>
+                    <a:lstStyle/>
+                    <a:p>
+                      <a:r>
+                        <a:rPr sz="1200" b="1"/>
+                        <a:t>Missing</a:t>
                       </a:r>
                     </a:p>
                   </a:txBody>
@@ -4427,7 +6383,7 @@
                   <a:tcPr/>
                 </a:tc>
               </a:tr>
-              <a:tr h="400000">
+              <a:tr h="720000">
                 <a:tc>
                   <a:txBody>
                     <a:bodyPr/>
@@ -4435,7 +6391,7 @@
                     <a:p>
                       <a:r>
                         <a:rPr sz="1200" b="0"/>
-                        <a:t>Trigger lead</a:t>
+                        <a:t>RQ1 scale-out</a:t>
                       </a:r>
                     </a:p>
                   </a:txBody>
@@ -4448,7 +6404,7 @@
                     <a:p>
                       <a:r>
                         <a:rPr sz="1200" b="0"/>
-                        <a:t>computed vs fixed 1 to 4 s vs band width</a:t>
+                        <a:t>canvas sweep; CARLA partition</a:t>
                       </a:r>
                     </a:p>
                   </a:txBody>
@@ -4461,7 +6417,162 @@
                     <a:p>
                       <a:r>
                         <a:rPr sz="1200" b="0"/>
-                        <a:t>RQ3, RQ4</a:t>
+                        <a:t>sizing study</a:t>
+                      </a:r>
+                    </a:p>
+                  </a:txBody>
+                  <a:tcPr/>
+                </a:tc>
+                <a:tc>
+                  <a:txBody>
+                    <a:bodyPr/>
+                    <a:lstStyle/>
+                    <a:p>
+                      <a:r>
+                        <a:rPr sz="1200" b="0"/>
+                        <a:t>density-trace sizing</a:t>
+                      </a:r>
+                    </a:p>
+                  </a:txBody>
+                  <a:tcPr/>
+                </a:tc>
+                <a:tc>
+                  <a:txBody>
+                    <a:bodyPr/>
+                    <a:lstStyle/>
+                    <a:p>
+                      <a:r>
+                        <a:rPr sz="1200" b="1">
+                          <a:solidFill>
+                            <a:srgbClr val="2E7D32"/>
+                          </a:solidFill>
+                        </a:rPr>
+                        <a:t>Done</a:t>
+                      </a:r>
+                    </a:p>
+                  </a:txBody>
+                  <a:tcPr/>
+                </a:tc>
+              </a:tr>
+              <a:tr h="720000">
+                <a:tc>
+                  <a:txBody>
+                    <a:bodyPr/>
+                    <a:lstStyle/>
+                    <a:p>
+                      <a:r>
+                        <a:rPr sz="1200" b="0"/>
+                        <a:t>RQ2 state continuity</a:t>
+                      </a:r>
+                    </a:p>
+                  </a:txBody>
+                  <a:tcPr/>
+                </a:tc>
+                <a:tc>
+                  <a:txBody>
+                    <a:bodyPr/>
+                    <a:lstStyle/>
+                    <a:p>
+                      <a:r>
+                        <a:rPr sz="1200" b="0"/>
+                        <a:t>microbench 2.8 to 9.3x; acceleration 4/4 vs 3/4</a:t>
+                      </a:r>
+                    </a:p>
+                  </a:txBody>
+                  <a:tcPr/>
+                </a:tc>
+                <a:tc>
+                  <a:txBody>
+                    <a:bodyPr/>
+                    <a:lstStyle/>
+                    <a:p>
+                      <a:r>
+                        <a:rPr sz="1200" b="0"/>
+                        <a:t>post-handoff minADE/minFDE (T9)</a:t>
+                      </a:r>
+                    </a:p>
+                  </a:txBody>
+                  <a:tcPr/>
+                </a:tc>
+                <a:tc>
+                  <a:txBody>
+                    <a:bodyPr/>
+                    <a:lstStyle/>
+                    <a:p>
+                      <a:r>
+                        <a:rPr sz="1200" b="0"/>
+                        <a:t>none</a:t>
+                      </a:r>
+                    </a:p>
+                  </a:txBody>
+                  <a:tcPr/>
+                </a:tc>
+                <a:tc>
+                  <a:txBody>
+                    <a:bodyPr/>
+                    <a:lstStyle/>
+                    <a:p>
+                      <a:r>
+                        <a:rPr sz="1200" b="1">
+                          <a:solidFill>
+                            <a:srgbClr val="2E7D32"/>
+                          </a:solidFill>
+                        </a:rPr>
+                        <a:t>Done</a:t>
+                      </a:r>
+                    </a:p>
+                  </a:txBody>
+                  <a:tcPr/>
+                </a:tc>
+              </a:tr>
+              <a:tr h="720000">
+                <a:tc>
+                  <a:txBody>
+                    <a:bodyPr/>
+                    <a:lstStyle/>
+                    <a:p>
+                      <a:r>
+                        <a:rPr sz="1200" b="0"/>
+                        <a:t>RQ3 safe handoff</a:t>
+                      </a:r>
+                    </a:p>
+                  </a:txBody>
+                  <a:tcPr/>
+                </a:tc>
+                <a:tc>
+                  <a:txBody>
+                    <a:bodyPr/>
+                    <a:lstStyle/>
+                    <a:p>
+                      <a:r>
+                        <a:rPr sz="1200" b="0"/>
+                        <a:t>8-scenario ownership faults; age chain</a:t>
+                      </a:r>
+                    </a:p>
+                  </a:txBody>
+                  <a:tcPr/>
+                </a:tc>
+                <a:tc>
+                  <a:txBody>
+                    <a:bodyPr/>
+                    <a:lstStyle/>
+                    <a:p>
+                      <a:r>
+                        <a:rPr sz="1200" b="0"/>
+                        <a:t>v3 re-baseline; computed vs fixed lead</a:t>
+                      </a:r>
+                    </a:p>
+                  </a:txBody>
+                  <a:tcPr/>
+                </a:tc>
+                <a:tc>
+                  <a:txBody>
+                    <a:bodyPr/>
+                    <a:lstStyle/>
+                    <a:p>
+                      <a:r>
+                        <a:rPr sz="1200" b="0"/>
+                        <a:t>per-scenario safe-age limits (T12); live fault arms (T7); real transport (T8); dual-authority arm</a:t>
                       </a:r>
                     </a:p>
                   </a:txBody>
@@ -4485,7 +6596,7 @@
                   <a:tcPr/>
                 </a:tc>
               </a:tr>
-              <a:tr h="400000">
+              <a:tr h="720000">
                 <a:tc>
                   <a:txBody>
                     <a:bodyPr/>
@@ -4493,7 +6604,7 @@
                     <a:p>
                       <a:r>
                         <a:rPr sz="1200" b="0"/>
-                        <a:t>Migrated state</a:t>
+                        <a:t>RQ4 multi-locale</a:t>
                       </a:r>
                     </a:p>
                   </a:txBody>
@@ -4506,7 +6617,7 @@
                     <a:p>
                       <a:r>
                         <a:rPr sz="1200" b="0"/>
-                        <a:t>history vs snapshot vs one frame</a:t>
+                        <a:t>harness, knobs, burst scenario</a:t>
                       </a:r>
                     </a:p>
                   </a:txBody>
@@ -4519,39 +6630,7 @@
                     <a:p>
                       <a:r>
                         <a:rPr sz="1200" b="0"/>
-                        <a:t>RQ2</a:t>
-                      </a:r>
-                    </a:p>
-                  </a:txBody>
-                  <a:tcPr/>
-                </a:tc>
-                <a:tc>
-                  <a:txBody>
-                    <a:bodyPr/>
-                    <a:lstStyle/>
-                    <a:p>
-                      <a:r>
-                        <a:rPr sz="1200" b="1">
-                          <a:solidFill>
-                            <a:srgbClr val="2E7D32"/>
-                          </a:solidFill>
-                        </a:rPr>
-                        <a:t>Done</a:t>
-                      </a:r>
-                    </a:p>
-                  </a:txBody>
-                  <a:tcPr/>
-                </a:tc>
-              </a:tr>
-              <a:tr h="400000">
-                <a:tc>
-                  <a:txBody>
-                    <a:bodyPr/>
-                    <a:lstStyle/>
-                    <a:p>
-                      <a:r>
-                        <a:rPr sz="1200" b="0"/>
-                        <a:t>Final update and mirroring rate</a:t>
+                        <a:t>crossing-rate sweep (q5)</a:t>
                       </a:r>
                     </a:p>
                   </a:txBody>
@@ -4564,426 +6643,7 @@
                     <a:p>
                       <a:r>
                         <a:rPr sz="1200" b="0"/>
-                        <a:t>none / at commit / 0.25 to 2 s</a:t>
-                      </a:r>
-                    </a:p>
-                  </a:txBody>
-                  <a:tcPr/>
-                </a:tc>
-                <a:tc>
-                  <a:txBody>
-                    <a:bodyPr/>
-                    <a:lstStyle/>
-                    <a:p>
-                      <a:r>
-                        <a:rPr sz="1200" b="0"/>
-                        <a:t>RQ4</a:t>
-                      </a:r>
-                    </a:p>
-                  </a:txBody>
-                  <a:tcPr/>
-                </a:tc>
-                <a:tc>
-                  <a:txBody>
-                    <a:bodyPr/>
-                    <a:lstStyle/>
-                    <a:p>
-                      <a:r>
-                        <a:rPr sz="1200" b="1">
-                          <a:solidFill>
-                            <a:srgbClr val="D68C00"/>
-                          </a:solidFill>
-                        </a:rPr>
-                        <a:t>Provisional</a:t>
-                      </a:r>
-                    </a:p>
-                  </a:txBody>
-                  <a:tcPr/>
-                </a:tc>
-              </a:tr>
-              <a:tr h="400000">
-                <a:tc>
-                  <a:txBody>
-                    <a:bodyPr/>
-                    <a:lstStyle/>
-                    <a:p>
-                      <a:r>
-                        <a:rPr sz="1200" b="0"/>
-                        <a:t>Ownership epochs and fault injection</a:t>
-                      </a:r>
-                    </a:p>
-                  </a:txBody>
-                  <a:tcPr/>
-                </a:tc>
-                <a:tc>
-                  <a:txBody>
-                    <a:bodyPr/>
-                    <a:lstStyle/>
-                    <a:p>
-                      <a:r>
-                        <a:rPr sz="1200" b="0"/>
-                        <a:t>6 fault arms, epoch check on and off</a:t>
-                      </a:r>
-                    </a:p>
-                  </a:txBody>
-                  <a:tcPr/>
-                </a:tc>
-                <a:tc>
-                  <a:txBody>
-                    <a:bodyPr/>
-                    <a:lstStyle/>
-                    <a:p>
-                      <a:r>
-                        <a:rPr sz="1200" b="0"/>
-                        <a:t>RQ4</a:t>
-                      </a:r>
-                    </a:p>
-                  </a:txBody>
-                  <a:tcPr/>
-                </a:tc>
-                <a:tc>
-                  <a:txBody>
-                    <a:bodyPr/>
-                    <a:lstStyle/>
-                    <a:p>
-                      <a:r>
-                        <a:rPr sz="1200" b="1">
-                          <a:solidFill>
-                            <a:srgbClr val="787878"/>
-                          </a:solidFill>
-                        </a:rPr>
-                        <a:t>Needed</a:t>
-                      </a:r>
-                    </a:p>
-                  </a:txBody>
-                  <a:tcPr/>
-                </a:tc>
-              </a:tr>
-              <a:tr h="400000">
-                <a:tc>
-                  <a:txBody>
-                    <a:bodyPr/>
-                    <a:lstStyle/>
-                    <a:p>
-                      <a:r>
-                        <a:rPr sz="1200" b="0"/>
-                        <a:t>Crossing burst size</a:t>
-                      </a:r>
-                    </a:p>
-                  </a:txBody>
-                  <a:tcPr/>
-                </a:tc>
-                <a:tc>
-                  <a:txBody>
-                    <a:bodyPr/>
-                    <a:lstStyle/>
-                    <a:p>
-                      <a:r>
-                        <a:rPr sz="1200" b="0"/>
-                        <a:t>2, 4, 8 simultaneous tracks</a:t>
-                      </a:r>
-                    </a:p>
-                  </a:txBody>
-                  <a:tcPr/>
-                </a:tc>
-                <a:tc>
-                  <a:txBody>
-                    <a:bodyPr/>
-                    <a:lstStyle/>
-                    <a:p>
-                      <a:r>
-                        <a:rPr sz="1200" b="0"/>
-                        <a:t>RQ5</a:t>
-                      </a:r>
-                    </a:p>
-                  </a:txBody>
-                  <a:tcPr/>
-                </a:tc>
-                <a:tc>
-                  <a:txBody>
-                    <a:bodyPr/>
-                    <a:lstStyle/>
-                    <a:p>
-                      <a:r>
-                        <a:rPr sz="1200" b="1">
-                          <a:solidFill>
-                            <a:srgbClr val="1565C0"/>
-                          </a:solidFill>
-                        </a:rPr>
-                        <a:t>Running</a:t>
-                      </a:r>
-                    </a:p>
-                  </a:txBody>
-                  <a:tcPr/>
-                </a:tc>
-              </a:tr>
-              <a:tr h="400000">
-                <a:tc>
-                  <a:txBody>
-                    <a:bodyPr/>
-                    <a:lstStyle/>
-                    <a:p>
-                      <a:r>
-                        <a:rPr sz="1200" b="0"/>
-                        <a:t>Crossing rate</a:t>
-                      </a:r>
-                    </a:p>
-                  </a:txBody>
-                  <a:tcPr/>
-                </a:tc>
-                <a:tc>
-                  <a:txBody>
-                    <a:bodyPr/>
-                    <a:lstStyle/>
-                    <a:p>
-                      <a:r>
-                        <a:rPr sz="1200" b="0"/>
-                        <a:t>oncoming count 2, 4, 8</a:t>
-                      </a:r>
-                    </a:p>
-                  </a:txBody>
-                  <a:tcPr/>
-                </a:tc>
-                <a:tc>
-                  <a:txBody>
-                    <a:bodyPr/>
-                    <a:lstStyle/>
-                    <a:p>
-                      <a:r>
-                        <a:rPr sz="1200" b="0"/>
-                        <a:t>RQ5</a:t>
-                      </a:r>
-                    </a:p>
-                  </a:txBody>
-                  <a:tcPr/>
-                </a:tc>
-                <a:tc>
-                  <a:txBody>
-                    <a:bodyPr/>
-                    <a:lstStyle/>
-                    <a:p>
-                      <a:r>
-                        <a:rPr sz="1200" b="1">
-                          <a:solidFill>
-                            <a:srgbClr val="1565C0"/>
-                          </a:solidFill>
-                        </a:rPr>
-                        <a:t>Running</a:t>
-                      </a:r>
-                    </a:p>
-                  </a:txBody>
-                  <a:tcPr/>
-                </a:tc>
-              </a:tr>
-              <a:tr h="400000">
-                <a:tc>
-                  <a:txBody>
-                    <a:bodyPr/>
-                    <a:lstStyle/>
-                    <a:p>
-                      <a:r>
-                        <a:rPr sz="1200" b="0"/>
-                        <a:t>Backhaul impairment</a:t>
-                      </a:r>
-                    </a:p>
-                  </a:txBody>
-                  <a:tcPr/>
-                </a:tc>
-                <a:tc>
-                  <a:txBody>
-                    <a:bodyPr/>
-                    <a:lstStyle/>
-                    <a:p>
-                      <a:r>
-                        <a:rPr sz="1200" b="0"/>
-                        <a:t>latency, jitter, loss</a:t>
-                      </a:r>
-                    </a:p>
-                  </a:txBody>
-                  <a:tcPr/>
-                </a:tc>
-                <a:tc>
-                  <a:txBody>
-                    <a:bodyPr/>
-                    <a:lstStyle/>
-                    <a:p>
-                      <a:r>
-                        <a:rPr sz="1200" b="0"/>
-                        <a:t>RQ5</a:t>
-                      </a:r>
-                    </a:p>
-                  </a:txBody>
-                  <a:tcPr/>
-                </a:tc>
-                <a:tc>
-                  <a:txBody>
-                    <a:bodyPr/>
-                    <a:lstStyle/>
-                    <a:p>
-                      <a:r>
-                        <a:rPr sz="1200" b="1">
-                          <a:solidFill>
-                            <a:srgbClr val="787878"/>
-                          </a:solidFill>
-                        </a:rPr>
-                        <a:t>Needed</a:t>
-                      </a:r>
-                    </a:p>
-                  </a:txBody>
-                  <a:tcPr/>
-                </a:tc>
-              </a:tr>
-              <a:tr h="400000">
-                <a:tc>
-                  <a:txBody>
-                    <a:bodyPr/>
-                    <a:lstStyle/>
-                    <a:p>
-                      <a:r>
-                        <a:rPr sz="1200" b="0"/>
-                        <a:t>Transport</a:t>
-                      </a:r>
-                    </a:p>
-                  </a:txBody>
-                  <a:tcPr/>
-                </a:tc>
-                <a:tc>
-                  <a:txBody>
-                    <a:bodyPr/>
-                    <a:lstStyle/>
-                    <a:p>
-                      <a:r>
-                        <a:rPr sz="1200" b="0"/>
-                        <a:t>modeled vs real gRPC with netem</a:t>
-                      </a:r>
-                    </a:p>
-                  </a:txBody>
-                  <a:tcPr/>
-                </a:tc>
-                <a:tc>
-                  <a:txBody>
-                    <a:bodyPr/>
-                    <a:lstStyle/>
-                    <a:p>
-                      <a:r>
-                        <a:rPr sz="1200" b="0"/>
-                        <a:t>RQ5</a:t>
-                      </a:r>
-                    </a:p>
-                  </a:txBody>
-                  <a:tcPr/>
-                </a:tc>
-                <a:tc>
-                  <a:txBody>
-                    <a:bodyPr/>
-                    <a:lstStyle/>
-                    <a:p>
-                      <a:r>
-                        <a:rPr sz="1200" b="1">
-                          <a:solidFill>
-                            <a:srgbClr val="787878"/>
-                          </a:solidFill>
-                        </a:rPr>
-                        <a:t>Needed</a:t>
-                      </a:r>
-                    </a:p>
-                  </a:txBody>
-                  <a:tcPr/>
-                </a:tc>
-              </a:tr>
-              <a:tr h="400000">
-                <a:tc>
-                  <a:txBody>
-                    <a:bodyPr/>
-                    <a:lstStyle/>
-                    <a:p>
-                      <a:r>
-                        <a:rPr sz="1200" b="0"/>
-                        <a:t>Association error (unconnected actors)</a:t>
-                      </a:r>
-                    </a:p>
-                  </a:txBody>
-                  <a:tcPr/>
-                </a:tc>
-                <a:tc>
-                  <a:txBody>
-                    <a:bodyPr/>
-                    <a:lstStyle/>
-                    <a:p>
-                      <a:r>
-                        <a:rPr sz="1200" b="0"/>
-                        <a:t>pose error 0 to 2 m, distractors</a:t>
-                      </a:r>
-                    </a:p>
-                  </a:txBody>
-                  <a:tcPr/>
-                </a:tc>
-                <a:tc>
-                  <a:txBody>
-                    <a:bodyPr/>
-                    <a:lstStyle/>
-                    <a:p>
-                      <a:r>
-                        <a:rPr sz="1200" b="0"/>
-                        <a:t>RQ5</a:t>
-                      </a:r>
-                    </a:p>
-                  </a:txBody>
-                  <a:tcPr/>
-                </a:tc>
-                <a:tc>
-                  <a:txBody>
-                    <a:bodyPr/>
-                    <a:lstStyle/>
-                    <a:p>
-                      <a:r>
-                        <a:rPr sz="1200" b="1">
-                          <a:solidFill>
-                            <a:srgbClr val="787878"/>
-                          </a:solidFill>
-                        </a:rPr>
-                        <a:t>Needed</a:t>
-                      </a:r>
-                    </a:p>
-                  </a:txBody>
-                  <a:tcPr/>
-                </a:tc>
-              </a:tr>
-              <a:tr h="400000">
-                <a:tc>
-                  <a:txBody>
-                    <a:bodyPr/>
-                    <a:lstStyle/>
-                    <a:p>
-                      <a:r>
-                        <a:rPr sz="1200" b="0"/>
-                        <a:t>Boundary position</a:t>
-                      </a:r>
-                    </a:p>
-                  </a:txBody>
-                  <a:tcPr/>
-                </a:tc>
-                <a:tc>
-                  <a:txBody>
-                    <a:bodyPr/>
-                    <a:lstStyle/>
-                    <a:p>
-                      <a:r>
-                        <a:rPr sz="1200" b="0"/>
-                        <a:t>25 m sweep along the approach</a:t>
-                      </a:r>
-                    </a:p>
-                  </a:txBody>
-                  <a:tcPr/>
-                </a:tc>
-                <a:tc>
-                  <a:txBody>
-                    <a:bodyPr/>
-                    <a:lstStyle/>
-                    <a:p>
-                      <a:r>
-                        <a:rPr sz="1200" b="0"/>
-                        <a:t>RQ3</a:t>
+                        <a:t>corridor scenario and route-level metrics (T13)</a:t>
                       </a:r>
                     </a:p>
                   </a:txBody>
@@ -5013,14 +6673,14 @@
       </p:graphicFrame>
       <p:sp>
         <p:nvSpPr>
-          <p:cNvPr id="5" name="TextBox 4"/>
+          <p:cNvPr id="4" name="TextBox 3"/>
           <p:cNvSpPr txBox="1"/>
           <p:nvPr/>
         </p:nvSpPr>
         <p:spPr>
           <a:xfrm>
-            <a:off x="640080" y="6263640"/>
-            <a:ext cx="10972800" cy="457200"/>
+            <a:off x="640080" y="5100000"/>
+            <a:ext cx="10972800" cy="900000"/>
           </a:xfrm>
           <a:prstGeom prst="rect">
             <a:avLst/>
@@ -5035,161 +6695,31 @@
           <a:p>
             <a:pPr>
               <a:spcAft>
-                <a:spcPts val="600"/>
+                <a:spcPts val="400"/>
               </a:spcAft>
             </a:pPr>
             <a:r>
               <a:rPr sz="1200" b="0">
                 <a:solidFill>
-                  <a:srgbClr val="B3A369"/>
-                </a:solidFill>
-              </a:rPr>
-              <a:t>Answers RQ5  ·  All dimensions are knobs in the harness today; Needed items are staged on the eval side</a:t>
-            </a:r>
-          </a:p>
-        </p:txBody>
-      </p:sp>
-    </p:spTree>
-  </p:cSld>
-  <p:clrMapOvr>
-    <a:masterClrMapping/>
-  </p:clrMapOvr>
-</p:sld>
-</file>
-
-<file path=ppt/slides/slide15.xml><?xml version="1.0" encoding="utf-8"?>
-<p:sld xmlns:a="http://schemas.openxmlformats.org/drawingml/2006/main" xmlns:p="http://schemas.openxmlformats.org/presentationml/2006/main" xmlns:r="http://schemas.openxmlformats.org/officeDocument/2006/relationships">
-  <p:cSld>
-    <p:spTree>
-      <p:nvGrpSpPr>
-        <p:cNvPr id="1" name=""/>
-        <p:cNvGrpSpPr/>
-        <p:nvPr/>
-      </p:nvGrpSpPr>
-      <p:grpSpPr/>
-      <p:sp>
-        <p:nvSpPr>
-          <p:cNvPr id="2" name="TextBox 1"/>
-          <p:cNvSpPr txBox="1"/>
-          <p:nvPr/>
-        </p:nvSpPr>
-        <p:spPr>
-          <a:xfrm>
-            <a:off x="548640" y="256032"/>
-            <a:ext cx="9600000" cy="777240"/>
-          </a:xfrm>
-          <a:prstGeom prst="rect">
-            <a:avLst/>
-          </a:prstGeom>
-          <a:noFill/>
-        </p:spPr>
-        <p:txBody>
-          <a:bodyPr wrap="square">
-            <a:spAutoFit/>
-          </a:bodyPr>
-          <a:lstStyle/>
+                  <a:srgbClr val="212121"/>
+                </a:solidFill>
+              </a:rPr>
+              <a:t>Provenance: the first two sweeps ran an unvalidated scenario geometry (found Sep 3); the fix is a runner default, and v3 is the re-baseline.</a:t>
+            </a:r>
+          </a:p>
           <a:p>
             <a:pPr>
               <a:spcAft>
-                <a:spcPts val="600"/>
-              </a:spcAft>
-            </a:pPr>
-            <a:r>
-              <a:rPr sz="2800" b="1">
-                <a:solidFill>
-                  <a:srgbClr val="1B3A6B"/>
-                </a:solidFill>
-              </a:rPr>
-              <a:t>Evaluation status</a:t>
-            </a:r>
-          </a:p>
-        </p:txBody>
-      </p:sp>
-      <p:sp>
-        <p:nvSpPr>
-          <p:cNvPr id="3" name="TextBox 2"/>
-          <p:cNvSpPr txBox="1"/>
-          <p:nvPr/>
-        </p:nvSpPr>
-        <p:spPr>
-          <a:xfrm>
-            <a:off x="10200000" y="292608"/>
-            <a:ext cx="1700000" cy="457200"/>
-          </a:xfrm>
-          <a:prstGeom prst="rect">
-            <a:avLst/>
-          </a:prstGeom>
-          <a:noFill/>
-        </p:spPr>
-        <p:txBody>
-          <a:bodyPr wrap="square">
-            <a:spAutoFit/>
-          </a:bodyPr>
-          <a:lstStyle/>
-          <a:p>
-            <a:pPr algn="r">
-              <a:spcAft>
-                <a:spcPts val="600"/>
-              </a:spcAft>
-            </a:pPr>
-            <a:r>
-              <a:rPr sz="1300" b="1">
-                <a:solidFill>
-                  <a:srgbClr val="B3A369"/>
-                </a:solidFill>
-              </a:rPr>
-              <a:t>RQ5</a:t>
-            </a:r>
-          </a:p>
-        </p:txBody>
-      </p:sp>
-      <p:sp>
-        <p:nvSpPr>
-          <p:cNvPr id="4" name="Rounded Rectangle 3"/>
-          <p:cNvSpPr/>
-          <p:nvPr/>
-        </p:nvSpPr>
-        <p:spPr>
-          <a:xfrm>
-            <a:off x="10200000" y="760000"/>
-            <a:ext cx="1450000" cy="330000"/>
-          </a:xfrm>
-          <a:prstGeom prst="roundRect">
-            <a:avLst/>
-          </a:prstGeom>
-          <a:solidFill>
-            <a:srgbClr val="1565C0"/>
-          </a:solidFill>
-          <a:ln>
-            <a:noFill/>
-          </a:ln>
-        </p:spPr>
-        <p:style>
-          <a:lnRef idx="1">
-            <a:schemeClr val="accent1"/>
-          </a:lnRef>
-          <a:fillRef idx="3">
-            <a:schemeClr val="accent1"/>
-          </a:fillRef>
-          <a:effectRef idx="2">
-            <a:schemeClr val="accent1"/>
-          </a:effectRef>
-          <a:fontRef idx="minor">
-            <a:schemeClr val="lt1"/>
-          </a:fontRef>
-        </p:style>
-        <p:txBody>
-          <a:bodyPr rtlCol="0" anchor="ctr"/>
-          <a:lstStyle/>
-          <a:p>
-            <a:pPr algn="ctr"/>
-            <a:r>
-              <a:rPr sz="1100" b="1">
-                <a:solidFill>
-                  <a:srgbClr val="FFFFFF"/>
-                </a:solidFill>
-              </a:rPr>
-              <a:t>Running</a:t>
+                <a:spcPts val="400"/>
+              </a:spcAft>
+            </a:pPr>
+            <a:r>
+              <a:rPr sz="1200" b="0">
+                <a:solidFill>
+                  <a:srgbClr val="212121"/>
+                </a:solidFill>
+              </a:rPr>
+              <a:t>Timeline: NSDI'27 abstracts Sep 10, papers Sep 17. T13 is the largest open item; early warning if it cannot land by Sep 15.</a:t>
             </a:r>
           </a:p>
         </p:txBody>
@@ -5197,649 +6727,6 @@
       <p:sp>
         <p:nvSpPr>
           <p:cNvPr id="5" name="TextBox 4"/>
-          <p:cNvSpPr txBox="1"/>
-          <p:nvPr/>
-        </p:nvSpPr>
-        <p:spPr>
-          <a:xfrm>
-            <a:off x="640080" y="1150000"/>
-            <a:ext cx="10972800" cy="3200000"/>
-          </a:xfrm>
-          <a:prstGeom prst="rect">
-            <a:avLst/>
-          </a:prstGeom>
-          <a:noFill/>
-        </p:spPr>
-        <p:txBody>
-          <a:bodyPr wrap="square">
-            <a:spAutoFit/>
-          </a:bodyPr>
-          <a:lstStyle/>
-          <a:p>
-            <a:pPr>
-              <a:spcAft>
-                <a:spcPts val="800"/>
-              </a:spcAft>
-            </a:pPr>
-            <a:r>
-              <a:rPr sz="1600" b="0">
-                <a:solidFill>
-                  <a:srgbClr val="212121"/>
-                </a:solidFill>
-              </a:rPr>
-              <a:t>• Found Sep 3: the sweep harness never set the validated scenario geometry (12 m/s oncoming, 300 m trigger).</a:t>
-            </a:r>
-          </a:p>
-          <a:p>
-            <a:pPr>
-              <a:spcAft>
-                <a:spcPts val="800"/>
-              </a:spcAft>
-            </a:pPr>
-            <a:r>
-              <a:rPr sz="1600" b="0">
-                <a:solidFill>
-                  <a:srgbClr val="212121"/>
-                </a:solidFill>
-              </a:rPr>
-              <a:t>• Same code, bare geometry: 1 collision, no completion. Validated geometry: clean completion.</a:t>
-            </a:r>
-          </a:p>
-          <a:p>
-            <a:pPr>
-              <a:spcAft>
-                <a:spcPts val="800"/>
-              </a:spcAft>
-            </a:pPr>
-            <a:r>
-              <a:rPr sz="1600" b="0">
-                <a:solidFill>
-                  <a:srgbClr val="212121"/>
-                </a:solidFill>
-              </a:rPr>
-              <a:t>• Consequence: the v2 sweep is discarded and v1 relative findings are provisional.</a:t>
-            </a:r>
-          </a:p>
-          <a:p>
-            <a:pPr>
-              <a:spcAft>
-                <a:spcPts val="800"/>
-              </a:spcAft>
-            </a:pPr>
-            <a:r>
-              <a:rPr sz="1600" b="0">
-                <a:solidFill>
-                  <a:srgbClr val="212121"/>
-                </a:solidFill>
-              </a:rPr>
-              <a:t>• Fix: the geometry is now a runner default. The v3 re-baseline is running (6 arms × 10 + 15 burst).</a:t>
-            </a:r>
-          </a:p>
-          <a:p>
-            <a:pPr>
-              <a:spcAft>
-                <a:spcPts val="800"/>
-              </a:spcAft>
-            </a:pPr>
-            <a:r>
-              <a:rPr sz="1600" b="0">
-                <a:solidFill>
-                  <a:srgbClr val="212121"/>
-                </a:solidFill>
-              </a:rPr>
-              <a:t>• Queue after v3: crossing-rate sweep, lookahead redo, canonical reproduction check.</a:t>
-            </a:r>
-          </a:p>
-        </p:txBody>
-      </p:sp>
-      <p:sp>
-        <p:nvSpPr>
-          <p:cNvPr id="6" name="TextBox 5"/>
-          <p:cNvSpPr txBox="1"/>
-          <p:nvPr/>
-        </p:nvSpPr>
-        <p:spPr>
-          <a:xfrm>
-            <a:off x="640080" y="6263640"/>
-            <a:ext cx="10972800" cy="457200"/>
-          </a:xfrm>
-          <a:prstGeom prst="rect">
-            <a:avLst/>
-          </a:prstGeom>
-          <a:noFill/>
-        </p:spPr>
-        <p:txBody>
-          <a:bodyPr wrap="square">
-            <a:spAutoFit/>
-          </a:bodyPr>
-          <a:lstStyle/>
-          <a:p>
-            <a:pPr>
-              <a:spcAft>
-                <a:spcPts val="600"/>
-              </a:spcAft>
-            </a:pPr>
-            <a:r>
-              <a:rPr sz="1200" b="0">
-                <a:solidFill>
-                  <a:srgbClr val="B3A369"/>
-                </a:solidFill>
-              </a:rPr>
-              <a:t>Absolute rates stay embargoed until v3 lands clean  ·  No number in the paper cites v1 or v2 absolutes</a:t>
-            </a:r>
-          </a:p>
-        </p:txBody>
-      </p:sp>
-    </p:spTree>
-  </p:cSld>
-  <p:clrMapOvr>
-    <a:masterClrMapping/>
-  </p:clrMapOvr>
-</p:sld>
-</file>
-
-<file path=ppt/slides/slide16.xml><?xml version="1.0" encoding="utf-8"?>
-<p:sld xmlns:a="http://schemas.openxmlformats.org/drawingml/2006/main" xmlns:p="http://schemas.openxmlformats.org/presentationml/2006/main" xmlns:r="http://schemas.openxmlformats.org/officeDocument/2006/relationships">
-  <p:cSld>
-    <p:spTree>
-      <p:nvGrpSpPr>
-        <p:cNvPr id="1" name=""/>
-        <p:cNvGrpSpPr/>
-        <p:nvPr/>
-      </p:nvGrpSpPr>
-      <p:grpSpPr/>
-      <p:sp>
-        <p:nvSpPr>
-          <p:cNvPr id="2" name="TextBox 1"/>
-          <p:cNvSpPr txBox="1"/>
-          <p:nvPr/>
-        </p:nvSpPr>
-        <p:spPr>
-          <a:xfrm>
-            <a:off x="548640" y="256032"/>
-            <a:ext cx="9600000" cy="777240"/>
-          </a:xfrm>
-          <a:prstGeom prst="rect">
-            <a:avLst/>
-          </a:prstGeom>
-          <a:noFill/>
-        </p:spPr>
-        <p:txBody>
-          <a:bodyPr wrap="square">
-            <a:spAutoFit/>
-          </a:bodyPr>
-          <a:lstStyle/>
-          <a:p>
-            <a:pPr>
-              <a:spcAft>
-                <a:spcPts val="600"/>
-              </a:spcAft>
-            </a:pPr>
-            <a:r>
-              <a:rPr sz="2800" b="1">
-                <a:solidFill>
-                  <a:srgbClr val="1B3A6B"/>
-                </a:solidFill>
-              </a:rPr>
-              <a:t>Research questions and evidence</a:t>
-            </a:r>
-          </a:p>
-        </p:txBody>
-      </p:sp>
-      <p:graphicFrame>
-        <p:nvGraphicFramePr>
-          <p:cNvPr id="3" name="Table 2"/>
-          <p:cNvGraphicFramePr>
-            <a:graphicFrameLocks noGrp="1"/>
-          </p:cNvGraphicFramePr>
-          <p:nvPr/>
-        </p:nvGraphicFramePr>
-        <p:xfrm>
-          <a:off x="548640" y="1150000"/>
-          <a:ext cx="11094720" cy="4300000"/>
-        </p:xfrm>
-        <a:graphic>
-          <a:graphicData uri="http://schemas.openxmlformats.org/drawingml/2006/table">
-            <a:tbl>
-              <a:tblPr firstRow="1" bandRow="1">
-                <a:tableStyleId>{5C22544A-7EE6-4342-B048-85BDC9FD1C3A}</a:tableStyleId>
-              </a:tblPr>
-              <a:tblGrid>
-                <a:gridCol w="1900000"/>
-                <a:gridCol w="2500000"/>
-                <a:gridCol w="2700000"/>
-                <a:gridCol w="2700000"/>
-                <a:gridCol w="1294720"/>
-              </a:tblGrid>
-              <a:tr h="716666">
-                <a:tc>
-                  <a:txBody>
-                    <a:bodyPr/>
-                    <a:lstStyle/>
-                    <a:p>
-                      <a:r>
-                        <a:rPr sz="1100" b="1"/>
-                        <a:t>Question</a:t>
-                      </a:r>
-                    </a:p>
-                  </a:txBody>
-                  <a:tcPr/>
-                </a:tc>
-                <a:tc>
-                  <a:txBody>
-                    <a:bodyPr/>
-                    <a:lstStyle/>
-                    <a:p>
-                      <a:r>
-                        <a:rPr sz="1100" b="1"/>
-                        <a:t>Current answer</a:t>
-                      </a:r>
-                    </a:p>
-                  </a:txBody>
-                  <a:tcPr/>
-                </a:tc>
-                <a:tc>
-                  <a:txBody>
-                    <a:bodyPr/>
-                    <a:lstStyle/>
-                    <a:p>
-                      <a:r>
-                        <a:rPr sz="1100" b="1"/>
-                        <a:t>Evidence</a:t>
-                      </a:r>
-                    </a:p>
-                  </a:txBody>
-                  <a:tcPr/>
-                </a:tc>
-                <a:tc>
-                  <a:txBody>
-                    <a:bodyPr/>
-                    <a:lstStyle/>
-                    <a:p>
-                      <a:r>
-                        <a:rPr sz="1100" b="1"/>
-                        <a:t>Missing experiment</a:t>
-                      </a:r>
-                    </a:p>
-                  </a:txBody>
-                  <a:tcPr/>
-                </a:tc>
-                <a:tc>
-                  <a:txBody>
-                    <a:bodyPr/>
-                    <a:lstStyle/>
-                    <a:p>
-                      <a:r>
-                        <a:rPr sz="1100" b="1"/>
-                        <a:t>Status</a:t>
-                      </a:r>
-                    </a:p>
-                  </a:txBody>
-                  <a:tcPr/>
-                </a:tc>
-              </a:tr>
-              <a:tr h="716666">
-                <a:tc>
-                  <a:txBody>
-                    <a:bodyPr/>
-                    <a:lstStyle/>
-                    <a:p>
-                      <a:r>
-                        <a:rPr sz="1100" b="0"/>
-                        <a:t>RQ1 locale size</a:t>
-                      </a:r>
-                    </a:p>
-                  </a:txBody>
-                  <a:tcPr/>
-                </a:tc>
-                <a:tc>
-                  <a:txBody>
-                    <a:bodyPr/>
-                    <a:lstStyle/>
-                    <a:p>
-                      <a:r>
-                        <a:rPr sz="1100" b="0"/>
-                        <a:t>About 300 m for our stack</a:t>
-                      </a:r>
-                    </a:p>
-                  </a:txBody>
-                  <a:tcPr/>
-                </a:tc>
-                <a:tc>
-                  <a:txBody>
-                    <a:bodyPr/>
-                    <a:lstStyle/>
-                    <a:p>
-                      <a:r>
-                        <a:rPr sz="1100" b="0"/>
-                        <a:t>canvas sweep, 282 to 400 m at 8 contributors</a:t>
-                      </a:r>
-                    </a:p>
-                  </a:txBody>
-                  <a:tcPr/>
-                </a:tc>
-                <a:tc>
-                  <a:txBody>
-                    <a:bodyPr/>
-                    <a:lstStyle/>
-                    <a:p>
-                      <a:r>
-                        <a:rPr sz="1100" b="0"/>
-                        <a:t>sizing study on density traces</a:t>
-                      </a:r>
-                    </a:p>
-                  </a:txBody>
-                  <a:tcPr/>
-                </a:tc>
-                <a:tc>
-                  <a:txBody>
-                    <a:bodyPr/>
-                    <a:lstStyle/>
-                    <a:p>
-                      <a:r>
-                        <a:rPr sz="1100" b="1">
-                          <a:solidFill>
-                            <a:srgbClr val="2E7D32"/>
-                          </a:solidFill>
-                        </a:rPr>
-                        <a:t>Done</a:t>
-                      </a:r>
-                    </a:p>
-                  </a:txBody>
-                  <a:tcPr/>
-                </a:tc>
-              </a:tr>
-              <a:tr h="716666">
-                <a:tc>
-                  <a:txBody>
-                    <a:bodyPr/>
-                    <a:lstStyle/>
-                    <a:p>
-                      <a:r>
-                        <a:rPr sz="1100" b="0"/>
-                        <a:t>RQ2 tracking state</a:t>
-                      </a:r>
-                    </a:p>
-                  </a:txBody>
-                  <a:tcPr/>
-                </a:tc>
-                <a:tc>
-                  <a:txBody>
-                    <a:bodyPr/>
-                    <a:lstStyle/>
-                    <a:p>
-                      <a:r>
-                        <a:rPr sz="1100" b="0"/>
-                        <a:t>Observation history, not a snapshot</a:t>
-                      </a:r>
-                    </a:p>
-                  </a:txBody>
-                  <a:tcPr/>
-                </a:tc>
-                <a:tc>
-                  <a:txBody>
-                    <a:bodyPr/>
-                    <a:lstStyle/>
-                    <a:p>
-                      <a:r>
-                        <a:rPr sz="1100" b="0"/>
-                        <a:t>microbench 2.8 to 9.3×; acceleration 4/4 vs 3/4</a:t>
-                      </a:r>
-                    </a:p>
-                  </a:txBody>
-                  <a:tcPr/>
-                </a:tc>
-                <a:tc>
-                  <a:txBody>
-                    <a:bodyPr/>
-                    <a:lstStyle/>
-                    <a:p>
-                      <a:r>
-                        <a:rPr sz="1100" b="0"/>
-                        <a:t>post-handoff minADE and minFDE</a:t>
-                      </a:r>
-                    </a:p>
-                  </a:txBody>
-                  <a:tcPr/>
-                </a:tc>
-                <a:tc>
-                  <a:txBody>
-                    <a:bodyPr/>
-                    <a:lstStyle/>
-                    <a:p>
-                      <a:r>
-                        <a:rPr sz="1100" b="1">
-                          <a:solidFill>
-                            <a:srgbClr val="2E7D32"/>
-                          </a:solidFill>
-                        </a:rPr>
-                        <a:t>Done</a:t>
-                      </a:r>
-                    </a:p>
-                  </a:txBody>
-                  <a:tcPr/>
-                </a:tc>
-              </a:tr>
-              <a:tr h="716666">
-                <a:tc>
-                  <a:txBody>
-                    <a:bodyPr/>
-                    <a:lstStyle/>
-                    <a:p>
-                      <a:r>
-                        <a:rPr sz="1100" b="0"/>
-                        <a:t>RQ3 where mechanisms fail</a:t>
-                      </a:r>
-                    </a:p>
-                  </a:txBody>
-                  <a:tcPr/>
-                </a:tc>
-                <a:tc>
-                  <a:txBody>
-                    <a:bodyPr/>
-                    <a:lstStyle/>
-                    <a:p>
-                      <a:r>
-                        <a:rPr sz="1100" b="0"/>
-                        <a:t>Late transfer and snapshots fail on approach segments</a:t>
-                      </a:r>
-                    </a:p>
-                  </a:txBody>
-                  <a:tcPr/>
-                </a:tc>
-                <a:tc>
-                  <a:txBody>
-                    <a:bodyPr/>
-                    <a:lstStyle/>
-                    <a:p>
-                      <a:r>
-                        <a:rPr sz="1100" b="0"/>
-                        <a:t>lead-time sweep (unvalidated geometry)</a:t>
-                      </a:r>
-                    </a:p>
-                  </a:txBody>
-                  <a:tcPr/>
-                </a:tc>
-                <a:tc>
-                  <a:txBody>
-                    <a:bodyPr/>
-                    <a:lstStyle/>
-                    <a:p>
-                      <a:r>
-                        <a:rPr sz="1100" b="0"/>
-                        <a:t>v3 re-baseline; boundary-position sweep; V2X-Seq trigger study</a:t>
-                      </a:r>
-                    </a:p>
-                  </a:txBody>
-                  <a:tcPr/>
-                </a:tc>
-                <a:tc>
-                  <a:txBody>
-                    <a:bodyPr/>
-                    <a:lstStyle/>
-                    <a:p>
-                      <a:r>
-                        <a:rPr sz="1100" b="1">
-                          <a:solidFill>
-                            <a:srgbClr val="D68C00"/>
-                          </a:solidFill>
-                        </a:rPr>
-                        <a:t>Provisional</a:t>
-                      </a:r>
-                    </a:p>
-                  </a:txBody>
-                  <a:tcPr/>
-                </a:tc>
-              </a:tr>
-              <a:tr h="716666">
-                <a:tc>
-                  <a:txBody>
-                    <a:bodyPr/>
-                    <a:lstStyle/>
-                    <a:p>
-                      <a:r>
-                        <a:rPr sz="1100" b="0"/>
-                        <a:t>RQ4 freshness through transfer</a:t>
-                      </a:r>
-                    </a:p>
-                  </a:txBody>
-                  <a:tcPr/>
-                </a:tc>
-                <a:tc>
-                  <a:txBody>
-                    <a:bodyPr/>
-                    <a:lstStyle/>
-                    <a:p>
-                      <a:r>
-                        <a:rPr sz="1100" b="0"/>
-                        <a:t>Design meets it; live measurement pending</a:t>
-                      </a:r>
-                    </a:p>
-                  </a:txBody>
-                  <a:tcPr/>
-                </a:tc>
-                <a:tc>
-                  <a:txBody>
-                    <a:bodyPr/>
-                    <a:lstStyle/>
-                    <a:p>
-                      <a:r>
-                        <a:rPr sz="1100" b="0"/>
-                        <a:t>age chain; 8-scenario fault microeval</a:t>
-                      </a:r>
-                    </a:p>
-                  </a:txBody>
-                  <a:tcPr/>
-                </a:tc>
-                <a:tc>
-                  <a:txBody>
-                    <a:bodyPr/>
-                    <a:lstStyle/>
-                    <a:p>
-                      <a:r>
-                        <a:rPr sz="1100" b="0"/>
-                        <a:t>computed trigger vs fixed leads; live fault arms</a:t>
-                      </a:r>
-                    </a:p>
-                  </a:txBody>
-                  <a:tcPr/>
-                </a:tc>
-                <a:tc>
-                  <a:txBody>
-                    <a:bodyPr/>
-                    <a:lstStyle/>
-                    <a:p>
-                      <a:r>
-                        <a:rPr sz="1100" b="1">
-                          <a:solidFill>
-                            <a:srgbClr val="1565C0"/>
-                          </a:solidFill>
-                        </a:rPr>
-                        <a:t>Running</a:t>
-                      </a:r>
-                    </a:p>
-                  </a:txBody>
-                  <a:tcPr/>
-                </a:tc>
-              </a:tr>
-              <a:tr h="716670">
-                <a:tc>
-                  <a:txBody>
-                    <a:bodyPr/>
-                    <a:lstStyle/>
-                    <a:p>
-                      <a:r>
-                        <a:rPr sz="1100" b="0"/>
-                        <a:t>RQ5 feasible region</a:t>
-                      </a:r>
-                    </a:p>
-                  </a:txBody>
-                  <a:tcPr/>
-                </a:tc>
-                <a:tc>
-                  <a:txBody>
-                    <a:bodyPr/>
-                    <a:lstStyle/>
-                    <a:p>
-                      <a:r>
-                        <a:rPr sz="1100" b="0"/>
-                        <a:t>Unknown until the corrected sweeps land</a:t>
-                      </a:r>
-                    </a:p>
-                  </a:txBody>
-                  <a:tcPr/>
-                </a:tc>
-                <a:tc>
-                  <a:txBody>
-                    <a:bodyPr/>
-                    <a:lstStyle/>
-                    <a:p>
-                      <a:r>
-                        <a:rPr sz="1100" b="0"/>
-                        <a:t>harness and knobs</a:t>
-                      </a:r>
-                    </a:p>
-                  </a:txBody>
-                  <a:tcPr/>
-                </a:tc>
-                <a:tc>
-                  <a:txBody>
-                    <a:bodyPr/>
-                    <a:lstStyle/>
-                    <a:p>
-                      <a:r>
-                        <a:rPr sz="1100" b="0"/>
-                        <a:t>burst and crossing-rate sweep; real transport; association</a:t>
-                      </a:r>
-                    </a:p>
-                  </a:txBody>
-                  <a:tcPr/>
-                </a:tc>
-                <a:tc>
-                  <a:txBody>
-                    <a:bodyPr/>
-                    <a:lstStyle/>
-                    <a:p>
-                      <a:r>
-                        <a:rPr sz="1100" b="1">
-                          <a:solidFill>
-                            <a:srgbClr val="1565C0"/>
-                          </a:solidFill>
-                        </a:rPr>
-                        <a:t>Running</a:t>
-                      </a:r>
-                    </a:p>
-                  </a:txBody>
-                  <a:tcPr/>
-                </a:tc>
-              </a:tr>
-            </a:tbl>
-          </a:graphicData>
-        </a:graphic>
-      </p:graphicFrame>
-      <p:sp>
-        <p:nvSpPr>
-          <p:cNvPr id="4" name="TextBox 3"/>
           <p:cNvSpPr txBox="1"/>
           <p:nvPr/>
         </p:nvSpPr>
@@ -5926,21 +6813,72 @@
                   <a:srgbClr val="1B3A6B"/>
                 </a:solidFill>
               </a:rPr>
-              <a:t>Claim being tested</a:t>
-            </a:r>
-          </a:p>
-        </p:txBody>
-      </p:sp>
-      <p:sp>
-        <p:nvSpPr>
-          <p:cNvPr id="3" name="TextBox 2"/>
+              <a:t>Conductor solved one locale</a:t>
+            </a:r>
+          </a:p>
+        </p:txBody>
+      </p:sp>
+      <p:sp>
+        <p:nvSpPr>
+          <p:cNvPr id="3" name="Rounded Rectangle 2"/>
+          <p:cNvSpPr/>
+          <p:nvPr/>
+        </p:nvSpPr>
+        <p:spPr>
+          <a:xfrm>
+            <a:off x="10200000" y="760000"/>
+            <a:ext cx="1450000" cy="330000"/>
+          </a:xfrm>
+          <a:prstGeom prst="roundRect">
+            <a:avLst/>
+          </a:prstGeom>
+          <a:solidFill>
+            <a:srgbClr val="2E7D32"/>
+          </a:solidFill>
+          <a:ln>
+            <a:noFill/>
+          </a:ln>
+        </p:spPr>
+        <p:style>
+          <a:lnRef idx="1">
+            <a:schemeClr val="accent1"/>
+          </a:lnRef>
+          <a:fillRef idx="3">
+            <a:schemeClr val="accent1"/>
+          </a:fillRef>
+          <a:effectRef idx="2">
+            <a:schemeClr val="accent1"/>
+          </a:effectRef>
+          <a:fontRef idx="minor">
+            <a:schemeClr val="lt1"/>
+          </a:fontRef>
+        </p:style>
+        <p:txBody>
+          <a:bodyPr rtlCol="0" anchor="ctr" wrap="square"/>
+          <a:lstStyle/>
+          <a:p>
+            <a:pPr algn="ctr"/>
+            <a:r>
+              <a:rPr sz="1100" b="1">
+                <a:solidFill>
+                  <a:srgbClr val="FFFFFF"/>
+                </a:solidFill>
+              </a:rPr>
+              <a:t>Done</a:t>
+            </a:r>
+          </a:p>
+        </p:txBody>
+      </p:sp>
+      <p:sp>
+        <p:nvSpPr>
+          <p:cNvPr id="4" name="TextBox 3"/>
           <p:cNvSpPr txBox="1"/>
           <p:nvPr/>
         </p:nvSpPr>
         <p:spPr>
           <a:xfrm>
             <a:off x="640080" y="1150000"/>
-            <a:ext cx="10972800" cy="2000000"/>
+            <a:ext cx="10972800" cy="3600000"/>
           </a:xfrm>
           <a:prstGeom prst="rect">
             <a:avLst/>
@@ -5964,7 +6902,7 @@
                   <a:srgbClr val="212121"/>
                 </a:solidFill>
               </a:rPr>
-              <a:t>• Locale-scaled cooperative prediction must migrate per-track temporal state before actor ownership changes.</a:t>
+              <a:t>• One shared cooperative-prediction service per road region: fusion, tracking, trajectory prediction.</a:t>
             </a:r>
           </a:p>
           <a:p>
@@ -5979,7 +6917,7 @@
                   <a:srgbClr val="212121"/>
                 </a:solidFill>
               </a:rPr>
-              <a:t>• Otherwise the destination suffers a planner-visible cold start.</a:t>
+              <a:t>• Admission control and prediction scheduling keep it inside the 300 ms deadline up to 31 CAVs.</a:t>
             </a:r>
           </a:p>
           <a:p>
@@ -5994,7 +6932,7 @@
                   <a:srgbClr val="212121"/>
                 </a:solidFill>
               </a:rPr>
-              <a:t>• Chain: bounded locale size → frequent crossings → history-dependent tracking → lost history → cold start.</a:t>
+              <a:t>• Accepted at SEC 2026.</a:t>
             </a:r>
           </a:p>
           <a:p>
@@ -6009,14 +6947,14 @@
                   <a:srgbClr val="212121"/>
                 </a:solidFill>
               </a:rPr>
-              <a:t>• Khonsu moves the state on the service's own forecast, before the crossing, with one current owner per track.</a:t>
-            </a:r>
-          </a:p>
-        </p:txBody>
-      </p:sp>
-      <p:sp>
-        <p:nvSpPr>
-          <p:cNvPr id="4" name="TextBox 3"/>
+              <a:t>• Bottom line: we know how to operate one locale.</a:t>
+            </a:r>
+          </a:p>
+        </p:txBody>
+      </p:sp>
+      <p:sp>
+        <p:nvSpPr>
+          <p:cNvPr id="5" name="TextBox 4"/>
           <p:cNvSpPr txBox="1"/>
           <p:nvPr/>
         </p:nvSpPr>
@@ -6047,7 +6985,7 @@
                   <a:srgbClr val="B3A369"/>
                 </a:solidFill>
               </a:rPr>
-              <a:t>Thesis sentence for the NSDI paper; every following slide tests one link of the chain.</a:t>
+              <a:t>Landle et al., Scalable Edge-assisted Fusion and Path Prediction for Connected Autonomous Vehicles, SEC 2026</a:t>
             </a:r>
           </a:p>
         </p:txBody>
@@ -6103,7 +7041,7 @@
                   <a:srgbClr val="1B3A6B"/>
                 </a:solidFill>
               </a:rPr>
-              <a:t>Research Questions</a:t>
+              <a:t>The next problem is metropolitan scale</a:t>
             </a:r>
           </a:p>
         </p:txBody>
@@ -6116,8 +7054,8 @@
         </p:nvSpPr>
         <p:spPr>
           <a:xfrm>
-            <a:off x="640080" y="1150000"/>
-            <a:ext cx="10972800" cy="3200000"/>
+            <a:off x="640080" y="1100000"/>
+            <a:ext cx="10972800" cy="1200000"/>
           </a:xfrm>
           <a:prstGeom prst="rect">
             <a:avLst/>
@@ -6141,7 +7079,7 @@
                   <a:srgbClr val="212121"/>
                 </a:solidFill>
               </a:rPr>
-              <a:t>• RQ1  How large can a locale be while meeting the edge deadline?</a:t>
+              <a:t>• One locale has finite spatial extent.</a:t>
             </a:r>
           </a:p>
           <a:p>
@@ -6156,7 +7094,7 @@
                   <a:srgbClr val="212121"/>
                 </a:solidFill>
               </a:rPr>
-              <a:t>• RQ2  What tracking state is required for maneuvering vehicles?</a:t>
+              <a:t>• City coverage therefore needs many locales.</a:t>
             </a:r>
           </a:p>
           <a:p>
@@ -6171,51 +7109,74 @@
                   <a:srgbClr val="212121"/>
                 </a:solidFill>
               </a:rPr>
-              <a:t>• RQ3  When do locale crossings make existing migration mechanisms fail?</a:t>
-            </a:r>
-          </a:p>
-          <a:p>
-            <a:pPr>
-              <a:spcAft>
-                <a:spcPts val="800"/>
-              </a:spcAft>
-            </a:pPr>
-            <a:r>
-              <a:rPr sz="1600" b="0">
-                <a:solidFill>
-                  <a:srgbClr val="212121"/>
-                </a:solidFill>
-              </a:rPr>
-              <a:t>• RQ4  Can migration preserve planner freshness through ownership transfer?</a:t>
-            </a:r>
-          </a:p>
-          <a:p>
-            <a:pPr>
-              <a:spcAft>
-                <a:spcPts val="800"/>
-              </a:spcAft>
-            </a:pPr>
-            <a:r>
-              <a:rPr sz="1600" b="0">
-                <a:solidFill>
-                  <a:srgbClr val="212121"/>
-                </a:solidFill>
-              </a:rPr>
-              <a:t>• RQ5  Under what load and network conditions does Khonsu remain feasible?</a:t>
-            </a:r>
-          </a:p>
-        </p:txBody>
-      </p:sp>
-      <p:sp>
-        <p:nvSpPr>
-          <p:cNvPr id="4" name="TextBox 3"/>
+              <a:t>• Vehicles and tracked actors cross between them continually.</a:t>
+            </a:r>
+          </a:p>
+        </p:txBody>
+      </p:sp>
+      <p:sp>
+        <p:nvSpPr>
+          <p:cNvPr id="4" name="Rounded Rectangle 3"/>
+          <p:cNvSpPr/>
+          <p:nvPr/>
+        </p:nvSpPr>
+        <p:spPr>
+          <a:xfrm>
+            <a:off x="640080" y="2450000"/>
+            <a:ext cx="10972800" cy="900000"/>
+          </a:xfrm>
+          <a:prstGeom prst="roundRect">
+            <a:avLst/>
+          </a:prstGeom>
+          <a:solidFill>
+            <a:srgbClr val="E1E8F5"/>
+          </a:solidFill>
+          <a:ln w="15875">
+            <a:solidFill>
+              <a:srgbClr val="1B3A6B"/>
+            </a:solidFill>
+          </a:ln>
+        </p:spPr>
+        <p:style>
+          <a:lnRef idx="1">
+            <a:schemeClr val="accent1"/>
+          </a:lnRef>
+          <a:fillRef idx="3">
+            <a:schemeClr val="accent1"/>
+          </a:fillRef>
+          <a:effectRef idx="2">
+            <a:schemeClr val="accent1"/>
+          </a:effectRef>
+          <a:fontRef idx="minor">
+            <a:schemeClr val="lt1"/>
+          </a:fontRef>
+        </p:style>
+        <p:txBody>
+          <a:bodyPr rtlCol="0" anchor="ctr" wrap="square"/>
+          <a:lstStyle/>
+          <a:p>
+            <a:pPr algn="ctr"/>
+            <a:r>
+              <a:rPr sz="1600" b="1">
+                <a:solidFill>
+                  <a:srgbClr val="1B3A6B"/>
+                </a:solidFill>
+              </a:rPr>
+              <a:t>Main question: how do we extend edge-hosted cooperative prediction from one locale to a metropolitan deployment while preserving planner safety?</a:t>
+            </a:r>
+          </a:p>
+        </p:txBody>
+      </p:sp>
+      <p:sp>
+        <p:nvSpPr>
+          <p:cNvPr id="5" name="TextBox 4"/>
           <p:cNvSpPr txBox="1"/>
           <p:nvPr/>
         </p:nvSpPr>
         <p:spPr>
           <a:xfrm>
-            <a:off x="640080" y="6263640"/>
-            <a:ext cx="10972800" cy="457200"/>
+            <a:off x="640080" y="3550000"/>
+            <a:ext cx="10972800" cy="2600000"/>
           </a:xfrm>
           <a:prstGeom prst="rect">
             <a:avLst/>
@@ -6230,6 +7191,89 @@
           <a:p>
             <a:pPr>
               <a:spcAft>
+                <a:spcPts val="800"/>
+              </a:spcAft>
+            </a:pPr>
+            <a:r>
+              <a:rPr sz="1400" b="0">
+                <a:solidFill>
+                  <a:srgbClr val="212121"/>
+                </a:solidFill>
+              </a:rPr>
+              <a:t>RQ1  Scale-out: how should cooperative prediction be partitioned across locales, and what limits the region one locale can serve?</a:t>
+            </a:r>
+          </a:p>
+          <a:p>
+            <a:pPr>
+              <a:spcAft>
+                <a:spcPts val="800"/>
+              </a:spcAft>
+            </a:pPr>
+            <a:r>
+              <a:rPr sz="1400" b="0">
+                <a:solidFill>
+                  <a:srgbClr val="212121"/>
+                </a:solidFill>
+              </a:rPr>
+              <a:t>RQ2  State continuity: when actors move between locales, what state must follow them to preserve prediction quality?</a:t>
+            </a:r>
+          </a:p>
+          <a:p>
+            <a:pPr>
+              <a:spcAft>
+                <a:spcPts val="800"/>
+              </a:spcAft>
+            </a:pPr>
+            <a:r>
+              <a:rPr sz="1400" b="0">
+                <a:solidFill>
+                  <a:srgbClr val="212121"/>
+                </a:solidFill>
+              </a:rPr>
+              <a:t>RQ3  Safe handoff: what handoff timing and mechanism keep predictions inside the maneuver-specific safe-age envelope?</a:t>
+            </a:r>
+          </a:p>
+          <a:p>
+            <a:pPr>
+              <a:spcAft>
+                <a:spcPts val="800"/>
+              </a:spcAft>
+            </a:pPr>
+            <a:r>
+              <a:rPr sz="1400" b="0">
+                <a:solidFill>
+                  <a:srgbClr val="212121"/>
+                </a:solidFill>
+              </a:rPr>
+              <a:t>RQ4  Multi-locale operation: can the design sustain repeated and concurrent handoffs across a realistic corridor?</a:t>
+            </a:r>
+          </a:p>
+        </p:txBody>
+      </p:sp>
+      <p:sp>
+        <p:nvSpPr>
+          <p:cNvPr id="6" name="TextBox 5"/>
+          <p:cNvSpPr txBox="1"/>
+          <p:nvPr/>
+        </p:nvSpPr>
+        <p:spPr>
+          <a:xfrm>
+            <a:off x="640080" y="6263640"/>
+            <a:ext cx="10972800" cy="457200"/>
+          </a:xfrm>
+          <a:prstGeom prst="rect">
+            <a:avLst/>
+          </a:prstGeom>
+          <a:noFill/>
+        </p:spPr>
+        <p:txBody>
+          <a:bodyPr wrap="square">
+            <a:spAutoFit/>
+          </a:bodyPr>
+          <a:lstStyle/>
+          <a:p>
+            <a:pPr>
+              <a:spcAft>
                 <a:spcPts val="600"/>
               </a:spcAft>
             </a:pPr>
@@ -6239,7 +7283,7 @@
                   <a:srgbClr val="B3A369"/>
                 </a:solidFill>
               </a:rPr>
-              <a:t>Each RQ slide gives the current answer, the evidence, and the missing experiment.</a:t>
+              <a:t>Khonsu is the answer that falls out of RQ2 and RQ3; RQ4 tests it as a system.</a:t>
             </a:r>
           </a:p>
         </p:txBody>
@@ -6295,7 +7339,7 @@
                   <a:srgbClr val="1B3A6B"/>
                 </a:solidFill>
               </a:rPr>
-              <a:t>GPU latency limits locale size</a:t>
+              <a:t>RQ1: one locale has a finite region</a:t>
             </a:r>
           </a:p>
         </p:txBody>
@@ -6374,7 +7418,7 @@
           </a:fontRef>
         </p:style>
         <p:txBody>
-          <a:bodyPr rtlCol="0" anchor="ctr"/>
+          <a:bodyPr rtlCol="0" anchor="ctr" wrap="square"/>
           <a:lstStyle/>
           <a:p>
             <a:pPr algn="ctr"/>
@@ -6398,7 +7442,7 @@
         <p:spPr>
           <a:xfrm>
             <a:off x="640080" y="1150000"/>
-            <a:ext cx="10972800" cy="2000000"/>
+            <a:ext cx="10972800" cy="3600000"/>
           </a:xfrm>
           <a:prstGeom prst="rect">
             <a:avLst/>
@@ -6437,7 +7481,7 @@
                   <a:srgbClr val="212121"/>
                 </a:solidFill>
               </a:rPr>
-              <a:t>• At 8 contributors, fusion exceeds its 130 ms budget between 282 and 400 m.</a:t>
+              <a:t>• At 8 contributors, fusion exceeds its 130 ms allocation between 282 and 400 m.</a:t>
             </a:r>
           </a:p>
           <a:p>
@@ -6529,7 +7573,7 @@
                   <a:srgbClr val="B3A369"/>
                 </a:solidFill>
               </a:rPr>
-              <a:t>Answers RQ1  ·  Evidence: canvas latency sweep on the edge GPU (Aug 31)  ·  Caveat: the number is architecture-specific</a:t>
+              <a:t>Evidence: canvas latency sweep on the edge GPU  ·  Caveat: the number is architecture-specific; the existence of a cap is general</a:t>
             </a:r>
           </a:p>
         </p:txBody>
@@ -6585,7 +7629,7 @@
                   <a:srgbClr val="1B3A6B"/>
                 </a:solidFill>
               </a:rPr>
-              <a:t>Metropolitan coverage requires many locales</a:t>
+              <a:t>RQ1: what a multi-locale deployment looks like</a:t>
             </a:r>
           </a:p>
         </p:txBody>
@@ -6664,7 +7708,7 @@
           </a:fontRef>
         </p:style>
         <p:txBody>
-          <a:bodyPr rtlCol="0" anchor="ctr"/>
+          <a:bodyPr rtlCol="0" anchor="ctr" wrap="square"/>
           <a:lstStyle/>
           <a:p>
             <a:pPr algn="ctr"/>
@@ -6688,7 +7732,7 @@
         <p:spPr>
           <a:xfrm>
             <a:off x="640080" y="1150000"/>
-            <a:ext cx="10972800" cy="2000000"/>
+            <a:ext cx="10972800" cy="3600000"/>
           </a:xfrm>
           <a:prstGeom prst="rect">
             <a:avLst/>
@@ -6712,7 +7756,7 @@
                   <a:srgbClr val="212121"/>
                 </a:solidFill>
               </a:rPr>
-              <a:t>• Locales of about 300 m, each with its own service instance.</a:t>
+              <a:t>• Fixed conflict points, intersections and merges, are the natural locale anchors.</a:t>
             </a:r>
           </a:p>
           <a:p>
@@ -6727,7 +7771,7 @@
                   <a:srgbClr val="212121"/>
                 </a:solidFill>
               </a:rPr>
-              <a:t>• Boundaries fall on the road segments between conflict zones.</a:t>
+              <a:t>• Boundaries necessarily fall on the roads connecting them.</a:t>
             </a:r>
           </a:p>
           <a:p>
@@ -6757,7 +7801,7 @@
                   <a:srgbClr val="212121"/>
                 </a:solidFill>
               </a:rPr>
-              <a:t>• Handoffs are the steady-state workload, not a corner case.</a:t>
+              <a:t>• Handoffs are the steady-state workload of the deployment.</a:t>
             </a:r>
           </a:p>
         </p:txBody>
@@ -6843,7 +7887,7 @@
                   <a:srgbClr val="B3A369"/>
                 </a:solidFill>
               </a:rPr>
-              <a:t>Answers RQ1  ·  Evidence: partition of a CARLA town under the measured cap  ·  Missing: sizing study on measured density traces</a:t>
+              <a:t>Evidence: partition of a CARLA town under the measured cap  ·  Missing: sizing study on measured density traces</a:t>
             </a:r>
           </a:p>
         </p:txBody>
@@ -6899,7 +7943,7 @@
                   <a:srgbClr val="1B3A6B"/>
                 </a:solidFill>
               </a:rPr>
-              <a:t>Maneuvering vehicles require temporal history</a:t>
+              <a:t>Partitioning creates a new problem</a:t>
             </a:r>
           </a:p>
         </p:txBody>
@@ -6912,8 +7956,8 @@
         </p:nvSpPr>
         <p:spPr>
           <a:xfrm>
-            <a:off x="10200000" y="292608"/>
-            <a:ext cx="1700000" cy="457200"/>
+            <a:off x="640080" y="1100000"/>
+            <a:ext cx="10972800" cy="1000000"/>
           </a:xfrm>
           <a:prstGeom prst="rect">
             <a:avLst/>
@@ -6926,41 +7970,59 @@
           </a:bodyPr>
           <a:lstStyle/>
           <a:p>
-            <a:pPr algn="r">
-              <a:spcAft>
-                <a:spcPts val="600"/>
-              </a:spcAft>
-            </a:pPr>
-            <a:r>
-              <a:rPr sz="1300" b="1">
-                <a:solidFill>
-                  <a:srgbClr val="B3A369"/>
-                </a:solidFill>
-              </a:rPr>
-              <a:t>RQ2</a:t>
-            </a:r>
-          </a:p>
-        </p:txBody>
-      </p:sp>
-      <p:sp>
-        <p:nvSpPr>
-          <p:cNvPr id="4" name="Rounded Rectangle 3"/>
+            <a:pPr>
+              <a:spcAft>
+                <a:spcPts val="800"/>
+              </a:spcAft>
+            </a:pPr>
+            <a:r>
+              <a:rPr sz="1600" b="0">
+                <a:solidFill>
+                  <a:srgbClr val="212121"/>
+                </a:solidFill>
+              </a:rPr>
+              <a:t>• Conflicts do not respect the partition: queue tails, stopped vehicles, overtakes, lane changes form between intersections.</a:t>
+            </a:r>
+          </a:p>
+          <a:p>
+            <a:pPr>
+              <a:spcAft>
+                <a:spcPts val="800"/>
+              </a:spcAft>
+            </a:pPr>
+            <a:r>
+              <a:rPr sz="1600" b="0">
+                <a:solidFill>
+                  <a:srgbClr val="212121"/>
+                </a:solidFill>
+              </a:rPr>
+              <a:t>• The service is stateful: the tracker and predictor condition on observations accumulated before the crossing.</a:t>
+            </a:r>
+          </a:p>
+        </p:txBody>
+      </p:sp>
+      <p:sp>
+        <p:nvSpPr>
+          <p:cNvPr id="4" name="Rectangle 3"/>
           <p:cNvSpPr/>
           <p:nvPr/>
         </p:nvSpPr>
         <p:spPr>
           <a:xfrm>
-            <a:off x="10200000" y="760000"/>
-            <a:ext cx="1450000" cy="330000"/>
-          </a:xfrm>
-          <a:prstGeom prst="roundRect">
+            <a:off x="700000" y="2500000"/>
+            <a:ext cx="3400000" cy="2300000"/>
+          </a:xfrm>
+          <a:prstGeom prst="rect">
             <a:avLst/>
           </a:prstGeom>
           <a:solidFill>
-            <a:srgbClr val="2E7D32"/>
+            <a:srgbClr val="E1E8F5"/>
           </a:solidFill>
-          <a:ln>
-            <a:noFill/>
+          <a:ln w="15875">
+            <a:solidFill>
+              <a:srgbClr val="1B3A6B"/>
+            </a:solidFill>
+            <a:prstDash val="dash"/>
           </a:ln>
         </p:spPr>
         <p:style>
@@ -6982,14 +8044,6 @@
           <a:lstStyle/>
           <a:p>
             <a:pPr algn="ctr"/>
-            <a:r>
-              <a:rPr sz="1100" b="1">
-                <a:solidFill>
-                  <a:srgbClr val="FFFFFF"/>
-                </a:solidFill>
-              </a:rPr>
-              <a:t>Done</a:t>
-            </a:r>
           </a:p>
         </p:txBody>
       </p:sp>
@@ -7001,8 +8055,8 @@
         </p:nvSpPr>
         <p:spPr>
           <a:xfrm>
-            <a:off x="640080" y="1150000"/>
-            <a:ext cx="10972800" cy="2000000"/>
+            <a:off x="780000" y="2540000"/>
+            <a:ext cx="1800000" cy="400000"/>
           </a:xfrm>
           <a:prstGeom prst="rect">
             <a:avLst/>
@@ -7017,99 +8071,127 @@
           <a:p>
             <a:pPr>
               <a:spcAft>
-                <a:spcPts val="800"/>
-              </a:spcAft>
-            </a:pPr>
-            <a:r>
-              <a:rPr sz="1600" b="0">
-                <a:solidFill>
-                  <a:srgbClr val="212121"/>
-                </a:solidFill>
-              </a:rPr>
-              <a:t>• Braking, acceleration, turning, and lane changes break constant-velocity tracking.</a:t>
-            </a:r>
-          </a:p>
-          <a:p>
-            <a:pPr>
-              <a:spcAft>
-                <a:spcPts val="800"/>
-              </a:spcAft>
-            </a:pPr>
-            <a:r>
-              <a:rPr sz="1600" b="0">
-                <a:solidFill>
-                  <a:srgbClr val="212121"/>
-                </a:solidFill>
-              </a:rPr>
-              <a:t>• Our 3D adaptation of MambaTrack conditions on the last K observations.</a:t>
-            </a:r>
-          </a:p>
-          <a:p>
-            <a:pPr>
-              <a:spcAft>
-                <a:spcPts val="800"/>
-              </a:spcAft>
-            </a:pPr>
-            <a:r>
-              <a:rPr sz="1600" b="0">
-                <a:solidFill>
-                  <a:srgbClr val="212121"/>
-                </a:solidFill>
-              </a:rPr>
-              <a:t>• After a forced handoff, one frame is indistinguishable from a cold start.</a:t>
-            </a:r>
-          </a:p>
-          <a:p>
-            <a:pPr>
-              <a:spcAft>
-                <a:spcPts val="800"/>
-              </a:spcAft>
-            </a:pPr>
-            <a:r>
-              <a:rPr sz="1600" b="0">
-                <a:solidFill>
-                  <a:srgbClr val="212121"/>
-                </a:solidFill>
-              </a:rPr>
-              <a:t>• The observation history reduces post-handoff error by a factor of 2.8 to 9.3.</a:t>
-            </a:r>
-          </a:p>
-        </p:txBody>
-      </p:sp>
-      <p:pic>
-        <p:nvPicPr>
-          <p:cNvPr id="6" name="Picture 5" descr="image.png"/>
-          <p:cNvPicPr>
-            <a:picLocks noChangeAspect="1"/>
-          </p:cNvPicPr>
-          <p:nvPr/>
-        </p:nvPicPr>
-        <p:blipFill>
-          <a:blip r:embed="rId2"/>
-          <a:stretch>
-            <a:fillRect/>
-          </a:stretch>
-        </p:blipFill>
-        <p:spPr>
-          <a:xfrm>
-            <a:off x="2834640" y="2900000"/>
-            <a:ext cx="5190647" cy="3250000"/>
-          </a:xfrm>
-          <a:prstGeom prst="rect">
-            <a:avLst/>
-          </a:prstGeom>
-        </p:spPr>
-      </p:pic>
-      <p:sp>
-        <p:nvSpPr>
-          <p:cNvPr id="7" name="TextBox 6"/>
+                <a:spcPts val="600"/>
+              </a:spcAft>
+            </a:pPr>
+            <a:r>
+              <a:rPr sz="1300" b="1">
+                <a:solidFill>
+                  <a:srgbClr val="1B3A6B"/>
+                </a:solidFill>
+              </a:rPr>
+              <a:t>Locale A</a:t>
+            </a:r>
+          </a:p>
+        </p:txBody>
+      </p:sp>
+      <p:sp>
+        <p:nvSpPr>
+          <p:cNvPr id="6" name="Rectangle 5"/>
+          <p:cNvSpPr/>
+          <p:nvPr/>
+        </p:nvSpPr>
+        <p:spPr>
+          <a:xfrm>
+            <a:off x="2200000" y="2750000"/>
+            <a:ext cx="400000" cy="400000"/>
+          </a:xfrm>
+          <a:prstGeom prst="rect">
+            <a:avLst/>
+          </a:prstGeom>
+          <a:solidFill>
+            <a:srgbClr val="6E6E6E"/>
+          </a:solidFill>
+          <a:ln>
+            <a:noFill/>
+          </a:ln>
+        </p:spPr>
+        <p:style>
+          <a:lnRef idx="1">
+            <a:schemeClr val="accent1"/>
+          </a:lnRef>
+          <a:fillRef idx="3">
+            <a:schemeClr val="accent1"/>
+          </a:fillRef>
+          <a:effectRef idx="2">
+            <a:schemeClr val="accent1"/>
+          </a:effectRef>
+          <a:fontRef idx="minor">
+            <a:schemeClr val="lt1"/>
+          </a:fontRef>
+        </p:style>
+        <p:txBody>
+          <a:bodyPr rtlCol="0" anchor="ctr" wrap="square"/>
+          <a:lstStyle/>
+          <a:p>
+            <a:pPr algn="ctr"/>
+            <a:r>
+              <a:rPr sz="900" b="0">
+                <a:solidFill>
+                  <a:srgbClr val="FFFFFF"/>
+                </a:solidFill>
+              </a:rPr>
+              <a:t>RSU</a:t>
+            </a:r>
+          </a:p>
+        </p:txBody>
+      </p:sp>
+      <p:sp>
+        <p:nvSpPr>
+          <p:cNvPr id="7" name="Rectangle 6"/>
+          <p:cNvSpPr/>
+          <p:nvPr/>
+        </p:nvSpPr>
+        <p:spPr>
+          <a:xfrm>
+            <a:off x="4350000" y="2500000"/>
+            <a:ext cx="3400000" cy="2300000"/>
+          </a:xfrm>
+          <a:prstGeom prst="rect">
+            <a:avLst/>
+          </a:prstGeom>
+          <a:solidFill>
+            <a:srgbClr val="FCECD6"/>
+          </a:solidFill>
+          <a:ln w="15875">
+            <a:solidFill>
+              <a:srgbClr val="CC7814"/>
+            </a:solidFill>
+            <a:prstDash val="dash"/>
+          </a:ln>
+        </p:spPr>
+        <p:style>
+          <a:lnRef idx="1">
+            <a:schemeClr val="accent1"/>
+          </a:lnRef>
+          <a:fillRef idx="3">
+            <a:schemeClr val="accent1"/>
+          </a:fillRef>
+          <a:effectRef idx="2">
+            <a:schemeClr val="accent1"/>
+          </a:effectRef>
+          <a:fontRef idx="minor">
+            <a:schemeClr val="lt1"/>
+          </a:fontRef>
+        </p:style>
+        <p:txBody>
+          <a:bodyPr rtlCol="0" anchor="ctr"/>
+          <a:lstStyle/>
+          <a:p>
+            <a:pPr algn="ctr"/>
+          </a:p>
+        </p:txBody>
+      </p:sp>
+      <p:sp>
+        <p:nvSpPr>
+          <p:cNvPr id="8" name="TextBox 7"/>
           <p:cNvSpPr txBox="1"/>
           <p:nvPr/>
         </p:nvSpPr>
         <p:spPr>
           <a:xfrm>
-            <a:off x="640080" y="6263640"/>
-            <a:ext cx="10972800" cy="457200"/>
+            <a:off x="4430000" y="2540000"/>
+            <a:ext cx="1800000" cy="400000"/>
           </a:xfrm>
           <a:prstGeom prst="rect">
             <a:avLst/>
@@ -7128,12 +8210,839 @@
               </a:spcAft>
             </a:pPr>
             <a:r>
+              <a:rPr sz="1300" b="1">
+                <a:solidFill>
+                  <a:srgbClr val="CC7814"/>
+                </a:solidFill>
+              </a:rPr>
+              <a:t>Locale B</a:t>
+            </a:r>
+          </a:p>
+        </p:txBody>
+      </p:sp>
+      <p:sp>
+        <p:nvSpPr>
+          <p:cNvPr id="9" name="Rectangle 8"/>
+          <p:cNvSpPr/>
+          <p:nvPr/>
+        </p:nvSpPr>
+        <p:spPr>
+          <a:xfrm>
+            <a:off x="5850000" y="2750000"/>
+            <a:ext cx="400000" cy="400000"/>
+          </a:xfrm>
+          <a:prstGeom prst="rect">
+            <a:avLst/>
+          </a:prstGeom>
+          <a:solidFill>
+            <a:srgbClr val="6E6E6E"/>
+          </a:solidFill>
+          <a:ln>
+            <a:noFill/>
+          </a:ln>
+        </p:spPr>
+        <p:style>
+          <a:lnRef idx="1">
+            <a:schemeClr val="accent1"/>
+          </a:lnRef>
+          <a:fillRef idx="3">
+            <a:schemeClr val="accent1"/>
+          </a:fillRef>
+          <a:effectRef idx="2">
+            <a:schemeClr val="accent1"/>
+          </a:effectRef>
+          <a:fontRef idx="minor">
+            <a:schemeClr val="lt1"/>
+          </a:fontRef>
+        </p:style>
+        <p:txBody>
+          <a:bodyPr rtlCol="0" anchor="ctr" wrap="square"/>
+          <a:lstStyle/>
+          <a:p>
+            <a:pPr algn="ctr"/>
+            <a:r>
+              <a:rPr sz="900" b="0">
+                <a:solidFill>
+                  <a:srgbClr val="FFFFFF"/>
+                </a:solidFill>
+              </a:rPr>
+              <a:t>RSU</a:t>
+            </a:r>
+          </a:p>
+        </p:txBody>
+      </p:sp>
+      <p:sp>
+        <p:nvSpPr>
+          <p:cNvPr id="10" name="Rectangle 9"/>
+          <p:cNvSpPr/>
+          <p:nvPr/>
+        </p:nvSpPr>
+        <p:spPr>
+          <a:xfrm>
+            <a:off x="8000000" y="2500000"/>
+            <a:ext cx="3400000" cy="2300000"/>
+          </a:xfrm>
+          <a:prstGeom prst="rect">
+            <a:avLst/>
+          </a:prstGeom>
+          <a:solidFill>
+            <a:srgbClr val="E1E8F5"/>
+          </a:solidFill>
+          <a:ln w="15875">
+            <a:solidFill>
+              <a:srgbClr val="1B3A6B"/>
+            </a:solidFill>
+            <a:prstDash val="dash"/>
+          </a:ln>
+        </p:spPr>
+        <p:style>
+          <a:lnRef idx="1">
+            <a:schemeClr val="accent1"/>
+          </a:lnRef>
+          <a:fillRef idx="3">
+            <a:schemeClr val="accent1"/>
+          </a:fillRef>
+          <a:effectRef idx="2">
+            <a:schemeClr val="accent1"/>
+          </a:effectRef>
+          <a:fontRef idx="minor">
+            <a:schemeClr val="lt1"/>
+          </a:fontRef>
+        </p:style>
+        <p:txBody>
+          <a:bodyPr rtlCol="0" anchor="ctr"/>
+          <a:lstStyle/>
+          <a:p>
+            <a:pPr algn="ctr"/>
+          </a:p>
+        </p:txBody>
+      </p:sp>
+      <p:sp>
+        <p:nvSpPr>
+          <p:cNvPr id="11" name="TextBox 10"/>
+          <p:cNvSpPr txBox="1"/>
+          <p:nvPr/>
+        </p:nvSpPr>
+        <p:spPr>
+          <a:xfrm>
+            <a:off x="8080000" y="2540000"/>
+            <a:ext cx="1800000" cy="400000"/>
+          </a:xfrm>
+          <a:prstGeom prst="rect">
+            <a:avLst/>
+          </a:prstGeom>
+          <a:noFill/>
+        </p:spPr>
+        <p:txBody>
+          <a:bodyPr wrap="square">
+            <a:spAutoFit/>
+          </a:bodyPr>
+          <a:lstStyle/>
+          <a:p>
+            <a:pPr>
+              <a:spcAft>
+                <a:spcPts val="600"/>
+              </a:spcAft>
+            </a:pPr>
+            <a:r>
+              <a:rPr sz="1300" b="1">
+                <a:solidFill>
+                  <a:srgbClr val="1B3A6B"/>
+                </a:solidFill>
+              </a:rPr>
+              <a:t>Locale C</a:t>
+            </a:r>
+          </a:p>
+        </p:txBody>
+      </p:sp>
+      <p:sp>
+        <p:nvSpPr>
+          <p:cNvPr id="12" name="Rectangle 11"/>
+          <p:cNvSpPr/>
+          <p:nvPr/>
+        </p:nvSpPr>
+        <p:spPr>
+          <a:xfrm>
+            <a:off x="9500000" y="2750000"/>
+            <a:ext cx="400000" cy="400000"/>
+          </a:xfrm>
+          <a:prstGeom prst="rect">
+            <a:avLst/>
+          </a:prstGeom>
+          <a:solidFill>
+            <a:srgbClr val="6E6E6E"/>
+          </a:solidFill>
+          <a:ln>
+            <a:noFill/>
+          </a:ln>
+        </p:spPr>
+        <p:style>
+          <a:lnRef idx="1">
+            <a:schemeClr val="accent1"/>
+          </a:lnRef>
+          <a:fillRef idx="3">
+            <a:schemeClr val="accent1"/>
+          </a:fillRef>
+          <a:effectRef idx="2">
+            <a:schemeClr val="accent1"/>
+          </a:effectRef>
+          <a:fontRef idx="minor">
+            <a:schemeClr val="lt1"/>
+          </a:fontRef>
+        </p:style>
+        <p:txBody>
+          <a:bodyPr rtlCol="0" anchor="ctr" wrap="square"/>
+          <a:lstStyle/>
+          <a:p>
+            <a:pPr algn="ctr"/>
+            <a:r>
+              <a:rPr sz="900" b="0">
+                <a:solidFill>
+                  <a:srgbClr val="FFFFFF"/>
+                </a:solidFill>
+              </a:rPr>
+              <a:t>RSU</a:t>
+            </a:r>
+          </a:p>
+        </p:txBody>
+      </p:sp>
+      <p:sp>
+        <p:nvSpPr>
+          <p:cNvPr id="13" name="Rectangle 12"/>
+          <p:cNvSpPr/>
+          <p:nvPr/>
+        </p:nvSpPr>
+        <p:spPr>
+          <a:xfrm>
+            <a:off x="900000" y="3750000"/>
+            <a:ext cx="10400000" cy="380000"/>
+          </a:xfrm>
+          <a:prstGeom prst="rect">
+            <a:avLst/>
+          </a:prstGeom>
+          <a:solidFill>
+            <a:srgbClr val="C8C8C8"/>
+          </a:solidFill>
+          <a:ln>
+            <a:noFill/>
+          </a:ln>
+        </p:spPr>
+        <p:style>
+          <a:lnRef idx="1">
+            <a:schemeClr val="accent1"/>
+          </a:lnRef>
+          <a:fillRef idx="3">
+            <a:schemeClr val="accent1"/>
+          </a:fillRef>
+          <a:effectRef idx="2">
+            <a:schemeClr val="accent1"/>
+          </a:effectRef>
+          <a:fontRef idx="minor">
+            <a:schemeClr val="lt1"/>
+          </a:fontRef>
+        </p:style>
+        <p:txBody>
+          <a:bodyPr rtlCol="0" anchor="ctr"/>
+          <a:lstStyle/>
+          <a:p>
+            <a:pPr algn="ctr"/>
+          </a:p>
+        </p:txBody>
+      </p:sp>
+      <p:sp>
+        <p:nvSpPr>
+          <p:cNvPr id="14" name="Rectangle 13"/>
+          <p:cNvSpPr/>
+          <p:nvPr/>
+        </p:nvSpPr>
+        <p:spPr>
+          <a:xfrm>
+            <a:off x="4225000" y="2400000"/>
+            <a:ext cx="20000" cy="2500000"/>
+          </a:xfrm>
+          <a:prstGeom prst="rect">
+            <a:avLst/>
+          </a:prstGeom>
+          <a:solidFill>
+            <a:srgbClr val="C0392B"/>
+          </a:solidFill>
+          <a:ln>
+            <a:noFill/>
+          </a:ln>
+        </p:spPr>
+        <p:style>
+          <a:lnRef idx="1">
+            <a:schemeClr val="accent1"/>
+          </a:lnRef>
+          <a:fillRef idx="3">
+            <a:schemeClr val="accent1"/>
+          </a:fillRef>
+          <a:effectRef idx="2">
+            <a:schemeClr val="accent1"/>
+          </a:effectRef>
+          <a:fontRef idx="minor">
+            <a:schemeClr val="lt1"/>
+          </a:fontRef>
+        </p:style>
+        <p:txBody>
+          <a:bodyPr rtlCol="0" anchor="ctr"/>
+          <a:lstStyle/>
+          <a:p>
+            <a:pPr algn="ctr"/>
+          </a:p>
+        </p:txBody>
+      </p:sp>
+      <p:sp>
+        <p:nvSpPr>
+          <p:cNvPr id="15" name="Rectangle 14"/>
+          <p:cNvSpPr/>
+          <p:nvPr/>
+        </p:nvSpPr>
+        <p:spPr>
+          <a:xfrm>
+            <a:off x="7875000" y="2400000"/>
+            <a:ext cx="20000" cy="2500000"/>
+          </a:xfrm>
+          <a:prstGeom prst="rect">
+            <a:avLst/>
+          </a:prstGeom>
+          <a:solidFill>
+            <a:srgbClr val="C0392B"/>
+          </a:solidFill>
+          <a:ln>
+            <a:noFill/>
+          </a:ln>
+        </p:spPr>
+        <p:style>
+          <a:lnRef idx="1">
+            <a:schemeClr val="accent1"/>
+          </a:lnRef>
+          <a:fillRef idx="3">
+            <a:schemeClr val="accent1"/>
+          </a:fillRef>
+          <a:effectRef idx="2">
+            <a:schemeClr val="accent1"/>
+          </a:effectRef>
+          <a:fontRef idx="minor">
+            <a:schemeClr val="lt1"/>
+          </a:fontRef>
+        </p:style>
+        <p:txBody>
+          <a:bodyPr rtlCol="0" anchor="ctr"/>
+          <a:lstStyle/>
+          <a:p>
+            <a:pPr algn="ctr"/>
+          </a:p>
+        </p:txBody>
+      </p:sp>
+      <p:sp>
+        <p:nvSpPr>
+          <p:cNvPr id="16" name="Oval 15"/>
+          <p:cNvSpPr/>
+          <p:nvPr/>
+        </p:nvSpPr>
+        <p:spPr>
+          <a:xfrm>
+            <a:off x="1200000" y="3890000"/>
+            <a:ext cx="110000" cy="110000"/>
+          </a:xfrm>
+          <a:prstGeom prst="ellipse">
+            <a:avLst/>
+          </a:prstGeom>
+          <a:solidFill>
+            <a:srgbClr val="1B3A6B"/>
+          </a:solidFill>
+          <a:ln>
+            <a:noFill/>
+          </a:ln>
+        </p:spPr>
+        <p:style>
+          <a:lnRef idx="1">
+            <a:schemeClr val="accent1"/>
+          </a:lnRef>
+          <a:fillRef idx="3">
+            <a:schemeClr val="accent1"/>
+          </a:fillRef>
+          <a:effectRef idx="2">
+            <a:schemeClr val="accent1"/>
+          </a:effectRef>
+          <a:fontRef idx="minor">
+            <a:schemeClr val="lt1"/>
+          </a:fontRef>
+        </p:style>
+        <p:txBody>
+          <a:bodyPr rtlCol="0" anchor="ctr"/>
+          <a:lstStyle/>
+          <a:p>
+            <a:pPr algn="ctr"/>
+          </a:p>
+        </p:txBody>
+      </p:sp>
+      <p:sp>
+        <p:nvSpPr>
+          <p:cNvPr id="17" name="Oval 16"/>
+          <p:cNvSpPr/>
+          <p:nvPr/>
+        </p:nvSpPr>
+        <p:spPr>
+          <a:xfrm>
+            <a:off x="1500000" y="3890000"/>
+            <a:ext cx="110000" cy="110000"/>
+          </a:xfrm>
+          <a:prstGeom prst="ellipse">
+            <a:avLst/>
+          </a:prstGeom>
+          <a:solidFill>
+            <a:srgbClr val="1B3A6B"/>
+          </a:solidFill>
+          <a:ln>
+            <a:noFill/>
+          </a:ln>
+        </p:spPr>
+        <p:style>
+          <a:lnRef idx="1">
+            <a:schemeClr val="accent1"/>
+          </a:lnRef>
+          <a:fillRef idx="3">
+            <a:schemeClr val="accent1"/>
+          </a:fillRef>
+          <a:effectRef idx="2">
+            <a:schemeClr val="accent1"/>
+          </a:effectRef>
+          <a:fontRef idx="minor">
+            <a:schemeClr val="lt1"/>
+          </a:fontRef>
+        </p:style>
+        <p:txBody>
+          <a:bodyPr rtlCol="0" anchor="ctr"/>
+          <a:lstStyle/>
+          <a:p>
+            <a:pPr algn="ctr"/>
+          </a:p>
+        </p:txBody>
+      </p:sp>
+      <p:sp>
+        <p:nvSpPr>
+          <p:cNvPr id="18" name="Oval 17"/>
+          <p:cNvSpPr/>
+          <p:nvPr/>
+        </p:nvSpPr>
+        <p:spPr>
+          <a:xfrm>
+            <a:off x="1800000" y="3890000"/>
+            <a:ext cx="110000" cy="110000"/>
+          </a:xfrm>
+          <a:prstGeom prst="ellipse">
+            <a:avLst/>
+          </a:prstGeom>
+          <a:solidFill>
+            <a:srgbClr val="1B3A6B"/>
+          </a:solidFill>
+          <a:ln>
+            <a:noFill/>
+          </a:ln>
+        </p:spPr>
+        <p:style>
+          <a:lnRef idx="1">
+            <a:schemeClr val="accent1"/>
+          </a:lnRef>
+          <a:fillRef idx="3">
+            <a:schemeClr val="accent1"/>
+          </a:fillRef>
+          <a:effectRef idx="2">
+            <a:schemeClr val="accent1"/>
+          </a:effectRef>
+          <a:fontRef idx="minor">
+            <a:schemeClr val="lt1"/>
+          </a:fontRef>
+        </p:style>
+        <p:txBody>
+          <a:bodyPr rtlCol="0" anchor="ctr"/>
+          <a:lstStyle/>
+          <a:p>
+            <a:pPr algn="ctr"/>
+          </a:p>
+        </p:txBody>
+      </p:sp>
+      <p:sp>
+        <p:nvSpPr>
+          <p:cNvPr id="19" name="Oval 18"/>
+          <p:cNvSpPr/>
+          <p:nvPr/>
+        </p:nvSpPr>
+        <p:spPr>
+          <a:xfrm>
+            <a:off x="2100000" y="3890000"/>
+            <a:ext cx="110000" cy="110000"/>
+          </a:xfrm>
+          <a:prstGeom prst="ellipse">
+            <a:avLst/>
+          </a:prstGeom>
+          <a:solidFill>
+            <a:srgbClr val="1B3A6B"/>
+          </a:solidFill>
+          <a:ln>
+            <a:noFill/>
+          </a:ln>
+        </p:spPr>
+        <p:style>
+          <a:lnRef idx="1">
+            <a:schemeClr val="accent1"/>
+          </a:lnRef>
+          <a:fillRef idx="3">
+            <a:schemeClr val="accent1"/>
+          </a:fillRef>
+          <a:effectRef idx="2">
+            <a:schemeClr val="accent1"/>
+          </a:effectRef>
+          <a:fontRef idx="minor">
+            <a:schemeClr val="lt1"/>
+          </a:fontRef>
+        </p:style>
+        <p:txBody>
+          <a:bodyPr rtlCol="0" anchor="ctr"/>
+          <a:lstStyle/>
+          <a:p>
+            <a:pPr algn="ctr"/>
+          </a:p>
+        </p:txBody>
+      </p:sp>
+      <p:sp>
+        <p:nvSpPr>
+          <p:cNvPr id="20" name="Oval 19"/>
+          <p:cNvSpPr/>
+          <p:nvPr/>
+        </p:nvSpPr>
+        <p:spPr>
+          <a:xfrm>
+            <a:off x="2400000" y="3890000"/>
+            <a:ext cx="110000" cy="110000"/>
+          </a:xfrm>
+          <a:prstGeom prst="ellipse">
+            <a:avLst/>
+          </a:prstGeom>
+          <a:solidFill>
+            <a:srgbClr val="1B3A6B"/>
+          </a:solidFill>
+          <a:ln>
+            <a:noFill/>
+          </a:ln>
+        </p:spPr>
+        <p:style>
+          <a:lnRef idx="1">
+            <a:schemeClr val="accent1"/>
+          </a:lnRef>
+          <a:fillRef idx="3">
+            <a:schemeClr val="accent1"/>
+          </a:fillRef>
+          <a:effectRef idx="2">
+            <a:schemeClr val="accent1"/>
+          </a:effectRef>
+          <a:fontRef idx="minor">
+            <a:schemeClr val="lt1"/>
+          </a:fontRef>
+        </p:style>
+        <p:txBody>
+          <a:bodyPr rtlCol="0" anchor="ctr"/>
+          <a:lstStyle/>
+          <a:p>
+            <a:pPr algn="ctr"/>
+          </a:p>
+        </p:txBody>
+      </p:sp>
+      <p:sp>
+        <p:nvSpPr>
+          <p:cNvPr id="21" name="Rectangle 20"/>
+          <p:cNvSpPr/>
+          <p:nvPr/>
+        </p:nvSpPr>
+        <p:spPr>
+          <a:xfrm>
+            <a:off x="2750000" y="3830000"/>
+            <a:ext cx="320000" cy="230000"/>
+          </a:xfrm>
+          <a:prstGeom prst="rect">
+            <a:avLst/>
+          </a:prstGeom>
+          <a:solidFill>
+            <a:srgbClr val="1B3A6B"/>
+          </a:solidFill>
+          <a:ln>
+            <a:noFill/>
+          </a:ln>
+        </p:spPr>
+        <p:style>
+          <a:lnRef idx="1">
+            <a:schemeClr val="accent1"/>
+          </a:lnRef>
+          <a:fillRef idx="3">
+            <a:schemeClr val="accent1"/>
+          </a:fillRef>
+          <a:effectRef idx="2">
+            <a:schemeClr val="accent1"/>
+          </a:effectRef>
+          <a:fontRef idx="minor">
+            <a:schemeClr val="lt1"/>
+          </a:fontRef>
+        </p:style>
+        <p:txBody>
+          <a:bodyPr rtlCol="0" anchor="ctr" wrap="square"/>
+          <a:lstStyle/>
+          <a:p>
+            <a:pPr algn="ctr"/>
+            <a:r>
+              <a:rPr sz="1000" b="1">
+                <a:solidFill>
+                  <a:srgbClr val="FFFFFF"/>
+                </a:solidFill>
+              </a:rPr>
+              <a:t>a</a:t>
+            </a:r>
+          </a:p>
+        </p:txBody>
+      </p:sp>
+      <p:sp>
+        <p:nvSpPr>
+          <p:cNvPr id="22" name="TextBox 21"/>
+          <p:cNvSpPr txBox="1"/>
+          <p:nvPr/>
+        </p:nvSpPr>
+        <p:spPr>
+          <a:xfrm>
+            <a:off x="1000000" y="4200000"/>
+            <a:ext cx="3000000" cy="500000"/>
+          </a:xfrm>
+          <a:prstGeom prst="rect">
+            <a:avLst/>
+          </a:prstGeom>
+          <a:noFill/>
+        </p:spPr>
+        <p:txBody>
+          <a:bodyPr wrap="square">
+            <a:spAutoFit/>
+          </a:bodyPr>
+          <a:lstStyle/>
+          <a:p>
+            <a:pPr>
+              <a:spcAft>
+                <a:spcPts val="600"/>
+              </a:spcAft>
+            </a:pPr>
+            <a:r>
+              <a:rPr sz="1100" b="0">
+                <a:solidFill>
+                  <a:srgbClr val="1B3A6B"/>
+                </a:solidFill>
+              </a:rPr>
+              <a:t>observation history accumulates in A</a:t>
+            </a:r>
+          </a:p>
+        </p:txBody>
+      </p:sp>
+      <p:sp>
+        <p:nvSpPr>
+          <p:cNvPr id="23" name="Rectangle 22"/>
+          <p:cNvSpPr/>
+          <p:nvPr/>
+        </p:nvSpPr>
+        <p:spPr>
+          <a:xfrm>
+            <a:off x="5400000" y="3830000"/>
+            <a:ext cx="320000" cy="230000"/>
+          </a:xfrm>
+          <a:prstGeom prst="rect">
+            <a:avLst/>
+          </a:prstGeom>
+          <a:solidFill>
+            <a:srgbClr val="CC7814"/>
+          </a:solidFill>
+          <a:ln>
+            <a:noFill/>
+          </a:ln>
+        </p:spPr>
+        <p:style>
+          <a:lnRef idx="1">
+            <a:schemeClr val="accent1"/>
+          </a:lnRef>
+          <a:fillRef idx="3">
+            <a:schemeClr val="accent1"/>
+          </a:fillRef>
+          <a:effectRef idx="2">
+            <a:schemeClr val="accent1"/>
+          </a:effectRef>
+          <a:fontRef idx="minor">
+            <a:schemeClr val="lt1"/>
+          </a:fontRef>
+        </p:style>
+        <p:txBody>
+          <a:bodyPr rtlCol="0" anchor="ctr" wrap="square"/>
+          <a:lstStyle/>
+          <a:p>
+            <a:pPr algn="ctr"/>
+            <a:r>
+              <a:rPr sz="1000" b="1">
+                <a:solidFill>
+                  <a:srgbClr val="FFFFFF"/>
+                </a:solidFill>
+              </a:rPr>
+              <a:t>v</a:t>
+            </a:r>
+          </a:p>
+        </p:txBody>
+      </p:sp>
+      <p:sp>
+        <p:nvSpPr>
+          <p:cNvPr id="24" name="Rectangle 23"/>
+          <p:cNvSpPr/>
+          <p:nvPr/>
+        </p:nvSpPr>
+        <p:spPr>
+          <a:xfrm>
+            <a:off x="5350000" y="3780000"/>
+            <a:ext cx="420000" cy="330000"/>
+          </a:xfrm>
+          <a:prstGeom prst="rect">
+            <a:avLst/>
+          </a:prstGeom>
+          <a:noFill/>
+          <a:ln w="15875">
+            <a:solidFill>
+              <a:srgbClr val="C0392B"/>
+            </a:solidFill>
+          </a:ln>
+        </p:spPr>
+        <p:style>
+          <a:lnRef idx="1">
+            <a:schemeClr val="accent1"/>
+          </a:lnRef>
+          <a:fillRef idx="3">
+            <a:schemeClr val="accent1"/>
+          </a:fillRef>
+          <a:effectRef idx="2">
+            <a:schemeClr val="accent1"/>
+          </a:effectRef>
+          <a:fontRef idx="minor">
+            <a:schemeClr val="lt1"/>
+          </a:fontRef>
+        </p:style>
+        <p:txBody>
+          <a:bodyPr rtlCol="0" anchor="ctr"/>
+          <a:lstStyle/>
+          <a:p>
+            <a:pPr algn="ctr"/>
+          </a:p>
+        </p:txBody>
+      </p:sp>
+      <p:sp>
+        <p:nvSpPr>
+          <p:cNvPr id="25" name="TextBox 24"/>
+          <p:cNvSpPr txBox="1"/>
+          <p:nvPr/>
+        </p:nvSpPr>
+        <p:spPr>
+          <a:xfrm>
+            <a:off x="4650000" y="4200000"/>
+            <a:ext cx="3300000" cy="500000"/>
+          </a:xfrm>
+          <a:prstGeom prst="rect">
+            <a:avLst/>
+          </a:prstGeom>
+          <a:noFill/>
+        </p:spPr>
+        <p:txBody>
+          <a:bodyPr wrap="square">
+            <a:spAutoFit/>
+          </a:bodyPr>
+          <a:lstStyle/>
+          <a:p>
+            <a:pPr>
+              <a:spcAft>
+                <a:spcPts val="600"/>
+              </a:spcAft>
+            </a:pPr>
+            <a:r>
+              <a:rPr sz="1100" b="0">
+                <a:solidFill>
+                  <a:srgbClr val="C0392B"/>
+                </a:solidFill>
+              </a:rPr>
+              <a:t>decision in B, on the segment between anchors</a:t>
+            </a:r>
+          </a:p>
+        </p:txBody>
+      </p:sp>
+      <p:sp>
+        <p:nvSpPr>
+          <p:cNvPr id="26" name="TextBox 25"/>
+          <p:cNvSpPr txBox="1"/>
+          <p:nvPr/>
+        </p:nvSpPr>
+        <p:spPr>
+          <a:xfrm>
+            <a:off x="7900000" y="4200000"/>
+            <a:ext cx="3000000" cy="500000"/>
+          </a:xfrm>
+          <a:prstGeom prst="rect">
+            <a:avLst/>
+          </a:prstGeom>
+          <a:noFill/>
+        </p:spPr>
+        <p:txBody>
+          <a:bodyPr wrap="square">
+            <a:spAutoFit/>
+          </a:bodyPr>
+          <a:lstStyle/>
+          <a:p>
+            <a:pPr>
+              <a:spcAft>
+                <a:spcPts val="600"/>
+              </a:spcAft>
+            </a:pPr>
+            <a:r>
+              <a:rPr sz="1100" b="0">
+                <a:solidFill>
+                  <a:srgbClr val="6E6E6E"/>
+                </a:solidFill>
+              </a:rPr>
+              <a:t>same again at the next boundary</a:t>
+            </a:r>
+          </a:p>
+        </p:txBody>
+      </p:sp>
+      <p:sp>
+        <p:nvSpPr>
+          <p:cNvPr id="27" name="TextBox 26"/>
+          <p:cNvSpPr txBox="1"/>
+          <p:nvPr/>
+        </p:nvSpPr>
+        <p:spPr>
+          <a:xfrm>
+            <a:off x="640080" y="6263640"/>
+            <a:ext cx="10972800" cy="457200"/>
+          </a:xfrm>
+          <a:prstGeom prst="rect">
+            <a:avLst/>
+          </a:prstGeom>
+          <a:noFill/>
+        </p:spPr>
+        <p:txBody>
+          <a:bodyPr wrap="square">
+            <a:spAutoFit/>
+          </a:bodyPr>
+          <a:lstStyle/>
+          <a:p>
+            <a:pPr>
+              <a:spcAft>
+                <a:spcPts val="600"/>
+              </a:spcAft>
+            </a:pPr>
+            <a:r>
               <a:rPr sz="1200" b="0">
                 <a:solidFill>
                   <a:srgbClr val="B3A369"/>
                 </a:solidFill>
               </a:rPr>
-              <a:t>Answers RQ2  ·  Evidence: forced-handoff microbenchmark, four maneuvers  ·  Claim scope: first SSM 3D tracker inside a distributed cooperative-prediction pipeline</a:t>
+              <a:t>The boundary separates the observations that establish an actor's motion from the decision that consumes them.</a:t>
             </a:r>
           </a:p>
         </p:txBody>
@@ -7189,7 +9098,7 @@
                   <a:srgbClr val="1B3A6B"/>
                 </a:solidFill>
               </a:rPr>
-              <a:t>A Kalman snapshot is insufficient under acceleration</a:t>
+              <a:t>RQ2: what state must survive a crossing?</a:t>
             </a:r>
           </a:p>
         </p:txBody>
@@ -7268,7 +9177,7 @@
           </a:fontRef>
         </p:style>
         <p:txBody>
-          <a:bodyPr rtlCol="0" anchor="ctr"/>
+          <a:bodyPr rtlCol="0" anchor="ctr" wrap="square"/>
           <a:lstStyle/>
           <a:p>
             <a:pPr algn="ctr"/>
@@ -7292,7 +9201,7 @@
         <p:spPr>
           <a:xfrm>
             <a:off x="640080" y="1150000"/>
-            <a:ext cx="10972800" cy="2000000"/>
+            <a:ext cx="10972800" cy="3600000"/>
           </a:xfrm>
           <a:prstGeom prst="rect">
             <a:avLst/>
@@ -7316,7 +9225,7 @@
                   <a:srgbClr val="212121"/>
                 </a:solidFill>
               </a:rPr>
-              <a:t>• Oncoming actor accelerates through the conflict.</a:t>
+              <a:t>• Real motion includes acceleration, braking, turning. Constant-velocity Kalman tracking degrades there.</a:t>
             </a:r>
           </a:p>
           <a:p>
@@ -7331,7 +9240,7 @@
                   <a:srgbClr val="212121"/>
                 </a:solidFill>
               </a:rPr>
-              <a:t>• Kalman snapshot: 4 of 4 runs collide.</a:t>
+              <a:t>• Our 3D adaptation of MambaTrack gains its accuracy from a history of K observations.</a:t>
             </a:r>
           </a:p>
           <a:p>
@@ -7346,7 +9255,7 @@
                   <a:srgbClr val="212121"/>
                 </a:solidFill>
               </a:rPr>
-              <a:t>• Temporal history: 3 of 4 runs complete without collision.</a:t>
+              <a:t>• Once the service is partitioned, that history becomes cross-locale service state.</a:t>
             </a:r>
           </a:p>
           <a:p>
@@ -7361,7 +9270,7 @@
                   <a:srgbClr val="212121"/>
                 </a:solidFill>
               </a:rPr>
-              <a:t>• The difference comes from motion history, not transfer size.</a:t>
+              <a:t>• One frame is indistinguishable from cold start; the history reduces post-handoff error by a factor of 2.8 to 9.3.</a:t>
             </a:r>
           </a:p>
         </p:txBody>
@@ -7382,8 +9291,8 @@
         </p:blipFill>
         <p:spPr>
           <a:xfrm>
-            <a:off x="1645920" y="2900000"/>
-            <a:ext cx="8778240" cy="3038988"/>
+            <a:off x="2834640" y="2900000"/>
+            <a:ext cx="5190647" cy="3250000"/>
           </a:xfrm>
           <a:prstGeom prst="rect">
             <a:avLst/>
@@ -7423,7 +9332,7 @@
                   <a:srgbClr val="B3A369"/>
                 </a:solidFill>
               </a:rPr>
-              <a:t>Answers RQ2  ·  Evidence: closed-loop acceleration experiment, 4 seeds, validated scenario  ·  Missing: post-handoff minADE and minFDE</a:t>
+              <a:t>Evidence: forced-handoff microbenchmark, four maneuvers  ·  Claim scope: first SSM 3D tracker inside a distributed cooperative-prediction pipeline</a:t>
             </a:r>
           </a:p>
         </p:txBody>
@@ -7479,7 +9388,7 @@
                   <a:srgbClr val="1B3A6B"/>
                 </a:solidFill>
               </a:rPr>
-              <a:t>Dynamic conflicts occur anywhere, not only at junctions</a:t>
+              <a:t>RQ2: a Kalman snapshot is insufficient under acceleration</a:t>
             </a:r>
           </a:p>
         </p:txBody>
@@ -7517,7 +9426,7 @@
                   <a:srgbClr val="B3A369"/>
                 </a:solidFill>
               </a:rPr>
-              <a:t>RQ3</a:t>
+              <a:t>RQ2</a:t>
             </a:r>
           </a:p>
         </p:txBody>
@@ -7558,7 +9467,7 @@
           </a:fontRef>
         </p:style>
         <p:txBody>
-          <a:bodyPr rtlCol="0" anchor="ctr"/>
+          <a:bodyPr rtlCol="0" anchor="ctr" wrap="square"/>
           <a:lstStyle/>
           <a:p>
             <a:pPr algn="ctr"/>
@@ -7582,7 +9491,7 @@
         <p:spPr>
           <a:xfrm>
             <a:off x="640080" y="1150000"/>
-            <a:ext cx="10972800" cy="3000000"/>
+            <a:ext cx="10972800" cy="3600000"/>
           </a:xfrm>
           <a:prstGeom prst="rect">
             <a:avLst/>
@@ -7606,7 +9515,7 @@
                   <a:srgbClr val="212121"/>
                 </a:solidFill>
               </a:rPr>
-              <a:t>• Crossing-path and turning conflicts concentrate at intersections, so locales anchor there.</a:t>
+              <a:t>• Oncoming actor accelerates through the conflict.</a:t>
             </a:r>
           </a:p>
           <a:p>
@@ -7621,7 +9530,7 @@
                   <a:srgbClr val="212121"/>
                 </a:solidFill>
               </a:rPr>
-              <a:t>• Queue tails, stopped vehicles, lane changes, and occlusions form on ordinary segments.</a:t>
+              <a:t>• Kalman snapshot: 4 of 4 runs collide.</a:t>
             </a:r>
           </a:p>
           <a:p>
@@ -7636,7 +9545,7 @@
                   <a:srgbClr val="212121"/>
                 </a:solidFill>
               </a:rPr>
-              <a:t>• Those segments are exactly where boundaries fall once locale size is capped.</a:t>
+              <a:t>• Temporal history: 3 of 4 runs complete without collision.</a:t>
             </a:r>
           </a:p>
           <a:p>
@@ -7651,14 +9560,38 @@
                   <a:srgbClr val="212121"/>
                 </a:solidFill>
               </a:rPr>
-              <a:t>• A boundary can separate the observations that build a track from the decision that uses it.</a:t>
-            </a:r>
-          </a:p>
-        </p:txBody>
-      </p:sp>
-      <p:sp>
-        <p:nvSpPr>
-          <p:cNvPr id="6" name="TextBox 5"/>
+              <a:t>• The difference comes from motion history, not transfer size.</a:t>
+            </a:r>
+          </a:p>
+        </p:txBody>
+      </p:sp>
+      <p:pic>
+        <p:nvPicPr>
+          <p:cNvPr id="6" name="Picture 5" descr="image.png"/>
+          <p:cNvPicPr>
+            <a:picLocks noChangeAspect="1"/>
+          </p:cNvPicPr>
+          <p:nvPr/>
+        </p:nvPicPr>
+        <p:blipFill>
+          <a:blip r:embed="rId2"/>
+          <a:stretch>
+            <a:fillRect/>
+          </a:stretch>
+        </p:blipFill>
+        <p:spPr>
+          <a:xfrm>
+            <a:off x="1645920" y="2900000"/>
+            <a:ext cx="8778240" cy="3038988"/>
+          </a:xfrm>
+          <a:prstGeom prst="rect">
+            <a:avLst/>
+          </a:prstGeom>
+        </p:spPr>
+      </p:pic>
+      <p:sp>
+        <p:nvSpPr>
+          <p:cNvPr id="7" name="TextBox 6"/>
           <p:cNvSpPr txBox="1"/>
           <p:nvPr/>
         </p:nvSpPr>
@@ -7689,7 +9622,7 @@
                   <a:srgbClr val="B3A369"/>
                 </a:solidFill>
               </a:rPr>
-              <a:t>Answers RQ3  ·  Evidence: NHTSA pre-crash typology for the maneuver families  ·  Missing: occurrence rate on the dense route</a:t>
+              <a:t>Evidence: closed-loop acceleration experiment, 4 seeds, validated scenario  ·  Missing: post-handoff minADE and minFDE</a:t>
             </a:r>
           </a:p>
         </p:txBody>
@@ -7745,7 +9678,7 @@
                   <a:srgbClr val="1B3A6B"/>
                 </a:solidFill>
               </a:rPr>
-              <a:t>Reactive transfer is too late</a:t>
+              <a:t>Safety condition: the maneuver-specific safe-age envelope</a:t>
             </a:r>
           </a:p>
         </p:txBody>
@@ -7803,7 +9736,7 @@
             <a:avLst/>
           </a:prstGeom>
           <a:solidFill>
-            <a:srgbClr val="D68C00"/>
+            <a:srgbClr val="787878"/>
           </a:solidFill>
           <a:ln>
             <a:noFill/>
@@ -7824,7 +9757,7 @@
           </a:fontRef>
         </p:style>
         <p:txBody>
-          <a:bodyPr rtlCol="0" anchor="ctr"/>
+          <a:bodyPr rtlCol="0" anchor="ctr" wrap="square"/>
           <a:lstStyle/>
           <a:p>
             <a:pPr algn="ctr"/>
@@ -7834,7 +9767,7 @@
                   <a:srgbClr val="FFFFFF"/>
                 </a:solidFill>
               </a:rPr>
-              <a:t>Provisional</a:t>
+              <a:t>Needed</a:t>
             </a:r>
           </a:p>
         </p:txBody>
@@ -7848,7 +9781,7 @@
         <p:spPr>
           <a:xfrm>
             <a:off x="640080" y="1150000"/>
-            <a:ext cx="10972800" cy="2000000"/>
+            <a:ext cx="10972800" cy="3600000"/>
           </a:xfrm>
           <a:prstGeom prst="rect">
             <a:avLst/>
@@ -7872,7 +9805,7 @@
                   <a:srgbClr val="212121"/>
                 </a:solidFill>
               </a:rPr>
-              <a:t>• Transfer at the crossing leaves the destination no time to fold the track in.</a:t>
+              <a:t>• Correct state eventually becomes too old to act on.</a:t>
             </a:r>
           </a:p>
           <a:p>
@@ -7887,7 +9820,7 @@
                   <a:srgbClr val="212121"/>
                 </a:solidFill>
               </a:rPr>
-              <a:t>• Completion rose with transfer lead up to about 4 s in the first sweep.</a:t>
+              <a:t>• The usable age depends on maneuver urgency, not one universal latency number.</a:t>
             </a:r>
           </a:p>
           <a:p>
@@ -7902,7 +9835,7 @@
                   <a:srgbClr val="212121"/>
                 </a:solidFill>
               </a:rPr>
-              <a:t>• The lead is spent on destination warm-up, not on the wire.</a:t>
+              <a:t>• Our earlier single-locale experiments (not yet accepted) put the limits near 220 to 450 ms.</a:t>
             </a:r>
           </a:p>
           <a:p>
@@ -7917,7 +9850,7 @@
                   <a:srgbClr val="212121"/>
                 </a:solidFill>
               </a:rPr>
-              <a:t>• That sweep ran an unvalidated scenario geometry and is being re-measured.</a:t>
+              <a:t>• Khonsu re-measures the limit for each handoff scenario, so the paper stands on its own numbers.</a:t>
             </a:r>
           </a:p>
         </p:txBody>
@@ -7938,8 +9871,8 @@
         </p:blipFill>
         <p:spPr>
           <a:xfrm>
-            <a:off x="1645920" y="2900000"/>
-            <a:ext cx="8305556" cy="3250000"/>
+            <a:off x="1463040" y="2900000"/>
+            <a:ext cx="9326880" cy="3108960"/>
           </a:xfrm>
           <a:prstGeom prst="rect">
             <a:avLst/>
@@ -7979,7 +9912,7 @@
                   <a:srgbClr val="B3A369"/>
                 </a:solidFill>
               </a:rPr>
-              <a:t>Answers RQ3  ·  Evidence: lead-time sweep, 10 seeds per point  ·  Missing: v3 re-baseline on the corrected scenario</a:t>
+              <a:t>Evidence: age chain across a handoff (measured except the destination refresh term)  ·  Missing: per-scenario safe-age re-measurement (T12)</a:t>
             </a:r>
           </a:p>
         </p:txBody>

--- a/docs/kb/decks/khonsu_story_2026-09-04.pptx
+++ b/docs/kb/decks/khonsu_story_2026-09-04.pptx
@@ -21,6 +21,11 @@
     <p:sldId id="269" r:id="rId20"/>
     <p:sldId id="270" r:id="rId21"/>
     <p:sldId id="271" r:id="rId22"/>
+    <p:sldId id="272" r:id="rId23"/>
+    <p:sldId id="273" r:id="rId24"/>
+    <p:sldId id="274" r:id="rId25"/>
+    <p:sldId id="275" r:id="rId26"/>
+    <p:sldId id="276" r:id="rId27"/>
   </p:sldIdLst>
   <p:sldSz cx="12192000" cy="6858000" type="screen4x3"/>
   <p:notesSz cx="6858000" cy="9144000"/>
@@ -3188,7 +3193,7 @@
         <p:spPr>
           <a:xfrm>
             <a:off x="900000" y="4300000"/>
-            <a:ext cx="10392000" cy="500000"/>
+            <a:ext cx="10392000" cy="700000"/>
           </a:xfrm>
           <a:prstGeom prst="rect">
             <a:avLst/>
@@ -3212,7 +3217,22 @@
                   <a:srgbClr val="B3A369"/>
                 </a:solidFill>
               </a:rPr>
-              <a:t>Status labels on evidence slides:  Done  /  Provisional  /  Running  /  Needed</a:t>
+              <a:t>Status labels on evidence slides  ·  Done  ·  Provisional  ·  Running  ·  Needed</a:t>
+            </a:r>
+          </a:p>
+          <a:p>
+            <a:pPr algn="ctr">
+              <a:spcAft>
+                <a:spcPts val="600"/>
+              </a:spcAft>
+            </a:pPr>
+            <a:r>
+              <a:rPr sz="1300" b="0">
+                <a:solidFill>
+                  <a:srgbClr val="B3A369"/>
+                </a:solidFill>
+              </a:rPr>
+              <a:t>Dashed figures with the red banner are expected shapes, not measurements</a:t>
             </a:r>
           </a:p>
         </p:txBody>
@@ -3344,7 +3364,7 @@
                   <a:srgbClr val="212121"/>
                 </a:solidFill>
               </a:rPr>
-              <a:t>• Cold start: does no state transfer violate the envelope?</a:t>
+              <a:t>• Cold start. Does no state transfer violate the envelope?</a:t>
             </a:r>
           </a:p>
           <a:p>
@@ -3359,7 +3379,7 @@
                   <a:srgbClr val="212121"/>
                 </a:solidFill>
               </a:rPr>
-              <a:t>• Transfer at the boundary: is reactive migration early enough?</a:t>
+              <a:t>• Transfer at the boundary. Is reactive migration early enough?</a:t>
             </a:r>
           </a:p>
           <a:p>
@@ -3374,7 +3394,7 @@
                   <a:srgbClr val="212121"/>
                 </a:solidFill>
               </a:rPr>
-              <a:t>• EdgeWarp timing: does radio-predicted migration give the predictor time to warm?</a:t>
+              <a:t>• EdgeWarp timing. Does radio-predicted migration give the predictor time to warm?</a:t>
             </a:r>
           </a:p>
           <a:p>
@@ -3389,7 +3409,7 @@
                   <a:srgbClr val="212121"/>
                 </a:solidFill>
               </a:rPr>
-              <a:t>• Overlap: can both locale services simply run in an overlap region?</a:t>
+              <a:t>• Overlap. Can both locale services simply run in an overlap region?</a:t>
             </a:r>
           </a:p>
           <a:p>
@@ -3404,7 +3424,7 @@
                   <a:srgbClr val="212121"/>
                 </a:solidFill>
               </a:rPr>
-              <a:t>• Continuous replication: can we mirror everything and avoid predictive handoff?</a:t>
+              <a:t>• Continuous replication. Can we mirror everything and avoid predictive handoff?</a:t>
             </a:r>
           </a:p>
           <a:p>
@@ -3419,7 +3439,7 @@
                   <a:srgbClr val="212121"/>
                 </a:solidFill>
               </a:rPr>
-              <a:t>• Khonsu: does forecast-driven prepare, final update, and ownership transfer preserve the envelope efficiently?</a:t>
+              <a:t>• Khonsu. Does forecast-driven prepare, final update, and ownership transfer preserve the envelope efficiently?</a:t>
             </a:r>
           </a:p>
           <a:p>
@@ -3434,7 +3454,7 @@
                   <a:srgbClr val="212121"/>
                 </a:solidFill>
               </a:rPr>
-              <a:t>• Oracle: what is the upper bound?</a:t>
+              <a:t>• Oracle. What is the upper bound?</a:t>
             </a:r>
           </a:p>
         </p:txBody>
@@ -3655,7 +3675,7 @@
                   <a:srgbClr val="212121"/>
                 </a:solidFill>
               </a:rPr>
-              <a:t>• The predictor already forecasts each actor; a forecast that crosses the boundary names the actor, destination, and arrival time.</a:t>
+              <a:t>• The predictor already forecasts each actor. A forecast that crosses the boundary names the actor, the destination, and the arrival time.</a:t>
             </a:r>
           </a:p>
           <a:p>
@@ -3670,7 +3690,7 @@
                   <a:srgbClr val="212121"/>
                 </a:solidFill>
               </a:rPr>
-              <a:t>• Prepare moves the temporal track state early; the track is warm but unpublished.</a:t>
+              <a:t>• Prepare moves the temporal track state early. The track is warm but unpublished.</a:t>
             </a:r>
           </a:p>
           <a:p>
@@ -3700,7 +3720,7 @@
                   <a:srgbClr val="212121"/>
                 </a:solidFill>
               </a:rPr>
-              <a:t>• Every forecast carries an ownership epoch; planners accept only the highest, so one owner is consumed.</a:t>
+              <a:t>• Every forecast carries an ownership epoch. Planners accept only the highest, so one owner is consumed.</a:t>
             </a:r>
           </a:p>
           <a:p>
@@ -3753,7 +3773,7 @@
                   <a:srgbClr val="B3A369"/>
                 </a:solidFill>
               </a:rPr>
-              <a:t>Lead time is computed from the age chain: transfer EMA + destination fold-in + margin</a:t>
+              <a:t>Lead time is computed from the age chain, transfer EMA plus destination fold-in plus margin</a:t>
             </a:r>
           </a:p>
         </p:txBody>
@@ -3936,7 +3956,7 @@
                   <a:srgbClr val="212121"/>
                 </a:solidFill>
               </a:rPr>
-              <a:t>• Handoff microbenchmark: history beats one frame by a factor of 2.8 to 9.3 (Done).</a:t>
+              <a:t>• Handoff microbenchmark (Done). History beats one frame by a factor of 2.8 to 9.3.</a:t>
             </a:r>
           </a:p>
           <a:p>
@@ -3951,7 +3971,7 @@
                   <a:srgbClr val="212121"/>
                 </a:solidFill>
               </a:rPr>
-              <a:t>• Acceleration closed loop: snapshot 4/4 collide, history 3/4 clean (Done).</a:t>
+              <a:t>• Acceleration closed loop (Done). Snapshot collides in 4 of 4, history completes 3 of 4 cleanly.</a:t>
             </a:r>
           </a:p>
           <a:p>
@@ -3966,7 +3986,7 @@
                   <a:srgbClr val="212121"/>
                 </a:solidFill>
               </a:rPr>
-              <a:t>• Ownership protocol: 8 fault scenarios, one publishable epoch at every step (Done).</a:t>
+              <a:t>• Ownership protocol (Done). Eight fault scenarios, one publishable epoch at every step.</a:t>
             </a:r>
           </a:p>
           <a:p>
@@ -3981,14 +4001,14 @@
                   <a:srgbClr val="212121"/>
                 </a:solidFill>
               </a:rPr>
-              <a:t>• Lead-time sweep: more lead, more completions up to 4 s, on an unvalidated geometry (Provisional, v3 running).</a:t>
+              <a:t>• Lead-time sweep (Provisional). Completion rises with lead up to 4 s, on an unvalidated geometry, v3 running.</a:t>
             </a:r>
           </a:p>
         </p:txBody>
       </p:sp>
       <p:pic>
         <p:nvPicPr>
-          <p:cNvPr id="6" name="Picture 5" descr="image.png"/>
+          <p:cNvPr id="6" name="Picture 5" descr="fig_leadtime_v2.png"/>
           <p:cNvPicPr>
             <a:picLocks noChangeAspect="1"/>
           </p:cNvPicPr>
@@ -4002,8 +4022,8 @@
         </p:blipFill>
         <p:spPr>
           <a:xfrm>
-            <a:off x="1645920" y="2900000"/>
-            <a:ext cx="8305556" cy="3250000"/>
+            <a:off x="2600000" y="2900000"/>
+            <a:ext cx="6500000" cy="3250000"/>
           </a:xfrm>
           <a:prstGeom prst="rect">
             <a:avLst/>
@@ -4043,7 +4063,7 @@
                   <a:srgbClr val="B3A369"/>
                 </a:solidFill>
               </a:rPr>
-              <a:t>Missing: computed trigger vs fixed leads on the corrected scenario; live fault arms with the epoch check on and off</a:t>
+              <a:t>Missing: computed trigger vs fixed leads on the corrected scenario, live fault arms with the epoch check on and off</a:t>
             </a:r>
           </a:p>
         </p:txBody>
@@ -4099,7 +4119,7 @@
                   <a:srgbClr val="1B3A6B"/>
                 </a:solidFill>
               </a:rPr>
-              <a:t>Overlap: how much is enough, what does it cost?</a:t>
+              <a:t>A trigger must be early without migrating everything</a:t>
             </a:r>
           </a:p>
         </p:txBody>
@@ -4157,7 +4177,7 @@
             <a:avLst/>
           </a:prstGeom>
           <a:solidFill>
-            <a:srgbClr val="D68C00"/>
+            <a:srgbClr val="787878"/>
           </a:solidFill>
           <a:ln>
             <a:noFill/>
@@ -4188,97 +4208,14 @@
                   <a:srgbClr val="FFFFFF"/>
                 </a:solidFill>
               </a:rPr>
-              <a:t>Provisional</a:t>
-            </a:r>
-          </a:p>
-        </p:txBody>
-      </p:sp>
-      <p:sp>
-        <p:nvSpPr>
-          <p:cNvPr id="5" name="TextBox 4"/>
-          <p:cNvSpPr txBox="1"/>
-          <p:nvPr/>
-        </p:nvSpPr>
-        <p:spPr>
-          <a:xfrm>
-            <a:off x="640080" y="1150000"/>
-            <a:ext cx="10972800" cy="3600000"/>
-          </a:xfrm>
-          <a:prstGeom prst="rect">
-            <a:avLst/>
-          </a:prstGeom>
-          <a:noFill/>
-        </p:spPr>
-        <p:txBody>
-          <a:bodyPr wrap="square">
-            <a:spAutoFit/>
-          </a:bodyPr>
-          <a:lstStyle/>
-          <a:p>
-            <a:pPr>
-              <a:spcAft>
-                <a:spcPts val="800"/>
-              </a:spcAft>
-            </a:pPr>
-            <a:r>
-              <a:rPr sz="1600" b="0">
-                <a:solidFill>
-                  <a:srgbClr val="212121"/>
-                </a:solidFill>
-              </a:rPr>
-              <a:t>• Sensing overlap only: both locales see the boundary, but the state must still move.</a:t>
-            </a:r>
-          </a:p>
-          <a:p>
-            <a:pPr>
-              <a:spcAft>
-                <a:spcPts val="800"/>
-              </a:spcAft>
-            </a:pPr>
-            <a:r>
-              <a:rPr sz="1600" b="0">
-                <a:solidFill>
-                  <a:srgbClr val="212121"/>
-                </a:solidFill>
-              </a:rPr>
-              <a:t>• Compute overlap (make-before-break): geometric prefetching, compared directly against forecast triggering.</a:t>
-            </a:r>
-          </a:p>
-          <a:p>
-            <a:pPr>
-              <a:spcAft>
-                <a:spcPts val="800"/>
-              </a:spcAft>
-            </a:pPr>
-            <a:r>
-              <a:rPr sz="1600" b="0">
-                <a:solidFill>
-                  <a:srgbClr val="212121"/>
-                </a:solidFill>
-              </a:rPr>
-              <a:t>• Dual authority: two forecasts for the same actor need a conflict-resolution rule.</a:t>
-            </a:r>
-          </a:p>
-          <a:p>
-            <a:pPr>
-              <a:spcAft>
-                <a:spcPts val="800"/>
-              </a:spcAft>
-            </a:pPr>
-            <a:r>
-              <a:rPr sz="1600" b="0">
-                <a:solidFill>
-                  <a:srgbClr val="212121"/>
-                </a:solidFill>
-              </a:rPr>
-              <a:t>• First sweep: replication doubled bytes and changed nothing (Provisional).</a:t>
+              <a:t>Needed</a:t>
             </a:r>
           </a:p>
         </p:txBody>
       </p:sp>
       <p:pic>
         <p:nvPicPr>
-          <p:cNvPr id="6" name="Picture 5" descr="image.png"/>
+          <p:cNvPr id="5" name="Picture 4" descr="toy_trigger.png"/>
           <p:cNvPicPr>
             <a:picLocks noChangeAspect="1"/>
           </p:cNvPicPr>
@@ -4292,8 +4229,8 @@
         </p:blipFill>
         <p:spPr>
           <a:xfrm>
-            <a:off x="2194560" y="2900000"/>
-            <a:ext cx="7680960" cy="2838616"/>
+            <a:off x="500000" y="1150000"/>
+            <a:ext cx="7400000" cy="4111111"/>
           </a:xfrm>
           <a:prstGeom prst="rect">
             <a:avLst/>
@@ -4302,14 +4239,14 @@
       </p:pic>
       <p:sp>
         <p:nvSpPr>
-          <p:cNvPr id="7" name="TextBox 6"/>
+          <p:cNvPr id="6" name="TextBox 5"/>
           <p:cNvSpPr txBox="1"/>
           <p:nvPr/>
         </p:nvSpPr>
         <p:spPr>
           <a:xfrm>
-            <a:off x="640080" y="6263640"/>
-            <a:ext cx="10972800" cy="457200"/>
+            <a:off x="8100000" y="1200000"/>
+            <a:ext cx="3600000" cy="320000"/>
           </a:xfrm>
           <a:prstGeom prst="rect">
             <a:avLst/>
@@ -4328,12 +4265,202 @@
               </a:spcAft>
             </a:pPr>
             <a:r>
+              <a:rPr sz="1100" b="1">
+                <a:solidFill>
+                  <a:srgbClr val="B3A369"/>
+                </a:solidFill>
+              </a:rPr>
+              <a:t>Question</a:t>
+            </a:r>
+          </a:p>
+        </p:txBody>
+      </p:sp>
+      <p:sp>
+        <p:nvSpPr>
+          <p:cNvPr id="7" name="TextBox 6"/>
+          <p:cNvSpPr txBox="1"/>
+          <p:nvPr/>
+        </p:nvSpPr>
+        <p:spPr>
+          <a:xfrm>
+            <a:off x="8100000" y="1520000"/>
+            <a:ext cx="3600000" cy="1250000"/>
+          </a:xfrm>
+          <a:prstGeom prst="rect">
+            <a:avLst/>
+          </a:prstGeom>
+          <a:noFill/>
+        </p:spPr>
+        <p:txBody>
+          <a:bodyPr wrap="square">
+            <a:spAutoFit/>
+          </a:bodyPr>
+          <a:lstStyle/>
+          <a:p>
+            <a:pPr>
+              <a:spcAft>
+                <a:spcPts val="400"/>
+              </a:spcAft>
+            </a:pPr>
+            <a:r>
               <a:rPr sz="1200" b="0">
                 <a:solidFill>
+                  <a:srgbClr val="212121"/>
+                </a:solidFill>
+              </a:rPr>
+              <a:t>Why not EdgeWarp timing, a fixed band, or simply triggering 4 s early?</a:t>
+            </a:r>
+          </a:p>
+        </p:txBody>
+      </p:sp>
+      <p:sp>
+        <p:nvSpPr>
+          <p:cNvPr id="8" name="TextBox 7"/>
+          <p:cNvSpPr txBox="1"/>
+          <p:nvPr/>
+        </p:nvSpPr>
+        <p:spPr>
+          <a:xfrm>
+            <a:off x="8100000" y="2800000"/>
+            <a:ext cx="3600000" cy="320000"/>
+          </a:xfrm>
+          <a:prstGeom prst="rect">
+            <a:avLst/>
+          </a:prstGeom>
+          <a:noFill/>
+        </p:spPr>
+        <p:txBody>
+          <a:bodyPr wrap="square">
+            <a:spAutoFit/>
+          </a:bodyPr>
+          <a:lstStyle/>
+          <a:p>
+            <a:pPr>
+              <a:spcAft>
+                <a:spcPts val="600"/>
+              </a:spcAft>
+            </a:pPr>
+            <a:r>
+              <a:rPr sz="1100" b="1">
+                <a:solidFill>
                   <a:srgbClr val="B3A369"/>
                 </a:solidFill>
               </a:rPr>
-              <a:t>Evidence: band and mirroring arms (Provisional)  ·  Missing: dual-authority arm; overlap width sweep</a:t>
+              <a:t>Experiment</a:t>
+            </a:r>
+          </a:p>
+        </p:txBody>
+      </p:sp>
+      <p:sp>
+        <p:nvSpPr>
+          <p:cNvPr id="9" name="TextBox 8"/>
+          <p:cNvSpPr txBox="1"/>
+          <p:nvPr/>
+        </p:nvSpPr>
+        <p:spPr>
+          <a:xfrm>
+            <a:off x="8100000" y="3120000"/>
+            <a:ext cx="3600000" cy="1250000"/>
+          </a:xfrm>
+          <a:prstGeom prst="rect">
+            <a:avLst/>
+          </a:prstGeom>
+          <a:noFill/>
+        </p:spPr>
+        <p:txBody>
+          <a:bodyPr wrap="square">
+            <a:spAutoFit/>
+          </a:bodyPr>
+          <a:lstStyle/>
+          <a:p>
+            <a:pPr>
+              <a:spcAft>
+                <a:spcPts val="400"/>
+              </a:spcAft>
+            </a:pPr>
+            <a:r>
+              <a:rPr sz="1200" b="0">
+                <a:solidFill>
+                  <a:srgbClr val="212121"/>
+                </a:solidFill>
+              </a:rPr>
+              <a:t>Trigger study on the corrected scenario. Radio handover, bands of 5 to 80 m, fixed leads of 1 to 4 s, the computed lead, and the oracle. Record warm-before-use, wasted bytes, and the lead-time distribution (v3, T11).</a:t>
+            </a:r>
+          </a:p>
+        </p:txBody>
+      </p:sp>
+      <p:sp>
+        <p:nvSpPr>
+          <p:cNvPr id="10" name="TextBox 9"/>
+          <p:cNvSpPr txBox="1"/>
+          <p:nvPr/>
+        </p:nvSpPr>
+        <p:spPr>
+          <a:xfrm>
+            <a:off x="8100000" y="4400000"/>
+            <a:ext cx="3600000" cy="320000"/>
+          </a:xfrm>
+          <a:prstGeom prst="rect">
+            <a:avLst/>
+          </a:prstGeom>
+          <a:noFill/>
+        </p:spPr>
+        <p:txBody>
+          <a:bodyPr wrap="square">
+            <a:spAutoFit/>
+          </a:bodyPr>
+          <a:lstStyle/>
+          <a:p>
+            <a:pPr>
+              <a:spcAft>
+                <a:spcPts val="600"/>
+              </a:spcAft>
+            </a:pPr>
+            <a:r>
+              <a:rPr sz="1100" b="1">
+                <a:solidFill>
+                  <a:srgbClr val="B3A369"/>
+                </a:solidFill>
+              </a:rPr>
+              <a:t>Result we need</a:t>
+            </a:r>
+          </a:p>
+        </p:txBody>
+      </p:sp>
+      <p:sp>
+        <p:nvSpPr>
+          <p:cNvPr id="11" name="TextBox 10"/>
+          <p:cNvSpPr txBox="1"/>
+          <p:nvPr/>
+        </p:nvSpPr>
+        <p:spPr>
+          <a:xfrm>
+            <a:off x="8100000" y="4720000"/>
+            <a:ext cx="3600000" cy="1250000"/>
+          </a:xfrm>
+          <a:prstGeom prst="rect">
+            <a:avLst/>
+          </a:prstGeom>
+          <a:noFill/>
+        </p:spPr>
+        <p:txBody>
+          <a:bodyPr wrap="square">
+            <a:spAutoFit/>
+          </a:bodyPr>
+          <a:lstStyle/>
+          <a:p>
+            <a:pPr>
+              <a:spcAft>
+                <a:spcPts val="400"/>
+              </a:spcAft>
+            </a:pPr>
+            <a:r>
+              <a:rPr sz="1200" b="0">
+                <a:solidFill>
+                  <a:srgbClr val="212121"/>
+                </a:solidFill>
+              </a:rPr>
+              <a:t>Khonsu near the oracle vertically while left of aggressive fixed leads and wide bands. The inset shows why: its lead tracks the predicted arrival.</a:t>
             </a:r>
           </a:p>
         </p:txBody>
@@ -4389,7 +4516,7 @@
                   <a:srgbClr val="1B3A6B"/>
                 </a:solidFill>
               </a:rPr>
-              <a:t>RQ4: what happens across an actual corridor?</a:t>
+              <a:t>Overlap can provide lead time, but its cost grows with width</a:t>
             </a:r>
           </a:p>
         </p:txBody>
@@ -4427,7 +4554,7 @@
                   <a:srgbClr val="B3A369"/>
                 </a:solidFill>
               </a:rPr>
-              <a:t>RQ4</a:t>
+              <a:t>RQ3</a:t>
             </a:r>
           </a:p>
         </p:txBody>
@@ -4447,7 +4574,7 @@
             <a:avLst/>
           </a:prstGeom>
           <a:solidFill>
-            <a:srgbClr val="787878"/>
+            <a:srgbClr val="D68C00"/>
           </a:solidFill>
           <a:ln>
             <a:noFill/>
@@ -4478,21 +4605,45 @@
                   <a:srgbClr val="FFFFFF"/>
                 </a:solidFill>
               </a:rPr>
-              <a:t>Needed</a:t>
-            </a:r>
-          </a:p>
-        </p:txBody>
-      </p:sp>
-      <p:sp>
-        <p:nvSpPr>
-          <p:cNvPr id="5" name="TextBox 4"/>
+              <a:t>Provisional</a:t>
+            </a:r>
+          </a:p>
+        </p:txBody>
+      </p:sp>
+      <p:pic>
+        <p:nvPicPr>
+          <p:cNvPr id="5" name="Picture 4" descr="toy_overlap.png"/>
+          <p:cNvPicPr>
+            <a:picLocks noChangeAspect="1"/>
+          </p:cNvPicPr>
+          <p:nvPr/>
+        </p:nvPicPr>
+        <p:blipFill>
+          <a:blip r:embed="rId2"/>
+          <a:stretch>
+            <a:fillRect/>
+          </a:stretch>
+        </p:blipFill>
+        <p:spPr>
+          <a:xfrm>
+            <a:off x="500000" y="1150000"/>
+            <a:ext cx="7400000" cy="3700000"/>
+          </a:xfrm>
+          <a:prstGeom prst="rect">
+            <a:avLst/>
+          </a:prstGeom>
+        </p:spPr>
+      </p:pic>
+      <p:sp>
+        <p:nvSpPr>
+          <p:cNvPr id="6" name="TextBox 5"/>
           <p:cNvSpPr txBox="1"/>
           <p:nvPr/>
         </p:nvSpPr>
         <p:spPr>
           <a:xfrm>
-            <a:off x="640080" y="1100000"/>
-            <a:ext cx="10972800" cy="800000"/>
+            <a:off x="8100000" y="1200000"/>
+            <a:ext cx="3600000" cy="320000"/>
           </a:xfrm>
           <a:prstGeom prst="rect">
             <a:avLst/>
@@ -4507,78 +4658,17 @@
           <a:p>
             <a:pPr>
               <a:spcAft>
-                <a:spcPts val="800"/>
-              </a:spcAft>
-            </a:pPr>
-            <a:r>
-              <a:rPr sz="1600" b="0">
-                <a:solidFill>
-                  <a:srgbClr val="212121"/>
-                </a:solidFill>
-              </a:rPr>
-              <a:t>• Four locales, three boundaries, one ego driving the whole corridor.</a:t>
-            </a:r>
-          </a:p>
-          <a:p>
-            <a:pPr>
-              <a:spcAft>
-                <a:spcPts val="800"/>
-              </a:spcAft>
-            </a:pPr>
-            <a:r>
-              <a:rPr sz="1600" b="0">
-                <a:solidFill>
-                  <a:srgbClr val="212121"/>
-                </a:solidFill>
-              </a:rPr>
-              <a:t>• Conflicts at intersection centers and, deliberately, between them.</a:t>
-            </a:r>
-          </a:p>
-        </p:txBody>
-      </p:sp>
-      <p:sp>
-        <p:nvSpPr>
-          <p:cNvPr id="6" name="Rectangle 5"/>
-          <p:cNvSpPr/>
-          <p:nvPr/>
-        </p:nvSpPr>
-        <p:spPr>
-          <a:xfrm>
-            <a:off x="600000" y="2300000"/>
-            <a:ext cx="2600000" cy="2600000"/>
-          </a:xfrm>
-          <a:prstGeom prst="rect">
-            <a:avLst/>
-          </a:prstGeom>
-          <a:solidFill>
-            <a:srgbClr val="E1E8F5"/>
-          </a:solidFill>
-          <a:ln w="15875">
-            <a:solidFill>
-              <a:srgbClr val="1B3A6B"/>
-            </a:solidFill>
-            <a:prstDash val="dash"/>
-          </a:ln>
-        </p:spPr>
-        <p:style>
-          <a:lnRef idx="1">
-            <a:schemeClr val="accent1"/>
-          </a:lnRef>
-          <a:fillRef idx="3">
-            <a:schemeClr val="accent1"/>
-          </a:fillRef>
-          <a:effectRef idx="2">
-            <a:schemeClr val="accent1"/>
-          </a:effectRef>
-          <a:fontRef idx="minor">
-            <a:schemeClr val="lt1"/>
-          </a:fontRef>
-        </p:style>
-        <p:txBody>
-          <a:bodyPr rtlCol="0" anchor="ctr"/>
-          <a:lstStyle/>
-          <a:p>
-            <a:pPr algn="ctr"/>
+                <a:spcPts val="600"/>
+              </a:spcAft>
+            </a:pPr>
+            <a:r>
+              <a:rPr sz="1100" b="1">
+                <a:solidFill>
+                  <a:srgbClr val="B3A369"/>
+                </a:solidFill>
+              </a:rPr>
+              <a:t>Question</a:t>
+            </a:r>
           </a:p>
         </p:txBody>
       </p:sp>
@@ -4590,8 +4680,8 @@
         </p:nvSpPr>
         <p:spPr>
           <a:xfrm>
-            <a:off x="660000" y="2330000"/>
-            <a:ext cx="1500000" cy="380000"/>
+            <a:off x="8100000" y="1520000"/>
+            <a:ext cx="3600000" cy="1250000"/>
           </a:xfrm>
           <a:prstGeom prst="rect">
             <a:avLst/>
@@ -4606,170 +4696,30 @@
           <a:p>
             <a:pPr>
               <a:spcAft>
-                <a:spcPts val="600"/>
-              </a:spcAft>
-            </a:pPr>
-            <a:r>
-              <a:rPr sz="1300" b="1">
-                <a:solidFill>
-                  <a:srgbClr val="1B3A6B"/>
-                </a:solidFill>
-              </a:rPr>
-              <a:t>Locale A</a:t>
-            </a:r>
-          </a:p>
-        </p:txBody>
-      </p:sp>
-      <p:sp>
-        <p:nvSpPr>
-          <p:cNvPr id="8" name="Rectangle 7"/>
-          <p:cNvSpPr/>
-          <p:nvPr/>
-        </p:nvSpPr>
-        <p:spPr>
-          <a:xfrm>
-            <a:off x="1700000" y="2650000"/>
-            <a:ext cx="400000" cy="380000"/>
-          </a:xfrm>
-          <a:prstGeom prst="rect">
-            <a:avLst/>
-          </a:prstGeom>
-          <a:solidFill>
-            <a:srgbClr val="6E6E6E"/>
-          </a:solidFill>
-          <a:ln>
-            <a:noFill/>
-          </a:ln>
-        </p:spPr>
-        <p:style>
-          <a:lnRef idx="1">
-            <a:schemeClr val="accent1"/>
-          </a:lnRef>
-          <a:fillRef idx="3">
-            <a:schemeClr val="accent1"/>
-          </a:fillRef>
-          <a:effectRef idx="2">
-            <a:schemeClr val="accent1"/>
-          </a:effectRef>
-          <a:fontRef idx="minor">
-            <a:schemeClr val="lt1"/>
-          </a:fontRef>
-        </p:style>
-        <p:txBody>
-          <a:bodyPr rtlCol="0" anchor="ctr" wrap="square"/>
-          <a:lstStyle/>
-          <a:p>
-            <a:pPr algn="ctr"/>
-            <a:r>
-              <a:rPr sz="900" b="0">
-                <a:solidFill>
-                  <a:srgbClr val="FFFFFF"/>
-                </a:solidFill>
-              </a:rPr>
-              <a:t>RSU</a:t>
-            </a:r>
-          </a:p>
-        </p:txBody>
-      </p:sp>
-      <p:sp>
-        <p:nvSpPr>
-          <p:cNvPr id="9" name="Rectangle 8"/>
-          <p:cNvSpPr/>
-          <p:nvPr/>
-        </p:nvSpPr>
-        <p:spPr>
-          <a:xfrm>
-            <a:off x="1750000" y="3200000"/>
-            <a:ext cx="300000" cy="1500000"/>
-          </a:xfrm>
-          <a:prstGeom prst="rect">
-            <a:avLst/>
-          </a:prstGeom>
-          <a:solidFill>
-            <a:srgbClr val="D7D7D7"/>
-          </a:solidFill>
-          <a:ln>
-            <a:noFill/>
-          </a:ln>
-        </p:spPr>
-        <p:style>
-          <a:lnRef idx="1">
-            <a:schemeClr val="accent1"/>
-          </a:lnRef>
-          <a:fillRef idx="3">
-            <a:schemeClr val="accent1"/>
-          </a:fillRef>
-          <a:effectRef idx="2">
-            <a:schemeClr val="accent1"/>
-          </a:effectRef>
-          <a:fontRef idx="minor">
-            <a:schemeClr val="lt1"/>
-          </a:fontRef>
-        </p:style>
-        <p:txBody>
-          <a:bodyPr rtlCol="0" anchor="ctr"/>
-          <a:lstStyle/>
-          <a:p>
-            <a:pPr algn="ctr"/>
-          </a:p>
-        </p:txBody>
-      </p:sp>
-      <p:sp>
-        <p:nvSpPr>
-          <p:cNvPr id="10" name="Rectangle 9"/>
-          <p:cNvSpPr/>
-          <p:nvPr/>
-        </p:nvSpPr>
-        <p:spPr>
-          <a:xfrm>
-            <a:off x="3350000" y="2300000"/>
-            <a:ext cx="2600000" cy="2600000"/>
-          </a:xfrm>
-          <a:prstGeom prst="rect">
-            <a:avLst/>
-          </a:prstGeom>
-          <a:solidFill>
-            <a:srgbClr val="FCECD6"/>
-          </a:solidFill>
-          <a:ln w="15875">
-            <a:solidFill>
-              <a:srgbClr val="CC7814"/>
-            </a:solidFill>
-            <a:prstDash val="dash"/>
-          </a:ln>
-        </p:spPr>
-        <p:style>
-          <a:lnRef idx="1">
-            <a:schemeClr val="accent1"/>
-          </a:lnRef>
-          <a:fillRef idx="3">
-            <a:schemeClr val="accent1"/>
-          </a:fillRef>
-          <a:effectRef idx="2">
-            <a:schemeClr val="accent1"/>
-          </a:effectRef>
-          <a:fontRef idx="minor">
-            <a:schemeClr val="lt1"/>
-          </a:fontRef>
-        </p:style>
-        <p:txBody>
-          <a:bodyPr rtlCol="0" anchor="ctr"/>
-          <a:lstStyle/>
-          <a:p>
-            <a:pPr algn="ctr"/>
-          </a:p>
-        </p:txBody>
-      </p:sp>
-      <p:sp>
-        <p:nvSpPr>
-          <p:cNvPr id="11" name="TextBox 10"/>
+                <a:spcPts val="400"/>
+              </a:spcAft>
+            </a:pPr>
+            <a:r>
+              <a:rPr sz="1200" b="0">
+                <a:solidFill>
+                  <a:srgbClr val="212121"/>
+                </a:solidFill>
+              </a:rPr>
+              <a:t>Can overlapping locales eliminate the explicit handoff? Sensing overlap, compute overlap, and dual authority are three different things.</a:t>
+            </a:r>
+          </a:p>
+        </p:txBody>
+      </p:sp>
+      <p:sp>
+        <p:nvSpPr>
+          <p:cNvPr id="8" name="TextBox 7"/>
           <p:cNvSpPr txBox="1"/>
           <p:nvPr/>
         </p:nvSpPr>
         <p:spPr>
           <a:xfrm>
-            <a:off x="3410000" y="2330000"/>
-            <a:ext cx="1500000" cy="380000"/>
+            <a:off x="8100000" y="2800000"/>
+            <a:ext cx="3600000" cy="320000"/>
           </a:xfrm>
           <a:prstGeom prst="rect">
             <a:avLst/>
@@ -4788,166 +4738,26 @@
               </a:spcAft>
             </a:pPr>
             <a:r>
-              <a:rPr sz="1300" b="1">
-                <a:solidFill>
-                  <a:srgbClr val="CC7814"/>
-                </a:solidFill>
-              </a:rPr>
-              <a:t>Locale B</a:t>
-            </a:r>
-          </a:p>
-        </p:txBody>
-      </p:sp>
-      <p:sp>
-        <p:nvSpPr>
-          <p:cNvPr id="12" name="Rectangle 11"/>
-          <p:cNvSpPr/>
-          <p:nvPr/>
-        </p:nvSpPr>
-        <p:spPr>
-          <a:xfrm>
-            <a:off x="4450000" y="2650000"/>
-            <a:ext cx="400000" cy="380000"/>
-          </a:xfrm>
-          <a:prstGeom prst="rect">
-            <a:avLst/>
-          </a:prstGeom>
-          <a:solidFill>
-            <a:srgbClr val="6E6E6E"/>
-          </a:solidFill>
-          <a:ln>
-            <a:noFill/>
-          </a:ln>
-        </p:spPr>
-        <p:style>
-          <a:lnRef idx="1">
-            <a:schemeClr val="accent1"/>
-          </a:lnRef>
-          <a:fillRef idx="3">
-            <a:schemeClr val="accent1"/>
-          </a:fillRef>
-          <a:effectRef idx="2">
-            <a:schemeClr val="accent1"/>
-          </a:effectRef>
-          <a:fontRef idx="minor">
-            <a:schemeClr val="lt1"/>
-          </a:fontRef>
-        </p:style>
-        <p:txBody>
-          <a:bodyPr rtlCol="0" anchor="ctr" wrap="square"/>
-          <a:lstStyle/>
-          <a:p>
-            <a:pPr algn="ctr"/>
-            <a:r>
-              <a:rPr sz="900" b="0">
-                <a:solidFill>
-                  <a:srgbClr val="FFFFFF"/>
-                </a:solidFill>
-              </a:rPr>
-              <a:t>RSU</a:t>
-            </a:r>
-          </a:p>
-        </p:txBody>
-      </p:sp>
-      <p:sp>
-        <p:nvSpPr>
-          <p:cNvPr id="13" name="Rectangle 12"/>
-          <p:cNvSpPr/>
-          <p:nvPr/>
-        </p:nvSpPr>
-        <p:spPr>
-          <a:xfrm>
-            <a:off x="4500000" y="3200000"/>
-            <a:ext cx="300000" cy="1500000"/>
-          </a:xfrm>
-          <a:prstGeom prst="rect">
-            <a:avLst/>
-          </a:prstGeom>
-          <a:solidFill>
-            <a:srgbClr val="D7D7D7"/>
-          </a:solidFill>
-          <a:ln>
-            <a:noFill/>
-          </a:ln>
-        </p:spPr>
-        <p:style>
-          <a:lnRef idx="1">
-            <a:schemeClr val="accent1"/>
-          </a:lnRef>
-          <a:fillRef idx="3">
-            <a:schemeClr val="accent1"/>
-          </a:fillRef>
-          <a:effectRef idx="2">
-            <a:schemeClr val="accent1"/>
-          </a:effectRef>
-          <a:fontRef idx="minor">
-            <a:schemeClr val="lt1"/>
-          </a:fontRef>
-        </p:style>
-        <p:txBody>
-          <a:bodyPr rtlCol="0" anchor="ctr"/>
-          <a:lstStyle/>
-          <a:p>
-            <a:pPr algn="ctr"/>
-          </a:p>
-        </p:txBody>
-      </p:sp>
-      <p:sp>
-        <p:nvSpPr>
-          <p:cNvPr id="14" name="Rectangle 13"/>
-          <p:cNvSpPr/>
-          <p:nvPr/>
-        </p:nvSpPr>
-        <p:spPr>
-          <a:xfrm>
-            <a:off x="6100000" y="2300000"/>
-            <a:ext cx="2600000" cy="2600000"/>
-          </a:xfrm>
-          <a:prstGeom prst="rect">
-            <a:avLst/>
-          </a:prstGeom>
-          <a:solidFill>
-            <a:srgbClr val="E1E8F5"/>
-          </a:solidFill>
-          <a:ln w="15875">
-            <a:solidFill>
-              <a:srgbClr val="1B3A6B"/>
-            </a:solidFill>
-            <a:prstDash val="dash"/>
-          </a:ln>
-        </p:spPr>
-        <p:style>
-          <a:lnRef idx="1">
-            <a:schemeClr val="accent1"/>
-          </a:lnRef>
-          <a:fillRef idx="3">
-            <a:schemeClr val="accent1"/>
-          </a:fillRef>
-          <a:effectRef idx="2">
-            <a:schemeClr val="accent1"/>
-          </a:effectRef>
-          <a:fontRef idx="minor">
-            <a:schemeClr val="lt1"/>
-          </a:fontRef>
-        </p:style>
-        <p:txBody>
-          <a:bodyPr rtlCol="0" anchor="ctr"/>
-          <a:lstStyle/>
-          <a:p>
-            <a:pPr algn="ctr"/>
-          </a:p>
-        </p:txBody>
-      </p:sp>
-      <p:sp>
-        <p:nvSpPr>
-          <p:cNvPr id="15" name="TextBox 14"/>
+              <a:rPr sz="1100" b="1">
+                <a:solidFill>
+                  <a:srgbClr val="B3A369"/>
+                </a:solidFill>
+              </a:rPr>
+              <a:t>Experiment</a:t>
+            </a:r>
+          </a:p>
+        </p:txBody>
+      </p:sp>
+      <p:sp>
+        <p:nvSpPr>
+          <p:cNvPr id="9" name="TextBox 8"/>
           <p:cNvSpPr txBox="1"/>
           <p:nvPr/>
         </p:nvSpPr>
         <p:spPr>
           <a:xfrm>
-            <a:off x="6160000" y="2330000"/>
-            <a:ext cx="1500000" cy="380000"/>
+            <a:off x="8100000" y="3120000"/>
+            <a:ext cx="3600000" cy="1250000"/>
           </a:xfrm>
           <a:prstGeom prst="rect">
             <a:avLst/>
@@ -4962,170 +4772,30 @@
           <a:p>
             <a:pPr>
               <a:spcAft>
-                <a:spcPts val="600"/>
-              </a:spcAft>
-            </a:pPr>
-            <a:r>
-              <a:rPr sz="1300" b="1">
-                <a:solidFill>
-                  <a:srgbClr val="1B3A6B"/>
-                </a:solidFill>
-              </a:rPr>
-              <a:t>Locale C</a:t>
-            </a:r>
-          </a:p>
-        </p:txBody>
-      </p:sp>
-      <p:sp>
-        <p:nvSpPr>
-          <p:cNvPr id="16" name="Rectangle 15"/>
-          <p:cNvSpPr/>
-          <p:nvPr/>
-        </p:nvSpPr>
-        <p:spPr>
-          <a:xfrm>
-            <a:off x="7200000" y="2650000"/>
-            <a:ext cx="400000" cy="380000"/>
-          </a:xfrm>
-          <a:prstGeom prst="rect">
-            <a:avLst/>
-          </a:prstGeom>
-          <a:solidFill>
-            <a:srgbClr val="6E6E6E"/>
-          </a:solidFill>
-          <a:ln>
-            <a:noFill/>
-          </a:ln>
-        </p:spPr>
-        <p:style>
-          <a:lnRef idx="1">
-            <a:schemeClr val="accent1"/>
-          </a:lnRef>
-          <a:fillRef idx="3">
-            <a:schemeClr val="accent1"/>
-          </a:fillRef>
-          <a:effectRef idx="2">
-            <a:schemeClr val="accent1"/>
-          </a:effectRef>
-          <a:fontRef idx="minor">
-            <a:schemeClr val="lt1"/>
-          </a:fontRef>
-        </p:style>
-        <p:txBody>
-          <a:bodyPr rtlCol="0" anchor="ctr" wrap="square"/>
-          <a:lstStyle/>
-          <a:p>
-            <a:pPr algn="ctr"/>
-            <a:r>
-              <a:rPr sz="900" b="0">
-                <a:solidFill>
-                  <a:srgbClr val="FFFFFF"/>
-                </a:solidFill>
-              </a:rPr>
-              <a:t>RSU</a:t>
-            </a:r>
-          </a:p>
-        </p:txBody>
-      </p:sp>
-      <p:sp>
-        <p:nvSpPr>
-          <p:cNvPr id="17" name="Rectangle 16"/>
-          <p:cNvSpPr/>
-          <p:nvPr/>
-        </p:nvSpPr>
-        <p:spPr>
-          <a:xfrm>
-            <a:off x="7250000" y="3200000"/>
-            <a:ext cx="300000" cy="1500000"/>
-          </a:xfrm>
-          <a:prstGeom prst="rect">
-            <a:avLst/>
-          </a:prstGeom>
-          <a:solidFill>
-            <a:srgbClr val="D7D7D7"/>
-          </a:solidFill>
-          <a:ln>
-            <a:noFill/>
-          </a:ln>
-        </p:spPr>
-        <p:style>
-          <a:lnRef idx="1">
-            <a:schemeClr val="accent1"/>
-          </a:lnRef>
-          <a:fillRef idx="3">
-            <a:schemeClr val="accent1"/>
-          </a:fillRef>
-          <a:effectRef idx="2">
-            <a:schemeClr val="accent1"/>
-          </a:effectRef>
-          <a:fontRef idx="minor">
-            <a:schemeClr val="lt1"/>
-          </a:fontRef>
-        </p:style>
-        <p:txBody>
-          <a:bodyPr rtlCol="0" anchor="ctr"/>
-          <a:lstStyle/>
-          <a:p>
-            <a:pPr algn="ctr"/>
-          </a:p>
-        </p:txBody>
-      </p:sp>
-      <p:sp>
-        <p:nvSpPr>
-          <p:cNvPr id="18" name="Rectangle 17"/>
-          <p:cNvSpPr/>
-          <p:nvPr/>
-        </p:nvSpPr>
-        <p:spPr>
-          <a:xfrm>
-            <a:off x="8850000" y="2300000"/>
-            <a:ext cx="2600000" cy="2600000"/>
-          </a:xfrm>
-          <a:prstGeom prst="rect">
-            <a:avLst/>
-          </a:prstGeom>
-          <a:solidFill>
-            <a:srgbClr val="FCECD6"/>
-          </a:solidFill>
-          <a:ln w="15875">
-            <a:solidFill>
-              <a:srgbClr val="CC7814"/>
-            </a:solidFill>
-            <a:prstDash val="dash"/>
-          </a:ln>
-        </p:spPr>
-        <p:style>
-          <a:lnRef idx="1">
-            <a:schemeClr val="accent1"/>
-          </a:lnRef>
-          <a:fillRef idx="3">
-            <a:schemeClr val="accent1"/>
-          </a:fillRef>
-          <a:effectRef idx="2">
-            <a:schemeClr val="accent1"/>
-          </a:effectRef>
-          <a:fontRef idx="minor">
-            <a:schemeClr val="lt1"/>
-          </a:fontRef>
-        </p:style>
-        <p:txBody>
-          <a:bodyPr rtlCol="0" anchor="ctr"/>
-          <a:lstStyle/>
-          <a:p>
-            <a:pPr algn="ctr"/>
-          </a:p>
-        </p:txBody>
-      </p:sp>
-      <p:sp>
-        <p:nvSpPr>
-          <p:cNvPr id="19" name="TextBox 18"/>
+                <a:spcPts val="400"/>
+              </a:spcAft>
+            </a:pPr>
+            <a:r>
+              <a:rPr sz="1200" b="0">
+                <a:solidFill>
+                  <a:srgbClr val="212121"/>
+                </a:solidFill>
+              </a:rPr>
+              <a:t>Sweep overlap width 20 to 120 m for each meaning. Measure warm-before-use, bytes per crossing, dueling forecasts, age at use, collisions (T14). First sweep, replication doubled bytes and changed nothing (Provisional).</a:t>
+            </a:r>
+          </a:p>
+        </p:txBody>
+      </p:sp>
+      <p:sp>
+        <p:nvSpPr>
+          <p:cNvPr id="10" name="TextBox 9"/>
           <p:cNvSpPr txBox="1"/>
           <p:nvPr/>
         </p:nvSpPr>
         <p:spPr>
           <a:xfrm>
-            <a:off x="8910000" y="2330000"/>
-            <a:ext cx="1500000" cy="380000"/>
+            <a:off x="8100000" y="4400000"/>
+            <a:ext cx="3600000" cy="320000"/>
           </a:xfrm>
           <a:prstGeom prst="rect">
             <a:avLst/>
@@ -5144,343 +4814,26 @@
               </a:spcAft>
             </a:pPr>
             <a:r>
-              <a:rPr sz="1300" b="1">
-                <a:solidFill>
-                  <a:srgbClr val="CC7814"/>
-                </a:solidFill>
-              </a:rPr>
-              <a:t>Locale D</a:t>
-            </a:r>
-          </a:p>
-        </p:txBody>
-      </p:sp>
-      <p:sp>
-        <p:nvSpPr>
-          <p:cNvPr id="20" name="Rectangle 19"/>
-          <p:cNvSpPr/>
-          <p:nvPr/>
-        </p:nvSpPr>
-        <p:spPr>
-          <a:xfrm>
-            <a:off x="9950000" y="2650000"/>
-            <a:ext cx="400000" cy="380000"/>
-          </a:xfrm>
-          <a:prstGeom prst="rect">
-            <a:avLst/>
-          </a:prstGeom>
-          <a:solidFill>
-            <a:srgbClr val="6E6E6E"/>
-          </a:solidFill>
-          <a:ln>
-            <a:noFill/>
-          </a:ln>
-        </p:spPr>
-        <p:style>
-          <a:lnRef idx="1">
-            <a:schemeClr val="accent1"/>
-          </a:lnRef>
-          <a:fillRef idx="3">
-            <a:schemeClr val="accent1"/>
-          </a:fillRef>
-          <a:effectRef idx="2">
-            <a:schemeClr val="accent1"/>
-          </a:effectRef>
-          <a:fontRef idx="minor">
-            <a:schemeClr val="lt1"/>
-          </a:fontRef>
-        </p:style>
-        <p:txBody>
-          <a:bodyPr rtlCol="0" anchor="ctr" wrap="square"/>
-          <a:lstStyle/>
-          <a:p>
-            <a:pPr algn="ctr"/>
-            <a:r>
-              <a:rPr sz="900" b="0">
-                <a:solidFill>
-                  <a:srgbClr val="FFFFFF"/>
-                </a:solidFill>
-              </a:rPr>
-              <a:t>RSU</a:t>
-            </a:r>
-          </a:p>
-        </p:txBody>
-      </p:sp>
-      <p:sp>
-        <p:nvSpPr>
-          <p:cNvPr id="21" name="Rectangle 20"/>
-          <p:cNvSpPr/>
-          <p:nvPr/>
-        </p:nvSpPr>
-        <p:spPr>
-          <a:xfrm>
-            <a:off x="10000000" y="3200000"/>
-            <a:ext cx="300000" cy="1500000"/>
-          </a:xfrm>
-          <a:prstGeom prst="rect">
-            <a:avLst/>
-          </a:prstGeom>
-          <a:solidFill>
-            <a:srgbClr val="D7D7D7"/>
-          </a:solidFill>
-          <a:ln>
-            <a:noFill/>
-          </a:ln>
-        </p:spPr>
-        <p:style>
-          <a:lnRef idx="1">
-            <a:schemeClr val="accent1"/>
-          </a:lnRef>
-          <a:fillRef idx="3">
-            <a:schemeClr val="accent1"/>
-          </a:fillRef>
-          <a:effectRef idx="2">
-            <a:schemeClr val="accent1"/>
-          </a:effectRef>
-          <a:fontRef idx="minor">
-            <a:schemeClr val="lt1"/>
-          </a:fontRef>
-        </p:style>
-        <p:txBody>
-          <a:bodyPr rtlCol="0" anchor="ctr"/>
-          <a:lstStyle/>
-          <a:p>
-            <a:pPr algn="ctr"/>
-          </a:p>
-        </p:txBody>
-      </p:sp>
-      <p:sp>
-        <p:nvSpPr>
-          <p:cNvPr id="22" name="Rectangle 21"/>
-          <p:cNvSpPr/>
-          <p:nvPr/>
-        </p:nvSpPr>
-        <p:spPr>
-          <a:xfrm>
-            <a:off x="700000" y="3750000"/>
-            <a:ext cx="10800000" cy="380000"/>
-          </a:xfrm>
-          <a:prstGeom prst="rect">
-            <a:avLst/>
-          </a:prstGeom>
-          <a:solidFill>
-            <a:srgbClr val="C8C8C8"/>
-          </a:solidFill>
-          <a:ln>
-            <a:noFill/>
-          </a:ln>
-        </p:spPr>
-        <p:style>
-          <a:lnRef idx="1">
-            <a:schemeClr val="accent1"/>
-          </a:lnRef>
-          <a:fillRef idx="3">
-            <a:schemeClr val="accent1"/>
-          </a:fillRef>
-          <a:effectRef idx="2">
-            <a:schemeClr val="accent1"/>
-          </a:effectRef>
-          <a:fontRef idx="minor">
-            <a:schemeClr val="lt1"/>
-          </a:fontRef>
-        </p:style>
-        <p:txBody>
-          <a:bodyPr rtlCol="0" anchor="ctr"/>
-          <a:lstStyle/>
-          <a:p>
-            <a:pPr algn="ctr"/>
-          </a:p>
-        </p:txBody>
-      </p:sp>
-      <p:sp>
-        <p:nvSpPr>
-          <p:cNvPr id="23" name="Rectangle 22"/>
-          <p:cNvSpPr/>
-          <p:nvPr/>
-        </p:nvSpPr>
-        <p:spPr>
-          <a:xfrm>
-            <a:off x="3275000" y="2200000"/>
-            <a:ext cx="20000" cy="2800000"/>
-          </a:xfrm>
-          <a:prstGeom prst="rect">
-            <a:avLst/>
-          </a:prstGeom>
-          <a:solidFill>
-            <a:srgbClr val="C0392B"/>
-          </a:solidFill>
-          <a:ln>
-            <a:noFill/>
-          </a:ln>
-        </p:spPr>
-        <p:style>
-          <a:lnRef idx="1">
-            <a:schemeClr val="accent1"/>
-          </a:lnRef>
-          <a:fillRef idx="3">
-            <a:schemeClr val="accent1"/>
-          </a:fillRef>
-          <a:effectRef idx="2">
-            <a:schemeClr val="accent1"/>
-          </a:effectRef>
-          <a:fontRef idx="minor">
-            <a:schemeClr val="lt1"/>
-          </a:fontRef>
-        </p:style>
-        <p:txBody>
-          <a:bodyPr rtlCol="0" anchor="ctr"/>
-          <a:lstStyle/>
-          <a:p>
-            <a:pPr algn="ctr"/>
-          </a:p>
-        </p:txBody>
-      </p:sp>
-      <p:sp>
-        <p:nvSpPr>
-          <p:cNvPr id="24" name="Rectangle 23"/>
-          <p:cNvSpPr/>
-          <p:nvPr/>
-        </p:nvSpPr>
-        <p:spPr>
-          <a:xfrm>
-            <a:off x="6025000" y="2200000"/>
-            <a:ext cx="20000" cy="2800000"/>
-          </a:xfrm>
-          <a:prstGeom prst="rect">
-            <a:avLst/>
-          </a:prstGeom>
-          <a:solidFill>
-            <a:srgbClr val="C0392B"/>
-          </a:solidFill>
-          <a:ln>
-            <a:noFill/>
-          </a:ln>
-        </p:spPr>
-        <p:style>
-          <a:lnRef idx="1">
-            <a:schemeClr val="accent1"/>
-          </a:lnRef>
-          <a:fillRef idx="3">
-            <a:schemeClr val="accent1"/>
-          </a:fillRef>
-          <a:effectRef idx="2">
-            <a:schemeClr val="accent1"/>
-          </a:effectRef>
-          <a:fontRef idx="minor">
-            <a:schemeClr val="lt1"/>
-          </a:fontRef>
-        </p:style>
-        <p:txBody>
-          <a:bodyPr rtlCol="0" anchor="ctr"/>
-          <a:lstStyle/>
-          <a:p>
-            <a:pPr algn="ctr"/>
-          </a:p>
-        </p:txBody>
-      </p:sp>
-      <p:sp>
-        <p:nvSpPr>
-          <p:cNvPr id="25" name="Rectangle 24"/>
-          <p:cNvSpPr/>
-          <p:nvPr/>
-        </p:nvSpPr>
-        <p:spPr>
-          <a:xfrm>
-            <a:off x="8775000" y="2200000"/>
-            <a:ext cx="20000" cy="2800000"/>
-          </a:xfrm>
-          <a:prstGeom prst="rect">
-            <a:avLst/>
-          </a:prstGeom>
-          <a:solidFill>
-            <a:srgbClr val="C0392B"/>
-          </a:solidFill>
-          <a:ln>
-            <a:noFill/>
-          </a:ln>
-        </p:spPr>
-        <p:style>
-          <a:lnRef idx="1">
-            <a:schemeClr val="accent1"/>
-          </a:lnRef>
-          <a:fillRef idx="3">
-            <a:schemeClr val="accent1"/>
-          </a:fillRef>
-          <a:effectRef idx="2">
-            <a:schemeClr val="accent1"/>
-          </a:effectRef>
-          <a:fontRef idx="minor">
-            <a:schemeClr val="lt1"/>
-          </a:fontRef>
-        </p:style>
-        <p:txBody>
-          <a:bodyPr rtlCol="0" anchor="ctr"/>
-          <a:lstStyle/>
-          <a:p>
-            <a:pPr algn="ctr"/>
-          </a:p>
-        </p:txBody>
-      </p:sp>
-      <p:sp>
-        <p:nvSpPr>
-          <p:cNvPr id="26" name="Oval 25"/>
-          <p:cNvSpPr/>
-          <p:nvPr/>
-        </p:nvSpPr>
-        <p:spPr>
-          <a:xfrm>
-            <a:off x="1600000" y="3800000"/>
-            <a:ext cx="280000" cy="280000"/>
-          </a:xfrm>
-          <a:prstGeom prst="ellipse">
-            <a:avLst/>
-          </a:prstGeom>
-          <a:solidFill>
-            <a:srgbClr val="C0392B"/>
-          </a:solidFill>
-          <a:ln>
-            <a:noFill/>
-          </a:ln>
-        </p:spPr>
-        <p:style>
-          <a:lnRef idx="1">
-            <a:schemeClr val="accent1"/>
-          </a:lnRef>
-          <a:fillRef idx="3">
-            <a:schemeClr val="accent1"/>
-          </a:fillRef>
-          <a:effectRef idx="2">
-            <a:schemeClr val="accent1"/>
-          </a:effectRef>
-          <a:fontRef idx="minor">
-            <a:schemeClr val="lt1"/>
-          </a:fontRef>
-        </p:style>
-        <p:txBody>
-          <a:bodyPr rtlCol="0" anchor="ctr" wrap="square"/>
-          <a:lstStyle/>
-          <a:p>
-            <a:pPr algn="ctr"/>
-            <a:r>
-              <a:rPr sz="900" b="1">
-                <a:solidFill>
-                  <a:srgbClr val="FFFFFF"/>
-                </a:solidFill>
-              </a:rPr>
-              <a:t>x</a:t>
-            </a:r>
-          </a:p>
-        </p:txBody>
-      </p:sp>
-      <p:sp>
-        <p:nvSpPr>
-          <p:cNvPr id="27" name="TextBox 26"/>
+              <a:rPr sz="1100" b="1">
+                <a:solidFill>
+                  <a:srgbClr val="B3A369"/>
+                </a:solidFill>
+              </a:rPr>
+              <a:t>Result we need</a:t>
+            </a:r>
+          </a:p>
+        </p:txBody>
+      </p:sp>
+      <p:sp>
+        <p:nvSpPr>
+          <p:cNvPr id="11" name="TextBox 10"/>
           <p:cNvSpPr txBox="1"/>
           <p:nvPr/>
         </p:nvSpPr>
         <p:spPr>
           <a:xfrm>
-            <a:off x="1250000" y="4150000"/>
-            <a:ext cx="1100000" cy="350000"/>
+            <a:off x="8100000" y="4720000"/>
+            <a:ext cx="3600000" cy="1250000"/>
           </a:xfrm>
           <a:prstGeom prst="rect">
             <a:avLst/>
@@ -5493,463 +4846,18 @@
           </a:bodyPr>
           <a:lstStyle/>
           <a:p>
-            <a:pPr algn="ctr">
-              <a:spcAft>
-                <a:spcPts val="600"/>
-              </a:spcAft>
-            </a:pPr>
-            <a:r>
-              <a:rPr sz="900" b="0">
-                <a:solidFill>
-                  <a:srgbClr val="C0392B"/>
-                </a:solidFill>
-              </a:rPr>
-              <a:t>crossing path</a:t>
-            </a:r>
-          </a:p>
-        </p:txBody>
-      </p:sp>
-      <p:sp>
-        <p:nvSpPr>
-          <p:cNvPr id="28" name="Oval 27"/>
-          <p:cNvSpPr/>
-          <p:nvPr/>
-        </p:nvSpPr>
-        <p:spPr>
-          <a:xfrm>
-            <a:off x="3450000" y="3800000"/>
-            <a:ext cx="280000" cy="280000"/>
-          </a:xfrm>
-          <a:prstGeom prst="ellipse">
-            <a:avLst/>
-          </a:prstGeom>
-          <a:solidFill>
-            <a:srgbClr val="C0392B"/>
-          </a:solidFill>
-          <a:ln>
-            <a:noFill/>
-          </a:ln>
-        </p:spPr>
-        <p:style>
-          <a:lnRef idx="1">
-            <a:schemeClr val="accent1"/>
-          </a:lnRef>
-          <a:fillRef idx="3">
-            <a:schemeClr val="accent1"/>
-          </a:fillRef>
-          <a:effectRef idx="2">
-            <a:schemeClr val="accent1"/>
-          </a:effectRef>
-          <a:fontRef idx="minor">
-            <a:schemeClr val="lt1"/>
-          </a:fontRef>
-        </p:style>
-        <p:txBody>
-          <a:bodyPr rtlCol="0" anchor="ctr" wrap="square"/>
-          <a:lstStyle/>
-          <a:p>
-            <a:pPr algn="ctr"/>
-            <a:r>
-              <a:rPr sz="900" b="1">
-                <a:solidFill>
-                  <a:srgbClr val="FFFFFF"/>
-                </a:solidFill>
-              </a:rPr>
-              <a:t>x</a:t>
-            </a:r>
-          </a:p>
-        </p:txBody>
-      </p:sp>
-      <p:sp>
-        <p:nvSpPr>
-          <p:cNvPr id="29" name="TextBox 28"/>
-          <p:cNvSpPr txBox="1"/>
-          <p:nvPr/>
-        </p:nvSpPr>
-        <p:spPr>
-          <a:xfrm>
-            <a:off x="3100000" y="4150000"/>
-            <a:ext cx="1100000" cy="350000"/>
-          </a:xfrm>
-          <a:prstGeom prst="rect">
-            <a:avLst/>
-          </a:prstGeom>
-          <a:noFill/>
-        </p:spPr>
-        <p:txBody>
-          <a:bodyPr wrap="square">
-            <a:spAutoFit/>
-          </a:bodyPr>
-          <a:lstStyle/>
-          <a:p>
-            <a:pPr algn="ctr">
-              <a:spcAft>
-                <a:spcPts val="600"/>
-              </a:spcAft>
-            </a:pPr>
-            <a:r>
-              <a:rPr sz="900" b="0">
-                <a:solidFill>
-                  <a:srgbClr val="C0392B"/>
-                </a:solidFill>
-              </a:rPr>
-              <a:t>queue tail</a:t>
-            </a:r>
-          </a:p>
-        </p:txBody>
-      </p:sp>
-      <p:sp>
-        <p:nvSpPr>
-          <p:cNvPr id="30" name="Oval 29"/>
-          <p:cNvSpPr/>
-          <p:nvPr/>
-        </p:nvSpPr>
-        <p:spPr>
-          <a:xfrm>
-            <a:off x="6200000" y="3800000"/>
-            <a:ext cx="280000" cy="280000"/>
-          </a:xfrm>
-          <a:prstGeom prst="ellipse">
-            <a:avLst/>
-          </a:prstGeom>
-          <a:solidFill>
-            <a:srgbClr val="C0392B"/>
-          </a:solidFill>
-          <a:ln>
-            <a:noFill/>
-          </a:ln>
-        </p:spPr>
-        <p:style>
-          <a:lnRef idx="1">
-            <a:schemeClr val="accent1"/>
-          </a:lnRef>
-          <a:fillRef idx="3">
-            <a:schemeClr val="accent1"/>
-          </a:fillRef>
-          <a:effectRef idx="2">
-            <a:schemeClr val="accent1"/>
-          </a:effectRef>
-          <a:fontRef idx="minor">
-            <a:schemeClr val="lt1"/>
-          </a:fontRef>
-        </p:style>
-        <p:txBody>
-          <a:bodyPr rtlCol="0" anchor="ctr" wrap="square"/>
-          <a:lstStyle/>
-          <a:p>
-            <a:pPr algn="ctr"/>
-            <a:r>
-              <a:rPr sz="900" b="1">
-                <a:solidFill>
-                  <a:srgbClr val="FFFFFF"/>
-                </a:solidFill>
-              </a:rPr>
-              <a:t>x</a:t>
-            </a:r>
-          </a:p>
-        </p:txBody>
-      </p:sp>
-      <p:sp>
-        <p:nvSpPr>
-          <p:cNvPr id="31" name="TextBox 30"/>
-          <p:cNvSpPr txBox="1"/>
-          <p:nvPr/>
-        </p:nvSpPr>
-        <p:spPr>
-          <a:xfrm>
-            <a:off x="5850000" y="4150000"/>
-            <a:ext cx="1100000" cy="350000"/>
-          </a:xfrm>
-          <a:prstGeom prst="rect">
-            <a:avLst/>
-          </a:prstGeom>
-          <a:noFill/>
-        </p:spPr>
-        <p:txBody>
-          <a:bodyPr wrap="square">
-            <a:spAutoFit/>
-          </a:bodyPr>
-          <a:lstStyle/>
-          <a:p>
-            <a:pPr algn="ctr">
-              <a:spcAft>
-                <a:spcPts val="600"/>
-              </a:spcAft>
-            </a:pPr>
-            <a:r>
-              <a:rPr sz="900" b="0">
-                <a:solidFill>
-                  <a:srgbClr val="C0392B"/>
-                </a:solidFill>
-              </a:rPr>
-              <a:t>overtake</a:t>
-            </a:r>
-          </a:p>
-        </p:txBody>
-      </p:sp>
-      <p:sp>
-        <p:nvSpPr>
-          <p:cNvPr id="32" name="Oval 31"/>
-          <p:cNvSpPr/>
-          <p:nvPr/>
-        </p:nvSpPr>
-        <p:spPr>
-          <a:xfrm>
-            <a:off x="9000000" y="3800000"/>
-            <a:ext cx="280000" cy="280000"/>
-          </a:xfrm>
-          <a:prstGeom prst="ellipse">
-            <a:avLst/>
-          </a:prstGeom>
-          <a:solidFill>
-            <a:srgbClr val="C0392B"/>
-          </a:solidFill>
-          <a:ln>
-            <a:noFill/>
-          </a:ln>
-        </p:spPr>
-        <p:style>
-          <a:lnRef idx="1">
-            <a:schemeClr val="accent1"/>
-          </a:lnRef>
-          <a:fillRef idx="3">
-            <a:schemeClr val="accent1"/>
-          </a:fillRef>
-          <a:effectRef idx="2">
-            <a:schemeClr val="accent1"/>
-          </a:effectRef>
-          <a:fontRef idx="minor">
-            <a:schemeClr val="lt1"/>
-          </a:fontRef>
-        </p:style>
-        <p:txBody>
-          <a:bodyPr rtlCol="0" anchor="ctr" wrap="square"/>
-          <a:lstStyle/>
-          <a:p>
-            <a:pPr algn="ctr"/>
-            <a:r>
-              <a:rPr sz="900" b="1">
-                <a:solidFill>
-                  <a:srgbClr val="FFFFFF"/>
-                </a:solidFill>
-              </a:rPr>
-              <a:t>x</a:t>
-            </a:r>
-          </a:p>
-        </p:txBody>
-      </p:sp>
-      <p:sp>
-        <p:nvSpPr>
-          <p:cNvPr id="33" name="TextBox 32"/>
-          <p:cNvSpPr txBox="1"/>
-          <p:nvPr/>
-        </p:nvSpPr>
-        <p:spPr>
-          <a:xfrm>
-            <a:off x="8650000" y="4150000"/>
-            <a:ext cx="1100000" cy="350000"/>
-          </a:xfrm>
-          <a:prstGeom prst="rect">
-            <a:avLst/>
-          </a:prstGeom>
-          <a:noFill/>
-        </p:spPr>
-        <p:txBody>
-          <a:bodyPr wrap="square">
-            <a:spAutoFit/>
-          </a:bodyPr>
-          <a:lstStyle/>
-          <a:p>
-            <a:pPr algn="ctr">
-              <a:spcAft>
-                <a:spcPts val="600"/>
-              </a:spcAft>
-            </a:pPr>
-            <a:r>
-              <a:rPr sz="900" b="0">
-                <a:solidFill>
-                  <a:srgbClr val="C0392B"/>
-                </a:solidFill>
-              </a:rPr>
-              <a:t>stopped vehicle</a:t>
-            </a:r>
-          </a:p>
-        </p:txBody>
-      </p:sp>
-      <p:sp>
-        <p:nvSpPr>
-          <p:cNvPr id="34" name="Oval 33"/>
-          <p:cNvSpPr/>
-          <p:nvPr/>
-        </p:nvSpPr>
-        <p:spPr>
-          <a:xfrm>
-            <a:off x="7000000" y="3800000"/>
-            <a:ext cx="280000" cy="280000"/>
-          </a:xfrm>
-          <a:prstGeom prst="ellipse">
-            <a:avLst/>
-          </a:prstGeom>
-          <a:solidFill>
-            <a:srgbClr val="C0392B"/>
-          </a:solidFill>
-          <a:ln>
-            <a:noFill/>
-          </a:ln>
-        </p:spPr>
-        <p:style>
-          <a:lnRef idx="1">
-            <a:schemeClr val="accent1"/>
-          </a:lnRef>
-          <a:fillRef idx="3">
-            <a:schemeClr val="accent1"/>
-          </a:fillRef>
-          <a:effectRef idx="2">
-            <a:schemeClr val="accent1"/>
-          </a:effectRef>
-          <a:fontRef idx="minor">
-            <a:schemeClr val="lt1"/>
-          </a:fontRef>
-        </p:style>
-        <p:txBody>
-          <a:bodyPr rtlCol="0" anchor="ctr" wrap="square"/>
-          <a:lstStyle/>
-          <a:p>
-            <a:pPr algn="ctr"/>
-            <a:r>
-              <a:rPr sz="900" b="1">
-                <a:solidFill>
-                  <a:srgbClr val="FFFFFF"/>
-                </a:solidFill>
-              </a:rPr>
-              <a:t>x</a:t>
-            </a:r>
-          </a:p>
-        </p:txBody>
-      </p:sp>
-      <p:sp>
-        <p:nvSpPr>
-          <p:cNvPr id="35" name="TextBox 34"/>
-          <p:cNvSpPr txBox="1"/>
-          <p:nvPr/>
-        </p:nvSpPr>
-        <p:spPr>
-          <a:xfrm>
-            <a:off x="6650000" y="4150000"/>
-            <a:ext cx="1100000" cy="350000"/>
-          </a:xfrm>
-          <a:prstGeom prst="rect">
-            <a:avLst/>
-          </a:prstGeom>
-          <a:noFill/>
-        </p:spPr>
-        <p:txBody>
-          <a:bodyPr wrap="square">
-            <a:spAutoFit/>
-          </a:bodyPr>
-          <a:lstStyle/>
-          <a:p>
-            <a:pPr algn="ctr">
-              <a:spcAft>
-                <a:spcPts val="600"/>
-              </a:spcAft>
-            </a:pPr>
-            <a:r>
-              <a:rPr sz="900" b="0">
-                <a:solidFill>
-                  <a:srgbClr val="C0392B"/>
-                </a:solidFill>
-              </a:rPr>
-              <a:t>crossing path</a:t>
-            </a:r>
-          </a:p>
-        </p:txBody>
-      </p:sp>
-      <p:sp>
-        <p:nvSpPr>
-          <p:cNvPr id="36" name="Right Arrow 35"/>
-          <p:cNvSpPr/>
-          <p:nvPr/>
-        </p:nvSpPr>
-        <p:spPr>
-          <a:xfrm>
-            <a:off x="800000" y="4520000"/>
-            <a:ext cx="10500000" cy="250000"/>
-          </a:xfrm>
-          <a:prstGeom prst="rightArrow">
-            <a:avLst/>
-          </a:prstGeom>
-          <a:solidFill>
-            <a:srgbClr val="1B3A6B"/>
-          </a:solidFill>
-          <a:ln>
-            <a:noFill/>
-          </a:ln>
-        </p:spPr>
-        <p:style>
-          <a:lnRef idx="1">
-            <a:schemeClr val="accent1"/>
-          </a:lnRef>
-          <a:fillRef idx="3">
-            <a:schemeClr val="accent1"/>
-          </a:fillRef>
-          <a:effectRef idx="2">
-            <a:schemeClr val="accent1"/>
-          </a:effectRef>
-          <a:fontRef idx="minor">
-            <a:schemeClr val="lt1"/>
-          </a:fontRef>
-        </p:style>
-        <p:txBody>
-          <a:bodyPr rtlCol="0" anchor="ctr"/>
-          <a:lstStyle/>
-          <a:p>
-            <a:pPr algn="ctr"/>
-            <a:r>
-              <a:rPr sz="1000" b="1">
-                <a:solidFill>
-                  <a:srgbClr val="FFFFFF"/>
-                </a:solidFill>
-              </a:rPr>
-              <a:t>ego route: three handoffs, actors crossing independently, several at once</a:t>
-            </a:r>
-          </a:p>
-        </p:txBody>
-      </p:sp>
-      <p:sp>
-        <p:nvSpPr>
-          <p:cNvPr id="37" name="TextBox 36"/>
-          <p:cNvSpPr txBox="1"/>
-          <p:nvPr/>
-        </p:nvSpPr>
-        <p:spPr>
-          <a:xfrm>
-            <a:off x="640080" y="6263640"/>
-            <a:ext cx="10972800" cy="457200"/>
-          </a:xfrm>
-          <a:prstGeom prst="rect">
-            <a:avLst/>
-          </a:prstGeom>
-          <a:noFill/>
-        </p:spPr>
-        <p:txBody>
-          <a:bodyPr wrap="square">
-            <a:spAutoFit/>
-          </a:bodyPr>
-          <a:lstStyle/>
-          <a:p>
-            <a:pPr>
-              <a:spcAft>
-                <a:spcPts val="600"/>
+            <a:pPr>
+              <a:spcAft>
+                <a:spcPts val="400"/>
               </a:spcAft>
             </a:pPr>
             <a:r>
               <a:rPr sz="1200" b="0">
                 <a:solidFill>
-                  <a:srgbClr val="B3A369"/>
-                </a:solidFill>
-              </a:rPr>
-              <a:t>This is a cooperative-prediction service operating across a sequence of locales, not a two-server microbenchmark  ·  Missing: build (T13)</a:t>
+                  <a:srgbClr val="212121"/>
+                </a:solidFill>
+              </a:rPr>
+              <a:t>Lead time from a fixed width shrinks with speed, so enough time at 20 m/s needs a wide overlap, and wider overlap means more duplicated work. Khonsu sizes the lead from the predicted arrival instead.</a:t>
             </a:r>
           </a:p>
         </p:txBody>
@@ -6005,7 +4913,7 @@
                   <a:srgbClr val="1B3A6B"/>
                 </a:solidFill>
               </a:rPr>
-              <a:t>RQ4: multi-locale evaluation</a:t>
+              <a:t>Ownership epochs block stale forecasts at the planner</a:t>
             </a:r>
           </a:p>
         </p:txBody>
@@ -6043,7 +4951,7 @@
                   <a:srgbClr val="B3A369"/>
                 </a:solidFill>
               </a:rPr>
-              <a:t>RQ4</a:t>
+              <a:t>RQ3</a:t>
             </a:r>
           </a:p>
         </p:txBody>
@@ -6063,7 +4971,7 @@
             <a:avLst/>
           </a:prstGeom>
           <a:solidFill>
-            <a:srgbClr val="787878"/>
+            <a:srgbClr val="1565C0"/>
           </a:solidFill>
           <a:ln>
             <a:noFill/>
@@ -6094,21 +5002,45 @@
                   <a:srgbClr val="FFFFFF"/>
                 </a:solidFill>
               </a:rPr>
-              <a:t>Needed</a:t>
-            </a:r>
-          </a:p>
-        </p:txBody>
-      </p:sp>
-      <p:sp>
-        <p:nvSpPr>
-          <p:cNvPr id="5" name="TextBox 4"/>
+              <a:t>Running</a:t>
+            </a:r>
+          </a:p>
+        </p:txBody>
+      </p:sp>
+      <p:pic>
+        <p:nvPicPr>
+          <p:cNvPr id="5" name="Picture 4" descr="toy_faults.png"/>
+          <p:cNvPicPr>
+            <a:picLocks noChangeAspect="1"/>
+          </p:cNvPicPr>
+          <p:nvPr/>
+        </p:nvPicPr>
+        <p:blipFill>
+          <a:blip r:embed="rId2"/>
+          <a:stretch>
+            <a:fillRect/>
+          </a:stretch>
+        </p:blipFill>
+        <p:spPr>
+          <a:xfrm>
+            <a:off x="500000" y="1150000"/>
+            <a:ext cx="7400000" cy="3700000"/>
+          </a:xfrm>
+          <a:prstGeom prst="rect">
+            <a:avLst/>
+          </a:prstGeom>
+        </p:spPr>
+      </p:pic>
+      <p:sp>
+        <p:nvSpPr>
+          <p:cNvPr id="6" name="TextBox 5"/>
           <p:cNvSpPr txBox="1"/>
           <p:nvPr/>
         </p:nvSpPr>
         <p:spPr>
           <a:xfrm>
-            <a:off x="640080" y="1150000"/>
-            <a:ext cx="10972800" cy="3600000"/>
+            <a:off x="8100000" y="1200000"/>
+            <a:ext cx="3600000" cy="320000"/>
           </a:xfrm>
           <a:prstGeom prst="rect">
             <a:avLst/>
@@ -6123,90 +5055,30 @@
           <a:p>
             <a:pPr>
               <a:spcAft>
-                <a:spcPts val="800"/>
-              </a:spcAft>
-            </a:pPr>
-            <a:r>
-              <a:rPr sz="1600" b="0">
-                <a:solidFill>
-                  <a:srgbClr val="212121"/>
-                </a:solidFill>
-              </a:rPr>
-              <a:t>• Continuity: handoffs warm before use, post-handoff ADE and FDE, track resets, fallbacks per km.</a:t>
-            </a:r>
-          </a:p>
-          <a:p>
-            <a:pPr>
-              <a:spcAft>
-                <a:spcPts val="800"/>
-              </a:spcAft>
-            </a:pPr>
-            <a:r>
-              <a:rPr sz="1600" b="0">
-                <a:solidFill>
-                  <a:srgbClr val="212121"/>
-                </a:solidFill>
-              </a:rPr>
-              <a:t>• Planner safety: age at use vs the scenario's safe-age limit, minimum TTC, collisions, hard and false braking, route completion.</a:t>
-            </a:r>
-          </a:p>
-          <a:p>
-            <a:pPr>
-              <a:spcAft>
-                <a:spcPts val="800"/>
-              </a:spcAft>
-            </a:pPr>
-            <a:r>
-              <a:rPr sz="1600" b="0">
-                <a:solidFill>
-                  <a:srgbClr val="212121"/>
-                </a:solidFill>
-              </a:rPr>
-              <a:t>• System: migrations per second, concurrent migrations, bytes per second, import and first-refresh latency, per-locale utilization.</a:t>
-            </a:r>
-          </a:p>
-          <a:p>
-            <a:pPr>
-              <a:spcAft>
-                <a:spcPts val="800"/>
-              </a:spcAft>
-            </a:pPr>
-            <a:r>
-              <a:rPr sz="1600" b="0">
-                <a:solidFill>
-                  <a:srgbClr val="212121"/>
-                </a:solidFill>
-              </a:rPr>
-              <a:t>• Repeated handoffs: every metric by crossing index, stale epochs, back-and-forth transitions.</a:t>
-            </a:r>
-          </a:p>
-          <a:p>
-            <a:pPr>
-              <a:spcAft>
-                <a:spcPts val="800"/>
-              </a:spcAft>
-            </a:pPr>
-            <a:r>
-              <a:rPr sz="1600" b="0">
-                <a:solidFill>
-                  <a:srgbClr val="212121"/>
-                </a:solidFill>
-              </a:rPr>
-              <a:t>• The whole route under cold start, boundary transfer, EdgeWarp timing, overlap, replication, Khonsu, oracle.</a:t>
-            </a:r>
-          </a:p>
-        </p:txBody>
-      </p:sp>
-      <p:sp>
-        <p:nvSpPr>
-          <p:cNvPr id="6" name="TextBox 5"/>
+                <a:spcPts val="600"/>
+              </a:spcAft>
+            </a:pPr>
+            <a:r>
+              <a:rPr sz="1100" b="1">
+                <a:solidFill>
+                  <a:srgbClr val="B3A369"/>
+                </a:solidFill>
+              </a:rPr>
+              <a:t>Question</a:t>
+            </a:r>
+          </a:p>
+        </p:txBody>
+      </p:sp>
+      <p:sp>
+        <p:nvSpPr>
+          <p:cNvPr id="7" name="TextBox 6"/>
           <p:cNvSpPr txBox="1"/>
           <p:nvPr/>
         </p:nvSpPr>
         <p:spPr>
           <a:xfrm>
-            <a:off x="640080" y="6263640"/>
-            <a:ext cx="10972800" cy="457200"/>
+            <a:off x="8100000" y="1520000"/>
+            <a:ext cx="3600000" cy="1250000"/>
           </a:xfrm>
           <a:prstGeom prst="rect">
             <a:avLst/>
@@ -6221,16 +5093,168 @@
           <a:p>
             <a:pPr>
               <a:spcAft>
+                <a:spcPts val="400"/>
+              </a:spcAft>
+            </a:pPr>
+            <a:r>
+              <a:rPr sz="1200" b="0">
+                <a:solidFill>
+                  <a:srgbClr val="212121"/>
+                </a:solidFill>
+              </a:rPr>
+              <a:t>Both locales may emit forecasts for a moment under message loss. Does the planner ever consume a stale owner's forecast?</a:t>
+            </a:r>
+          </a:p>
+        </p:txBody>
+      </p:sp>
+      <p:sp>
+        <p:nvSpPr>
+          <p:cNvPr id="8" name="TextBox 7"/>
+          <p:cNvSpPr txBox="1"/>
+          <p:nvPr/>
+        </p:nvSpPr>
+        <p:spPr>
+          <a:xfrm>
+            <a:off x="8100000" y="2800000"/>
+            <a:ext cx="3600000" cy="320000"/>
+          </a:xfrm>
+          <a:prstGeom prst="rect">
+            <a:avLst/>
+          </a:prstGeom>
+          <a:noFill/>
+        </p:spPr>
+        <p:txBody>
+          <a:bodyPr wrap="square">
+            <a:spAutoFit/>
+          </a:bodyPr>
+          <a:lstStyle/>
+          <a:p>
+            <a:pPr>
+              <a:spcAft>
                 <a:spcPts val="600"/>
               </a:spcAft>
             </a:pPr>
             <a:r>
+              <a:rPr sz="1100" b="1">
+                <a:solidFill>
+                  <a:srgbClr val="B3A369"/>
+                </a:solidFill>
+              </a:rPr>
+              <a:t>Experiment</a:t>
+            </a:r>
+          </a:p>
+        </p:txBody>
+      </p:sp>
+      <p:sp>
+        <p:nvSpPr>
+          <p:cNvPr id="9" name="TextBox 8"/>
+          <p:cNvSpPr txBox="1"/>
+          <p:nvPr/>
+        </p:nvSpPr>
+        <p:spPr>
+          <a:xfrm>
+            <a:off x="8100000" y="3120000"/>
+            <a:ext cx="3600000" cy="1250000"/>
+          </a:xfrm>
+          <a:prstGeom prst="rect">
+            <a:avLst/>
+          </a:prstGeom>
+          <a:noFill/>
+        </p:spPr>
+        <p:txBody>
+          <a:bodyPr wrap="square">
+            <a:spAutoFit/>
+          </a:bodyPr>
+          <a:lstStyle/>
+          <a:p>
+            <a:pPr>
+              <a:spcAft>
+                <a:spcPts val="400"/>
+              </a:spcAft>
+            </a:pPr>
+            <a:r>
               <a:rPr sz="1200" b="0">
                 <a:solidFill>
+                  <a:srgbClr val="212121"/>
+                </a:solidFill>
+              </a:rPr>
+              <a:t>Inject lost PREPARE, lost ACK, lost COMMIT, duplicate COMMIT, reordering, and destination failure on the live path, with the epoch check off and on (T7 live). The unit-level state machine already passes eight scenarios.</a:t>
+            </a:r>
+          </a:p>
+        </p:txBody>
+      </p:sp>
+      <p:sp>
+        <p:nvSpPr>
+          <p:cNvPr id="10" name="TextBox 9"/>
+          <p:cNvSpPr txBox="1"/>
+          <p:nvPr/>
+        </p:nvSpPr>
+        <p:spPr>
+          <a:xfrm>
+            <a:off x="8100000" y="4400000"/>
+            <a:ext cx="3600000" cy="320000"/>
+          </a:xfrm>
+          <a:prstGeom prst="rect">
+            <a:avLst/>
+          </a:prstGeom>
+          <a:noFill/>
+        </p:spPr>
+        <p:txBody>
+          <a:bodyPr wrap="square">
+            <a:spAutoFit/>
+          </a:bodyPr>
+          <a:lstStyle/>
+          <a:p>
+            <a:pPr>
+              <a:spcAft>
+                <a:spcPts val="600"/>
+              </a:spcAft>
+            </a:pPr>
+            <a:r>
+              <a:rPr sz="1100" b="1">
+                <a:solidFill>
                   <a:srgbClr val="B3A369"/>
                 </a:solidFill>
               </a:rPr>
-              <a:t>The burst test (5-vehicle platoon) stays as the microbenchmark behind the concurrent-crossing part</a:t>
+              <a:t>Result we need</a:t>
+            </a:r>
+          </a:p>
+        </p:txBody>
+      </p:sp>
+      <p:sp>
+        <p:nvSpPr>
+          <p:cNvPr id="11" name="TextBox 10"/>
+          <p:cNvSpPr txBox="1"/>
+          <p:nvPr/>
+        </p:nvSpPr>
+        <p:spPr>
+          <a:xfrm>
+            <a:off x="8100000" y="4720000"/>
+            <a:ext cx="3600000" cy="1250000"/>
+          </a:xfrm>
+          <a:prstGeom prst="rect">
+            <a:avLst/>
+          </a:prstGeom>
+          <a:noFill/>
+        </p:spPr>
+        <p:txBody>
+          <a:bodyPr wrap="square">
+            <a:spAutoFit/>
+          </a:bodyPr>
+          <a:lstStyle/>
+          <a:p>
+            <a:pPr>
+              <a:spcAft>
+                <a:spcPts val="400"/>
+              </a:spcAft>
+            </a:pPr>
+            <a:r>
+              <a:rPr sz="1200" b="0">
+                <a:solidFill>
+                  <a:srgbClr val="212121"/>
+                </a:solidFill>
+              </a:rPr>
+              <a:t>Double emission may remain briefly with the check on. Stale-owner forecasts consumed must be exactly zero in every fault. Destination failure ends in fallback, not a stale consume.</a:t>
             </a:r>
           </a:p>
         </p:txBody>
@@ -6244,6 +5268,3175 @@
 </file>
 
 <file path=ppt/slides/slide16.xml><?xml version="1.0" encoding="utf-8"?>
+<p:sld xmlns:a="http://schemas.openxmlformats.org/drawingml/2006/main" xmlns:p="http://schemas.openxmlformats.org/presentationml/2006/main" xmlns:r="http://schemas.openxmlformats.org/officeDocument/2006/relationships">
+  <p:cSld>
+    <p:spTree>
+      <p:nvGrpSpPr>
+        <p:cNvPr id="1" name=""/>
+        <p:cNvGrpSpPr/>
+        <p:nvPr/>
+      </p:nvGrpSpPr>
+      <p:grpSpPr/>
+      <p:sp>
+        <p:nvSpPr>
+          <p:cNvPr id="2" name="TextBox 1"/>
+          <p:cNvSpPr txBox="1"/>
+          <p:nvPr/>
+        </p:nvSpPr>
+        <p:spPr>
+          <a:xfrm>
+            <a:off x="548640" y="256032"/>
+            <a:ext cx="9600000" cy="777240"/>
+          </a:xfrm>
+          <a:prstGeom prst="rect">
+            <a:avLst/>
+          </a:prstGeom>
+          <a:noFill/>
+        </p:spPr>
+        <p:txBody>
+          <a:bodyPr wrap="square">
+            <a:spAutoFit/>
+          </a:bodyPr>
+          <a:lstStyle/>
+          <a:p>
+            <a:pPr>
+              <a:spcAft>
+                <a:spcPts val="600"/>
+              </a:spcAft>
+            </a:pPr>
+            <a:r>
+              <a:rPr sz="2800" b="1">
+                <a:solidFill>
+                  <a:srgbClr val="1B3A6B"/>
+                </a:solidFill>
+              </a:rPr>
+              <a:t>How many simultaneous handoffs can one locale sustain?</a:t>
+            </a:r>
+          </a:p>
+        </p:txBody>
+      </p:sp>
+      <p:sp>
+        <p:nvSpPr>
+          <p:cNvPr id="3" name="TextBox 2"/>
+          <p:cNvSpPr txBox="1"/>
+          <p:nvPr/>
+        </p:nvSpPr>
+        <p:spPr>
+          <a:xfrm>
+            <a:off x="10200000" y="292608"/>
+            <a:ext cx="1700000" cy="457200"/>
+          </a:xfrm>
+          <a:prstGeom prst="rect">
+            <a:avLst/>
+          </a:prstGeom>
+          <a:noFill/>
+        </p:spPr>
+        <p:txBody>
+          <a:bodyPr wrap="square">
+            <a:spAutoFit/>
+          </a:bodyPr>
+          <a:lstStyle/>
+          <a:p>
+            <a:pPr algn="r">
+              <a:spcAft>
+                <a:spcPts val="600"/>
+              </a:spcAft>
+            </a:pPr>
+            <a:r>
+              <a:rPr sz="1300" b="1">
+                <a:solidFill>
+                  <a:srgbClr val="B3A369"/>
+                </a:solidFill>
+              </a:rPr>
+              <a:t>RQ4</a:t>
+            </a:r>
+          </a:p>
+        </p:txBody>
+      </p:sp>
+      <p:sp>
+        <p:nvSpPr>
+          <p:cNvPr id="4" name="Rounded Rectangle 3"/>
+          <p:cNvSpPr/>
+          <p:nvPr/>
+        </p:nvSpPr>
+        <p:spPr>
+          <a:xfrm>
+            <a:off x="10200000" y="760000"/>
+            <a:ext cx="1450000" cy="330000"/>
+          </a:xfrm>
+          <a:prstGeom prst="roundRect">
+            <a:avLst/>
+          </a:prstGeom>
+          <a:solidFill>
+            <a:srgbClr val="1565C0"/>
+          </a:solidFill>
+          <a:ln>
+            <a:noFill/>
+          </a:ln>
+        </p:spPr>
+        <p:style>
+          <a:lnRef idx="1">
+            <a:schemeClr val="accent1"/>
+          </a:lnRef>
+          <a:fillRef idx="3">
+            <a:schemeClr val="accent1"/>
+          </a:fillRef>
+          <a:effectRef idx="2">
+            <a:schemeClr val="accent1"/>
+          </a:effectRef>
+          <a:fontRef idx="minor">
+            <a:schemeClr val="lt1"/>
+          </a:fontRef>
+        </p:style>
+        <p:txBody>
+          <a:bodyPr rtlCol="0" anchor="ctr" wrap="square"/>
+          <a:lstStyle/>
+          <a:p>
+            <a:pPr algn="ctr"/>
+            <a:r>
+              <a:rPr sz="1100" b="1">
+                <a:solidFill>
+                  <a:srgbClr val="FFFFFF"/>
+                </a:solidFill>
+              </a:rPr>
+              <a:t>Running</a:t>
+            </a:r>
+          </a:p>
+        </p:txBody>
+      </p:sp>
+      <p:pic>
+        <p:nvPicPr>
+          <p:cNvPr id="5" name="Picture 4" descr="toy_load.png"/>
+          <p:cNvPicPr>
+            <a:picLocks noChangeAspect="1"/>
+          </p:cNvPicPr>
+          <p:nvPr/>
+        </p:nvPicPr>
+        <p:blipFill>
+          <a:blip r:embed="rId2"/>
+          <a:stretch>
+            <a:fillRect/>
+          </a:stretch>
+        </p:blipFill>
+        <p:spPr>
+          <a:xfrm>
+            <a:off x="500000" y="1150000"/>
+            <a:ext cx="7400000" cy="3905555"/>
+          </a:xfrm>
+          <a:prstGeom prst="rect">
+            <a:avLst/>
+          </a:prstGeom>
+        </p:spPr>
+      </p:pic>
+      <p:sp>
+        <p:nvSpPr>
+          <p:cNvPr id="6" name="TextBox 5"/>
+          <p:cNvSpPr txBox="1"/>
+          <p:nvPr/>
+        </p:nvSpPr>
+        <p:spPr>
+          <a:xfrm>
+            <a:off x="8100000" y="1200000"/>
+            <a:ext cx="3600000" cy="320000"/>
+          </a:xfrm>
+          <a:prstGeom prst="rect">
+            <a:avLst/>
+          </a:prstGeom>
+          <a:noFill/>
+        </p:spPr>
+        <p:txBody>
+          <a:bodyPr wrap="square">
+            <a:spAutoFit/>
+          </a:bodyPr>
+          <a:lstStyle/>
+          <a:p>
+            <a:pPr>
+              <a:spcAft>
+                <a:spcPts val="600"/>
+              </a:spcAft>
+            </a:pPr>
+            <a:r>
+              <a:rPr sz="1100" b="1">
+                <a:solidFill>
+                  <a:srgbClr val="B3A369"/>
+                </a:solidFill>
+              </a:rPr>
+              <a:t>Question</a:t>
+            </a:r>
+          </a:p>
+        </p:txBody>
+      </p:sp>
+      <p:sp>
+        <p:nvSpPr>
+          <p:cNvPr id="7" name="TextBox 6"/>
+          <p:cNvSpPr txBox="1"/>
+          <p:nvPr/>
+        </p:nvSpPr>
+        <p:spPr>
+          <a:xfrm>
+            <a:off x="8100000" y="1520000"/>
+            <a:ext cx="3600000" cy="1250000"/>
+          </a:xfrm>
+          <a:prstGeom prst="rect">
+            <a:avLst/>
+          </a:prstGeom>
+          <a:noFill/>
+        </p:spPr>
+        <p:txBody>
+          <a:bodyPr wrap="square">
+            <a:spAutoFit/>
+          </a:bodyPr>
+          <a:lstStyle/>
+          <a:p>
+            <a:pPr>
+              <a:spcAft>
+                <a:spcPts val="400"/>
+              </a:spcAft>
+            </a:pPr>
+            <a:r>
+              <a:rPr sz="1200" b="0">
+                <a:solidFill>
+                  <a:srgbClr val="212121"/>
+                </a:solidFill>
+              </a:rPr>
+              <a:t>At what crossing load does the handoff path stop meeting the budget?</a:t>
+            </a:r>
+          </a:p>
+        </p:txBody>
+      </p:sp>
+      <p:sp>
+        <p:nvSpPr>
+          <p:cNvPr id="8" name="TextBox 7"/>
+          <p:cNvSpPr txBox="1"/>
+          <p:nvPr/>
+        </p:nvSpPr>
+        <p:spPr>
+          <a:xfrm>
+            <a:off x="8100000" y="2800000"/>
+            <a:ext cx="3600000" cy="320000"/>
+          </a:xfrm>
+          <a:prstGeom prst="rect">
+            <a:avLst/>
+          </a:prstGeom>
+          <a:noFill/>
+        </p:spPr>
+        <p:txBody>
+          <a:bodyPr wrap="square">
+            <a:spAutoFit/>
+          </a:bodyPr>
+          <a:lstStyle/>
+          <a:p>
+            <a:pPr>
+              <a:spcAft>
+                <a:spcPts val="600"/>
+              </a:spcAft>
+            </a:pPr>
+            <a:r>
+              <a:rPr sz="1100" b="1">
+                <a:solidFill>
+                  <a:srgbClr val="B3A369"/>
+                </a:solidFill>
+              </a:rPr>
+              <a:t>Experiment</a:t>
+            </a:r>
+          </a:p>
+        </p:txBody>
+      </p:sp>
+      <p:sp>
+        <p:nvSpPr>
+          <p:cNvPr id="9" name="TextBox 8"/>
+          <p:cNvSpPr txBox="1"/>
+          <p:nvPr/>
+        </p:nvSpPr>
+        <p:spPr>
+          <a:xfrm>
+            <a:off x="8100000" y="3120000"/>
+            <a:ext cx="3600000" cy="1250000"/>
+          </a:xfrm>
+          <a:prstGeom prst="rect">
+            <a:avLst/>
+          </a:prstGeom>
+          <a:noFill/>
+        </p:spPr>
+        <p:txBody>
+          <a:bodyPr wrap="square">
+            <a:spAutoFit/>
+          </a:bodyPr>
+          <a:lstStyle/>
+          <a:p>
+            <a:pPr>
+              <a:spcAft>
+                <a:spcPts val="400"/>
+              </a:spcAft>
+            </a:pPr>
+            <a:r>
+              <a:rPr sz="1200" b="0">
+                <a:solidFill>
+                  <a:srgbClr val="212121"/>
+                </a:solidFill>
+              </a:rPr>
+              <a:t>Platoons of 1 to 16 tracks crossing together, plus the crossing-rate sweep. Measure p99 transfer-to-first-refresh latency against the available handoff budget (q5, burst scenario).</a:t>
+            </a:r>
+          </a:p>
+        </p:txBody>
+      </p:sp>
+      <p:sp>
+        <p:nvSpPr>
+          <p:cNvPr id="10" name="TextBox 9"/>
+          <p:cNvSpPr txBox="1"/>
+          <p:nvPr/>
+        </p:nvSpPr>
+        <p:spPr>
+          <a:xfrm>
+            <a:off x="8100000" y="4400000"/>
+            <a:ext cx="3600000" cy="320000"/>
+          </a:xfrm>
+          <a:prstGeom prst="rect">
+            <a:avLst/>
+          </a:prstGeom>
+          <a:noFill/>
+        </p:spPr>
+        <p:txBody>
+          <a:bodyPr wrap="square">
+            <a:spAutoFit/>
+          </a:bodyPr>
+          <a:lstStyle/>
+          <a:p>
+            <a:pPr>
+              <a:spcAft>
+                <a:spcPts val="600"/>
+              </a:spcAft>
+            </a:pPr>
+            <a:r>
+              <a:rPr sz="1100" b="1">
+                <a:solidFill>
+                  <a:srgbClr val="B3A369"/>
+                </a:solidFill>
+              </a:rPr>
+              <a:t>Result we need</a:t>
+            </a:r>
+          </a:p>
+        </p:txBody>
+      </p:sp>
+      <p:sp>
+        <p:nvSpPr>
+          <p:cNvPr id="11" name="TextBox 10"/>
+          <p:cNvSpPr txBox="1"/>
+          <p:nvPr/>
+        </p:nvSpPr>
+        <p:spPr>
+          <a:xfrm>
+            <a:off x="8100000" y="4720000"/>
+            <a:ext cx="3600000" cy="1250000"/>
+          </a:xfrm>
+          <a:prstGeom prst="rect">
+            <a:avLst/>
+          </a:prstGeom>
+          <a:noFill/>
+        </p:spPr>
+        <p:txBody>
+          <a:bodyPr wrap="square">
+            <a:spAutoFit/>
+          </a:bodyPr>
+          <a:lstStyle/>
+          <a:p>
+            <a:pPr>
+              <a:spcAft>
+                <a:spcPts val="400"/>
+              </a:spcAft>
+            </a:pPr>
+            <a:r>
+              <a:rPr sz="1200" b="0">
+                <a:solidFill>
+                  <a:srgbClr val="212121"/>
+                </a:solidFill>
+              </a:rPr>
+              <a:t>The concurrent-track count at which Khonsu crosses the budget, stated as a capacity. Replication and dual-service overlap should cross earlier.</a:t>
+            </a:r>
+          </a:p>
+        </p:txBody>
+      </p:sp>
+    </p:spTree>
+  </p:cSld>
+  <p:clrMapOvr>
+    <a:masterClrMapping/>
+  </p:clrMapOvr>
+</p:sld>
+</file>
+
+<file path=ppt/slides/slide17.xml><?xml version="1.0" encoding="utf-8"?>
+<p:sld xmlns:a="http://schemas.openxmlformats.org/drawingml/2006/main" xmlns:p="http://schemas.openxmlformats.org/presentationml/2006/main" xmlns:r="http://schemas.openxmlformats.org/officeDocument/2006/relationships">
+  <p:cSld>
+    <p:spTree>
+      <p:nvGrpSpPr>
+        <p:cNvPr id="1" name=""/>
+        <p:cNvGrpSpPr/>
+        <p:nvPr/>
+      </p:nvGrpSpPr>
+      <p:grpSpPr/>
+      <p:sp>
+        <p:nvSpPr>
+          <p:cNvPr id="2" name="TextBox 1"/>
+          <p:cNvSpPr txBox="1"/>
+          <p:nvPr/>
+        </p:nvSpPr>
+        <p:spPr>
+          <a:xfrm>
+            <a:off x="548640" y="256032"/>
+            <a:ext cx="9600000" cy="777240"/>
+          </a:xfrm>
+          <a:prstGeom prst="rect">
+            <a:avLst/>
+          </a:prstGeom>
+          <a:noFill/>
+        </p:spPr>
+        <p:txBody>
+          <a:bodyPr wrap="square">
+            <a:spAutoFit/>
+          </a:bodyPr>
+          <a:lstStyle/>
+          <a:p>
+            <a:pPr>
+              <a:spcAft>
+                <a:spcPts val="600"/>
+              </a:spcAft>
+            </a:pPr>
+            <a:r>
+              <a:rPr sz="2800" b="1">
+                <a:solidFill>
+                  <a:srgbClr val="1B3A6B"/>
+                </a:solidFill>
+              </a:rPr>
+              <a:t>RQ4: what happens across an actual corridor?</a:t>
+            </a:r>
+          </a:p>
+        </p:txBody>
+      </p:sp>
+      <p:sp>
+        <p:nvSpPr>
+          <p:cNvPr id="3" name="TextBox 2"/>
+          <p:cNvSpPr txBox="1"/>
+          <p:nvPr/>
+        </p:nvSpPr>
+        <p:spPr>
+          <a:xfrm>
+            <a:off x="10200000" y="292608"/>
+            <a:ext cx="1700000" cy="457200"/>
+          </a:xfrm>
+          <a:prstGeom prst="rect">
+            <a:avLst/>
+          </a:prstGeom>
+          <a:noFill/>
+        </p:spPr>
+        <p:txBody>
+          <a:bodyPr wrap="square">
+            <a:spAutoFit/>
+          </a:bodyPr>
+          <a:lstStyle/>
+          <a:p>
+            <a:pPr algn="r">
+              <a:spcAft>
+                <a:spcPts val="600"/>
+              </a:spcAft>
+            </a:pPr>
+            <a:r>
+              <a:rPr sz="1300" b="1">
+                <a:solidFill>
+                  <a:srgbClr val="B3A369"/>
+                </a:solidFill>
+              </a:rPr>
+              <a:t>RQ4</a:t>
+            </a:r>
+          </a:p>
+        </p:txBody>
+      </p:sp>
+      <p:sp>
+        <p:nvSpPr>
+          <p:cNvPr id="4" name="Rounded Rectangle 3"/>
+          <p:cNvSpPr/>
+          <p:nvPr/>
+        </p:nvSpPr>
+        <p:spPr>
+          <a:xfrm>
+            <a:off x="10200000" y="760000"/>
+            <a:ext cx="1450000" cy="330000"/>
+          </a:xfrm>
+          <a:prstGeom prst="roundRect">
+            <a:avLst/>
+          </a:prstGeom>
+          <a:solidFill>
+            <a:srgbClr val="787878"/>
+          </a:solidFill>
+          <a:ln>
+            <a:noFill/>
+          </a:ln>
+        </p:spPr>
+        <p:style>
+          <a:lnRef idx="1">
+            <a:schemeClr val="accent1"/>
+          </a:lnRef>
+          <a:fillRef idx="3">
+            <a:schemeClr val="accent1"/>
+          </a:fillRef>
+          <a:effectRef idx="2">
+            <a:schemeClr val="accent1"/>
+          </a:effectRef>
+          <a:fontRef idx="minor">
+            <a:schemeClr val="lt1"/>
+          </a:fontRef>
+        </p:style>
+        <p:txBody>
+          <a:bodyPr rtlCol="0" anchor="ctr" wrap="square"/>
+          <a:lstStyle/>
+          <a:p>
+            <a:pPr algn="ctr"/>
+            <a:r>
+              <a:rPr sz="1100" b="1">
+                <a:solidFill>
+                  <a:srgbClr val="FFFFFF"/>
+                </a:solidFill>
+              </a:rPr>
+              <a:t>Needed</a:t>
+            </a:r>
+          </a:p>
+        </p:txBody>
+      </p:sp>
+      <p:sp>
+        <p:nvSpPr>
+          <p:cNvPr id="5" name="TextBox 4"/>
+          <p:cNvSpPr txBox="1"/>
+          <p:nvPr/>
+        </p:nvSpPr>
+        <p:spPr>
+          <a:xfrm>
+            <a:off x="640080" y="1050000"/>
+            <a:ext cx="10972800" cy="2200000"/>
+          </a:xfrm>
+          <a:prstGeom prst="rect">
+            <a:avLst/>
+          </a:prstGeom>
+          <a:noFill/>
+        </p:spPr>
+        <p:txBody>
+          <a:bodyPr wrap="square">
+            <a:spAutoFit/>
+          </a:bodyPr>
+          <a:lstStyle/>
+          <a:p>
+            <a:pPr>
+              <a:spcAft>
+                <a:spcPts val="500"/>
+              </a:spcAft>
+            </a:pPr>
+            <a:r>
+              <a:rPr sz="1400" b="0">
+                <a:solidFill>
+                  <a:srgbClr val="212121"/>
+                </a:solidFill>
+              </a:rPr>
+              <a:t>• Four locales of about 300 m on the flow-scenario arterial, boundaries at the midpoints between anchors.</a:t>
+            </a:r>
+          </a:p>
+          <a:p>
+            <a:pPr>
+              <a:spcAft>
+                <a:spcPts val="500"/>
+              </a:spcAft>
+            </a:pPr>
+            <a:r>
+              <a:rPr sz="1400" b="0">
+                <a:solidFill>
+                  <a:srgbClr val="212121"/>
+                </a:solidFill>
+              </a:rPr>
+              <a:t>• One ego drives 1.2 km at 12 m/s through three handoffs.</a:t>
+            </a:r>
+          </a:p>
+          <a:p>
+            <a:pPr>
+              <a:spcAft>
+                <a:spcPts val="500"/>
+              </a:spcAft>
+            </a:pPr>
+            <a:r>
+              <a:rPr sz="1400" b="0">
+                <a:solidFill>
+                  <a:srgbClr val="212121"/>
+                </a:solidFill>
+              </a:rPr>
+              <a:t>• Oncoming stream of 4 and 8 vehicles per run, half connected, 2 to 4 crossings per minute per boundary.</a:t>
+            </a:r>
+          </a:p>
+          <a:p>
+            <a:pPr>
+              <a:spcAft>
+                <a:spcPts val="500"/>
+              </a:spcAft>
+            </a:pPr>
+            <a:r>
+              <a:rPr sz="1400" b="0">
+                <a:solidFill>
+                  <a:srgbClr val="212121"/>
+                </a:solidFill>
+              </a:rPr>
+              <a:t>• Conflicts at anchors 1 and 3, and between them a queue tail, a stopped vehicle with an overtake, and a merge. A platoon crosses boundary 2 together.</a:t>
+            </a:r>
+          </a:p>
+          <a:p>
+            <a:pPr>
+              <a:spcAft>
+                <a:spcPts val="500"/>
+              </a:spcAft>
+            </a:pPr>
+            <a:r>
+              <a:rPr sz="1400" b="0">
+                <a:solidFill>
+                  <a:srgbClr val="212121"/>
+                </a:solidFill>
+              </a:rPr>
+              <a:t>• Success per run means no ego collision, age at use under the limit at every decision, and 95% of handoffs warm before use.</a:t>
+            </a:r>
+          </a:p>
+        </p:txBody>
+      </p:sp>
+      <p:sp>
+        <p:nvSpPr>
+          <p:cNvPr id="6" name="Rectangle 5"/>
+          <p:cNvSpPr/>
+          <p:nvPr/>
+        </p:nvSpPr>
+        <p:spPr>
+          <a:xfrm>
+            <a:off x="600000" y="3400000"/>
+            <a:ext cx="2600000" cy="2050000"/>
+          </a:xfrm>
+          <a:prstGeom prst="rect">
+            <a:avLst/>
+          </a:prstGeom>
+          <a:solidFill>
+            <a:srgbClr val="E1E8F5"/>
+          </a:solidFill>
+          <a:ln w="15875">
+            <a:solidFill>
+              <a:srgbClr val="1B3A6B"/>
+            </a:solidFill>
+            <a:prstDash val="dash"/>
+          </a:ln>
+        </p:spPr>
+        <p:style>
+          <a:lnRef idx="1">
+            <a:schemeClr val="accent1"/>
+          </a:lnRef>
+          <a:fillRef idx="3">
+            <a:schemeClr val="accent1"/>
+          </a:fillRef>
+          <a:effectRef idx="2">
+            <a:schemeClr val="accent1"/>
+          </a:effectRef>
+          <a:fontRef idx="minor">
+            <a:schemeClr val="lt1"/>
+          </a:fontRef>
+        </p:style>
+        <p:txBody>
+          <a:bodyPr rtlCol="0" anchor="ctr"/>
+          <a:lstStyle/>
+          <a:p>
+            <a:pPr algn="ctr"/>
+          </a:p>
+        </p:txBody>
+      </p:sp>
+      <p:sp>
+        <p:nvSpPr>
+          <p:cNvPr id="7" name="TextBox 6"/>
+          <p:cNvSpPr txBox="1"/>
+          <p:nvPr/>
+        </p:nvSpPr>
+        <p:spPr>
+          <a:xfrm>
+            <a:off x="660000" y="3420000"/>
+            <a:ext cx="1500000" cy="360000"/>
+          </a:xfrm>
+          <a:prstGeom prst="rect">
+            <a:avLst/>
+          </a:prstGeom>
+          <a:noFill/>
+        </p:spPr>
+        <p:txBody>
+          <a:bodyPr wrap="square">
+            <a:spAutoFit/>
+          </a:bodyPr>
+          <a:lstStyle/>
+          <a:p>
+            <a:pPr>
+              <a:spcAft>
+                <a:spcPts val="600"/>
+              </a:spcAft>
+            </a:pPr>
+            <a:r>
+              <a:rPr sz="1200" b="1">
+                <a:solidFill>
+                  <a:srgbClr val="1B3A6B"/>
+                </a:solidFill>
+              </a:rPr>
+              <a:t>Locale A</a:t>
+            </a:r>
+          </a:p>
+        </p:txBody>
+      </p:sp>
+      <p:sp>
+        <p:nvSpPr>
+          <p:cNvPr id="8" name="Rectangle 7"/>
+          <p:cNvSpPr/>
+          <p:nvPr/>
+        </p:nvSpPr>
+        <p:spPr>
+          <a:xfrm>
+            <a:off x="1700000" y="3700000"/>
+            <a:ext cx="400000" cy="330000"/>
+          </a:xfrm>
+          <a:prstGeom prst="rect">
+            <a:avLst/>
+          </a:prstGeom>
+          <a:solidFill>
+            <a:srgbClr val="6E6E6E"/>
+          </a:solidFill>
+          <a:ln>
+            <a:noFill/>
+          </a:ln>
+        </p:spPr>
+        <p:style>
+          <a:lnRef idx="1">
+            <a:schemeClr val="accent1"/>
+          </a:lnRef>
+          <a:fillRef idx="3">
+            <a:schemeClr val="accent1"/>
+          </a:fillRef>
+          <a:effectRef idx="2">
+            <a:schemeClr val="accent1"/>
+          </a:effectRef>
+          <a:fontRef idx="minor">
+            <a:schemeClr val="lt1"/>
+          </a:fontRef>
+        </p:style>
+        <p:txBody>
+          <a:bodyPr rtlCol="0" anchor="ctr" wrap="square"/>
+          <a:lstStyle/>
+          <a:p>
+            <a:pPr algn="ctr"/>
+            <a:r>
+              <a:rPr sz="900" b="0">
+                <a:solidFill>
+                  <a:srgbClr val="FFFFFF"/>
+                </a:solidFill>
+              </a:rPr>
+              <a:t>RSU</a:t>
+            </a:r>
+          </a:p>
+        </p:txBody>
+      </p:sp>
+      <p:sp>
+        <p:nvSpPr>
+          <p:cNvPr id="9" name="Rectangle 8"/>
+          <p:cNvSpPr/>
+          <p:nvPr/>
+        </p:nvSpPr>
+        <p:spPr>
+          <a:xfrm>
+            <a:off x="1750000" y="4100000"/>
+            <a:ext cx="300000" cy="1200000"/>
+          </a:xfrm>
+          <a:prstGeom prst="rect">
+            <a:avLst/>
+          </a:prstGeom>
+          <a:solidFill>
+            <a:srgbClr val="D7D7D7"/>
+          </a:solidFill>
+          <a:ln>
+            <a:noFill/>
+          </a:ln>
+        </p:spPr>
+        <p:style>
+          <a:lnRef idx="1">
+            <a:schemeClr val="accent1"/>
+          </a:lnRef>
+          <a:fillRef idx="3">
+            <a:schemeClr val="accent1"/>
+          </a:fillRef>
+          <a:effectRef idx="2">
+            <a:schemeClr val="accent1"/>
+          </a:effectRef>
+          <a:fontRef idx="minor">
+            <a:schemeClr val="lt1"/>
+          </a:fontRef>
+        </p:style>
+        <p:txBody>
+          <a:bodyPr rtlCol="0" anchor="ctr"/>
+          <a:lstStyle/>
+          <a:p>
+            <a:pPr algn="ctr"/>
+          </a:p>
+        </p:txBody>
+      </p:sp>
+      <p:sp>
+        <p:nvSpPr>
+          <p:cNvPr id="10" name="Rectangle 9"/>
+          <p:cNvSpPr/>
+          <p:nvPr/>
+        </p:nvSpPr>
+        <p:spPr>
+          <a:xfrm>
+            <a:off x="3350000" y="3400000"/>
+            <a:ext cx="2600000" cy="2050000"/>
+          </a:xfrm>
+          <a:prstGeom prst="rect">
+            <a:avLst/>
+          </a:prstGeom>
+          <a:solidFill>
+            <a:srgbClr val="FCECD6"/>
+          </a:solidFill>
+          <a:ln w="15875">
+            <a:solidFill>
+              <a:srgbClr val="CC7814"/>
+            </a:solidFill>
+            <a:prstDash val="dash"/>
+          </a:ln>
+        </p:spPr>
+        <p:style>
+          <a:lnRef idx="1">
+            <a:schemeClr val="accent1"/>
+          </a:lnRef>
+          <a:fillRef idx="3">
+            <a:schemeClr val="accent1"/>
+          </a:fillRef>
+          <a:effectRef idx="2">
+            <a:schemeClr val="accent1"/>
+          </a:effectRef>
+          <a:fontRef idx="minor">
+            <a:schemeClr val="lt1"/>
+          </a:fontRef>
+        </p:style>
+        <p:txBody>
+          <a:bodyPr rtlCol="0" anchor="ctr"/>
+          <a:lstStyle/>
+          <a:p>
+            <a:pPr algn="ctr"/>
+          </a:p>
+        </p:txBody>
+      </p:sp>
+      <p:sp>
+        <p:nvSpPr>
+          <p:cNvPr id="11" name="TextBox 10"/>
+          <p:cNvSpPr txBox="1"/>
+          <p:nvPr/>
+        </p:nvSpPr>
+        <p:spPr>
+          <a:xfrm>
+            <a:off x="3410000" y="3420000"/>
+            <a:ext cx="1500000" cy="360000"/>
+          </a:xfrm>
+          <a:prstGeom prst="rect">
+            <a:avLst/>
+          </a:prstGeom>
+          <a:noFill/>
+        </p:spPr>
+        <p:txBody>
+          <a:bodyPr wrap="square">
+            <a:spAutoFit/>
+          </a:bodyPr>
+          <a:lstStyle/>
+          <a:p>
+            <a:pPr>
+              <a:spcAft>
+                <a:spcPts val="600"/>
+              </a:spcAft>
+            </a:pPr>
+            <a:r>
+              <a:rPr sz="1200" b="1">
+                <a:solidFill>
+                  <a:srgbClr val="CC7814"/>
+                </a:solidFill>
+              </a:rPr>
+              <a:t>Locale B</a:t>
+            </a:r>
+          </a:p>
+        </p:txBody>
+      </p:sp>
+      <p:sp>
+        <p:nvSpPr>
+          <p:cNvPr id="12" name="Rectangle 11"/>
+          <p:cNvSpPr/>
+          <p:nvPr/>
+        </p:nvSpPr>
+        <p:spPr>
+          <a:xfrm>
+            <a:off x="4450000" y="3700000"/>
+            <a:ext cx="400000" cy="330000"/>
+          </a:xfrm>
+          <a:prstGeom prst="rect">
+            <a:avLst/>
+          </a:prstGeom>
+          <a:solidFill>
+            <a:srgbClr val="6E6E6E"/>
+          </a:solidFill>
+          <a:ln>
+            <a:noFill/>
+          </a:ln>
+        </p:spPr>
+        <p:style>
+          <a:lnRef idx="1">
+            <a:schemeClr val="accent1"/>
+          </a:lnRef>
+          <a:fillRef idx="3">
+            <a:schemeClr val="accent1"/>
+          </a:fillRef>
+          <a:effectRef idx="2">
+            <a:schemeClr val="accent1"/>
+          </a:effectRef>
+          <a:fontRef idx="minor">
+            <a:schemeClr val="lt1"/>
+          </a:fontRef>
+        </p:style>
+        <p:txBody>
+          <a:bodyPr rtlCol="0" anchor="ctr" wrap="square"/>
+          <a:lstStyle/>
+          <a:p>
+            <a:pPr algn="ctr"/>
+            <a:r>
+              <a:rPr sz="900" b="0">
+                <a:solidFill>
+                  <a:srgbClr val="FFFFFF"/>
+                </a:solidFill>
+              </a:rPr>
+              <a:t>RSU</a:t>
+            </a:r>
+          </a:p>
+        </p:txBody>
+      </p:sp>
+      <p:sp>
+        <p:nvSpPr>
+          <p:cNvPr id="13" name="Rectangle 12"/>
+          <p:cNvSpPr/>
+          <p:nvPr/>
+        </p:nvSpPr>
+        <p:spPr>
+          <a:xfrm>
+            <a:off x="4500000" y="4100000"/>
+            <a:ext cx="300000" cy="1200000"/>
+          </a:xfrm>
+          <a:prstGeom prst="rect">
+            <a:avLst/>
+          </a:prstGeom>
+          <a:solidFill>
+            <a:srgbClr val="D7D7D7"/>
+          </a:solidFill>
+          <a:ln>
+            <a:noFill/>
+          </a:ln>
+        </p:spPr>
+        <p:style>
+          <a:lnRef idx="1">
+            <a:schemeClr val="accent1"/>
+          </a:lnRef>
+          <a:fillRef idx="3">
+            <a:schemeClr val="accent1"/>
+          </a:fillRef>
+          <a:effectRef idx="2">
+            <a:schemeClr val="accent1"/>
+          </a:effectRef>
+          <a:fontRef idx="minor">
+            <a:schemeClr val="lt1"/>
+          </a:fontRef>
+        </p:style>
+        <p:txBody>
+          <a:bodyPr rtlCol="0" anchor="ctr"/>
+          <a:lstStyle/>
+          <a:p>
+            <a:pPr algn="ctr"/>
+          </a:p>
+        </p:txBody>
+      </p:sp>
+      <p:sp>
+        <p:nvSpPr>
+          <p:cNvPr id="14" name="Rectangle 13"/>
+          <p:cNvSpPr/>
+          <p:nvPr/>
+        </p:nvSpPr>
+        <p:spPr>
+          <a:xfrm>
+            <a:off x="6100000" y="3400000"/>
+            <a:ext cx="2600000" cy="2050000"/>
+          </a:xfrm>
+          <a:prstGeom prst="rect">
+            <a:avLst/>
+          </a:prstGeom>
+          <a:solidFill>
+            <a:srgbClr val="E1E8F5"/>
+          </a:solidFill>
+          <a:ln w="15875">
+            <a:solidFill>
+              <a:srgbClr val="1B3A6B"/>
+            </a:solidFill>
+            <a:prstDash val="dash"/>
+          </a:ln>
+        </p:spPr>
+        <p:style>
+          <a:lnRef idx="1">
+            <a:schemeClr val="accent1"/>
+          </a:lnRef>
+          <a:fillRef idx="3">
+            <a:schemeClr val="accent1"/>
+          </a:fillRef>
+          <a:effectRef idx="2">
+            <a:schemeClr val="accent1"/>
+          </a:effectRef>
+          <a:fontRef idx="minor">
+            <a:schemeClr val="lt1"/>
+          </a:fontRef>
+        </p:style>
+        <p:txBody>
+          <a:bodyPr rtlCol="0" anchor="ctr"/>
+          <a:lstStyle/>
+          <a:p>
+            <a:pPr algn="ctr"/>
+          </a:p>
+        </p:txBody>
+      </p:sp>
+      <p:sp>
+        <p:nvSpPr>
+          <p:cNvPr id="15" name="TextBox 14"/>
+          <p:cNvSpPr txBox="1"/>
+          <p:nvPr/>
+        </p:nvSpPr>
+        <p:spPr>
+          <a:xfrm>
+            <a:off x="6160000" y="3420000"/>
+            <a:ext cx="1500000" cy="360000"/>
+          </a:xfrm>
+          <a:prstGeom prst="rect">
+            <a:avLst/>
+          </a:prstGeom>
+          <a:noFill/>
+        </p:spPr>
+        <p:txBody>
+          <a:bodyPr wrap="square">
+            <a:spAutoFit/>
+          </a:bodyPr>
+          <a:lstStyle/>
+          <a:p>
+            <a:pPr>
+              <a:spcAft>
+                <a:spcPts val="600"/>
+              </a:spcAft>
+            </a:pPr>
+            <a:r>
+              <a:rPr sz="1200" b="1">
+                <a:solidFill>
+                  <a:srgbClr val="1B3A6B"/>
+                </a:solidFill>
+              </a:rPr>
+              <a:t>Locale C</a:t>
+            </a:r>
+          </a:p>
+        </p:txBody>
+      </p:sp>
+      <p:sp>
+        <p:nvSpPr>
+          <p:cNvPr id="16" name="Rectangle 15"/>
+          <p:cNvSpPr/>
+          <p:nvPr/>
+        </p:nvSpPr>
+        <p:spPr>
+          <a:xfrm>
+            <a:off x="7200000" y="3700000"/>
+            <a:ext cx="400000" cy="330000"/>
+          </a:xfrm>
+          <a:prstGeom prst="rect">
+            <a:avLst/>
+          </a:prstGeom>
+          <a:solidFill>
+            <a:srgbClr val="6E6E6E"/>
+          </a:solidFill>
+          <a:ln>
+            <a:noFill/>
+          </a:ln>
+        </p:spPr>
+        <p:style>
+          <a:lnRef idx="1">
+            <a:schemeClr val="accent1"/>
+          </a:lnRef>
+          <a:fillRef idx="3">
+            <a:schemeClr val="accent1"/>
+          </a:fillRef>
+          <a:effectRef idx="2">
+            <a:schemeClr val="accent1"/>
+          </a:effectRef>
+          <a:fontRef idx="minor">
+            <a:schemeClr val="lt1"/>
+          </a:fontRef>
+        </p:style>
+        <p:txBody>
+          <a:bodyPr rtlCol="0" anchor="ctr" wrap="square"/>
+          <a:lstStyle/>
+          <a:p>
+            <a:pPr algn="ctr"/>
+            <a:r>
+              <a:rPr sz="900" b="0">
+                <a:solidFill>
+                  <a:srgbClr val="FFFFFF"/>
+                </a:solidFill>
+              </a:rPr>
+              <a:t>RSU</a:t>
+            </a:r>
+          </a:p>
+        </p:txBody>
+      </p:sp>
+      <p:sp>
+        <p:nvSpPr>
+          <p:cNvPr id="17" name="Rectangle 16"/>
+          <p:cNvSpPr/>
+          <p:nvPr/>
+        </p:nvSpPr>
+        <p:spPr>
+          <a:xfrm>
+            <a:off x="7250000" y="4100000"/>
+            <a:ext cx="300000" cy="1200000"/>
+          </a:xfrm>
+          <a:prstGeom prst="rect">
+            <a:avLst/>
+          </a:prstGeom>
+          <a:solidFill>
+            <a:srgbClr val="D7D7D7"/>
+          </a:solidFill>
+          <a:ln>
+            <a:noFill/>
+          </a:ln>
+        </p:spPr>
+        <p:style>
+          <a:lnRef idx="1">
+            <a:schemeClr val="accent1"/>
+          </a:lnRef>
+          <a:fillRef idx="3">
+            <a:schemeClr val="accent1"/>
+          </a:fillRef>
+          <a:effectRef idx="2">
+            <a:schemeClr val="accent1"/>
+          </a:effectRef>
+          <a:fontRef idx="minor">
+            <a:schemeClr val="lt1"/>
+          </a:fontRef>
+        </p:style>
+        <p:txBody>
+          <a:bodyPr rtlCol="0" anchor="ctr"/>
+          <a:lstStyle/>
+          <a:p>
+            <a:pPr algn="ctr"/>
+          </a:p>
+        </p:txBody>
+      </p:sp>
+      <p:sp>
+        <p:nvSpPr>
+          <p:cNvPr id="18" name="Rectangle 17"/>
+          <p:cNvSpPr/>
+          <p:nvPr/>
+        </p:nvSpPr>
+        <p:spPr>
+          <a:xfrm>
+            <a:off x="8850000" y="3400000"/>
+            <a:ext cx="2600000" cy="2050000"/>
+          </a:xfrm>
+          <a:prstGeom prst="rect">
+            <a:avLst/>
+          </a:prstGeom>
+          <a:solidFill>
+            <a:srgbClr val="FCECD6"/>
+          </a:solidFill>
+          <a:ln w="15875">
+            <a:solidFill>
+              <a:srgbClr val="CC7814"/>
+            </a:solidFill>
+            <a:prstDash val="dash"/>
+          </a:ln>
+        </p:spPr>
+        <p:style>
+          <a:lnRef idx="1">
+            <a:schemeClr val="accent1"/>
+          </a:lnRef>
+          <a:fillRef idx="3">
+            <a:schemeClr val="accent1"/>
+          </a:fillRef>
+          <a:effectRef idx="2">
+            <a:schemeClr val="accent1"/>
+          </a:effectRef>
+          <a:fontRef idx="minor">
+            <a:schemeClr val="lt1"/>
+          </a:fontRef>
+        </p:style>
+        <p:txBody>
+          <a:bodyPr rtlCol="0" anchor="ctr"/>
+          <a:lstStyle/>
+          <a:p>
+            <a:pPr algn="ctr"/>
+          </a:p>
+        </p:txBody>
+      </p:sp>
+      <p:sp>
+        <p:nvSpPr>
+          <p:cNvPr id="19" name="TextBox 18"/>
+          <p:cNvSpPr txBox="1"/>
+          <p:nvPr/>
+        </p:nvSpPr>
+        <p:spPr>
+          <a:xfrm>
+            <a:off x="8910000" y="3420000"/>
+            <a:ext cx="1500000" cy="360000"/>
+          </a:xfrm>
+          <a:prstGeom prst="rect">
+            <a:avLst/>
+          </a:prstGeom>
+          <a:noFill/>
+        </p:spPr>
+        <p:txBody>
+          <a:bodyPr wrap="square">
+            <a:spAutoFit/>
+          </a:bodyPr>
+          <a:lstStyle/>
+          <a:p>
+            <a:pPr>
+              <a:spcAft>
+                <a:spcPts val="600"/>
+              </a:spcAft>
+            </a:pPr>
+            <a:r>
+              <a:rPr sz="1200" b="1">
+                <a:solidFill>
+                  <a:srgbClr val="CC7814"/>
+                </a:solidFill>
+              </a:rPr>
+              <a:t>Locale D</a:t>
+            </a:r>
+          </a:p>
+        </p:txBody>
+      </p:sp>
+      <p:sp>
+        <p:nvSpPr>
+          <p:cNvPr id="20" name="Rectangle 19"/>
+          <p:cNvSpPr/>
+          <p:nvPr/>
+        </p:nvSpPr>
+        <p:spPr>
+          <a:xfrm>
+            <a:off x="9950000" y="3700000"/>
+            <a:ext cx="400000" cy="330000"/>
+          </a:xfrm>
+          <a:prstGeom prst="rect">
+            <a:avLst/>
+          </a:prstGeom>
+          <a:solidFill>
+            <a:srgbClr val="6E6E6E"/>
+          </a:solidFill>
+          <a:ln>
+            <a:noFill/>
+          </a:ln>
+        </p:spPr>
+        <p:style>
+          <a:lnRef idx="1">
+            <a:schemeClr val="accent1"/>
+          </a:lnRef>
+          <a:fillRef idx="3">
+            <a:schemeClr val="accent1"/>
+          </a:fillRef>
+          <a:effectRef idx="2">
+            <a:schemeClr val="accent1"/>
+          </a:effectRef>
+          <a:fontRef idx="minor">
+            <a:schemeClr val="lt1"/>
+          </a:fontRef>
+        </p:style>
+        <p:txBody>
+          <a:bodyPr rtlCol="0" anchor="ctr" wrap="square"/>
+          <a:lstStyle/>
+          <a:p>
+            <a:pPr algn="ctr"/>
+            <a:r>
+              <a:rPr sz="900" b="0">
+                <a:solidFill>
+                  <a:srgbClr val="FFFFFF"/>
+                </a:solidFill>
+              </a:rPr>
+              <a:t>RSU</a:t>
+            </a:r>
+          </a:p>
+        </p:txBody>
+      </p:sp>
+      <p:sp>
+        <p:nvSpPr>
+          <p:cNvPr id="21" name="Rectangle 20"/>
+          <p:cNvSpPr/>
+          <p:nvPr/>
+        </p:nvSpPr>
+        <p:spPr>
+          <a:xfrm>
+            <a:off x="10000000" y="4100000"/>
+            <a:ext cx="300000" cy="1200000"/>
+          </a:xfrm>
+          <a:prstGeom prst="rect">
+            <a:avLst/>
+          </a:prstGeom>
+          <a:solidFill>
+            <a:srgbClr val="D7D7D7"/>
+          </a:solidFill>
+          <a:ln>
+            <a:noFill/>
+          </a:ln>
+        </p:spPr>
+        <p:style>
+          <a:lnRef idx="1">
+            <a:schemeClr val="accent1"/>
+          </a:lnRef>
+          <a:fillRef idx="3">
+            <a:schemeClr val="accent1"/>
+          </a:fillRef>
+          <a:effectRef idx="2">
+            <a:schemeClr val="accent1"/>
+          </a:effectRef>
+          <a:fontRef idx="minor">
+            <a:schemeClr val="lt1"/>
+          </a:fontRef>
+        </p:style>
+        <p:txBody>
+          <a:bodyPr rtlCol="0" anchor="ctr"/>
+          <a:lstStyle/>
+          <a:p>
+            <a:pPr algn="ctr"/>
+          </a:p>
+        </p:txBody>
+      </p:sp>
+      <p:sp>
+        <p:nvSpPr>
+          <p:cNvPr id="22" name="Rectangle 21"/>
+          <p:cNvSpPr/>
+          <p:nvPr/>
+        </p:nvSpPr>
+        <p:spPr>
+          <a:xfrm>
+            <a:off x="700000" y="4500000"/>
+            <a:ext cx="10800000" cy="340000"/>
+          </a:xfrm>
+          <a:prstGeom prst="rect">
+            <a:avLst/>
+          </a:prstGeom>
+          <a:solidFill>
+            <a:srgbClr val="C8C8C8"/>
+          </a:solidFill>
+          <a:ln>
+            <a:noFill/>
+          </a:ln>
+        </p:spPr>
+        <p:style>
+          <a:lnRef idx="1">
+            <a:schemeClr val="accent1"/>
+          </a:lnRef>
+          <a:fillRef idx="3">
+            <a:schemeClr val="accent1"/>
+          </a:fillRef>
+          <a:effectRef idx="2">
+            <a:schemeClr val="accent1"/>
+          </a:effectRef>
+          <a:fontRef idx="minor">
+            <a:schemeClr val="lt1"/>
+          </a:fontRef>
+        </p:style>
+        <p:txBody>
+          <a:bodyPr rtlCol="0" anchor="ctr"/>
+          <a:lstStyle/>
+          <a:p>
+            <a:pPr algn="ctr"/>
+          </a:p>
+        </p:txBody>
+      </p:sp>
+      <p:sp>
+        <p:nvSpPr>
+          <p:cNvPr id="23" name="Rectangle 22"/>
+          <p:cNvSpPr/>
+          <p:nvPr/>
+        </p:nvSpPr>
+        <p:spPr>
+          <a:xfrm>
+            <a:off x="3275000" y="3320000"/>
+            <a:ext cx="20000" cy="2210000"/>
+          </a:xfrm>
+          <a:prstGeom prst="rect">
+            <a:avLst/>
+          </a:prstGeom>
+          <a:solidFill>
+            <a:srgbClr val="C0392B"/>
+          </a:solidFill>
+          <a:ln>
+            <a:noFill/>
+          </a:ln>
+        </p:spPr>
+        <p:style>
+          <a:lnRef idx="1">
+            <a:schemeClr val="accent1"/>
+          </a:lnRef>
+          <a:fillRef idx="3">
+            <a:schemeClr val="accent1"/>
+          </a:fillRef>
+          <a:effectRef idx="2">
+            <a:schemeClr val="accent1"/>
+          </a:effectRef>
+          <a:fontRef idx="minor">
+            <a:schemeClr val="lt1"/>
+          </a:fontRef>
+        </p:style>
+        <p:txBody>
+          <a:bodyPr rtlCol="0" anchor="ctr"/>
+          <a:lstStyle/>
+          <a:p>
+            <a:pPr algn="ctr"/>
+          </a:p>
+        </p:txBody>
+      </p:sp>
+      <p:sp>
+        <p:nvSpPr>
+          <p:cNvPr id="24" name="Rectangle 23"/>
+          <p:cNvSpPr/>
+          <p:nvPr/>
+        </p:nvSpPr>
+        <p:spPr>
+          <a:xfrm>
+            <a:off x="6025000" y="3320000"/>
+            <a:ext cx="20000" cy="2210000"/>
+          </a:xfrm>
+          <a:prstGeom prst="rect">
+            <a:avLst/>
+          </a:prstGeom>
+          <a:solidFill>
+            <a:srgbClr val="C0392B"/>
+          </a:solidFill>
+          <a:ln>
+            <a:noFill/>
+          </a:ln>
+        </p:spPr>
+        <p:style>
+          <a:lnRef idx="1">
+            <a:schemeClr val="accent1"/>
+          </a:lnRef>
+          <a:fillRef idx="3">
+            <a:schemeClr val="accent1"/>
+          </a:fillRef>
+          <a:effectRef idx="2">
+            <a:schemeClr val="accent1"/>
+          </a:effectRef>
+          <a:fontRef idx="minor">
+            <a:schemeClr val="lt1"/>
+          </a:fontRef>
+        </p:style>
+        <p:txBody>
+          <a:bodyPr rtlCol="0" anchor="ctr"/>
+          <a:lstStyle/>
+          <a:p>
+            <a:pPr algn="ctr"/>
+          </a:p>
+        </p:txBody>
+      </p:sp>
+      <p:sp>
+        <p:nvSpPr>
+          <p:cNvPr id="25" name="Rectangle 24"/>
+          <p:cNvSpPr/>
+          <p:nvPr/>
+        </p:nvSpPr>
+        <p:spPr>
+          <a:xfrm>
+            <a:off x="8775000" y="3320000"/>
+            <a:ext cx="20000" cy="2210000"/>
+          </a:xfrm>
+          <a:prstGeom prst="rect">
+            <a:avLst/>
+          </a:prstGeom>
+          <a:solidFill>
+            <a:srgbClr val="C0392B"/>
+          </a:solidFill>
+          <a:ln>
+            <a:noFill/>
+          </a:ln>
+        </p:spPr>
+        <p:style>
+          <a:lnRef idx="1">
+            <a:schemeClr val="accent1"/>
+          </a:lnRef>
+          <a:fillRef idx="3">
+            <a:schemeClr val="accent1"/>
+          </a:fillRef>
+          <a:effectRef idx="2">
+            <a:schemeClr val="accent1"/>
+          </a:effectRef>
+          <a:fontRef idx="minor">
+            <a:schemeClr val="lt1"/>
+          </a:fontRef>
+        </p:style>
+        <p:txBody>
+          <a:bodyPr rtlCol="0" anchor="ctr"/>
+          <a:lstStyle/>
+          <a:p>
+            <a:pPr algn="ctr"/>
+          </a:p>
+        </p:txBody>
+      </p:sp>
+      <p:sp>
+        <p:nvSpPr>
+          <p:cNvPr id="26" name="Oval 25"/>
+          <p:cNvSpPr/>
+          <p:nvPr/>
+        </p:nvSpPr>
+        <p:spPr>
+          <a:xfrm>
+            <a:off x="1600000" y="4540000"/>
+            <a:ext cx="260000" cy="260000"/>
+          </a:xfrm>
+          <a:prstGeom prst="ellipse">
+            <a:avLst/>
+          </a:prstGeom>
+          <a:solidFill>
+            <a:srgbClr val="C0392B"/>
+          </a:solidFill>
+          <a:ln>
+            <a:noFill/>
+          </a:ln>
+        </p:spPr>
+        <p:style>
+          <a:lnRef idx="1">
+            <a:schemeClr val="accent1"/>
+          </a:lnRef>
+          <a:fillRef idx="3">
+            <a:schemeClr val="accent1"/>
+          </a:fillRef>
+          <a:effectRef idx="2">
+            <a:schemeClr val="accent1"/>
+          </a:effectRef>
+          <a:fontRef idx="minor">
+            <a:schemeClr val="lt1"/>
+          </a:fontRef>
+        </p:style>
+        <p:txBody>
+          <a:bodyPr rtlCol="0" anchor="ctr" wrap="square"/>
+          <a:lstStyle/>
+          <a:p>
+            <a:pPr algn="ctr"/>
+            <a:r>
+              <a:rPr sz="900" b="1">
+                <a:solidFill>
+                  <a:srgbClr val="FFFFFF"/>
+                </a:solidFill>
+              </a:rPr>
+              <a:t>x</a:t>
+            </a:r>
+          </a:p>
+        </p:txBody>
+      </p:sp>
+      <p:sp>
+        <p:nvSpPr>
+          <p:cNvPr id="27" name="TextBox 26"/>
+          <p:cNvSpPr txBox="1"/>
+          <p:nvPr/>
+        </p:nvSpPr>
+        <p:spPr>
+          <a:xfrm>
+            <a:off x="1220000" y="4840000"/>
+            <a:ext cx="1100000" cy="300000"/>
+          </a:xfrm>
+          <a:prstGeom prst="rect">
+            <a:avLst/>
+          </a:prstGeom>
+          <a:noFill/>
+        </p:spPr>
+        <p:txBody>
+          <a:bodyPr wrap="square">
+            <a:spAutoFit/>
+          </a:bodyPr>
+          <a:lstStyle/>
+          <a:p>
+            <a:pPr algn="ctr">
+              <a:spcAft>
+                <a:spcPts val="600"/>
+              </a:spcAft>
+            </a:pPr>
+            <a:r>
+              <a:rPr sz="900" b="0">
+                <a:solidFill>
+                  <a:srgbClr val="C0392B"/>
+                </a:solidFill>
+              </a:rPr>
+              <a:t>crossing path</a:t>
+            </a:r>
+          </a:p>
+        </p:txBody>
+      </p:sp>
+      <p:sp>
+        <p:nvSpPr>
+          <p:cNvPr id="28" name="Oval 27"/>
+          <p:cNvSpPr/>
+          <p:nvPr/>
+        </p:nvSpPr>
+        <p:spPr>
+          <a:xfrm>
+            <a:off x="3450000" y="4540000"/>
+            <a:ext cx="260000" cy="260000"/>
+          </a:xfrm>
+          <a:prstGeom prst="ellipse">
+            <a:avLst/>
+          </a:prstGeom>
+          <a:solidFill>
+            <a:srgbClr val="C0392B"/>
+          </a:solidFill>
+          <a:ln>
+            <a:noFill/>
+          </a:ln>
+        </p:spPr>
+        <p:style>
+          <a:lnRef idx="1">
+            <a:schemeClr val="accent1"/>
+          </a:lnRef>
+          <a:fillRef idx="3">
+            <a:schemeClr val="accent1"/>
+          </a:fillRef>
+          <a:effectRef idx="2">
+            <a:schemeClr val="accent1"/>
+          </a:effectRef>
+          <a:fontRef idx="minor">
+            <a:schemeClr val="lt1"/>
+          </a:fontRef>
+        </p:style>
+        <p:txBody>
+          <a:bodyPr rtlCol="0" anchor="ctr" wrap="square"/>
+          <a:lstStyle/>
+          <a:p>
+            <a:pPr algn="ctr"/>
+            <a:r>
+              <a:rPr sz="900" b="1">
+                <a:solidFill>
+                  <a:srgbClr val="FFFFFF"/>
+                </a:solidFill>
+              </a:rPr>
+              <a:t>x</a:t>
+            </a:r>
+          </a:p>
+        </p:txBody>
+      </p:sp>
+      <p:sp>
+        <p:nvSpPr>
+          <p:cNvPr id="29" name="TextBox 28"/>
+          <p:cNvSpPr txBox="1"/>
+          <p:nvPr/>
+        </p:nvSpPr>
+        <p:spPr>
+          <a:xfrm>
+            <a:off x="3070000" y="4840000"/>
+            <a:ext cx="1100000" cy="300000"/>
+          </a:xfrm>
+          <a:prstGeom prst="rect">
+            <a:avLst/>
+          </a:prstGeom>
+          <a:noFill/>
+        </p:spPr>
+        <p:txBody>
+          <a:bodyPr wrap="square">
+            <a:spAutoFit/>
+          </a:bodyPr>
+          <a:lstStyle/>
+          <a:p>
+            <a:pPr algn="ctr">
+              <a:spcAft>
+                <a:spcPts val="600"/>
+              </a:spcAft>
+            </a:pPr>
+            <a:r>
+              <a:rPr sz="900" b="0">
+                <a:solidFill>
+                  <a:srgbClr val="C0392B"/>
+                </a:solidFill>
+              </a:rPr>
+              <a:t>queue tail</a:t>
+            </a:r>
+          </a:p>
+        </p:txBody>
+      </p:sp>
+      <p:sp>
+        <p:nvSpPr>
+          <p:cNvPr id="30" name="Oval 29"/>
+          <p:cNvSpPr/>
+          <p:nvPr/>
+        </p:nvSpPr>
+        <p:spPr>
+          <a:xfrm>
+            <a:off x="6200000" y="4540000"/>
+            <a:ext cx="260000" cy="260000"/>
+          </a:xfrm>
+          <a:prstGeom prst="ellipse">
+            <a:avLst/>
+          </a:prstGeom>
+          <a:solidFill>
+            <a:srgbClr val="C0392B"/>
+          </a:solidFill>
+          <a:ln>
+            <a:noFill/>
+          </a:ln>
+        </p:spPr>
+        <p:style>
+          <a:lnRef idx="1">
+            <a:schemeClr val="accent1"/>
+          </a:lnRef>
+          <a:fillRef idx="3">
+            <a:schemeClr val="accent1"/>
+          </a:fillRef>
+          <a:effectRef idx="2">
+            <a:schemeClr val="accent1"/>
+          </a:effectRef>
+          <a:fontRef idx="minor">
+            <a:schemeClr val="lt1"/>
+          </a:fontRef>
+        </p:style>
+        <p:txBody>
+          <a:bodyPr rtlCol="0" anchor="ctr" wrap="square"/>
+          <a:lstStyle/>
+          <a:p>
+            <a:pPr algn="ctr"/>
+            <a:r>
+              <a:rPr sz="900" b="1">
+                <a:solidFill>
+                  <a:srgbClr val="FFFFFF"/>
+                </a:solidFill>
+              </a:rPr>
+              <a:t>x</a:t>
+            </a:r>
+          </a:p>
+        </p:txBody>
+      </p:sp>
+      <p:sp>
+        <p:nvSpPr>
+          <p:cNvPr id="31" name="TextBox 30"/>
+          <p:cNvSpPr txBox="1"/>
+          <p:nvPr/>
+        </p:nvSpPr>
+        <p:spPr>
+          <a:xfrm>
+            <a:off x="5820000" y="4840000"/>
+            <a:ext cx="1100000" cy="300000"/>
+          </a:xfrm>
+          <a:prstGeom prst="rect">
+            <a:avLst/>
+          </a:prstGeom>
+          <a:noFill/>
+        </p:spPr>
+        <p:txBody>
+          <a:bodyPr wrap="square">
+            <a:spAutoFit/>
+          </a:bodyPr>
+          <a:lstStyle/>
+          <a:p>
+            <a:pPr algn="ctr">
+              <a:spcAft>
+                <a:spcPts val="600"/>
+              </a:spcAft>
+            </a:pPr>
+            <a:r>
+              <a:rPr sz="900" b="0">
+                <a:solidFill>
+                  <a:srgbClr val="C0392B"/>
+                </a:solidFill>
+              </a:rPr>
+              <a:t>overtake</a:t>
+            </a:r>
+          </a:p>
+        </p:txBody>
+      </p:sp>
+      <p:sp>
+        <p:nvSpPr>
+          <p:cNvPr id="32" name="Oval 31"/>
+          <p:cNvSpPr/>
+          <p:nvPr/>
+        </p:nvSpPr>
+        <p:spPr>
+          <a:xfrm>
+            <a:off x="7000000" y="4540000"/>
+            <a:ext cx="260000" cy="260000"/>
+          </a:xfrm>
+          <a:prstGeom prst="ellipse">
+            <a:avLst/>
+          </a:prstGeom>
+          <a:solidFill>
+            <a:srgbClr val="C0392B"/>
+          </a:solidFill>
+          <a:ln>
+            <a:noFill/>
+          </a:ln>
+        </p:spPr>
+        <p:style>
+          <a:lnRef idx="1">
+            <a:schemeClr val="accent1"/>
+          </a:lnRef>
+          <a:fillRef idx="3">
+            <a:schemeClr val="accent1"/>
+          </a:fillRef>
+          <a:effectRef idx="2">
+            <a:schemeClr val="accent1"/>
+          </a:effectRef>
+          <a:fontRef idx="minor">
+            <a:schemeClr val="lt1"/>
+          </a:fontRef>
+        </p:style>
+        <p:txBody>
+          <a:bodyPr rtlCol="0" anchor="ctr" wrap="square"/>
+          <a:lstStyle/>
+          <a:p>
+            <a:pPr algn="ctr"/>
+            <a:r>
+              <a:rPr sz="900" b="1">
+                <a:solidFill>
+                  <a:srgbClr val="FFFFFF"/>
+                </a:solidFill>
+              </a:rPr>
+              <a:t>x</a:t>
+            </a:r>
+          </a:p>
+        </p:txBody>
+      </p:sp>
+      <p:sp>
+        <p:nvSpPr>
+          <p:cNvPr id="33" name="TextBox 32"/>
+          <p:cNvSpPr txBox="1"/>
+          <p:nvPr/>
+        </p:nvSpPr>
+        <p:spPr>
+          <a:xfrm>
+            <a:off x="6620000" y="4840000"/>
+            <a:ext cx="1100000" cy="300000"/>
+          </a:xfrm>
+          <a:prstGeom prst="rect">
+            <a:avLst/>
+          </a:prstGeom>
+          <a:noFill/>
+        </p:spPr>
+        <p:txBody>
+          <a:bodyPr wrap="square">
+            <a:spAutoFit/>
+          </a:bodyPr>
+          <a:lstStyle/>
+          <a:p>
+            <a:pPr algn="ctr">
+              <a:spcAft>
+                <a:spcPts val="600"/>
+              </a:spcAft>
+            </a:pPr>
+            <a:r>
+              <a:rPr sz="900" b="0">
+                <a:solidFill>
+                  <a:srgbClr val="C0392B"/>
+                </a:solidFill>
+              </a:rPr>
+              <a:t>crossing path</a:t>
+            </a:r>
+          </a:p>
+        </p:txBody>
+      </p:sp>
+      <p:sp>
+        <p:nvSpPr>
+          <p:cNvPr id="34" name="Oval 33"/>
+          <p:cNvSpPr/>
+          <p:nvPr/>
+        </p:nvSpPr>
+        <p:spPr>
+          <a:xfrm>
+            <a:off x="9000000" y="4540000"/>
+            <a:ext cx="260000" cy="260000"/>
+          </a:xfrm>
+          <a:prstGeom prst="ellipse">
+            <a:avLst/>
+          </a:prstGeom>
+          <a:solidFill>
+            <a:srgbClr val="C0392B"/>
+          </a:solidFill>
+          <a:ln>
+            <a:noFill/>
+          </a:ln>
+        </p:spPr>
+        <p:style>
+          <a:lnRef idx="1">
+            <a:schemeClr val="accent1"/>
+          </a:lnRef>
+          <a:fillRef idx="3">
+            <a:schemeClr val="accent1"/>
+          </a:fillRef>
+          <a:effectRef idx="2">
+            <a:schemeClr val="accent1"/>
+          </a:effectRef>
+          <a:fontRef idx="minor">
+            <a:schemeClr val="lt1"/>
+          </a:fontRef>
+        </p:style>
+        <p:txBody>
+          <a:bodyPr rtlCol="0" anchor="ctr" wrap="square"/>
+          <a:lstStyle/>
+          <a:p>
+            <a:pPr algn="ctr"/>
+            <a:r>
+              <a:rPr sz="900" b="1">
+                <a:solidFill>
+                  <a:srgbClr val="FFFFFF"/>
+                </a:solidFill>
+              </a:rPr>
+              <a:t>x</a:t>
+            </a:r>
+          </a:p>
+        </p:txBody>
+      </p:sp>
+      <p:sp>
+        <p:nvSpPr>
+          <p:cNvPr id="35" name="TextBox 34"/>
+          <p:cNvSpPr txBox="1"/>
+          <p:nvPr/>
+        </p:nvSpPr>
+        <p:spPr>
+          <a:xfrm>
+            <a:off x="8620000" y="4840000"/>
+            <a:ext cx="1100000" cy="300000"/>
+          </a:xfrm>
+          <a:prstGeom prst="rect">
+            <a:avLst/>
+          </a:prstGeom>
+          <a:noFill/>
+        </p:spPr>
+        <p:txBody>
+          <a:bodyPr wrap="square">
+            <a:spAutoFit/>
+          </a:bodyPr>
+          <a:lstStyle/>
+          <a:p>
+            <a:pPr algn="ctr">
+              <a:spcAft>
+                <a:spcPts val="600"/>
+              </a:spcAft>
+            </a:pPr>
+            <a:r>
+              <a:rPr sz="900" b="0">
+                <a:solidFill>
+                  <a:srgbClr val="C0392B"/>
+                </a:solidFill>
+              </a:rPr>
+              <a:t>stopped vehicle</a:t>
+            </a:r>
+          </a:p>
+        </p:txBody>
+      </p:sp>
+      <p:sp>
+        <p:nvSpPr>
+          <p:cNvPr id="36" name="Oval 35"/>
+          <p:cNvSpPr/>
+          <p:nvPr/>
+        </p:nvSpPr>
+        <p:spPr>
+          <a:xfrm>
+            <a:off x="10400000" y="4540000"/>
+            <a:ext cx="260000" cy="260000"/>
+          </a:xfrm>
+          <a:prstGeom prst="ellipse">
+            <a:avLst/>
+          </a:prstGeom>
+          <a:solidFill>
+            <a:srgbClr val="C0392B"/>
+          </a:solidFill>
+          <a:ln>
+            <a:noFill/>
+          </a:ln>
+        </p:spPr>
+        <p:style>
+          <a:lnRef idx="1">
+            <a:schemeClr val="accent1"/>
+          </a:lnRef>
+          <a:fillRef idx="3">
+            <a:schemeClr val="accent1"/>
+          </a:fillRef>
+          <a:effectRef idx="2">
+            <a:schemeClr val="accent1"/>
+          </a:effectRef>
+          <a:fontRef idx="minor">
+            <a:schemeClr val="lt1"/>
+          </a:fontRef>
+        </p:style>
+        <p:txBody>
+          <a:bodyPr rtlCol="0" anchor="ctr" wrap="square"/>
+          <a:lstStyle/>
+          <a:p>
+            <a:pPr algn="ctr"/>
+            <a:r>
+              <a:rPr sz="900" b="1">
+                <a:solidFill>
+                  <a:srgbClr val="FFFFFF"/>
+                </a:solidFill>
+              </a:rPr>
+              <a:t>x</a:t>
+            </a:r>
+          </a:p>
+        </p:txBody>
+      </p:sp>
+      <p:sp>
+        <p:nvSpPr>
+          <p:cNvPr id="37" name="TextBox 36"/>
+          <p:cNvSpPr txBox="1"/>
+          <p:nvPr/>
+        </p:nvSpPr>
+        <p:spPr>
+          <a:xfrm>
+            <a:off x="10020000" y="4840000"/>
+            <a:ext cx="1100000" cy="300000"/>
+          </a:xfrm>
+          <a:prstGeom prst="rect">
+            <a:avLst/>
+          </a:prstGeom>
+          <a:noFill/>
+        </p:spPr>
+        <p:txBody>
+          <a:bodyPr wrap="square">
+            <a:spAutoFit/>
+          </a:bodyPr>
+          <a:lstStyle/>
+          <a:p>
+            <a:pPr algn="ctr">
+              <a:spcAft>
+                <a:spcPts val="600"/>
+              </a:spcAft>
+            </a:pPr>
+            <a:r>
+              <a:rPr sz="900" b="0">
+                <a:solidFill>
+                  <a:srgbClr val="C0392B"/>
+                </a:solidFill>
+              </a:rPr>
+              <a:t>merge</a:t>
+            </a:r>
+          </a:p>
+        </p:txBody>
+      </p:sp>
+      <p:sp>
+        <p:nvSpPr>
+          <p:cNvPr id="38" name="Right Arrow 37"/>
+          <p:cNvSpPr/>
+          <p:nvPr/>
+        </p:nvSpPr>
+        <p:spPr>
+          <a:xfrm>
+            <a:off x="800000" y="5160000"/>
+            <a:ext cx="10500000" cy="230000"/>
+          </a:xfrm>
+          <a:prstGeom prst="rightArrow">
+            <a:avLst/>
+          </a:prstGeom>
+          <a:solidFill>
+            <a:srgbClr val="1B3A6B"/>
+          </a:solidFill>
+          <a:ln>
+            <a:noFill/>
+          </a:ln>
+        </p:spPr>
+        <p:style>
+          <a:lnRef idx="1">
+            <a:schemeClr val="accent1"/>
+          </a:lnRef>
+          <a:fillRef idx="3">
+            <a:schemeClr val="accent1"/>
+          </a:fillRef>
+          <a:effectRef idx="2">
+            <a:schemeClr val="accent1"/>
+          </a:effectRef>
+          <a:fontRef idx="minor">
+            <a:schemeClr val="lt1"/>
+          </a:fontRef>
+        </p:style>
+        <p:txBody>
+          <a:bodyPr rtlCol="0" anchor="ctr"/>
+          <a:lstStyle/>
+          <a:p>
+            <a:pPr algn="ctr"/>
+            <a:r>
+              <a:rPr sz="1000" b="1">
+                <a:solidFill>
+                  <a:srgbClr val="FFFFFF"/>
+                </a:solidFill>
+              </a:rPr>
+              <a:t>ego route, three handoffs, actors crossing independently and several at once</a:t>
+            </a:r>
+          </a:p>
+        </p:txBody>
+      </p:sp>
+      <p:sp>
+        <p:nvSpPr>
+          <p:cNvPr id="39" name="TextBox 38"/>
+          <p:cNvSpPr txBox="1"/>
+          <p:nvPr/>
+        </p:nvSpPr>
+        <p:spPr>
+          <a:xfrm>
+            <a:off x="640080" y="6263640"/>
+            <a:ext cx="10972800" cy="457200"/>
+          </a:xfrm>
+          <a:prstGeom prst="rect">
+            <a:avLst/>
+          </a:prstGeom>
+          <a:noFill/>
+        </p:spPr>
+        <p:txBody>
+          <a:bodyPr wrap="square">
+            <a:spAutoFit/>
+          </a:bodyPr>
+          <a:lstStyle/>
+          <a:p>
+            <a:pPr>
+              <a:spcAft>
+                <a:spcPts val="600"/>
+              </a:spcAft>
+            </a:pPr>
+            <a:r>
+              <a:rPr sz="1200" b="0">
+                <a:solidFill>
+                  <a:srgbClr val="B3A369"/>
+                </a:solidFill>
+              </a:rPr>
+              <a:t>A cooperative-prediction service operating across a sequence of locales  ·  Missing: build (T13), go/no-go on a 3-locale smoke by Sep 9</a:t>
+            </a:r>
+          </a:p>
+        </p:txBody>
+      </p:sp>
+    </p:spTree>
+  </p:cSld>
+  <p:clrMapOvr>
+    <a:masterClrMapping/>
+  </p:clrMapOvr>
+</p:sld>
+</file>
+
+<file path=ppt/slides/slide18.xml><?xml version="1.0" encoding="utf-8"?>
+<p:sld xmlns:a="http://schemas.openxmlformats.org/drawingml/2006/main" xmlns:p="http://schemas.openxmlformats.org/presentationml/2006/main" xmlns:r="http://schemas.openxmlformats.org/officeDocument/2006/relationships">
+  <p:cSld>
+    <p:spTree>
+      <p:nvGrpSpPr>
+        <p:cNvPr id="1" name=""/>
+        <p:cNvGrpSpPr/>
+        <p:nvPr/>
+      </p:nvGrpSpPr>
+      <p:grpSpPr/>
+      <p:sp>
+        <p:nvSpPr>
+          <p:cNvPr id="2" name="TextBox 1"/>
+          <p:cNvSpPr txBox="1"/>
+          <p:nvPr/>
+        </p:nvSpPr>
+        <p:spPr>
+          <a:xfrm>
+            <a:off x="548640" y="256032"/>
+            <a:ext cx="9600000" cy="777240"/>
+          </a:xfrm>
+          <a:prstGeom prst="rect">
+            <a:avLst/>
+          </a:prstGeom>
+          <a:noFill/>
+        </p:spPr>
+        <p:txBody>
+          <a:bodyPr wrap="square">
+            <a:spAutoFit/>
+          </a:bodyPr>
+          <a:lstStyle/>
+          <a:p>
+            <a:pPr>
+              <a:spcAft>
+                <a:spcPts val="600"/>
+              </a:spcAft>
+            </a:pPr>
+            <a:r>
+              <a:rPr sz="2800" b="1">
+                <a:solidFill>
+                  <a:srgbClr val="1B3A6B"/>
+                </a:solidFill>
+              </a:rPr>
+              <a:t>Is prediction usable across repeated locale handoffs?</a:t>
+            </a:r>
+          </a:p>
+        </p:txBody>
+      </p:sp>
+      <p:sp>
+        <p:nvSpPr>
+          <p:cNvPr id="3" name="TextBox 2"/>
+          <p:cNvSpPr txBox="1"/>
+          <p:nvPr/>
+        </p:nvSpPr>
+        <p:spPr>
+          <a:xfrm>
+            <a:off x="10200000" y="292608"/>
+            <a:ext cx="1700000" cy="457200"/>
+          </a:xfrm>
+          <a:prstGeom prst="rect">
+            <a:avLst/>
+          </a:prstGeom>
+          <a:noFill/>
+        </p:spPr>
+        <p:txBody>
+          <a:bodyPr wrap="square">
+            <a:spAutoFit/>
+          </a:bodyPr>
+          <a:lstStyle/>
+          <a:p>
+            <a:pPr algn="r">
+              <a:spcAft>
+                <a:spcPts val="600"/>
+              </a:spcAft>
+            </a:pPr>
+            <a:r>
+              <a:rPr sz="1300" b="1">
+                <a:solidFill>
+                  <a:srgbClr val="B3A369"/>
+                </a:solidFill>
+              </a:rPr>
+              <a:t>RQ4</a:t>
+            </a:r>
+          </a:p>
+        </p:txBody>
+      </p:sp>
+      <p:sp>
+        <p:nvSpPr>
+          <p:cNvPr id="4" name="Rounded Rectangle 3"/>
+          <p:cNvSpPr/>
+          <p:nvPr/>
+        </p:nvSpPr>
+        <p:spPr>
+          <a:xfrm>
+            <a:off x="10200000" y="760000"/>
+            <a:ext cx="1450000" cy="330000"/>
+          </a:xfrm>
+          <a:prstGeom prst="roundRect">
+            <a:avLst/>
+          </a:prstGeom>
+          <a:solidFill>
+            <a:srgbClr val="787878"/>
+          </a:solidFill>
+          <a:ln>
+            <a:noFill/>
+          </a:ln>
+        </p:spPr>
+        <p:style>
+          <a:lnRef idx="1">
+            <a:schemeClr val="accent1"/>
+          </a:lnRef>
+          <a:fillRef idx="3">
+            <a:schemeClr val="accent1"/>
+          </a:fillRef>
+          <a:effectRef idx="2">
+            <a:schemeClr val="accent1"/>
+          </a:effectRef>
+          <a:fontRef idx="minor">
+            <a:schemeClr val="lt1"/>
+          </a:fontRef>
+        </p:style>
+        <p:txBody>
+          <a:bodyPr rtlCol="0" anchor="ctr" wrap="square"/>
+          <a:lstStyle/>
+          <a:p>
+            <a:pPr algn="ctr"/>
+            <a:r>
+              <a:rPr sz="1100" b="1">
+                <a:solidFill>
+                  <a:srgbClr val="FFFFFF"/>
+                </a:solidFill>
+              </a:rPr>
+              <a:t>Needed</a:t>
+            </a:r>
+          </a:p>
+        </p:txBody>
+      </p:sp>
+      <p:pic>
+        <p:nvPicPr>
+          <p:cNvPr id="5" name="Picture 4" descr="toy_corridor.png"/>
+          <p:cNvPicPr>
+            <a:picLocks noChangeAspect="1"/>
+          </p:cNvPicPr>
+          <p:nvPr/>
+        </p:nvPicPr>
+        <p:blipFill>
+          <a:blip r:embed="rId2"/>
+          <a:stretch>
+            <a:fillRect/>
+          </a:stretch>
+        </p:blipFill>
+        <p:spPr>
+          <a:xfrm>
+            <a:off x="500000" y="1150000"/>
+            <a:ext cx="7400000" cy="3700000"/>
+          </a:xfrm>
+          <a:prstGeom prst="rect">
+            <a:avLst/>
+          </a:prstGeom>
+        </p:spPr>
+      </p:pic>
+      <p:sp>
+        <p:nvSpPr>
+          <p:cNvPr id="6" name="TextBox 5"/>
+          <p:cNvSpPr txBox="1"/>
+          <p:nvPr/>
+        </p:nvSpPr>
+        <p:spPr>
+          <a:xfrm>
+            <a:off x="8100000" y="1200000"/>
+            <a:ext cx="3600000" cy="320000"/>
+          </a:xfrm>
+          <a:prstGeom prst="rect">
+            <a:avLst/>
+          </a:prstGeom>
+          <a:noFill/>
+        </p:spPr>
+        <p:txBody>
+          <a:bodyPr wrap="square">
+            <a:spAutoFit/>
+          </a:bodyPr>
+          <a:lstStyle/>
+          <a:p>
+            <a:pPr>
+              <a:spcAft>
+                <a:spcPts val="600"/>
+              </a:spcAft>
+            </a:pPr>
+            <a:r>
+              <a:rPr sz="1100" b="1">
+                <a:solidFill>
+                  <a:srgbClr val="B3A369"/>
+                </a:solidFill>
+              </a:rPr>
+              <a:t>Question</a:t>
+            </a:r>
+          </a:p>
+        </p:txBody>
+      </p:sp>
+      <p:sp>
+        <p:nvSpPr>
+          <p:cNvPr id="7" name="TextBox 6"/>
+          <p:cNvSpPr txBox="1"/>
+          <p:nvPr/>
+        </p:nvSpPr>
+        <p:spPr>
+          <a:xfrm>
+            <a:off x="8100000" y="1520000"/>
+            <a:ext cx="3600000" cy="1250000"/>
+          </a:xfrm>
+          <a:prstGeom prst="rect">
+            <a:avLst/>
+          </a:prstGeom>
+          <a:noFill/>
+        </p:spPr>
+        <p:txBody>
+          <a:bodyPr wrap="square">
+            <a:spAutoFit/>
+          </a:bodyPr>
+          <a:lstStyle/>
+          <a:p>
+            <a:pPr>
+              <a:spcAft>
+                <a:spcPts val="400"/>
+              </a:spcAft>
+            </a:pPr>
+            <a:r>
+              <a:rPr sz="1200" b="0">
+                <a:solidFill>
+                  <a:srgbClr val="212121"/>
+                </a:solidFill>
+              </a:rPr>
+              <a:t>Do reactive mechanisms spike above the safe-age limit at every boundary, and does Khonsu stay below it through all three?</a:t>
+            </a:r>
+          </a:p>
+        </p:txBody>
+      </p:sp>
+      <p:sp>
+        <p:nvSpPr>
+          <p:cNvPr id="8" name="TextBox 7"/>
+          <p:cNvSpPr txBox="1"/>
+          <p:nvPr/>
+        </p:nvSpPr>
+        <p:spPr>
+          <a:xfrm>
+            <a:off x="8100000" y="2800000"/>
+            <a:ext cx="3600000" cy="320000"/>
+          </a:xfrm>
+          <a:prstGeom prst="rect">
+            <a:avLst/>
+          </a:prstGeom>
+          <a:noFill/>
+        </p:spPr>
+        <p:txBody>
+          <a:bodyPr wrap="square">
+            <a:spAutoFit/>
+          </a:bodyPr>
+          <a:lstStyle/>
+          <a:p>
+            <a:pPr>
+              <a:spcAft>
+                <a:spcPts val="600"/>
+              </a:spcAft>
+            </a:pPr>
+            <a:r>
+              <a:rPr sz="1100" b="1">
+                <a:solidFill>
+                  <a:srgbClr val="B3A369"/>
+                </a:solidFill>
+              </a:rPr>
+              <a:t>Experiment</a:t>
+            </a:r>
+          </a:p>
+        </p:txBody>
+      </p:sp>
+      <p:sp>
+        <p:nvSpPr>
+          <p:cNvPr id="9" name="TextBox 8"/>
+          <p:cNvSpPr txBox="1"/>
+          <p:nvPr/>
+        </p:nvSpPr>
+        <p:spPr>
+          <a:xfrm>
+            <a:off x="8100000" y="3120000"/>
+            <a:ext cx="3600000" cy="1250000"/>
+          </a:xfrm>
+          <a:prstGeom prst="rect">
+            <a:avLst/>
+          </a:prstGeom>
+          <a:noFill/>
+        </p:spPr>
+        <p:txBody>
+          <a:bodyPr wrap="square">
+            <a:spAutoFit/>
+          </a:bodyPr>
+          <a:lstStyle/>
+          <a:p>
+            <a:pPr>
+              <a:spcAft>
+                <a:spcPts val="400"/>
+              </a:spcAft>
+            </a:pPr>
+            <a:r>
+              <a:rPr sz="1200" b="0">
+                <a:solidFill>
+                  <a:srgbClr val="212121"/>
+                </a:solidFill>
+              </a:rPr>
+              <a:t>Trace prediction age at the planner along the 1.2 km route for the boundary-trigger baseline and Khonsu, with the per-maneuver limit stepping through the conflict windows. Summarize the whole route per arm (T13).</a:t>
+            </a:r>
+          </a:p>
+        </p:txBody>
+      </p:sp>
+      <p:sp>
+        <p:nvSpPr>
+          <p:cNvPr id="10" name="TextBox 9"/>
+          <p:cNvSpPr txBox="1"/>
+          <p:nvPr/>
+        </p:nvSpPr>
+        <p:spPr>
+          <a:xfrm>
+            <a:off x="8100000" y="4400000"/>
+            <a:ext cx="3600000" cy="320000"/>
+          </a:xfrm>
+          <a:prstGeom prst="rect">
+            <a:avLst/>
+          </a:prstGeom>
+          <a:noFill/>
+        </p:spPr>
+        <p:txBody>
+          <a:bodyPr wrap="square">
+            <a:spAutoFit/>
+          </a:bodyPr>
+          <a:lstStyle/>
+          <a:p>
+            <a:pPr>
+              <a:spcAft>
+                <a:spcPts val="600"/>
+              </a:spcAft>
+            </a:pPr>
+            <a:r>
+              <a:rPr sz="1100" b="1">
+                <a:solidFill>
+                  <a:srgbClr val="B3A369"/>
+                </a:solidFill>
+              </a:rPr>
+              <a:t>Result we need</a:t>
+            </a:r>
+          </a:p>
+        </p:txBody>
+      </p:sp>
+      <p:sp>
+        <p:nvSpPr>
+          <p:cNvPr id="11" name="TextBox 10"/>
+          <p:cNvSpPr txBox="1"/>
+          <p:nvPr/>
+        </p:nvSpPr>
+        <p:spPr>
+          <a:xfrm>
+            <a:off x="8100000" y="4720000"/>
+            <a:ext cx="3600000" cy="1250000"/>
+          </a:xfrm>
+          <a:prstGeom prst="rect">
+            <a:avLst/>
+          </a:prstGeom>
+          <a:noFill/>
+        </p:spPr>
+        <p:txBody>
+          <a:bodyPr wrap="square">
+            <a:spAutoFit/>
+          </a:bodyPr>
+          <a:lstStyle/>
+          <a:p>
+            <a:pPr>
+              <a:spcAft>
+                <a:spcPts val="400"/>
+              </a:spcAft>
+            </a:pPr>
+            <a:r>
+              <a:rPr sz="1200" b="0">
+                <a:solidFill>
+                  <a:srgbClr val="212121"/>
+                </a:solidFill>
+              </a:rPr>
+              <a:t>Khonsu shows small bumps at each transition and stays below the limit. The aggregate is the fraction of safety-critical decisions served warm and fresh, with collisions and fallbacks per km as numbers.</a:t>
+            </a:r>
+          </a:p>
+        </p:txBody>
+      </p:sp>
+    </p:spTree>
+  </p:cSld>
+  <p:clrMapOvr>
+    <a:masterClrMapping/>
+  </p:clrMapOvr>
+</p:sld>
+</file>
+
+<file path=ppt/slides/slide19.xml><?xml version="1.0" encoding="utf-8"?>
+<p:sld xmlns:a="http://schemas.openxmlformats.org/drawingml/2006/main" xmlns:p="http://schemas.openxmlformats.org/presentationml/2006/main" xmlns:r="http://schemas.openxmlformats.org/officeDocument/2006/relationships">
+  <p:cSld>
+    <p:spTree>
+      <p:nvGrpSpPr>
+        <p:cNvPr id="1" name=""/>
+        <p:cNvGrpSpPr/>
+        <p:nvPr/>
+      </p:nvGrpSpPr>
+      <p:grpSpPr/>
+      <p:sp>
+        <p:nvSpPr>
+          <p:cNvPr id="2" name="TextBox 1"/>
+          <p:cNvSpPr txBox="1"/>
+          <p:nvPr/>
+        </p:nvSpPr>
+        <p:spPr>
+          <a:xfrm>
+            <a:off x="548640" y="256032"/>
+            <a:ext cx="9600000" cy="777240"/>
+          </a:xfrm>
+          <a:prstGeom prst="rect">
+            <a:avLst/>
+          </a:prstGeom>
+          <a:noFill/>
+        </p:spPr>
+        <p:txBody>
+          <a:bodyPr wrap="square">
+            <a:spAutoFit/>
+          </a:bodyPr>
+          <a:lstStyle/>
+          <a:p>
+            <a:pPr>
+              <a:spcAft>
+                <a:spcPts val="600"/>
+              </a:spcAft>
+            </a:pPr>
+            <a:r>
+              <a:rPr sz="2800" b="1">
+                <a:solidFill>
+                  <a:srgbClr val="1B3A6B"/>
+                </a:solidFill>
+              </a:rPr>
+              <a:t>Locale size has an upper and a lower bound</a:t>
+            </a:r>
+          </a:p>
+        </p:txBody>
+      </p:sp>
+      <p:sp>
+        <p:nvSpPr>
+          <p:cNvPr id="3" name="TextBox 2"/>
+          <p:cNvSpPr txBox="1"/>
+          <p:nvPr/>
+        </p:nvSpPr>
+        <p:spPr>
+          <a:xfrm>
+            <a:off x="10200000" y="292608"/>
+            <a:ext cx="1700000" cy="457200"/>
+          </a:xfrm>
+          <a:prstGeom prst="rect">
+            <a:avLst/>
+          </a:prstGeom>
+          <a:noFill/>
+        </p:spPr>
+        <p:txBody>
+          <a:bodyPr wrap="square">
+            <a:spAutoFit/>
+          </a:bodyPr>
+          <a:lstStyle/>
+          <a:p>
+            <a:pPr algn="r">
+              <a:spcAft>
+                <a:spcPts val="600"/>
+              </a:spcAft>
+            </a:pPr>
+            <a:r>
+              <a:rPr sz="1300" b="1">
+                <a:solidFill>
+                  <a:srgbClr val="B3A369"/>
+                </a:solidFill>
+              </a:rPr>
+              <a:t>RQ1</a:t>
+            </a:r>
+          </a:p>
+        </p:txBody>
+      </p:sp>
+      <p:sp>
+        <p:nvSpPr>
+          <p:cNvPr id="4" name="Rounded Rectangle 3"/>
+          <p:cNvSpPr/>
+          <p:nvPr/>
+        </p:nvSpPr>
+        <p:spPr>
+          <a:xfrm>
+            <a:off x="10200000" y="760000"/>
+            <a:ext cx="1450000" cy="330000"/>
+          </a:xfrm>
+          <a:prstGeom prst="roundRect">
+            <a:avLst/>
+          </a:prstGeom>
+          <a:solidFill>
+            <a:srgbClr val="1565C0"/>
+          </a:solidFill>
+          <a:ln>
+            <a:noFill/>
+          </a:ln>
+        </p:spPr>
+        <p:style>
+          <a:lnRef idx="1">
+            <a:schemeClr val="accent1"/>
+          </a:lnRef>
+          <a:fillRef idx="3">
+            <a:schemeClr val="accent1"/>
+          </a:fillRef>
+          <a:effectRef idx="2">
+            <a:schemeClr val="accent1"/>
+          </a:effectRef>
+          <a:fontRef idx="minor">
+            <a:schemeClr val="lt1"/>
+          </a:fontRef>
+        </p:style>
+        <p:txBody>
+          <a:bodyPr rtlCol="0" anchor="ctr" wrap="square"/>
+          <a:lstStyle/>
+          <a:p>
+            <a:pPr algn="ctr"/>
+            <a:r>
+              <a:rPr sz="1100" b="1">
+                <a:solidFill>
+                  <a:srgbClr val="FFFFFF"/>
+                </a:solidFill>
+              </a:rPr>
+              <a:t>Running</a:t>
+            </a:r>
+          </a:p>
+        </p:txBody>
+      </p:sp>
+      <p:pic>
+        <p:nvPicPr>
+          <p:cNvPr id="5" name="Picture 4" descr="toy_sizing.png"/>
+          <p:cNvPicPr>
+            <a:picLocks noChangeAspect="1"/>
+          </p:cNvPicPr>
+          <p:nvPr/>
+        </p:nvPicPr>
+        <p:blipFill>
+          <a:blip r:embed="rId2"/>
+          <a:stretch>
+            <a:fillRect/>
+          </a:stretch>
+        </p:blipFill>
+        <p:spPr>
+          <a:xfrm>
+            <a:off x="500000" y="1150000"/>
+            <a:ext cx="7400000" cy="3905555"/>
+          </a:xfrm>
+          <a:prstGeom prst="rect">
+            <a:avLst/>
+          </a:prstGeom>
+        </p:spPr>
+      </p:pic>
+      <p:sp>
+        <p:nvSpPr>
+          <p:cNvPr id="6" name="TextBox 5"/>
+          <p:cNvSpPr txBox="1"/>
+          <p:nvPr/>
+        </p:nvSpPr>
+        <p:spPr>
+          <a:xfrm>
+            <a:off x="8100000" y="1200000"/>
+            <a:ext cx="3600000" cy="320000"/>
+          </a:xfrm>
+          <a:prstGeom prst="rect">
+            <a:avLst/>
+          </a:prstGeom>
+          <a:noFill/>
+        </p:spPr>
+        <p:txBody>
+          <a:bodyPr wrap="square">
+            <a:spAutoFit/>
+          </a:bodyPr>
+          <a:lstStyle/>
+          <a:p>
+            <a:pPr>
+              <a:spcAft>
+                <a:spcPts val="600"/>
+              </a:spcAft>
+            </a:pPr>
+            <a:r>
+              <a:rPr sz="1100" b="1">
+                <a:solidFill>
+                  <a:srgbClr val="B3A369"/>
+                </a:solidFill>
+              </a:rPr>
+              <a:t>Question</a:t>
+            </a:r>
+          </a:p>
+        </p:txBody>
+      </p:sp>
+      <p:sp>
+        <p:nvSpPr>
+          <p:cNvPr id="7" name="TextBox 6"/>
+          <p:cNvSpPr txBox="1"/>
+          <p:nvPr/>
+        </p:nvSpPr>
+        <p:spPr>
+          <a:xfrm>
+            <a:off x="8100000" y="1520000"/>
+            <a:ext cx="3600000" cy="1250000"/>
+          </a:xfrm>
+          <a:prstGeom prst="rect">
+            <a:avLst/>
+          </a:prstGeom>
+          <a:noFill/>
+        </p:spPr>
+        <p:txBody>
+          <a:bodyPr wrap="square">
+            <a:spAutoFit/>
+          </a:bodyPr>
+          <a:lstStyle/>
+          <a:p>
+            <a:pPr>
+              <a:spcAft>
+                <a:spcPts val="400"/>
+              </a:spcAft>
+            </a:pPr>
+            <a:r>
+              <a:rPr sz="1200" b="0">
+                <a:solidFill>
+                  <a:srgbClr val="212121"/>
+                </a:solidFill>
+              </a:rPr>
+              <a:t>Where does the metropolitan story close? What locale sizes are feasible at all?</a:t>
+            </a:r>
+          </a:p>
+        </p:txBody>
+      </p:sp>
+      <p:sp>
+        <p:nvSpPr>
+          <p:cNvPr id="8" name="TextBox 7"/>
+          <p:cNvSpPr txBox="1"/>
+          <p:nvPr/>
+        </p:nvSpPr>
+        <p:spPr>
+          <a:xfrm>
+            <a:off x="8100000" y="2800000"/>
+            <a:ext cx="3600000" cy="320000"/>
+          </a:xfrm>
+          <a:prstGeom prst="rect">
+            <a:avLst/>
+          </a:prstGeom>
+          <a:noFill/>
+        </p:spPr>
+        <p:txBody>
+          <a:bodyPr wrap="square">
+            <a:spAutoFit/>
+          </a:bodyPr>
+          <a:lstStyle/>
+          <a:p>
+            <a:pPr>
+              <a:spcAft>
+                <a:spcPts val="600"/>
+              </a:spcAft>
+            </a:pPr>
+            <a:r>
+              <a:rPr sz="1100" b="1">
+                <a:solidFill>
+                  <a:srgbClr val="B3A369"/>
+                </a:solidFill>
+              </a:rPr>
+              <a:t>Experiment</a:t>
+            </a:r>
+          </a:p>
+        </p:txBody>
+      </p:sp>
+      <p:sp>
+        <p:nvSpPr>
+          <p:cNvPr id="9" name="TextBox 8"/>
+          <p:cNvSpPr txBox="1"/>
+          <p:nvPr/>
+        </p:nvSpPr>
+        <p:spPr>
+          <a:xfrm>
+            <a:off x="8100000" y="3120000"/>
+            <a:ext cx="3600000" cy="1250000"/>
+          </a:xfrm>
+          <a:prstGeom prst="rect">
+            <a:avLst/>
+          </a:prstGeom>
+          <a:noFill/>
+        </p:spPr>
+        <p:txBody>
+          <a:bodyPr wrap="square">
+            <a:spAutoFit/>
+          </a:bodyPr>
+          <a:lstStyle/>
+          <a:p>
+            <a:pPr>
+              <a:spcAft>
+                <a:spcPts val="400"/>
+              </a:spcAft>
+            </a:pPr>
+            <a:r>
+              <a:rPr sz="1200" b="0">
+                <a:solidFill>
+                  <a:srgbClr val="212121"/>
+                </a:solidFill>
+              </a:rPr>
+              <a:t>Sweep locale side length. Fusion compute utilization comes from the canvas measurement. Handoff load comes from crossings per km at the corridor traffic (sizing study).</a:t>
+            </a:r>
+          </a:p>
+        </p:txBody>
+      </p:sp>
+      <p:sp>
+        <p:nvSpPr>
+          <p:cNvPr id="10" name="TextBox 9"/>
+          <p:cNvSpPr txBox="1"/>
+          <p:nvPr/>
+        </p:nvSpPr>
+        <p:spPr>
+          <a:xfrm>
+            <a:off x="8100000" y="4400000"/>
+            <a:ext cx="3600000" cy="320000"/>
+          </a:xfrm>
+          <a:prstGeom prst="rect">
+            <a:avLst/>
+          </a:prstGeom>
+          <a:noFill/>
+        </p:spPr>
+        <p:txBody>
+          <a:bodyPr wrap="square">
+            <a:spAutoFit/>
+          </a:bodyPr>
+          <a:lstStyle/>
+          <a:p>
+            <a:pPr>
+              <a:spcAft>
+                <a:spcPts val="600"/>
+              </a:spcAft>
+            </a:pPr>
+            <a:r>
+              <a:rPr sz="1100" b="1">
+                <a:solidFill>
+                  <a:srgbClr val="B3A369"/>
+                </a:solidFill>
+              </a:rPr>
+              <a:t>Result we need</a:t>
+            </a:r>
+          </a:p>
+        </p:txBody>
+      </p:sp>
+      <p:sp>
+        <p:nvSpPr>
+          <p:cNvPr id="11" name="TextBox 10"/>
+          <p:cNvSpPr txBox="1"/>
+          <p:nvPr/>
+        </p:nvSpPr>
+        <p:spPr>
+          <a:xfrm>
+            <a:off x="8100000" y="4720000"/>
+            <a:ext cx="3600000" cy="1250000"/>
+          </a:xfrm>
+          <a:prstGeom prst="rect">
+            <a:avLst/>
+          </a:prstGeom>
+          <a:noFill/>
+        </p:spPr>
+        <p:txBody>
+          <a:bodyPr wrap="square">
+            <a:spAutoFit/>
+          </a:bodyPr>
+          <a:lstStyle/>
+          <a:p>
+            <a:pPr>
+              <a:spcAft>
+                <a:spcPts val="400"/>
+              </a:spcAft>
+            </a:pPr>
+            <a:r>
+              <a:rPr sz="1200" b="0">
+                <a:solidFill>
+                  <a:srgbClr val="212121"/>
+                </a:solidFill>
+              </a:rPr>
+              <a:t>An upper bound from per-locale compute, a lower bound from cross-locale transition load, and the feasible interval between them. The paper follows with the size by boundary-position surface.</a:t>
+            </a:r>
+          </a:p>
+        </p:txBody>
+      </p:sp>
+    </p:spTree>
+  </p:cSld>
+  <p:clrMapOvr>
+    <a:masterClrMapping/>
+  </p:clrMapOvr>
+</p:sld>
+</file>
+
+<file path=ppt/slides/slide2.xml><?xml version="1.0" encoding="utf-8"?>
+<p:sld xmlns:a="http://schemas.openxmlformats.org/drawingml/2006/main" xmlns:p="http://schemas.openxmlformats.org/presentationml/2006/main" xmlns:r="http://schemas.openxmlformats.org/officeDocument/2006/relationships">
+  <p:cSld>
+    <p:spTree>
+      <p:nvGrpSpPr>
+        <p:cNvPr id="1" name=""/>
+        <p:cNvGrpSpPr/>
+        <p:nvPr/>
+      </p:nvGrpSpPr>
+      <p:grpSpPr/>
+      <p:sp>
+        <p:nvSpPr>
+          <p:cNvPr id="2" name="TextBox 1"/>
+          <p:cNvSpPr txBox="1"/>
+          <p:nvPr/>
+        </p:nvSpPr>
+        <p:spPr>
+          <a:xfrm>
+            <a:off x="548640" y="256032"/>
+            <a:ext cx="9600000" cy="777240"/>
+          </a:xfrm>
+          <a:prstGeom prst="rect">
+            <a:avLst/>
+          </a:prstGeom>
+          <a:noFill/>
+        </p:spPr>
+        <p:txBody>
+          <a:bodyPr wrap="square">
+            <a:spAutoFit/>
+          </a:bodyPr>
+          <a:lstStyle/>
+          <a:p>
+            <a:pPr>
+              <a:spcAft>
+                <a:spcPts val="600"/>
+              </a:spcAft>
+            </a:pPr>
+            <a:r>
+              <a:rPr sz="2800" b="1">
+                <a:solidFill>
+                  <a:srgbClr val="1B3A6B"/>
+                </a:solidFill>
+              </a:rPr>
+              <a:t>Conductor solved one locale</a:t>
+            </a:r>
+          </a:p>
+        </p:txBody>
+      </p:sp>
+      <p:sp>
+        <p:nvSpPr>
+          <p:cNvPr id="3" name="Rounded Rectangle 2"/>
+          <p:cNvSpPr/>
+          <p:nvPr/>
+        </p:nvSpPr>
+        <p:spPr>
+          <a:xfrm>
+            <a:off x="10200000" y="760000"/>
+            <a:ext cx="1450000" cy="330000"/>
+          </a:xfrm>
+          <a:prstGeom prst="roundRect">
+            <a:avLst/>
+          </a:prstGeom>
+          <a:solidFill>
+            <a:srgbClr val="2E7D32"/>
+          </a:solidFill>
+          <a:ln>
+            <a:noFill/>
+          </a:ln>
+        </p:spPr>
+        <p:style>
+          <a:lnRef idx="1">
+            <a:schemeClr val="accent1"/>
+          </a:lnRef>
+          <a:fillRef idx="3">
+            <a:schemeClr val="accent1"/>
+          </a:fillRef>
+          <a:effectRef idx="2">
+            <a:schemeClr val="accent1"/>
+          </a:effectRef>
+          <a:fontRef idx="minor">
+            <a:schemeClr val="lt1"/>
+          </a:fontRef>
+        </p:style>
+        <p:txBody>
+          <a:bodyPr rtlCol="0" anchor="ctr" wrap="square"/>
+          <a:lstStyle/>
+          <a:p>
+            <a:pPr algn="ctr"/>
+            <a:r>
+              <a:rPr sz="1100" b="1">
+                <a:solidFill>
+                  <a:srgbClr val="FFFFFF"/>
+                </a:solidFill>
+              </a:rPr>
+              <a:t>Done</a:t>
+            </a:r>
+          </a:p>
+        </p:txBody>
+      </p:sp>
+      <p:sp>
+        <p:nvSpPr>
+          <p:cNvPr id="4" name="TextBox 3"/>
+          <p:cNvSpPr txBox="1"/>
+          <p:nvPr/>
+        </p:nvSpPr>
+        <p:spPr>
+          <a:xfrm>
+            <a:off x="640080" y="1150000"/>
+            <a:ext cx="10972800" cy="3600000"/>
+          </a:xfrm>
+          <a:prstGeom prst="rect">
+            <a:avLst/>
+          </a:prstGeom>
+          <a:noFill/>
+        </p:spPr>
+        <p:txBody>
+          <a:bodyPr wrap="square">
+            <a:spAutoFit/>
+          </a:bodyPr>
+          <a:lstStyle/>
+          <a:p>
+            <a:pPr>
+              <a:spcAft>
+                <a:spcPts val="800"/>
+              </a:spcAft>
+            </a:pPr>
+            <a:r>
+              <a:rPr sz="1600" b="0">
+                <a:solidFill>
+                  <a:srgbClr val="212121"/>
+                </a:solidFill>
+              </a:rPr>
+              <a:t>• One shared cooperative-prediction service per road region, covering fusion, tracking, and trajectory prediction.</a:t>
+            </a:r>
+          </a:p>
+          <a:p>
+            <a:pPr>
+              <a:spcAft>
+                <a:spcPts val="800"/>
+              </a:spcAft>
+            </a:pPr>
+            <a:r>
+              <a:rPr sz="1600" b="0">
+                <a:solidFill>
+                  <a:srgbClr val="212121"/>
+                </a:solidFill>
+              </a:rPr>
+              <a:t>• Admission control and prediction scheduling keep it inside the 300 ms deadline up to 31 CAVs.</a:t>
+            </a:r>
+          </a:p>
+          <a:p>
+            <a:pPr>
+              <a:spcAft>
+                <a:spcPts val="800"/>
+              </a:spcAft>
+            </a:pPr>
+            <a:r>
+              <a:rPr sz="1600" b="0">
+                <a:solidFill>
+                  <a:srgbClr val="212121"/>
+                </a:solidFill>
+              </a:rPr>
+              <a:t>• Accepted at SEC 2026.</a:t>
+            </a:r>
+          </a:p>
+          <a:p>
+            <a:pPr>
+              <a:spcAft>
+                <a:spcPts val="800"/>
+              </a:spcAft>
+            </a:pPr>
+            <a:r>
+              <a:rPr sz="1600" b="0">
+                <a:solidFill>
+                  <a:srgbClr val="212121"/>
+                </a:solidFill>
+              </a:rPr>
+              <a:t>• We know how to operate one locale.</a:t>
+            </a:r>
+          </a:p>
+        </p:txBody>
+      </p:sp>
+      <p:sp>
+        <p:nvSpPr>
+          <p:cNvPr id="5" name="TextBox 4"/>
+          <p:cNvSpPr txBox="1"/>
+          <p:nvPr/>
+        </p:nvSpPr>
+        <p:spPr>
+          <a:xfrm>
+            <a:off x="640080" y="6263640"/>
+            <a:ext cx="10972800" cy="457200"/>
+          </a:xfrm>
+          <a:prstGeom prst="rect">
+            <a:avLst/>
+          </a:prstGeom>
+          <a:noFill/>
+        </p:spPr>
+        <p:txBody>
+          <a:bodyPr wrap="square">
+            <a:spAutoFit/>
+          </a:bodyPr>
+          <a:lstStyle/>
+          <a:p>
+            <a:pPr>
+              <a:spcAft>
+                <a:spcPts val="600"/>
+              </a:spcAft>
+            </a:pPr>
+            <a:r>
+              <a:rPr sz="1200" b="0">
+                <a:solidFill>
+                  <a:srgbClr val="B3A369"/>
+                </a:solidFill>
+              </a:rPr>
+              <a:t>Landle et al., Scalable Edge-assisted Fusion and Path Prediction for Connected Autonomous Vehicles, SEC 2026</a:t>
+            </a:r>
+          </a:p>
+        </p:txBody>
+      </p:sp>
+    </p:spTree>
+  </p:cSld>
+  <p:clrMapOvr>
+    <a:masterClrMapping/>
+  </p:clrMapOvr>
+</p:sld>
+</file>
+
+<file path=ppt/slides/slide20.xml><?xml version="1.0" encoding="utf-8"?>
 <p:sld xmlns:a="http://schemas.openxmlformats.org/drawingml/2006/main" xmlns:p="http://schemas.openxmlformats.org/presentationml/2006/main" xmlns:r="http://schemas.openxmlformats.org/officeDocument/2006/relationships">
   <p:cSld>
     <p:spTree>
@@ -6404,7 +8597,7 @@
                     <a:p>
                       <a:r>
                         <a:rPr sz="1200" b="0"/>
-                        <a:t>canvas sweep; CARLA partition</a:t>
+                        <a:t>canvas sweep, CARLA partition</a:t>
                       </a:r>
                     </a:p>
                   </a:txBody>
@@ -6475,7 +8668,7 @@
                     <a:p>
                       <a:r>
                         <a:rPr sz="1200" b="0"/>
-                        <a:t>microbench 2.8 to 9.3x; acceleration 4/4 vs 3/4</a:t>
+                        <a:t>microbench 2.8 to 9.3x, acceleration 4/4 vs 3/4</a:t>
                       </a:r>
                     </a:p>
                   </a:txBody>
@@ -6488,7 +8681,7 @@
                     <a:p>
                       <a:r>
                         <a:rPr sz="1200" b="0"/>
-                        <a:t>post-handoff minADE/minFDE (T9)</a:t>
+                        <a:t>post-handoff minADE and minFDE (T9)</a:t>
                       </a:r>
                     </a:p>
                   </a:txBody>
@@ -6546,7 +8739,7 @@
                     <a:p>
                       <a:r>
                         <a:rPr sz="1200" b="0"/>
-                        <a:t>8-scenario ownership faults; age chain</a:t>
+                        <a:t>8-scenario ownership faults, age chain</a:t>
                       </a:r>
                     </a:p>
                   </a:txBody>
@@ -6559,7 +8752,7 @@
                     <a:p>
                       <a:r>
                         <a:rPr sz="1200" b="0"/>
-                        <a:t>v3 re-baseline; computed vs fixed lead</a:t>
+                        <a:t>v3 re-baseline, computed vs fixed lead</a:t>
                       </a:r>
                     </a:p>
                   </a:txBody>
@@ -6572,7 +8765,7 @@
                     <a:p>
                       <a:r>
                         <a:rPr sz="1200" b="0"/>
-                        <a:t>per-scenario safe-age limits (T12); live fault arms (T7); real transport (T8); dual-authority arm</a:t>
+                        <a:t>safe-age limits (T12), live fault arms (T7), real transport (T8), overlap sweep and dual authority (T14)</a:t>
                       </a:r>
                     </a:p>
                   </a:txBody>
@@ -6643,7 +8836,7 @@
                     <a:p>
                       <a:r>
                         <a:rPr sz="1200" b="0"/>
-                        <a:t>corridor scenario and route-level metrics (T13)</a:t>
+                        <a:t>corridor scenario and route-level metrics (T13), association for unconnected actors (T10)</a:t>
                       </a:r>
                     </a:p>
                   </a:txBody>
@@ -6704,7 +8897,7 @@
                   <a:srgbClr val="212121"/>
                 </a:solidFill>
               </a:rPr>
-              <a:t>Provenance: the first two sweeps ran an unvalidated scenario geometry (found Sep 3); the fix is a runner default, and v3 is the re-baseline.</a:t>
+              <a:t>Provenance. The first two sweeps ran an unvalidated scenario geometry (found Sep 3). The fix is a runner default, and v3 is the re-baseline.</a:t>
             </a:r>
           </a:p>
           <a:p>
@@ -6719,7 +8912,7 @@
                   <a:srgbClr val="212121"/>
                 </a:solidFill>
               </a:rPr>
-              <a:t>Timeline: NSDI'27 abstracts Sep 10, papers Sep 17. T13 is the largest open item; early warning if it cannot land by Sep 15.</a:t>
+              <a:t>Timeline. NSDI'27 abstracts Sep 10, papers Sep 17.</a:t>
             </a:r>
           </a:p>
         </p:txBody>
@@ -6770,7 +8963,7 @@
 </p:sld>
 </file>
 
-<file path=ppt/slides/slide2.xml><?xml version="1.0" encoding="utf-8"?>
+<file path=ppt/slides/slide21.xml><?xml version="1.0" encoding="utf-8"?>
 <p:sld xmlns:a="http://schemas.openxmlformats.org/drawingml/2006/main" xmlns:p="http://schemas.openxmlformats.org/presentationml/2006/main" xmlns:r="http://schemas.openxmlformats.org/officeDocument/2006/relationships">
   <p:cSld>
     <p:spTree>
@@ -6813,7 +9006,7 @@
                   <a:srgbClr val="1B3A6B"/>
                 </a:solidFill>
               </a:rPr>
-              <a:t>Conductor solved one locale</a:t>
+              <a:t>Minimum remaining evidence for NSDI</a:t>
             </a:r>
           </a:p>
         </p:txBody>
@@ -6833,7 +9026,7 @@
             <a:avLst/>
           </a:prstGeom>
           <a:solidFill>
-            <a:srgbClr val="2E7D32"/>
+            <a:srgbClr val="787878"/>
           </a:solidFill>
           <a:ln>
             <a:noFill/>
@@ -6864,7 +9057,7 @@
                   <a:srgbClr val="FFFFFF"/>
                 </a:solidFill>
               </a:rPr>
-              <a:t>Done</a:t>
+              <a:t>Needed</a:t>
             </a:r>
           </a:p>
         </p:txBody>
@@ -6902,7 +9095,7 @@
                   <a:srgbClr val="212121"/>
                 </a:solidFill>
               </a:rPr>
-              <a:t>• One shared cooperative-prediction service per road region: fusion, tracking, trajectory prediction.</a:t>
+              <a:t>• Safe-age limit re-measured per handoff scenario (T12).</a:t>
             </a:r>
           </a:p>
           <a:p>
@@ -6917,7 +9110,7 @@
                   <a:srgbClr val="212121"/>
                 </a:solidFill>
               </a:rPr>
-              <a:t>• Admission control and prediction scheduling keep it inside the 300 ms deadline up to 31 CAVs.</a:t>
+              <a:t>• v3 handoff baselines on the corrected scenario, including computed versus fixed lead and EdgeWarp timing (running).</a:t>
             </a:r>
           </a:p>
           <a:p>
@@ -6932,7 +9125,7 @@
                   <a:srgbClr val="212121"/>
                 </a:solidFill>
               </a:rPr>
-              <a:t>• Accepted at SEC 2026.</a:t>
+              <a:t>• Overlap in its three meanings over overlap width, with the dual-authority arm (T14).</a:t>
             </a:r>
           </a:p>
           <a:p>
@@ -6947,7 +9140,37 @@
                   <a:srgbClr val="212121"/>
                 </a:solidFill>
               </a:rPr>
-              <a:t>• Bottom line: we know how to operate one locale.</a:t>
+              <a:t>• Real two-process transport with emulated backhaul delay and loss (T8).</a:t>
+            </a:r>
+          </a:p>
+          <a:p>
+            <a:pPr>
+              <a:spcAft>
+                <a:spcPts val="800"/>
+              </a:spcAft>
+            </a:pPr>
+            <a:r>
+              <a:rPr sz="1600" b="0">
+                <a:solidFill>
+                  <a:srgbClr val="212121"/>
+                </a:solidFill>
+              </a:rPr>
+              <a:t>• The corridor scenario with route-level metrics (T13, go/no-go Sep 9).</a:t>
+            </a:r>
+          </a:p>
+          <a:p>
+            <a:pPr>
+              <a:spcAft>
+                <a:spcPts val="800"/>
+              </a:spcAft>
+            </a:pPr>
+            <a:r>
+              <a:rPr sz="1600" b="0">
+                <a:solidFill>
+                  <a:srgbClr val="212121"/>
+                </a:solidFill>
+              </a:rPr>
+              <a:t>• Association for unconnected actors measured under pose error and distractors, or scoped as a limitation (T10).</a:t>
             </a:r>
           </a:p>
         </p:txBody>
@@ -6985,7 +9208,7 @@
                   <a:srgbClr val="B3A369"/>
                 </a:solidFill>
               </a:rPr>
-              <a:t>Landle et al., Scalable Edge-assisted Fusion and Path Prediction for Connected Autonomous Vehicles, SEC 2026</a:t>
+              <a:t>Without these, the paper argues mechanism superiority from two-locale evidence and provisional sweeps</a:t>
             </a:r>
           </a:p>
         </p:txBody>
@@ -7116,14 +9339,52 @@
       </p:sp>
       <p:sp>
         <p:nvSpPr>
-          <p:cNvPr id="4" name="Rounded Rectangle 3"/>
+          <p:cNvPr id="4" name="TextBox 3"/>
+          <p:cNvSpPr txBox="1"/>
+          <p:nvPr/>
+        </p:nvSpPr>
+        <p:spPr>
+          <a:xfrm>
+            <a:off x="640080" y="2350000"/>
+            <a:ext cx="4000000" cy="300000"/>
+          </a:xfrm>
+          <a:prstGeom prst="rect">
+            <a:avLst/>
+          </a:prstGeom>
+          <a:noFill/>
+        </p:spPr>
+        <p:txBody>
+          <a:bodyPr wrap="square">
+            <a:spAutoFit/>
+          </a:bodyPr>
+          <a:lstStyle/>
+          <a:p>
+            <a:pPr>
+              <a:spcAft>
+                <a:spcPts val="600"/>
+              </a:spcAft>
+            </a:pPr>
+            <a:r>
+              <a:rPr sz="1200" b="1">
+                <a:solidFill>
+                  <a:srgbClr val="B3A369"/>
+                </a:solidFill>
+              </a:rPr>
+              <a:t>Main question</a:t>
+            </a:r>
+          </a:p>
+        </p:txBody>
+      </p:sp>
+      <p:sp>
+        <p:nvSpPr>
+          <p:cNvPr id="5" name="Rounded Rectangle 4"/>
           <p:cNvSpPr/>
           <p:nvPr/>
         </p:nvSpPr>
         <p:spPr>
           <a:xfrm>
-            <a:off x="640080" y="2450000"/>
-            <a:ext cx="10972800" cy="900000"/>
+            <a:off x="640080" y="2650000"/>
+            <a:ext cx="10972800" cy="850000"/>
           </a:xfrm>
           <a:prstGeom prst="roundRect">
             <a:avLst/>
@@ -7162,21 +9423,21 @@
                   <a:srgbClr val="1B3A6B"/>
                 </a:solidFill>
               </a:rPr>
-              <a:t>Main question: how do we extend edge-hosted cooperative prediction from one locale to a metropolitan deployment while preserving planner safety?</a:t>
-            </a:r>
-          </a:p>
-        </p:txBody>
-      </p:sp>
-      <p:sp>
-        <p:nvSpPr>
-          <p:cNvPr id="5" name="TextBox 4"/>
+              <a:t>How do we extend edge-hosted cooperative prediction from one locale to a metropolitan deployment while preserving planner safety?</a:t>
+            </a:r>
+          </a:p>
+        </p:txBody>
+      </p:sp>
+      <p:sp>
+        <p:nvSpPr>
+          <p:cNvPr id="6" name="TextBox 5"/>
           <p:cNvSpPr txBox="1"/>
           <p:nvPr/>
         </p:nvSpPr>
         <p:spPr>
           <a:xfrm>
-            <a:off x="640080" y="3550000"/>
-            <a:ext cx="10972800" cy="2600000"/>
+            <a:off x="640080" y="3650000"/>
+            <a:ext cx="10972800" cy="2500000"/>
           </a:xfrm>
           <a:prstGeom prst="rect">
             <a:avLst/>
@@ -7200,7 +9461,7 @@
                   <a:srgbClr val="212121"/>
                 </a:solidFill>
               </a:rPr>
-              <a:t>RQ1  Scale-out: how should cooperative prediction be partitioned across locales, and what limits the region one locale can serve?</a:t>
+              <a:t>RQ1 (scale-out). How should cooperative prediction be partitioned across locales, and what limits the region one locale can serve?</a:t>
             </a:r>
           </a:p>
           <a:p>
@@ -7215,7 +9476,7 @@
                   <a:srgbClr val="212121"/>
                 </a:solidFill>
               </a:rPr>
-              <a:t>RQ2  State continuity: when actors move between locales, what state must follow them to preserve prediction quality?</a:t>
+              <a:t>RQ2 (state continuity). When actors move between locales, what state must follow them to preserve prediction quality?</a:t>
             </a:r>
           </a:p>
           <a:p>
@@ -7230,7 +9491,7 @@
                   <a:srgbClr val="212121"/>
                 </a:solidFill>
               </a:rPr>
-              <a:t>RQ3  Safe handoff: what handoff timing and mechanism keep predictions inside the maneuver-specific safe-age envelope?</a:t>
+              <a:t>RQ3 (safe handoff). What handoff timing and mechanism keep predictions inside the maneuver-specific safe-age envelope?</a:t>
             </a:r>
           </a:p>
           <a:p>
@@ -7245,14 +9506,14 @@
                   <a:srgbClr val="212121"/>
                 </a:solidFill>
               </a:rPr>
-              <a:t>RQ4  Multi-locale operation: can the design sustain repeated and concurrent handoffs across a realistic corridor?</a:t>
-            </a:r>
-          </a:p>
-        </p:txBody>
-      </p:sp>
-      <p:sp>
-        <p:nvSpPr>
-          <p:cNvPr id="6" name="TextBox 5"/>
+              <a:t>RQ4 (multi-locale operation). Can the design sustain repeated and concurrent handoffs across a realistic corridor?</a:t>
+            </a:r>
+          </a:p>
+        </p:txBody>
+      </p:sp>
+      <p:sp>
+        <p:nvSpPr>
+          <p:cNvPr id="7" name="TextBox 6"/>
           <p:cNvSpPr txBox="1"/>
           <p:nvPr/>
         </p:nvSpPr>
@@ -7283,7 +9544,7 @@
                   <a:srgbClr val="B3A369"/>
                 </a:solidFill>
               </a:rPr>
-              <a:t>Khonsu is the answer that falls out of RQ2 and RQ3; RQ4 tests it as a system.</a:t>
+              <a:t>Khonsu is the answer that falls out of RQ2 and RQ3. RQ4 tests it as a system.</a:t>
             </a:r>
           </a:p>
         </p:txBody>
@@ -7496,7 +9757,7 @@
                   <a:srgbClr val="212121"/>
                 </a:solidFill>
               </a:rPr>
-              <a:t>• Memory is not the limit: 6.8 GB of 16 GB at 563 m.</a:t>
+              <a:t>• Memory is not the limit, at 6.8 GB of 16 GB for a 563 m canvas.</a:t>
             </a:r>
           </a:p>
           <a:p>
@@ -7573,7 +9834,7 @@
                   <a:srgbClr val="B3A369"/>
                 </a:solidFill>
               </a:rPr>
-              <a:t>Evidence: canvas latency sweep on the edge GPU  ·  Caveat: the number is architecture-specific; the existence of a cap is general</a:t>
+              <a:t>Evidence: canvas latency sweep on the edge GPU  ·  Caveat: the number is architecture-specific, the existence of a cap is general</a:t>
             </a:r>
           </a:p>
         </p:txBody>
@@ -7957,7 +10218,7 @@
         <p:spPr>
           <a:xfrm>
             <a:off x="640080" y="1100000"/>
-            <a:ext cx="10972800" cy="1000000"/>
+            <a:ext cx="10972800" cy="1300000"/>
           </a:xfrm>
           <a:prstGeom prst="rect">
             <a:avLst/>
@@ -7981,7 +10242,7 @@
                   <a:srgbClr val="212121"/>
                 </a:solidFill>
               </a:rPr>
-              <a:t>• Conflicts do not respect the partition: queue tails, stopped vehicles, overtakes, lane changes form between intersections.</a:t>
+              <a:t>• Conflicts do not respect the partition. Queue tails, stopped vehicles, overtakes, and lane changes form between intersections.</a:t>
             </a:r>
           </a:p>
           <a:p>
@@ -7996,7 +10257,7 @@
                   <a:srgbClr val="212121"/>
                 </a:solidFill>
               </a:rPr>
-              <a:t>• The service is stateful: the tracker and predictor condition on observations accumulated before the crossing.</a:t>
+              <a:t>• The service is stateful. The tracker and predictor condition on observations accumulated before the crossing.</a:t>
             </a:r>
           </a:p>
         </p:txBody>
@@ -9225,7 +11486,7 @@
                   <a:srgbClr val="212121"/>
                 </a:solidFill>
               </a:rPr>
-              <a:t>• Real motion includes acceleration, braking, turning. Constant-velocity Kalman tracking degrades there.</a:t>
+              <a:t>• Real motion includes acceleration, braking, and turning. Constant-velocity Kalman tracking degrades there.</a:t>
             </a:r>
           </a:p>
           <a:p>
@@ -9270,7 +11531,7 @@
                   <a:srgbClr val="212121"/>
                 </a:solidFill>
               </a:rPr>
-              <a:t>• One frame is indistinguishable from cold start; the history reduces post-handoff error by a factor of 2.8 to 9.3.</a:t>
+              <a:t>• One frame is indistinguishable from cold start. The history reduces post-handoff error by a factor of 2.8 to 9.3.</a:t>
             </a:r>
           </a:p>
         </p:txBody>
@@ -9515,7 +11776,7 @@
                   <a:srgbClr val="212121"/>
                 </a:solidFill>
               </a:rPr>
-              <a:t>• Oncoming actor accelerates through the conflict.</a:t>
+              <a:t>• The oncoming actor accelerates through the conflict.</a:t>
             </a:r>
           </a:p>
           <a:p>
@@ -9530,7 +11791,7 @@
                   <a:srgbClr val="212121"/>
                 </a:solidFill>
               </a:rPr>
-              <a:t>• Kalman snapshot: 4 of 4 runs collide.</a:t>
+              <a:t>• With a Kalman snapshot, ahead of or at the crossing, the ego collides in 4 of 4 runs.</a:t>
             </a:r>
           </a:p>
           <a:p>
@@ -9545,7 +11806,7 @@
                   <a:srgbClr val="212121"/>
                 </a:solidFill>
               </a:rPr>
-              <a:t>• Temporal history: 3 of 4 runs complete without collision.</a:t>
+              <a:t>• With the observation history ahead, 3 of 4 runs complete without a collision.</a:t>
             </a:r>
           </a:p>
           <a:p>
@@ -9567,7 +11828,7 @@
       </p:sp>
       <p:pic>
         <p:nvPicPr>
-          <p:cNvPr id="6" name="Picture 5" descr="image.png"/>
+          <p:cNvPr id="6" name="Picture 5" descr="fig_accel_collided.png"/>
           <p:cNvPicPr>
             <a:picLocks noChangeAspect="1"/>
           </p:cNvPicPr>
@@ -9581,8 +11842,8 @@
         </p:blipFill>
         <p:spPr>
           <a:xfrm>
-            <a:off x="1645920" y="2900000"/>
-            <a:ext cx="8778240" cy="3038988"/>
+            <a:off x="2200000" y="2900000"/>
+            <a:ext cx="7200000" cy="3000000"/>
           </a:xfrm>
           <a:prstGeom prst="rect">
             <a:avLst/>
@@ -9622,7 +11883,7 @@
                   <a:srgbClr val="B3A369"/>
                 </a:solidFill>
               </a:rPr>
-              <a:t>Evidence: closed-loop acceleration experiment, 4 seeds, validated scenario  ·  Missing: post-handoff minADE and minFDE</a:t>
+              <a:t>Evidence: closed-loop acceleration experiment, 4 seeds per arm, validated scenario  ·  Metric: collided or not per run  ·  Missing: post-handoff minADE and minFDE</a:t>
             </a:r>
           </a:p>
         </p:txBody>
@@ -9678,7 +11939,7 @@
                   <a:srgbClr val="1B3A6B"/>
                 </a:solidFill>
               </a:rPr>
-              <a:t>Safety condition: the maneuver-specific safe-age envelope</a:t>
+              <a:t>How old can a prediction be and still support the maneuver?</a:t>
             </a:r>
           </a:p>
         </p:txBody>
@@ -9772,92 +12033,9 @@
           </a:p>
         </p:txBody>
       </p:sp>
-      <p:sp>
-        <p:nvSpPr>
-          <p:cNvPr id="5" name="TextBox 4"/>
-          <p:cNvSpPr txBox="1"/>
-          <p:nvPr/>
-        </p:nvSpPr>
-        <p:spPr>
-          <a:xfrm>
-            <a:off x="640080" y="1150000"/>
-            <a:ext cx="10972800" cy="3600000"/>
-          </a:xfrm>
-          <a:prstGeom prst="rect">
-            <a:avLst/>
-          </a:prstGeom>
-          <a:noFill/>
-        </p:spPr>
-        <p:txBody>
-          <a:bodyPr wrap="square">
-            <a:spAutoFit/>
-          </a:bodyPr>
-          <a:lstStyle/>
-          <a:p>
-            <a:pPr>
-              <a:spcAft>
-                <a:spcPts val="800"/>
-              </a:spcAft>
-            </a:pPr>
-            <a:r>
-              <a:rPr sz="1600" b="0">
-                <a:solidFill>
-                  <a:srgbClr val="212121"/>
-                </a:solidFill>
-              </a:rPr>
-              <a:t>• Correct state eventually becomes too old to act on.</a:t>
-            </a:r>
-          </a:p>
-          <a:p>
-            <a:pPr>
-              <a:spcAft>
-                <a:spcPts val="800"/>
-              </a:spcAft>
-            </a:pPr>
-            <a:r>
-              <a:rPr sz="1600" b="0">
-                <a:solidFill>
-                  <a:srgbClr val="212121"/>
-                </a:solidFill>
-              </a:rPr>
-              <a:t>• The usable age depends on maneuver urgency, not one universal latency number.</a:t>
-            </a:r>
-          </a:p>
-          <a:p>
-            <a:pPr>
-              <a:spcAft>
-                <a:spcPts val="800"/>
-              </a:spcAft>
-            </a:pPr>
-            <a:r>
-              <a:rPr sz="1600" b="0">
-                <a:solidFill>
-                  <a:srgbClr val="212121"/>
-                </a:solidFill>
-              </a:rPr>
-              <a:t>• Our earlier single-locale experiments (not yet accepted) put the limits near 220 to 450 ms.</a:t>
-            </a:r>
-          </a:p>
-          <a:p>
-            <a:pPr>
-              <a:spcAft>
-                <a:spcPts val="800"/>
-              </a:spcAft>
-            </a:pPr>
-            <a:r>
-              <a:rPr sz="1600" b="0">
-                <a:solidFill>
-                  <a:srgbClr val="212121"/>
-                </a:solidFill>
-              </a:rPr>
-              <a:t>• Khonsu re-measures the limit for each handoff scenario, so the paper stands on its own numbers.</a:t>
-            </a:r>
-          </a:p>
-        </p:txBody>
-      </p:sp>
       <p:pic>
         <p:nvPicPr>
-          <p:cNvPr id="6" name="Picture 5" descr="image.png"/>
+          <p:cNvPr id="5" name="Picture 4" descr="toy_envelope.png"/>
           <p:cNvPicPr>
             <a:picLocks noChangeAspect="1"/>
           </p:cNvPicPr>
@@ -9871,8 +12049,8 @@
         </p:blipFill>
         <p:spPr>
           <a:xfrm>
-            <a:off x="1463040" y="2900000"/>
-            <a:ext cx="9326880" cy="3108960"/>
+            <a:off x="500000" y="1150000"/>
+            <a:ext cx="7400000" cy="4008333"/>
           </a:xfrm>
           <a:prstGeom prst="rect">
             <a:avLst/>
@@ -9881,14 +12059,14 @@
       </p:pic>
       <p:sp>
         <p:nvSpPr>
-          <p:cNvPr id="7" name="TextBox 6"/>
+          <p:cNvPr id="6" name="TextBox 5"/>
           <p:cNvSpPr txBox="1"/>
           <p:nvPr/>
         </p:nvSpPr>
         <p:spPr>
           <a:xfrm>
-            <a:off x="640080" y="6263640"/>
-            <a:ext cx="10972800" cy="457200"/>
+            <a:off x="8100000" y="1200000"/>
+            <a:ext cx="3600000" cy="320000"/>
           </a:xfrm>
           <a:prstGeom prst="rect">
             <a:avLst/>
@@ -9907,12 +12085,240 @@
               </a:spcAft>
             </a:pPr>
             <a:r>
+              <a:rPr sz="1100" b="1">
+                <a:solidFill>
+                  <a:srgbClr val="B3A369"/>
+                </a:solidFill>
+              </a:rPr>
+              <a:t>Question</a:t>
+            </a:r>
+          </a:p>
+        </p:txBody>
+      </p:sp>
+      <p:sp>
+        <p:nvSpPr>
+          <p:cNvPr id="7" name="TextBox 6"/>
+          <p:cNvSpPr txBox="1"/>
+          <p:nvPr/>
+        </p:nvSpPr>
+        <p:spPr>
+          <a:xfrm>
+            <a:off x="8100000" y="1520000"/>
+            <a:ext cx="3600000" cy="1250000"/>
+          </a:xfrm>
+          <a:prstGeom prst="rect">
+            <a:avLst/>
+          </a:prstGeom>
+          <a:noFill/>
+        </p:spPr>
+        <p:txBody>
+          <a:bodyPr wrap="square">
+            <a:spAutoFit/>
+          </a:bodyPr>
+          <a:lstStyle/>
+          <a:p>
+            <a:pPr>
+              <a:spcAft>
+                <a:spcPts val="400"/>
+              </a:spcAft>
+            </a:pPr>
+            <a:r>
               <a:rPr sz="1200" b="0">
                 <a:solidFill>
+                  <a:srgbClr val="212121"/>
+                </a:solidFill>
+              </a:rPr>
+              <a:t>What freshness limit must a locale handoff preserve? The limit depends on maneuver urgency, not on one universal latency number.</a:t>
+            </a:r>
+          </a:p>
+        </p:txBody>
+      </p:sp>
+      <p:sp>
+        <p:nvSpPr>
+          <p:cNvPr id="8" name="TextBox 7"/>
+          <p:cNvSpPr txBox="1"/>
+          <p:nvPr/>
+        </p:nvSpPr>
+        <p:spPr>
+          <a:xfrm>
+            <a:off x="8100000" y="2800000"/>
+            <a:ext cx="3600000" cy="320000"/>
+          </a:xfrm>
+          <a:prstGeom prst="rect">
+            <a:avLst/>
+          </a:prstGeom>
+          <a:noFill/>
+        </p:spPr>
+        <p:txBody>
+          <a:bodyPr wrap="square">
+            <a:spAutoFit/>
+          </a:bodyPr>
+          <a:lstStyle/>
+          <a:p>
+            <a:pPr>
+              <a:spcAft>
+                <a:spcPts val="600"/>
+              </a:spcAft>
+            </a:pPr>
+            <a:r>
+              <a:rPr sz="1100" b="1">
+                <a:solidFill>
                   <a:srgbClr val="B3A369"/>
                 </a:solidFill>
               </a:rPr>
-              <a:t>Evidence: age chain across a handoff (measured except the destination refresh term)  ·  Missing: per-scenario safe-age re-measurement (T12)</a:t>
+              <a:t>Experiment</a:t>
+            </a:r>
+          </a:p>
+        </p:txBody>
+      </p:sp>
+      <p:sp>
+        <p:nvSpPr>
+          <p:cNvPr id="9" name="TextBox 8"/>
+          <p:cNvSpPr txBox="1"/>
+          <p:nvPr/>
+        </p:nvSpPr>
+        <p:spPr>
+          <a:xfrm>
+            <a:off x="8100000" y="3120000"/>
+            <a:ext cx="3600000" cy="1250000"/>
+          </a:xfrm>
+          <a:prstGeom prst="rect">
+            <a:avLst/>
+          </a:prstGeom>
+          <a:noFill/>
+        </p:spPr>
+        <p:txBody>
+          <a:bodyPr wrap="square">
+            <a:spAutoFit/>
+          </a:bodyPr>
+          <a:lstStyle/>
+          <a:p>
+            <a:pPr>
+              <a:spcAft>
+                <a:spcPts val="400"/>
+              </a:spcAft>
+            </a:pPr>
+            <a:r>
+              <a:rPr sz="1200" b="0">
+                <a:solidFill>
+                  <a:srgbClr val="212121"/>
+                </a:solidFill>
+              </a:rPr>
+              <a:t>Inject a controlled forecast age at the planner around a locale crossing, with no migration in play, and measure closed-loop success per scenario (T12).</a:t>
+            </a:r>
+          </a:p>
+        </p:txBody>
+      </p:sp>
+      <p:sp>
+        <p:nvSpPr>
+          <p:cNvPr id="10" name="TextBox 9"/>
+          <p:cNvSpPr txBox="1"/>
+          <p:nvPr/>
+        </p:nvSpPr>
+        <p:spPr>
+          <a:xfrm>
+            <a:off x="8100000" y="4400000"/>
+            <a:ext cx="3600000" cy="320000"/>
+          </a:xfrm>
+          <a:prstGeom prst="rect">
+            <a:avLst/>
+          </a:prstGeom>
+          <a:noFill/>
+        </p:spPr>
+        <p:txBody>
+          <a:bodyPr wrap="square">
+            <a:spAutoFit/>
+          </a:bodyPr>
+          <a:lstStyle/>
+          <a:p>
+            <a:pPr>
+              <a:spcAft>
+                <a:spcPts val="600"/>
+              </a:spcAft>
+            </a:pPr>
+            <a:r>
+              <a:rPr sz="1100" b="1">
+                <a:solidFill>
+                  <a:srgbClr val="B3A369"/>
+                </a:solidFill>
+              </a:rPr>
+              <a:t>Result we need</a:t>
+            </a:r>
+          </a:p>
+        </p:txBody>
+      </p:sp>
+      <p:sp>
+        <p:nvSpPr>
+          <p:cNvPr id="11" name="TextBox 10"/>
+          <p:cNvSpPr txBox="1"/>
+          <p:nvPr/>
+        </p:nvSpPr>
+        <p:spPr>
+          <a:xfrm>
+            <a:off x="8100000" y="4720000"/>
+            <a:ext cx="3600000" cy="1250000"/>
+          </a:xfrm>
+          <a:prstGeom prst="rect">
+            <a:avLst/>
+          </a:prstGeom>
+          <a:noFill/>
+        </p:spPr>
+        <p:txBody>
+          <a:bodyPr wrap="square">
+            <a:spAutoFit/>
+          </a:bodyPr>
+          <a:lstStyle/>
+          <a:p>
+            <a:pPr>
+              <a:spcAft>
+                <a:spcPts val="400"/>
+              </a:spcAft>
+            </a:pPr>
+            <a:r>
+              <a:rPr sz="1200" b="0">
+                <a:solidFill>
+                  <a:srgbClr val="212121"/>
+                </a:solidFill>
+              </a:rPr>
+              <a:t>A maneuver-specific safe-age limit per scenario that every handoff experiment uses as its pass or fail boundary. Cliff positions from earlier single-locale work (not accepted) are placeholders until re-measured.</a:t>
+            </a:r>
+          </a:p>
+        </p:txBody>
+      </p:sp>
+      <p:sp>
+        <p:nvSpPr>
+          <p:cNvPr id="12" name="TextBox 11"/>
+          <p:cNvSpPr txBox="1"/>
+          <p:nvPr/>
+        </p:nvSpPr>
+        <p:spPr>
+          <a:xfrm>
+            <a:off x="640080" y="6263640"/>
+            <a:ext cx="10972800" cy="457200"/>
+          </a:xfrm>
+          <a:prstGeom prst="rect">
+            <a:avLst/>
+          </a:prstGeom>
+          <a:noFill/>
+        </p:spPr>
+        <p:txBody>
+          <a:bodyPr wrap="square">
+            <a:spAutoFit/>
+          </a:bodyPr>
+          <a:lstStyle/>
+          <a:p>
+            <a:pPr>
+              <a:spcAft>
+                <a:spcPts val="600"/>
+              </a:spcAft>
+            </a:pPr>
+            <a:r>
+              <a:rPr sz="1200" b="0">
+                <a:solidFill>
+                  <a:srgbClr val="B3A369"/>
+                </a:solidFill>
+              </a:rPr>
+              <a:t>Replaces the earlier 220 to 450 ms citation with numbers measured inside Khonsu</a:t>
             </a:r>
           </a:p>
         </p:txBody>

--- a/docs/kb/decks/khonsu_story_2026-09-04.pptx
+++ b/docs/kb/decks/khonsu_story_2026-09-04.pptx
@@ -3193,7 +3193,7 @@
         <p:spPr>
           <a:xfrm>
             <a:off x="900000" y="4300000"/>
-            <a:ext cx="10392000" cy="700000"/>
+            <a:ext cx="10392000" cy="500000"/>
           </a:xfrm>
           <a:prstGeom prst="rect">
             <a:avLst/>
@@ -3205,21 +3205,6 @@
             <a:spAutoFit/>
           </a:bodyPr>
           <a:lstStyle/>
-          <a:p>
-            <a:pPr algn="ctr">
-              <a:spcAft>
-                <a:spcPts val="600"/>
-              </a:spcAft>
-            </a:pPr>
-            <a:r>
-              <a:rPr sz="1300" b="0">
-                <a:solidFill>
-                  <a:srgbClr val="B3A369"/>
-                </a:solidFill>
-              </a:rPr>
-              <a:t>Status labels on evidence slides  ·  Done  ·  Provisional  ·  Running  ·  Needed</a:t>
-            </a:r>
-          </a:p>
           <a:p>
             <a:pPr algn="ctr">
               <a:spcAft>
@@ -8386,44 +8371,6 @@
                 </a:solidFill>
               </a:rPr>
               <a:t>• We know how to operate one locale.</a:t>
-            </a:r>
-          </a:p>
-        </p:txBody>
-      </p:sp>
-      <p:sp>
-        <p:nvSpPr>
-          <p:cNvPr id="5" name="TextBox 4"/>
-          <p:cNvSpPr txBox="1"/>
-          <p:nvPr/>
-        </p:nvSpPr>
-        <p:spPr>
-          <a:xfrm>
-            <a:off x="640080" y="6263640"/>
-            <a:ext cx="10972800" cy="457200"/>
-          </a:xfrm>
-          <a:prstGeom prst="rect">
-            <a:avLst/>
-          </a:prstGeom>
-          <a:noFill/>
-        </p:spPr>
-        <p:txBody>
-          <a:bodyPr wrap="square">
-            <a:spAutoFit/>
-          </a:bodyPr>
-          <a:lstStyle/>
-          <a:p>
-            <a:pPr>
-              <a:spcAft>
-                <a:spcPts val="600"/>
-              </a:spcAft>
-            </a:pPr>
-            <a:r>
-              <a:rPr sz="1200" b="0">
-                <a:solidFill>
-                  <a:srgbClr val="B3A369"/>
-                </a:solidFill>
-              </a:rPr>
-              <a:t>Landle et al., Scalable Edge-assisted Fusion and Path Prediction for Connected Autonomous Vehicles, SEC 2026</a:t>
             </a:r>
           </a:p>
         </p:txBody>
@@ -10115,44 +10062,6 @@
           </a:prstGeom>
         </p:spPr>
       </p:pic>
-      <p:sp>
-        <p:nvSpPr>
-          <p:cNvPr id="8" name="TextBox 7"/>
-          <p:cNvSpPr txBox="1"/>
-          <p:nvPr/>
-        </p:nvSpPr>
-        <p:spPr>
-          <a:xfrm>
-            <a:off x="640080" y="6263640"/>
-            <a:ext cx="10972800" cy="457200"/>
-          </a:xfrm>
-          <a:prstGeom prst="rect">
-            <a:avLst/>
-          </a:prstGeom>
-          <a:noFill/>
-        </p:spPr>
-        <p:txBody>
-          <a:bodyPr wrap="square">
-            <a:spAutoFit/>
-          </a:bodyPr>
-          <a:lstStyle/>
-          <a:p>
-            <a:pPr>
-              <a:spcAft>
-                <a:spcPts val="600"/>
-              </a:spcAft>
-            </a:pPr>
-            <a:r>
-              <a:rPr sz="1200" b="0">
-                <a:solidFill>
-                  <a:srgbClr val="B3A369"/>
-                </a:solidFill>
-              </a:rPr>
-              <a:t>Evidence: partition of a CARLA town under the measured cap  ·  Missing: sizing study on measured density traces</a:t>
-            </a:r>
-          </a:p>
-        </p:txBody>
-      </p:sp>
     </p:spTree>
   </p:cSld>
   <p:clrMapOvr>

--- a/docs/kb/decks/khonsu_story_2026-09-04.pptx
+++ b/docs/kb/decks/khonsu_story_2026-09-04.pptx
@@ -3184,44 +3184,6 @@
           </a:p>
         </p:txBody>
       </p:sp>
-      <p:sp>
-        <p:nvSpPr>
-          <p:cNvPr id="4" name="TextBox 3"/>
-          <p:cNvSpPr txBox="1"/>
-          <p:nvPr/>
-        </p:nvSpPr>
-        <p:spPr>
-          <a:xfrm>
-            <a:off x="900000" y="4300000"/>
-            <a:ext cx="10392000" cy="500000"/>
-          </a:xfrm>
-          <a:prstGeom prst="rect">
-            <a:avLst/>
-          </a:prstGeom>
-          <a:noFill/>
-        </p:spPr>
-        <p:txBody>
-          <a:bodyPr wrap="square">
-            <a:spAutoFit/>
-          </a:bodyPr>
-          <a:lstStyle/>
-          <a:p>
-            <a:pPr algn="ctr">
-              <a:spcAft>
-                <a:spcPts val="600"/>
-              </a:spcAft>
-            </a:pPr>
-            <a:r>
-              <a:rPr sz="1300" b="0">
-                <a:solidFill>
-                  <a:srgbClr val="B3A369"/>
-                </a:solidFill>
-              </a:rPr>
-              <a:t>Dashed figures with the red banner are expected shapes, not measurements</a:t>
-            </a:r>
-          </a:p>
-        </p:txBody>
-      </p:sp>
     </p:spTree>
   </p:cSld>
   <p:clrMapOvr>
@@ -3872,7 +3834,7 @@
             <a:avLst/>
           </a:prstGeom>
           <a:solidFill>
-            <a:srgbClr val="D68C00"/>
+            <a:srgbClr val="2E7D32"/>
           </a:solidFill>
           <a:ln>
             <a:noFill/>
@@ -3903,7 +3865,7 @@
                   <a:srgbClr val="FFFFFF"/>
                 </a:solidFill>
               </a:rPr>
-              <a:t>Provisional</a:t>
+              <a:t>Done</a:t>
             </a:r>
           </a:p>
         </p:txBody>
@@ -3986,7 +3948,37 @@
                   <a:srgbClr val="212121"/>
                 </a:solidFill>
               </a:rPr>
-              <a:t>• Lead-time sweep (Provisional). Completion rises with lead up to 4 s, on an unvalidated geometry, v3 running.</a:t>
+              <a:t>• v3 re-baseline (Done). Corrected scenario, 10 runs per arm. History at crossing 9 of 10 clean, history 1 s ahead 7 of 10, Kalman 2 of 10, cold 2 of 10, EdgeWarp timing 0 of 10.</a:t>
+            </a:r>
+          </a:p>
+          <a:p>
+            <a:pPr>
+              <a:spcAft>
+                <a:spcPts val="800"/>
+              </a:spcAft>
+            </a:pPr>
+            <a:r>
+              <a:rPr sz="1600" b="0">
+                <a:solidFill>
+                  <a:srgbClr val="212121"/>
+                </a:solidFill>
+              </a:rPr>
+              <a:t>• Burst (Done). Five-vehicle platoon on one boundary. History ahead 5 of 5 clean, EdgeWarp timing 0 of 5, cold 0 of 5.</a:t>
+            </a:r>
+          </a:p>
+          <a:p>
+            <a:pPr>
+              <a:spcAft>
+                <a:spcPts val="800"/>
+              </a:spcAft>
+            </a:pPr>
+            <a:r>
+              <a:rPr sz="1600" b="0">
+                <a:solidFill>
+                  <a:srgbClr val="212121"/>
+                </a:solidFill>
+              </a:rPr>
+              <a:t>• Lead-time sweep (Provisional). The v1 curve was on an unvalidated geometry. On the corrected geometry the source sees the actor, so at-crossing transfer suffices. The trigger table decides timing.</a:t>
             </a:r>
           </a:p>
         </p:txBody>
@@ -4007,8 +3999,8 @@
         </p:blipFill>
         <p:spPr>
           <a:xfrm>
-            <a:off x="2600000" y="2900000"/>
-            <a:ext cx="6500000" cy="3250000"/>
+            <a:off x="2600000" y="3700000"/>
+            <a:ext cx="4900000" cy="2450000"/>
           </a:xfrm>
           <a:prstGeom prst="rect">
             <a:avLst/>
@@ -4048,7 +4040,7 @@
                   <a:srgbClr val="B3A369"/>
                 </a:solidFill>
               </a:rPr>
-              <a:t>Missing: computed trigger vs fixed leads on the corrected scenario, live fault arms with the epoch check on and off</a:t>
+              <a:t>Missing: predictor-mode trigger and lead sweep on the corrected scenario (T15), live fault arms with the epoch check on and off</a:t>
             </a:r>
           </a:p>
         </p:txBody>
@@ -8686,7 +8678,7 @@
                     <a:p>
                       <a:r>
                         <a:rPr sz="1200" b="0"/>
-                        <a:t>8-scenario ownership faults, age chain</a:t>
+                        <a:t>v3 flow table (history 9/10 and 7/10 vs 0 to 2/10), 8-scenario ownership faults, age chain</a:t>
                       </a:r>
                     </a:p>
                   </a:txBody>
@@ -8699,7 +8691,7 @@
                     <a:p>
                       <a:r>
                         <a:rPr sz="1200" b="0"/>
-                        <a:t>v3 re-baseline, computed vs fixed lead</a:t>
+                        <a:t>q5 crossing rate, lookahead redo, computed-lead fix</a:t>
                       </a:r>
                     </a:p>
                   </a:txBody>
@@ -8712,7 +8704,7 @@
                     <a:p>
                       <a:r>
                         <a:rPr sz="1200" b="0"/>
-                        <a:t>safe-age limits (T12), live fault arms (T7), real transport (T8), overlap sweep and dual authority (T14)</a:t>
+                        <a:t>safe-age limits (T12), predictor-mode trigger (T15), live fault arms (T7), real transport (T8), overlap sweep (T14)</a:t>
                       </a:r>
                     </a:p>
                   </a:txBody>
@@ -8757,7 +8749,7 @@
                     <a:p>
                       <a:r>
                         <a:rPr sz="1200" b="0"/>
-                        <a:t>harness, knobs, burst scenario</a:t>
+                        <a:t>burst: history ahead 5/5 vs EdgeWarp 0/5 vs cold 0/5</a:t>
                       </a:r>
                     </a:p>
                   </a:txBody>
@@ -8770,7 +8762,7 @@
                     <a:p>
                       <a:r>
                         <a:rPr sz="1200" b="0"/>
-                        <a:t>crossing-rate sweep (q5)</a:t>
+                        <a:t>crossing-rate sweep (q5), corridor build (T13)</a:t>
                       </a:r>
                     </a:p>
                   </a:txBody>
@@ -8783,7 +8775,7 @@
                     <a:p>
                       <a:r>
                         <a:rPr sz="1200" b="0"/>
-                        <a:t>corridor scenario and route-level metrics (T13), association for unconnected actors (T10)</a:t>
+                        <a:t>corridor route-level metrics (T13), association for unconnected actors (T10)</a:t>
                       </a:r>
                     </a:p>
                   </a:txBody>
@@ -8797,10 +8789,10 @@
                       <a:r>
                         <a:rPr sz="1200" b="1">
                           <a:solidFill>
-                            <a:srgbClr val="787878"/>
+                            <a:srgbClr val="1565C0"/>
                           </a:solidFill>
                         </a:rPr>
-                        <a:t>Needed</a:t>
+                        <a:t>Running</a:t>
                       </a:r>
                     </a:p>
                   </a:txBody>
@@ -9057,7 +9049,7 @@
                   <a:srgbClr val="212121"/>
                 </a:solidFill>
               </a:rPr>
-              <a:t>• v3 handoff baselines on the corrected scenario, including computed versus fixed lead and EdgeWarp timing (running).</a:t>
+              <a:t>• Trigger table on the corrected scenario: predictor-mode trigger, fixed leads, bands (T15, lookahead redo). The v3 baselines have landed.</a:t>
             </a:r>
           </a:p>
           <a:p>

--- a/docs/kb/decks/khonsu_story_2026-09-04.pptx
+++ b/docs/kb/decks/khonsu_story_2026-09-04.pptx
@@ -5552,7 +5552,7 @@
                   <a:srgbClr val="212121"/>
                 </a:solidFill>
               </a:rPr>
-              <a:t>Platoons of 1 to 16 tracks crossing together, plus the crossing-rate sweep. Measure p99 transfer-to-first-refresh latency against the available handoff budget (q5, burst scenario).</a:t>
+              <a:t>Landed (q5, 5 runs per cell): with 2, 4, and 8 oncoming vehicles, history 1 s ahead avoids a collision in 5, 2, and 4 runs, the handover snapshot in 0, 1, and 0, cold start in 0, 0, and 1. Still running: platoons of 1 to 16 tracks, p99 transfer-to-first-refresh latency against the handoff budget.</a:t>
             </a:r>
           </a:p>
         </p:txBody>
@@ -8691,7 +8691,7 @@
                     <a:p>
                       <a:r>
                         <a:rPr sz="1200" b="0"/>
-                        <a:t>q5 crossing rate, lookahead redo, computed-lead fix</a:t>
+                        <a:t>lookahead redo, computed-lead fix</a:t>
                       </a:r>
                     </a:p>
                   </a:txBody>
@@ -8749,7 +8749,7 @@
                     <a:p>
                       <a:r>
                         <a:rPr sz="1200" b="0"/>
-                        <a:t>burst: history ahead 5/5 vs EdgeWarp 0/5 vs cold 0/5</a:t>
+                        <a:t>burst: history ahead 5/5 vs EdgeWarp 0/5 vs cold 0/5; density 2/4/8: history 5,2,4 vs snapshot 0,1,0 vs cold 0,0,1 of 5</a:t>
                       </a:r>
                     </a:p>
                   </a:txBody>
@@ -8762,7 +8762,7 @@
                     <a:p>
                       <a:r>
                         <a:rPr sz="1200" b="0"/>
-                        <a:t>crossing-rate sweep (q5), corridor build (T13)</a:t>
+                        <a:t>platoon latency sweep, corridor build (T13)</a:t>
                       </a:r>
                     </a:p>
                   </a:txBody>
@@ -8836,7 +8836,7 @@
                   <a:srgbClr val="212121"/>
                 </a:solidFill>
               </a:rPr>
-              <a:t>Provenance. The first two sweeps ran an unvalidated scenario geometry (found Sep 3). The fix is a runner default, and v3 is the re-baseline.</a:t>
+              <a:t>Provenance. The first two sweeps ran an unvalidated scenario geometry (found Sep 3). The fix is a runner default. The canonical warm arm reproduced 4/4 under the documented settings, and v3 is the re-baseline.</a:t>
             </a:r>
           </a:p>
           <a:p>

--- a/docs/kb/decks/khonsu_story_2026-09-04.pptx
+++ b/docs/kb/decks/khonsu_story_2026-09-04.pptx
@@ -5552,7 +5552,7 @@
                   <a:srgbClr val="212121"/>
                 </a:solidFill>
               </a:rPr>
-              <a:t>Landed (q5, 5 runs per cell): with 2, 4, and 8 oncoming vehicles, history 1 s ahead avoids a collision in 5, 2, and 4 runs, the handover snapshot in 0, 1, and 0, cold start in 0, 0, and 1. Still running: platoons of 1 to 16 tracks, p99 transfer-to-first-refresh latency against the handoff budget.</a:t>
+              <a:t>Landed (q5, 5 runs per cell): with 2, 4, and 8 oncoming vehicles, history 1 s ahead avoids a collision in 5, 2, and 4 runs, the handover snapshot in 0, 1, and 0, cold start in 0, 0, and 1. Needed: platoons of 1 to 16 tracks, p99 transfer-to-first-refresh latency against the handoff budget, with replication and dual-service overlap as arms (T19b).</a:t>
             </a:r>
           </a:p>
         </p:txBody>
@@ -7889,7 +7889,7 @@
             <a:avLst/>
           </a:prstGeom>
           <a:solidFill>
-            <a:srgbClr val="1565C0"/>
+            <a:srgbClr val="787878"/>
           </a:solidFill>
           <a:ln>
             <a:noFill/>
@@ -7920,7 +7920,7 @@
                   <a:srgbClr val="FFFFFF"/>
                 </a:solidFill>
               </a:rPr>
-              <a:t>Running</a:t>
+              <a:t>Needed</a:t>
             </a:r>
           </a:p>
         </p:txBody>
@@ -8096,7 +8096,7 @@
                   <a:srgbClr val="212121"/>
                 </a:solidFill>
               </a:rPr>
-              <a:t>Sweep locale side length. Fusion compute utilization comes from the canvas measurement. Handoff load comes from crossings per km at the corridor traffic (sizing study).</a:t>
+              <a:t>Sweep locale side length. Fusion compute utilization comes from the canvas measurement (in hand). Handoff load comes from crossings per boundary at the corridor traffic times the measured per-handoff cost (T22, analysis after T8 and T13).</a:t>
             </a:r>
           </a:p>
         </p:txBody>
@@ -8762,7 +8762,7 @@
                     <a:p>
                       <a:r>
                         <a:rPr sz="1200" b="0"/>
-                        <a:t>platoon latency sweep, corridor build (T13)</a:t>
+                        <a:t>corridor build (T13)</a:t>
                       </a:r>
                     </a:p>
                   </a:txBody>
@@ -8775,7 +8775,7 @@
                     <a:p>
                       <a:r>
                         <a:rPr sz="1200" b="0"/>
-                        <a:t>corridor route-level metrics (T13), association for unconnected actors (T10)</a:t>
+                        <a:t>crossing-load sweep (T19b), corridor route-level metrics (T13), sizing analysis (T22), association for unconnected actors (T10)</a:t>
                       </a:r>
                     </a:p>
                   </a:txBody>
